--- a/presentation/final_presentation.pptx
+++ b/presentation/final_presentation.pptx
@@ -4381,20 +4381,6 @@
             <a:noFill/>
           </a:ln>
         </p:spPr>
-        <p:style>
-          <a:lnRef idx="1">
-            <a:schemeClr val="accent1"/>
-          </a:lnRef>
-          <a:fillRef idx="3">
-            <a:schemeClr val="accent1"/>
-          </a:fillRef>
-          <a:effectRef idx="2">
-            <a:schemeClr val="accent1"/>
-          </a:effectRef>
-          <a:fontRef idx="minor">
-            <a:schemeClr val="lt1"/>
-          </a:fontRef>
-        </p:style>
         <p:txBody>
           <a:bodyPr rtlCol="0" anchor="ctr"/>
           <a:lstStyle/>
@@ -4527,7 +4513,7 @@
                 </a:solidFill>
                 <a:latin typeface="Arial"/>
               </a:rPr>
-              <a:t>CSE 4883 Digital Image Processing - final presentation</a:t>
+              <a:t>CSE 4883 Digital Image Processing  ·  final presentation</a:t>
             </a:r>
           </a:p>
           <a:p>
@@ -4543,7 +4529,7 @@
                 </a:solidFill>
                 <a:latin typeface="Arial"/>
               </a:rPr>
-              <a:t>Member 1 - Member 2 - Member 3</a:t>
+              <a:t>Member 1  ·  Member 2  ·  Member 3</a:t>
             </a:r>
           </a:p>
         </p:txBody>
@@ -4578,7 +4564,7 @@
                 </a:solidFill>
                 <a:latin typeface="Arial"/>
               </a:rPr>
-              <a:t>Introduction  -  Novelty  -  Methodology  -  Experiments  -  Results  -  Limitations  -  Future</a:t>
+              <a:t>Introduction   ·   Novelty   ·   Methodology   ·   Experiments   ·   Results   ·   Limitations   ·   Future</a:t>
             </a:r>
           </a:p>
         </p:txBody>
@@ -4627,7 +4613,7 @@
             <a:r>
               <a:rPr sz="1050" b="0" i="0">
                 <a:solidFill>
-                  <a:srgbClr val="A9B4C0"/>
+                  <a:srgbClr val="5D6D7E"/>
                 </a:solidFill>
                 <a:latin typeface="Arial"/>
               </a:rPr>
@@ -4662,7 +4648,7 @@
             <a:r>
               <a:rPr sz="1050" b="0" i="0">
                 <a:solidFill>
-                  <a:srgbClr val="A9B4C0"/>
+                  <a:srgbClr val="5D6D7E"/>
                 </a:solidFill>
                 <a:latin typeface="Arial"/>
               </a:rPr>
@@ -4697,7 +4683,7 @@
             <a:r>
               <a:rPr sz="1050" b="0" i="0">
                 <a:solidFill>
-                  <a:srgbClr val="A9B4C0"/>
+                  <a:srgbClr val="5D6D7E"/>
                 </a:solidFill>
                 <a:latin typeface="Arial"/>
               </a:rPr>
@@ -4732,7 +4718,7 @@
             <a:r>
               <a:rPr sz="1050" b="0" i="0">
                 <a:solidFill>
-                  <a:srgbClr val="A9B4C0"/>
+                  <a:srgbClr val="5D6D7E"/>
                 </a:solidFill>
                 <a:latin typeface="Arial"/>
               </a:rPr>
@@ -4797,20 +4783,6 @@
             <a:noFill/>
           </a:ln>
         </p:spPr>
-        <p:style>
-          <a:lnRef idx="1">
-            <a:schemeClr val="accent1"/>
-          </a:lnRef>
-          <a:fillRef idx="3">
-            <a:schemeClr val="accent1"/>
-          </a:fillRef>
-          <a:effectRef idx="2">
-            <a:schemeClr val="accent1"/>
-          </a:effectRef>
-          <a:fontRef idx="minor">
-            <a:schemeClr val="lt1"/>
-          </a:fontRef>
-        </p:style>
         <p:txBody>
           <a:bodyPr rtlCol="0" anchor="ctr"/>
           <a:lstStyle/>
@@ -4845,7 +4817,7 @@
             <a:r>
               <a:rPr sz="1050" b="0" i="0">
                 <a:solidFill>
-                  <a:srgbClr val="A9B4C0"/>
+                  <a:srgbClr val="5D6D7E"/>
                 </a:solidFill>
                 <a:latin typeface="Arial"/>
               </a:rPr>
@@ -4880,7 +4852,7 @@
             <a:r>
               <a:rPr sz="1050" b="0" i="0">
                 <a:solidFill>
-                  <a:srgbClr val="A9B4C0"/>
+                  <a:srgbClr val="5D6D7E"/>
                 </a:solidFill>
                 <a:latin typeface="Arial"/>
               </a:rPr>
@@ -4910,20 +4882,6 @@
             <a:noFill/>
           </a:ln>
         </p:spPr>
-        <p:style>
-          <a:lnRef idx="1">
-            <a:schemeClr val="accent1"/>
-          </a:lnRef>
-          <a:fillRef idx="3">
-            <a:schemeClr val="accent1"/>
-          </a:fillRef>
-          <a:effectRef idx="2">
-            <a:schemeClr val="accent1"/>
-          </a:effectRef>
-          <a:fontRef idx="minor">
-            <a:schemeClr val="lt1"/>
-          </a:fontRef>
-        </p:style>
         <p:txBody>
           <a:bodyPr rtlCol="0" anchor="ctr"/>
           <a:lstStyle/>
@@ -4941,7 +4899,7 @@
         <p:spPr>
           <a:xfrm>
             <a:off x="548640" y="713232"/>
-            <a:ext cx="9509760" cy="548640"/>
+            <a:ext cx="9418320" cy="548640"/>
           </a:xfrm>
           <a:prstGeom prst="rect">
             <a:avLst/>
@@ -4975,8 +4933,8 @@
         </p:nvSpPr>
         <p:spPr>
           <a:xfrm>
-            <a:off x="9997135" y="822960"/>
-            <a:ext cx="1645920" cy="274320"/>
+            <a:off x="10271455" y="822960"/>
+            <a:ext cx="1371600" cy="274320"/>
           </a:xfrm>
           <a:prstGeom prst="rect">
             <a:avLst/>
@@ -5033,214 +4991,217 @@
       </p:pic>
       <p:sp>
         <p:nvSpPr>
-          <p:cNvPr id="14" name="Rounded Rectangle 13"/>
-          <p:cNvSpPr/>
+          <p:cNvPr id="14" name="TextBox 13"/>
+          <p:cNvSpPr txBox="1"/>
           <p:nvPr/>
         </p:nvSpPr>
         <p:spPr>
           <a:xfrm>
             <a:off x="548640" y="5440680"/>
-            <a:ext cx="3515258" cy="822960"/>
-          </a:xfrm>
-          <a:prstGeom prst="roundRect">
-            <a:avLst>
-              <a:gd name="adj" fmla="val 12000"/>
-            </a:avLst>
-          </a:prstGeom>
-          <a:solidFill>
-            <a:srgbClr val="FFFFFF"/>
-          </a:solidFill>
-          <a:ln w="19050">
-            <a:solidFill>
-              <a:srgbClr val="1F3A5F"/>
-            </a:solidFill>
-          </a:ln>
-          <a:effectLst/>
-        </p:spPr>
-        <p:style>
-          <a:lnRef idx="1">
-            <a:schemeClr val="accent1"/>
-          </a:lnRef>
-          <a:fillRef idx="3">
-            <a:schemeClr val="accent1"/>
-          </a:fillRef>
-          <a:effectRef idx="2">
-            <a:schemeClr val="accent1"/>
-          </a:effectRef>
-          <a:fontRef idx="minor">
-            <a:schemeClr val="lt1"/>
-          </a:fontRef>
-        </p:style>
-        <p:txBody>
-          <a:bodyPr rtlCol="0" anchor="ctr" wrap="square" lIns="73152" rIns="73152" tIns="27432" bIns="27432"/>
+            <a:ext cx="3698138" cy="274320"/>
+          </a:xfrm>
+          <a:prstGeom prst="rect">
+            <a:avLst/>
+          </a:prstGeom>
+          <a:noFill/>
+        </p:spPr>
+        <p:txBody>
+          <a:bodyPr wrap="square" lIns="0" rIns="0" tIns="0" bIns="0">
+            <a:spAutoFit/>
+          </a:bodyPr>
           <a:lstStyle/>
           <a:p>
             <a:pPr algn="ctr"/>
             <a:r>
-              <a:rPr sz="2200" b="1">
-                <a:solidFill>
-                  <a:srgbClr val="1F3A5F"/>
+              <a:rPr sz="1250" b="0" i="0">
+                <a:solidFill>
+                  <a:srgbClr val="5D6D7E"/>
+                </a:solidFill>
+                <a:latin typeface="Arial"/>
+              </a:rPr>
+              <a:t>Pooled  ·  combined arm</a:t>
+            </a:r>
+          </a:p>
+        </p:txBody>
+      </p:sp>
+      <p:sp>
+        <p:nvSpPr>
+          <p:cNvPr id="15" name="TextBox 14"/>
+          <p:cNvSpPr txBox="1"/>
+          <p:nvPr/>
+        </p:nvSpPr>
+        <p:spPr>
+          <a:xfrm>
+            <a:off x="548640" y="5715000"/>
+            <a:ext cx="3698138" cy="457200"/>
+          </a:xfrm>
+          <a:prstGeom prst="rect">
+            <a:avLst/>
+          </a:prstGeom>
+          <a:noFill/>
+        </p:spPr>
+        <p:txBody>
+          <a:bodyPr wrap="square" lIns="0" rIns="0" tIns="0" bIns="0">
+            <a:spAutoFit/>
+          </a:bodyPr>
+          <a:lstStyle/>
+          <a:p>
+            <a:pPr algn="ctr"/>
+            <a:r>
+              <a:rPr sz="2400" b="1" i="0">
+                <a:solidFill>
+                  <a:srgbClr val="0E7A53"/>
                 </a:solidFill>
                 <a:latin typeface="Arial"/>
               </a:rPr>
               <a:t>0.796 → 0.802</a:t>
             </a:r>
           </a:p>
+        </p:txBody>
+      </p:sp>
+      <p:sp>
+        <p:nvSpPr>
+          <p:cNvPr id="16" name="TextBox 15"/>
+          <p:cNvSpPr txBox="1"/>
+          <p:nvPr/>
+        </p:nvSpPr>
+        <p:spPr>
+          <a:xfrm>
+            <a:off x="4246778" y="5440680"/>
+            <a:ext cx="3698138" cy="274320"/>
+          </a:xfrm>
+          <a:prstGeom prst="rect">
+            <a:avLst/>
+          </a:prstGeom>
+          <a:noFill/>
+        </p:spPr>
+        <p:txBody>
+          <a:bodyPr wrap="square" lIns="0" rIns="0" tIns="0" bIns="0">
+            <a:spAutoFit/>
+          </a:bodyPr>
+          <a:lstStyle/>
           <a:p>
             <a:pPr algn="ctr"/>
             <a:r>
-              <a:rPr sz="1250" b="0">
+              <a:rPr sz="1250" b="0" i="0">
                 <a:solidFill>
                   <a:srgbClr val="5D6D7E"/>
                 </a:solidFill>
                 <a:latin typeface="Arial"/>
               </a:rPr>
-              <a:t>Pooled (combined)</a:t>
-            </a:r>
-          </a:p>
-        </p:txBody>
-      </p:sp>
-      <p:sp>
-        <p:nvSpPr>
-          <p:cNvPr id="15" name="Rounded Rectangle 14"/>
-          <p:cNvSpPr/>
-          <p:nvPr/>
-        </p:nvSpPr>
-        <p:spPr>
-          <a:xfrm>
-            <a:off x="4338218" y="5440680"/>
-            <a:ext cx="3515258" cy="822960"/>
-          </a:xfrm>
-          <a:prstGeom prst="roundRect">
-            <a:avLst>
-              <a:gd name="adj" fmla="val 12000"/>
-            </a:avLst>
-          </a:prstGeom>
-          <a:solidFill>
-            <a:srgbClr val="FFFFFF"/>
-          </a:solidFill>
-          <a:ln w="19050">
-            <a:solidFill>
-              <a:srgbClr val="B2182B"/>
-            </a:solidFill>
-          </a:ln>
-          <a:effectLst/>
-        </p:spPr>
-        <p:style>
-          <a:lnRef idx="1">
-            <a:schemeClr val="accent1"/>
-          </a:lnRef>
-          <a:fillRef idx="3">
-            <a:schemeClr val="accent1"/>
-          </a:fillRef>
-          <a:effectRef idx="2">
-            <a:schemeClr val="accent1"/>
-          </a:effectRef>
-          <a:fontRef idx="minor">
-            <a:schemeClr val="lt1"/>
-          </a:fontRef>
-        </p:style>
-        <p:txBody>
-          <a:bodyPr rtlCol="0" anchor="ctr" wrap="square" lIns="73152" rIns="73152" tIns="27432" bIns="27432"/>
+              <a:t>BigGAN  ·  frequency arm</a:t>
+            </a:r>
+          </a:p>
+        </p:txBody>
+      </p:sp>
+      <p:sp>
+        <p:nvSpPr>
+          <p:cNvPr id="17" name="TextBox 16"/>
+          <p:cNvSpPr txBox="1"/>
+          <p:nvPr/>
+        </p:nvSpPr>
+        <p:spPr>
+          <a:xfrm>
+            <a:off x="4246778" y="5715000"/>
+            <a:ext cx="3698138" cy="457200"/>
+          </a:xfrm>
+          <a:prstGeom prst="rect">
+            <a:avLst/>
+          </a:prstGeom>
+          <a:noFill/>
+        </p:spPr>
+        <p:txBody>
+          <a:bodyPr wrap="square" lIns="0" rIns="0" tIns="0" bIns="0">
+            <a:spAutoFit/>
+          </a:bodyPr>
           <a:lstStyle/>
           <a:p>
             <a:pPr algn="ctr"/>
             <a:r>
-              <a:rPr sz="2200" b="1">
-                <a:solidFill>
-                  <a:srgbClr val="B2182B"/>
+              <a:rPr sz="2400" b="1" i="0">
+                <a:solidFill>
+                  <a:srgbClr val="B54819"/>
                 </a:solidFill>
                 <a:latin typeface="Arial"/>
               </a:rPr>
               <a:t>1.000 → 0.828</a:t>
             </a:r>
           </a:p>
+        </p:txBody>
+      </p:sp>
+      <p:sp>
+        <p:nvSpPr>
+          <p:cNvPr id="18" name="TextBox 17"/>
+          <p:cNvSpPr txBox="1"/>
+          <p:nvPr/>
+        </p:nvSpPr>
+        <p:spPr>
+          <a:xfrm>
+            <a:off x="7944916" y="5440680"/>
+            <a:ext cx="3698138" cy="274320"/>
+          </a:xfrm>
+          <a:prstGeom prst="rect">
+            <a:avLst/>
+          </a:prstGeom>
+          <a:noFill/>
+        </p:spPr>
+        <p:txBody>
+          <a:bodyPr wrap="square" lIns="0" rIns="0" tIns="0" bIns="0">
+            <a:spAutoFit/>
+          </a:bodyPr>
+          <a:lstStyle/>
           <a:p>
             <a:pPr algn="ctr"/>
             <a:r>
-              <a:rPr sz="1250" b="0">
+              <a:rPr sz="1250" b="0" i="0">
                 <a:solidFill>
                   <a:srgbClr val="5D6D7E"/>
                 </a:solidFill>
                 <a:latin typeface="Arial"/>
               </a:rPr>
-              <a:t>BigGAN (frequency)</a:t>
-            </a:r>
-          </a:p>
-        </p:txBody>
-      </p:sp>
-      <p:sp>
-        <p:nvSpPr>
-          <p:cNvPr id="16" name="Rounded Rectangle 15"/>
-          <p:cNvSpPr/>
-          <p:nvPr/>
-        </p:nvSpPr>
-        <p:spPr>
-          <a:xfrm>
-            <a:off x="8127796" y="5440680"/>
-            <a:ext cx="3515258" cy="822960"/>
-          </a:xfrm>
-          <a:prstGeom prst="roundRect">
-            <a:avLst>
-              <a:gd name="adj" fmla="val 12000"/>
-            </a:avLst>
-          </a:prstGeom>
-          <a:solidFill>
-            <a:srgbClr val="FFFFFF"/>
-          </a:solidFill>
-          <a:ln w="19050">
-            <a:solidFill>
-              <a:srgbClr val="1BAF7A"/>
-            </a:solidFill>
-          </a:ln>
-          <a:effectLst/>
-        </p:spPr>
-        <p:style>
-          <a:lnRef idx="1">
-            <a:schemeClr val="accent1"/>
-          </a:lnRef>
-          <a:fillRef idx="3">
-            <a:schemeClr val="accent1"/>
-          </a:fillRef>
-          <a:effectRef idx="2">
-            <a:schemeClr val="accent1"/>
-          </a:effectRef>
-          <a:fontRef idx="minor">
-            <a:schemeClr val="lt1"/>
-          </a:fontRef>
-        </p:style>
-        <p:txBody>
-          <a:bodyPr rtlCol="0" anchor="ctr" wrap="square" lIns="73152" rIns="73152" tIns="27432" bIns="27432"/>
+              <a:t>Unseen SD v1.4  ·  pixel arm</a:t>
+            </a:r>
+          </a:p>
+        </p:txBody>
+      </p:sp>
+      <p:sp>
+        <p:nvSpPr>
+          <p:cNvPr id="19" name="TextBox 18"/>
+          <p:cNvSpPr txBox="1"/>
+          <p:nvPr/>
+        </p:nvSpPr>
+        <p:spPr>
+          <a:xfrm>
+            <a:off x="7944916" y="5715000"/>
+            <a:ext cx="3698138" cy="457200"/>
+          </a:xfrm>
+          <a:prstGeom prst="rect">
+            <a:avLst/>
+          </a:prstGeom>
+          <a:noFill/>
+        </p:spPr>
+        <p:txBody>
+          <a:bodyPr wrap="square" lIns="0" rIns="0" tIns="0" bIns="0">
+            <a:spAutoFit/>
+          </a:bodyPr>
           <a:lstStyle/>
           <a:p>
             <a:pPr algn="ctr"/>
             <a:r>
-              <a:rPr sz="2200" b="1">
-                <a:solidFill>
-                  <a:srgbClr val="1BAF7A"/>
+              <a:rPr sz="2400" b="1" i="0">
+                <a:solidFill>
+                  <a:srgbClr val="1F63B8"/>
                 </a:solidFill>
                 <a:latin typeface="Arial"/>
               </a:rPr>
               <a:t>0.477 → 0.771</a:t>
             </a:r>
           </a:p>
-          <a:p>
-            <a:pPr algn="ctr"/>
-            <a:r>
-              <a:rPr sz="1250" b="0">
-                <a:solidFill>
-                  <a:srgbClr val="5D6D7E"/>
-                </a:solidFill>
-                <a:latin typeface="Arial"/>
-              </a:rPr>
-              <a:t>Unseen SD v1.4 (pixel)</a:t>
-            </a:r>
-          </a:p>
-        </p:txBody>
-      </p:sp>
-      <p:sp>
-        <p:nvSpPr>
-          <p:cNvPr id="17" name="TextBox 16"/>
+        </p:txBody>
+      </p:sp>
+      <p:sp>
+        <p:nvSpPr>
+          <p:cNvPr id="20" name="TextBox 19"/>
           <p:cNvSpPr txBox="1"/>
           <p:nvPr/>
         </p:nvSpPr>
@@ -5268,14 +5229,14 @@
                 </a:solidFill>
                 <a:latin typeface="Arial"/>
               </a:rPr>
-              <a:t>Same score, different story - spatial-frequency features for AI-generated image detection</a:t>
-            </a:r>
-          </a:p>
-        </p:txBody>
-      </p:sp>
-      <p:sp>
-        <p:nvSpPr>
-          <p:cNvPr id="18" name="TextBox 17"/>
+              <a:t>CSE 4883 Digital Image Processing  ·  Same score, different story</a:t>
+            </a:r>
+          </a:p>
+        </p:txBody>
+      </p:sp>
+      <p:sp>
+        <p:nvSpPr>
+          <p:cNvPr id="21" name="TextBox 20"/>
           <p:cNvSpPr txBox="1"/>
           <p:nvPr/>
         </p:nvSpPr>
@@ -5352,7 +5313,7 @@
             <a:r>
               <a:rPr sz="1050" b="0" i="0">
                 <a:solidFill>
-                  <a:srgbClr val="A9B4C0"/>
+                  <a:srgbClr val="5D6D7E"/>
                 </a:solidFill>
                 <a:latin typeface="Arial"/>
               </a:rPr>
@@ -5387,7 +5348,7 @@
             <a:r>
               <a:rPr sz="1050" b="0" i="0">
                 <a:solidFill>
-                  <a:srgbClr val="A9B4C0"/>
+                  <a:srgbClr val="5D6D7E"/>
                 </a:solidFill>
                 <a:latin typeface="Arial"/>
               </a:rPr>
@@ -5422,7 +5383,7 @@
             <a:r>
               <a:rPr sz="1050" b="0" i="0">
                 <a:solidFill>
-                  <a:srgbClr val="A9B4C0"/>
+                  <a:srgbClr val="5D6D7E"/>
                 </a:solidFill>
                 <a:latin typeface="Arial"/>
               </a:rPr>
@@ -5457,7 +5418,7 @@
             <a:r>
               <a:rPr sz="1050" b="0" i="0">
                 <a:solidFill>
-                  <a:srgbClr val="A9B4C0"/>
+                  <a:srgbClr val="5D6D7E"/>
                 </a:solidFill>
                 <a:latin typeface="Arial"/>
               </a:rPr>
@@ -5522,20 +5483,6 @@
             <a:noFill/>
           </a:ln>
         </p:spPr>
-        <p:style>
-          <a:lnRef idx="1">
-            <a:schemeClr val="accent1"/>
-          </a:lnRef>
-          <a:fillRef idx="3">
-            <a:schemeClr val="accent1"/>
-          </a:fillRef>
-          <a:effectRef idx="2">
-            <a:schemeClr val="accent1"/>
-          </a:effectRef>
-          <a:fontRef idx="minor">
-            <a:schemeClr val="lt1"/>
-          </a:fontRef>
-        </p:style>
         <p:txBody>
           <a:bodyPr rtlCol="0" anchor="ctr"/>
           <a:lstStyle/>
@@ -5570,7 +5517,7 @@
             <a:r>
               <a:rPr sz="1050" b="0" i="0">
                 <a:solidFill>
-                  <a:srgbClr val="A9B4C0"/>
+                  <a:srgbClr val="5D6D7E"/>
                 </a:solidFill>
                 <a:latin typeface="Arial"/>
               </a:rPr>
@@ -5605,7 +5552,7 @@
             <a:r>
               <a:rPr sz="1050" b="0" i="0">
                 <a:solidFill>
-                  <a:srgbClr val="A9B4C0"/>
+                  <a:srgbClr val="5D6D7E"/>
                 </a:solidFill>
                 <a:latin typeface="Arial"/>
               </a:rPr>
@@ -5635,20 +5582,6 @@
             <a:noFill/>
           </a:ln>
         </p:spPr>
-        <p:style>
-          <a:lnRef idx="1">
-            <a:schemeClr val="accent1"/>
-          </a:lnRef>
-          <a:fillRef idx="3">
-            <a:schemeClr val="accent1"/>
-          </a:fillRef>
-          <a:effectRef idx="2">
-            <a:schemeClr val="accent1"/>
-          </a:effectRef>
-          <a:fontRef idx="minor">
-            <a:schemeClr val="lt1"/>
-          </a:fontRef>
-        </p:style>
         <p:txBody>
           <a:bodyPr rtlCol="0" anchor="ctr"/>
           <a:lstStyle/>
@@ -5666,7 +5599,7 @@
         <p:spPr>
           <a:xfrm>
             <a:off x="548640" y="713232"/>
-            <a:ext cx="9509760" cy="548640"/>
+            <a:ext cx="9418320" cy="548640"/>
           </a:xfrm>
           <a:prstGeom prst="rect">
             <a:avLst/>
@@ -5700,8 +5633,8 @@
         </p:nvSpPr>
         <p:spPr>
           <a:xfrm>
-            <a:off x="9997135" y="822960"/>
-            <a:ext cx="1645920" cy="274320"/>
+            <a:off x="10271455" y="822960"/>
+            <a:ext cx="1371600" cy="274320"/>
           </a:xfrm>
           <a:prstGeom prst="rect">
             <a:avLst/>
@@ -5825,7 +5758,7 @@
                 </a:solidFill>
                 <a:latin typeface="Arial"/>
               </a:rPr>
-              <a:t>Which arm looks stronger?  pixel - frequency</a:t>
+              <a:t>Which arm looks stronger?  pixel − frequency</a:t>
             </a:r>
           </a:p>
         </p:txBody>
@@ -5952,7 +5885,7 @@
                           </a:solidFill>
                           <a:latin typeface="Arial"/>
                         </a:rPr>
-                        <a:t>-0.088 [-0.130, -0.045]</a:t>
+                        <a:t>−0.088 [−0.130, −0.045]</a:t>
                       </a:r>
                     </a:p>
                   </a:txBody>
@@ -6010,7 +5943,7 @@
                           </a:solidFill>
                           <a:latin typeface="Arial"/>
                         </a:rPr>
-                        <a:t>+0.022 [-0.015, 0.056]</a:t>
+                        <a:t>+0.022 [−0.015, 0.056]</a:t>
                       </a:r>
                     </a:p>
                   </a:txBody>
@@ -6466,7 +6399,7 @@
                 </a:solidFill>
                 <a:latin typeface="Arial"/>
               </a:rPr>
-              <a:t>Same score, different story - spatial-frequency features for AI-generated image detection</a:t>
+              <a:t>CSE 4883 Digital Image Processing  ·  Same score, different story</a:t>
             </a:r>
           </a:p>
         </p:txBody>
@@ -6550,7 +6483,7 @@
             <a:r>
               <a:rPr sz="1050" b="0" i="0">
                 <a:solidFill>
-                  <a:srgbClr val="A9B4C0"/>
+                  <a:srgbClr val="5D6D7E"/>
                 </a:solidFill>
                 <a:latin typeface="Arial"/>
               </a:rPr>
@@ -6585,7 +6518,7 @@
             <a:r>
               <a:rPr sz="1050" b="0" i="0">
                 <a:solidFill>
-                  <a:srgbClr val="A9B4C0"/>
+                  <a:srgbClr val="5D6D7E"/>
                 </a:solidFill>
                 <a:latin typeface="Arial"/>
               </a:rPr>
@@ -6620,7 +6553,7 @@
             <a:r>
               <a:rPr sz="1050" b="0" i="0">
                 <a:solidFill>
-                  <a:srgbClr val="A9B4C0"/>
+                  <a:srgbClr val="5D6D7E"/>
                 </a:solidFill>
                 <a:latin typeface="Arial"/>
               </a:rPr>
@@ -6655,7 +6588,7 @@
             <a:r>
               <a:rPr sz="1050" b="0" i="0">
                 <a:solidFill>
-                  <a:srgbClr val="A9B4C0"/>
+                  <a:srgbClr val="5D6D7E"/>
                 </a:solidFill>
                 <a:latin typeface="Arial"/>
               </a:rPr>
@@ -6690,7 +6623,7 @@
             <a:r>
               <a:rPr sz="1050" b="0" i="0">
                 <a:solidFill>
-                  <a:srgbClr val="A9B4C0"/>
+                  <a:srgbClr val="5D6D7E"/>
                 </a:solidFill>
                 <a:latin typeface="Arial"/>
               </a:rPr>
@@ -6755,20 +6688,6 @@
             <a:noFill/>
           </a:ln>
         </p:spPr>
-        <p:style>
-          <a:lnRef idx="1">
-            <a:schemeClr val="accent1"/>
-          </a:lnRef>
-          <a:fillRef idx="3">
-            <a:schemeClr val="accent1"/>
-          </a:fillRef>
-          <a:effectRef idx="2">
-            <a:schemeClr val="accent1"/>
-          </a:effectRef>
-          <a:fontRef idx="minor">
-            <a:schemeClr val="lt1"/>
-          </a:fontRef>
-        </p:style>
         <p:txBody>
           <a:bodyPr rtlCol="0" anchor="ctr"/>
           <a:lstStyle/>
@@ -6833,20 +6752,6 @@
             <a:noFill/>
           </a:ln>
         </p:spPr>
-        <p:style>
-          <a:lnRef idx="1">
-            <a:schemeClr val="accent1"/>
-          </a:lnRef>
-          <a:fillRef idx="3">
-            <a:schemeClr val="accent1"/>
-          </a:fillRef>
-          <a:effectRef idx="2">
-            <a:schemeClr val="accent1"/>
-          </a:effectRef>
-          <a:fontRef idx="minor">
-            <a:schemeClr val="lt1"/>
-          </a:fontRef>
-        </p:style>
         <p:txBody>
           <a:bodyPr rtlCol="0" anchor="ctr"/>
           <a:lstStyle/>
@@ -6876,20 +6781,6 @@
             <a:noFill/>
           </a:ln>
         </p:spPr>
-        <p:style>
-          <a:lnRef idx="1">
-            <a:schemeClr val="accent1"/>
-          </a:lnRef>
-          <a:fillRef idx="3">
-            <a:schemeClr val="accent1"/>
-          </a:fillRef>
-          <a:effectRef idx="2">
-            <a:schemeClr val="accent1"/>
-          </a:effectRef>
-          <a:fontRef idx="minor">
-            <a:schemeClr val="lt1"/>
-          </a:fontRef>
-        </p:style>
         <p:txBody>
           <a:bodyPr rtlCol="0" anchor="ctr"/>
           <a:lstStyle/>
@@ -6907,7 +6798,7 @@
         <p:spPr>
           <a:xfrm>
             <a:off x="548640" y="713232"/>
-            <a:ext cx="9509760" cy="548640"/>
+            <a:ext cx="9418320" cy="548640"/>
           </a:xfrm>
           <a:prstGeom prst="rect">
             <a:avLst/>
@@ -6941,8 +6832,8 @@
         </p:nvSpPr>
         <p:spPr>
           <a:xfrm>
-            <a:off x="9997135" y="822960"/>
-            <a:ext cx="1645920" cy="274320"/>
+            <a:off x="10271455" y="822960"/>
+            <a:ext cx="1371600" cy="274320"/>
           </a:xfrm>
           <a:prstGeom prst="rect">
             <a:avLst/>
@@ -7064,20 +6955,6 @@
           </a:ln>
           <a:effectLst/>
         </p:spPr>
-        <p:style>
-          <a:lnRef idx="1">
-            <a:schemeClr val="accent1"/>
-          </a:lnRef>
-          <a:fillRef idx="3">
-            <a:schemeClr val="accent1"/>
-          </a:fillRef>
-          <a:effectRef idx="2">
-            <a:schemeClr val="accent1"/>
-          </a:effectRef>
-          <a:fontRef idx="minor">
-            <a:schemeClr val="lt1"/>
-          </a:fontRef>
-        </p:style>
         <p:txBody>
           <a:bodyPr rtlCol="0" anchor="ctr" wrap="square" lIns="73152" rIns="73152" tIns="27432" bIns="27432"/>
           <a:lstStyle/>
@@ -7116,20 +6993,6 @@
             <a:tailEnd type="triangle" w="med" len="med"/>
           </a:ln>
         </p:spPr>
-        <p:style>
-          <a:lnRef idx="2">
-            <a:schemeClr val="accent1"/>
-          </a:lnRef>
-          <a:fillRef idx="0">
-            <a:schemeClr val="accent1"/>
-          </a:fillRef>
-          <a:effectRef idx="1">
-            <a:schemeClr val="accent1"/>
-          </a:effectRef>
-          <a:fontRef idx="minor">
-            <a:schemeClr val="tx1"/>
-          </a:fontRef>
-        </p:style>
       </p:cxnSp>
       <p:sp>
         <p:nvSpPr>
@@ -7157,20 +7020,6 @@
           </a:ln>
           <a:effectLst/>
         </p:spPr>
-        <p:style>
-          <a:lnRef idx="1">
-            <a:schemeClr val="accent1"/>
-          </a:lnRef>
-          <a:fillRef idx="3">
-            <a:schemeClr val="accent1"/>
-          </a:fillRef>
-          <a:effectRef idx="2">
-            <a:schemeClr val="accent1"/>
-          </a:effectRef>
-          <a:fontRef idx="minor">
-            <a:schemeClr val="lt1"/>
-          </a:fontRef>
-        </p:style>
         <p:txBody>
           <a:bodyPr rtlCol="0" anchor="ctr" wrap="square" lIns="73152" rIns="73152" tIns="27432" bIns="27432"/>
           <a:lstStyle/>
@@ -7183,7 +7032,7 @@
                 </a:solidFill>
                 <a:latin typeface="Arial"/>
               </a:rPr>
-              <a:t>pre-specified native-resolution protocol, matched field of view</a:t>
+              <a:t>pre-specified native-resolution protocol (matched view)</a:t>
             </a:r>
           </a:p>
         </p:txBody>
@@ -7214,20 +7063,6 @@
           </a:ln>
           <a:effectLst/>
         </p:spPr>
-        <p:style>
-          <a:lnRef idx="1">
-            <a:schemeClr val="accent1"/>
-          </a:lnRef>
-          <a:fillRef idx="3">
-            <a:schemeClr val="accent1"/>
-          </a:fillRef>
-          <a:effectRef idx="2">
-            <a:schemeClr val="accent1"/>
-          </a:effectRef>
-          <a:fontRef idx="minor">
-            <a:schemeClr val="lt1"/>
-          </a:fontRef>
-        </p:style>
         <p:txBody>
           <a:bodyPr rtlCol="0" anchor="ctr" wrap="square" lIns="73152" rIns="73152" tIns="27432" bIns="27432"/>
           <a:lstStyle/>
@@ -7266,20 +7101,6 @@
             <a:tailEnd type="triangle" w="med" len="med"/>
           </a:ln>
         </p:spPr>
-        <p:style>
-          <a:lnRef idx="2">
-            <a:schemeClr val="accent1"/>
-          </a:lnRef>
-          <a:fillRef idx="0">
-            <a:schemeClr val="accent1"/>
-          </a:fillRef>
-          <a:effectRef idx="1">
-            <a:schemeClr val="accent1"/>
-          </a:effectRef>
-          <a:fontRef idx="minor">
-            <a:schemeClr val="tx1"/>
-          </a:fontRef>
-        </p:style>
       </p:cxnSp>
       <p:sp>
         <p:nvSpPr>
@@ -7307,20 +7128,6 @@
           </a:ln>
           <a:effectLst/>
         </p:spPr>
-        <p:style>
-          <a:lnRef idx="1">
-            <a:schemeClr val="accent1"/>
-          </a:lnRef>
-          <a:fillRef idx="3">
-            <a:schemeClr val="accent1"/>
-          </a:fillRef>
-          <a:effectRef idx="2">
-            <a:schemeClr val="accent1"/>
-          </a:effectRef>
-          <a:fontRef idx="minor">
-            <a:schemeClr val="lt1"/>
-          </a:fontRef>
-        </p:style>
         <p:txBody>
           <a:bodyPr rtlCol="0" anchor="ctr" wrap="square" lIns="73152" rIns="73152" tIns="27432" bIns="27432"/>
           <a:lstStyle/>
@@ -7364,20 +7171,6 @@
           </a:ln>
           <a:effectLst/>
         </p:spPr>
-        <p:style>
-          <a:lnRef idx="1">
-            <a:schemeClr val="accent1"/>
-          </a:lnRef>
-          <a:fillRef idx="3">
-            <a:schemeClr val="accent1"/>
-          </a:fillRef>
-          <a:effectRef idx="2">
-            <a:schemeClr val="accent1"/>
-          </a:effectRef>
-          <a:fontRef idx="minor">
-            <a:schemeClr val="lt1"/>
-          </a:fontRef>
-        </p:style>
         <p:txBody>
           <a:bodyPr rtlCol="0" anchor="ctr" wrap="square" lIns="73152" rIns="73152" tIns="27432" bIns="27432"/>
           <a:lstStyle/>
@@ -7416,20 +7209,6 @@
             <a:tailEnd type="triangle" w="med" len="med"/>
           </a:ln>
         </p:spPr>
-        <p:style>
-          <a:lnRef idx="2">
-            <a:schemeClr val="accent1"/>
-          </a:lnRef>
-          <a:fillRef idx="0">
-            <a:schemeClr val="accent1"/>
-          </a:fillRef>
-          <a:effectRef idx="1">
-            <a:schemeClr val="accent1"/>
-          </a:effectRef>
-          <a:fontRef idx="minor">
-            <a:schemeClr val="tx1"/>
-          </a:fontRef>
-        </p:style>
       </p:cxnSp>
       <p:sp>
         <p:nvSpPr>
@@ -7457,20 +7236,6 @@
           </a:ln>
           <a:effectLst/>
         </p:spPr>
-        <p:style>
-          <a:lnRef idx="1">
-            <a:schemeClr val="accent1"/>
-          </a:lnRef>
-          <a:fillRef idx="3">
-            <a:schemeClr val="accent1"/>
-          </a:fillRef>
-          <a:effectRef idx="2">
-            <a:schemeClr val="accent1"/>
-          </a:effectRef>
-          <a:fontRef idx="minor">
-            <a:schemeClr val="lt1"/>
-          </a:fontRef>
-        </p:style>
         <p:txBody>
           <a:bodyPr rtlCol="0" anchor="ctr" wrap="square" lIns="73152" rIns="73152" tIns="27432" bIns="27432"/>
           <a:lstStyle/>
@@ -7514,20 +7279,6 @@
           </a:ln>
           <a:effectLst/>
         </p:spPr>
-        <p:style>
-          <a:lnRef idx="1">
-            <a:schemeClr val="accent1"/>
-          </a:lnRef>
-          <a:fillRef idx="3">
-            <a:schemeClr val="accent1"/>
-          </a:fillRef>
-          <a:effectRef idx="2">
-            <a:schemeClr val="accent1"/>
-          </a:effectRef>
-          <a:fontRef idx="minor">
-            <a:schemeClr val="lt1"/>
-          </a:fontRef>
-        </p:style>
         <p:txBody>
           <a:bodyPr rtlCol="0" anchor="ctr" wrap="square" lIns="73152" rIns="73152" tIns="27432" bIns="27432"/>
           <a:lstStyle/>
@@ -7566,20 +7317,6 @@
             <a:tailEnd type="triangle" w="med" len="med"/>
           </a:ln>
         </p:spPr>
-        <p:style>
-          <a:lnRef idx="2">
-            <a:schemeClr val="accent1"/>
-          </a:lnRef>
-          <a:fillRef idx="0">
-            <a:schemeClr val="accent1"/>
-          </a:fillRef>
-          <a:effectRef idx="1">
-            <a:schemeClr val="accent1"/>
-          </a:effectRef>
-          <a:fontRef idx="minor">
-            <a:schemeClr val="tx1"/>
-          </a:fontRef>
-        </p:style>
       </p:cxnSp>
       <p:sp>
         <p:nvSpPr>
@@ -7607,20 +7344,6 @@
           </a:ln>
           <a:effectLst/>
         </p:spPr>
-        <p:style>
-          <a:lnRef idx="1">
-            <a:schemeClr val="accent1"/>
-          </a:lnRef>
-          <a:fillRef idx="3">
-            <a:schemeClr val="accent1"/>
-          </a:fillRef>
-          <a:effectRef idx="2">
-            <a:schemeClr val="accent1"/>
-          </a:effectRef>
-          <a:fontRef idx="minor">
-            <a:schemeClr val="lt1"/>
-          </a:fontRef>
-        </p:style>
         <p:txBody>
           <a:bodyPr rtlCol="0" anchor="ctr" wrap="square" lIns="73152" rIns="73152" tIns="27432" bIns="27432"/>
           <a:lstStyle/>
@@ -7664,20 +7387,6 @@
           </a:ln>
           <a:effectLst/>
         </p:spPr>
-        <p:style>
-          <a:lnRef idx="1">
-            <a:schemeClr val="accent1"/>
-          </a:lnRef>
-          <a:fillRef idx="3">
-            <a:schemeClr val="accent1"/>
-          </a:fillRef>
-          <a:effectRef idx="2">
-            <a:schemeClr val="accent1"/>
-          </a:effectRef>
-          <a:fontRef idx="minor">
-            <a:schemeClr val="lt1"/>
-          </a:fontRef>
-        </p:style>
         <p:txBody>
           <a:bodyPr rtlCol="0" anchor="ctr" wrap="square" lIns="73152" rIns="73152" tIns="27432" bIns="27432"/>
           <a:lstStyle/>
@@ -7716,20 +7425,6 @@
             <a:tailEnd type="triangle" w="med" len="med"/>
           </a:ln>
         </p:spPr>
-        <p:style>
-          <a:lnRef idx="2">
-            <a:schemeClr val="accent1"/>
-          </a:lnRef>
-          <a:fillRef idx="0">
-            <a:schemeClr val="accent1"/>
-          </a:fillRef>
-          <a:effectRef idx="1">
-            <a:schemeClr val="accent1"/>
-          </a:effectRef>
-          <a:fontRef idx="minor">
-            <a:schemeClr val="tx1"/>
-          </a:fontRef>
-        </p:style>
       </p:cxnSp>
       <p:sp>
         <p:nvSpPr>
@@ -7757,20 +7452,6 @@
           </a:ln>
           <a:effectLst/>
         </p:spPr>
-        <p:style>
-          <a:lnRef idx="1">
-            <a:schemeClr val="accent1"/>
-          </a:lnRef>
-          <a:fillRef idx="3">
-            <a:schemeClr val="accent1"/>
-          </a:fillRef>
-          <a:effectRef idx="2">
-            <a:schemeClr val="accent1"/>
-          </a:effectRef>
-          <a:fontRef idx="minor">
-            <a:schemeClr val="lt1"/>
-          </a:fontRef>
-        </p:style>
         <p:txBody>
           <a:bodyPr rtlCol="0" anchor="ctr" wrap="square" lIns="73152" rIns="73152" tIns="27432" bIns="27432"/>
           <a:lstStyle/>
@@ -7818,7 +7499,7 @@
                 </a:solidFill>
                 <a:latin typeface="Arial"/>
               </a:rPr>
-              <a:t>Same score, different story - spatial-frequency features for AI-generated image detection</a:t>
+              <a:t>CSE 4883 Digital Image Processing  ·  Same score, different story</a:t>
             </a:r>
           </a:p>
         </p:txBody>
@@ -7897,20 +7578,6 @@
             <a:noFill/>
           </a:ln>
         </p:spPr>
-        <p:style>
-          <a:lnRef idx="1">
-            <a:schemeClr val="accent1"/>
-          </a:lnRef>
-          <a:fillRef idx="3">
-            <a:schemeClr val="accent1"/>
-          </a:fillRef>
-          <a:effectRef idx="2">
-            <a:schemeClr val="accent1"/>
-          </a:effectRef>
-          <a:fontRef idx="minor">
-            <a:schemeClr val="lt1"/>
-          </a:fontRef>
-        </p:style>
         <p:txBody>
           <a:bodyPr rtlCol="0" anchor="ctr"/>
           <a:lstStyle/>
@@ -7928,7 +7595,7 @@
         <p:spPr>
           <a:xfrm>
             <a:off x="548640" y="1463040"/>
-            <a:ext cx="10972800" cy="1828800"/>
+            <a:ext cx="10972800" cy="1508760"/>
           </a:xfrm>
           <a:prstGeom prst="rect">
             <a:avLst/>
@@ -8017,43 +7684,8 @@
         </p:nvSpPr>
         <p:spPr>
           <a:xfrm>
-            <a:off x="548640" y="4206240"/>
-            <a:ext cx="3566160" cy="640080"/>
-          </a:xfrm>
-          <a:prstGeom prst="rect">
-            <a:avLst/>
-          </a:prstGeom>
-          <a:noFill/>
-        </p:spPr>
-        <p:txBody>
-          <a:bodyPr wrap="square" lIns="0" rIns="0" tIns="0" bIns="0">
-            <a:spAutoFit/>
-          </a:bodyPr>
-          <a:lstStyle/>
-          <a:p>
-            <a:pPr algn="l"/>
-            <a:r>
-              <a:rPr sz="3200" b="1" i="0">
-                <a:solidFill>
-                  <a:srgbClr val="FFFFFF"/>
-                </a:solidFill>
-                <a:latin typeface="Georgia"/>
-              </a:rPr>
-              <a:t>0.793</a:t>
-            </a:r>
-          </a:p>
-        </p:txBody>
-      </p:sp>
-      <p:sp>
-        <p:nvSpPr>
-          <p:cNvPr id="6" name="TextBox 5"/>
-          <p:cNvSpPr txBox="1"/>
-          <p:nvPr/>
-        </p:nvSpPr>
-        <p:spPr>
-          <a:xfrm>
-            <a:off x="548640" y="4892040"/>
-            <a:ext cx="3566160" cy="640080"/>
+            <a:off x="548640" y="4069080"/>
+            <a:ext cx="10515600" cy="914400"/>
           </a:xfrm>
           <a:prstGeom prst="rect">
             <a:avLst/>
@@ -8068,33 +7700,106 @@
           <a:p>
             <a:pPr algn="l">
               <a:lnSpc>
-                <a:spcPct val="110000"/>
+                <a:spcPct val="130000"/>
               </a:lnSpc>
             </a:pPr>
             <a:r>
-              <a:rPr sz="1300" b="0" i="0">
+              <a:rPr sz="1600" b="0">
                 <a:solidFill>
                   <a:srgbClr val="ABB7C4"/>
                 </a:solidFill>
                 <a:latin typeface="Arial"/>
               </a:rPr>
-              <a:t>best pooled AUROC</a:t>
-            </a:r>
-          </a:p>
-          <a:p>
-            <a:pPr algn="l">
-              <a:lnSpc>
-                <a:spcPct val="110000"/>
-              </a:lnSpc>
-            </a:pPr>
-            <a:r>
-              <a:rPr sz="1300" b="0" i="0">
+              <a:t>Combined features scored best pooled (</a:t>
+            </a:r>
+            <a:r>
+              <a:rPr sz="1600" b="1">
+                <a:solidFill>
+                  <a:srgbClr val="FFFFFF"/>
+                </a:solidFill>
+                <a:latin typeface="Arial"/>
+              </a:rPr>
+              <a:t>0.793</a:t>
+            </a:r>
+            <a:r>
+              <a:rPr sz="1600" b="0">
                 <a:solidFill>
                   <a:srgbClr val="ABB7C4"/>
                 </a:solidFill>
                 <a:latin typeface="Arial"/>
               </a:rPr>
-              <a:t>(combined, clean)</a:t>
+              <a:t>; </a:t>
+            </a:r>
+            <a:r>
+              <a:rPr sz="1600" b="1">
+                <a:solidFill>
+                  <a:srgbClr val="FFFFFF"/>
+                </a:solidFill>
+                <a:latin typeface="Arial"/>
+              </a:rPr>
+              <a:t>0.629</a:t>
+            </a:r>
+            <a:r>
+              <a:rPr sz="1600" b="0">
+                <a:solidFill>
+                  <a:srgbClr val="ABB7C4"/>
+                </a:solidFill>
+                <a:latin typeface="Arial"/>
+              </a:rPr>
+              <a:t> on an unseen generator under JPEG 75), yet the same pooled score hid per-generator changes of </a:t>
+            </a:r>
+            <a:r>
+              <a:rPr sz="1600" b="1">
+                <a:solidFill>
+                  <a:srgbClr val="FFFFFF"/>
+                </a:solidFill>
+                <a:latin typeface="Arial"/>
+              </a:rPr>
+              <a:t>−0.17 to +0.30</a:t>
+            </a:r>
+            <a:r>
+              <a:rPr sz="1600" b="0">
+                <a:solidFill>
+                  <a:srgbClr val="ABB7C4"/>
+                </a:solidFill>
+                <a:latin typeface="Arial"/>
+              </a:rPr>
+              <a:t>.</a:t>
+            </a:r>
+          </a:p>
+        </p:txBody>
+      </p:sp>
+      <p:sp>
+        <p:nvSpPr>
+          <p:cNvPr id="6" name="TextBox 5"/>
+          <p:cNvSpPr txBox="1"/>
+          <p:nvPr/>
+        </p:nvSpPr>
+        <p:spPr>
+          <a:xfrm>
+            <a:off x="548640" y="5669280"/>
+            <a:ext cx="10972800" cy="365760"/>
+          </a:xfrm>
+          <a:prstGeom prst="rect">
+            <a:avLst/>
+          </a:prstGeom>
+          <a:noFill/>
+        </p:spPr>
+        <p:txBody>
+          <a:bodyPr wrap="square" lIns="0" rIns="0" tIns="0" bIns="0">
+            <a:spAutoFit/>
+          </a:bodyPr>
+          <a:lstStyle/>
+          <a:p>
+            <a:pPr algn="l"/>
+            <a:r>
+              <a:rPr sz="1800" b="1" i="0">
+                <a:solidFill>
+                  <a:srgbClr val="FFFFFF"/>
+                </a:solidFill>
+                <a:latin typeface="Georgia"/>
+              </a:rPr>
+              <a:t>Thank you  ·  questions?</a:t>
             </a:r>
           </a:p>
         </p:txBody>
@@ -8102,221 +7807,6 @@
       <p:sp>
         <p:nvSpPr>
           <p:cNvPr id="7" name="TextBox 6"/>
-          <p:cNvSpPr txBox="1"/>
-          <p:nvPr/>
-        </p:nvSpPr>
-        <p:spPr>
-          <a:xfrm>
-            <a:off x="4297679" y="4206240"/>
-            <a:ext cx="3566160" cy="640080"/>
-          </a:xfrm>
-          <a:prstGeom prst="rect">
-            <a:avLst/>
-          </a:prstGeom>
-          <a:noFill/>
-        </p:spPr>
-        <p:txBody>
-          <a:bodyPr wrap="square" lIns="0" rIns="0" tIns="0" bIns="0">
-            <a:spAutoFit/>
-          </a:bodyPr>
-          <a:lstStyle/>
-          <a:p>
-            <a:pPr algn="l"/>
-            <a:r>
-              <a:rPr sz="3200" b="1" i="0">
-                <a:solidFill>
-                  <a:srgbClr val="FFFFFF"/>
-                </a:solidFill>
-                <a:latin typeface="Georgia"/>
-              </a:rPr>
-              <a:t>0.629</a:t>
-            </a:r>
-          </a:p>
-        </p:txBody>
-      </p:sp>
-      <p:sp>
-        <p:nvSpPr>
-          <p:cNvPr id="8" name="TextBox 7"/>
-          <p:cNvSpPr txBox="1"/>
-          <p:nvPr/>
-        </p:nvSpPr>
-        <p:spPr>
-          <a:xfrm>
-            <a:off x="4297679" y="4892040"/>
-            <a:ext cx="3566160" cy="640080"/>
-          </a:xfrm>
-          <a:prstGeom prst="rect">
-            <a:avLst/>
-          </a:prstGeom>
-          <a:noFill/>
-        </p:spPr>
-        <p:txBody>
-          <a:bodyPr wrap="square" lIns="0" rIns="0" tIns="0" bIns="0">
-            <a:spAutoFit/>
-          </a:bodyPr>
-          <a:lstStyle/>
-          <a:p>
-            <a:pPr algn="l">
-              <a:lnSpc>
-                <a:spcPct val="110000"/>
-              </a:lnSpc>
-            </a:pPr>
-            <a:r>
-              <a:rPr sz="1300" b="0" i="0">
-                <a:solidFill>
-                  <a:srgbClr val="ABB7C4"/>
-                </a:solidFill>
-                <a:latin typeface="Arial"/>
-              </a:rPr>
-              <a:t>unseen generator</a:t>
-            </a:r>
-          </a:p>
-          <a:p>
-            <a:pPr algn="l">
-              <a:lnSpc>
-                <a:spcPct val="110000"/>
-              </a:lnSpc>
-            </a:pPr>
-            <a:r>
-              <a:rPr sz="1300" b="0" i="0">
-                <a:solidFill>
-                  <a:srgbClr val="ABB7C4"/>
-                </a:solidFill>
-                <a:latin typeface="Arial"/>
-              </a:rPr>
-              <a:t>under JPEG 75</a:t>
-            </a:r>
-          </a:p>
-        </p:txBody>
-      </p:sp>
-      <p:sp>
-        <p:nvSpPr>
-          <p:cNvPr id="9" name="TextBox 8"/>
-          <p:cNvSpPr txBox="1"/>
-          <p:nvPr/>
-        </p:nvSpPr>
-        <p:spPr>
-          <a:xfrm>
-            <a:off x="8046718" y="4206240"/>
-            <a:ext cx="3566160" cy="640080"/>
-          </a:xfrm>
-          <a:prstGeom prst="rect">
-            <a:avLst/>
-          </a:prstGeom>
-          <a:noFill/>
-        </p:spPr>
-        <p:txBody>
-          <a:bodyPr wrap="square" lIns="0" rIns="0" tIns="0" bIns="0">
-            <a:spAutoFit/>
-          </a:bodyPr>
-          <a:lstStyle/>
-          <a:p>
-            <a:pPr algn="l"/>
-            <a:r>
-              <a:rPr sz="3200" b="1" i="0">
-                <a:solidFill>
-                  <a:srgbClr val="FFFFFF"/>
-                </a:solidFill>
-                <a:latin typeface="Georgia"/>
-              </a:rPr>
-              <a:t>-0.17 to +0.30</a:t>
-            </a:r>
-          </a:p>
-        </p:txBody>
-      </p:sp>
-      <p:sp>
-        <p:nvSpPr>
-          <p:cNvPr id="10" name="TextBox 9"/>
-          <p:cNvSpPr txBox="1"/>
-          <p:nvPr/>
-        </p:nvSpPr>
-        <p:spPr>
-          <a:xfrm>
-            <a:off x="8046718" y="4892040"/>
-            <a:ext cx="3566160" cy="640080"/>
-          </a:xfrm>
-          <a:prstGeom prst="rect">
-            <a:avLst/>
-          </a:prstGeom>
-          <a:noFill/>
-        </p:spPr>
-        <p:txBody>
-          <a:bodyPr wrap="square" lIns="0" rIns="0" tIns="0" bIns="0">
-            <a:spAutoFit/>
-          </a:bodyPr>
-          <a:lstStyle/>
-          <a:p>
-            <a:pPr algn="l">
-              <a:lnSpc>
-                <a:spcPct val="110000"/>
-              </a:lnSpc>
-            </a:pPr>
-            <a:r>
-              <a:rPr sz="1300" b="0" i="0">
-                <a:solidFill>
-                  <a:srgbClr val="ABB7C4"/>
-                </a:solidFill>
-                <a:latin typeface="Arial"/>
-              </a:rPr>
-              <a:t>per-generator change,</a:t>
-            </a:r>
-          </a:p>
-          <a:p>
-            <a:pPr algn="l">
-              <a:lnSpc>
-                <a:spcPct val="110000"/>
-              </a:lnSpc>
-            </a:pPr>
-            <a:r>
-              <a:rPr sz="1300" b="0" i="0">
-                <a:solidFill>
-                  <a:srgbClr val="ABB7C4"/>
-                </a:solidFill>
-                <a:latin typeface="Arial"/>
-              </a:rPr>
-              <a:t>same pooled score</a:t>
-            </a:r>
-          </a:p>
-        </p:txBody>
-      </p:sp>
-      <p:sp>
-        <p:nvSpPr>
-          <p:cNvPr id="11" name="TextBox 10"/>
-          <p:cNvSpPr txBox="1"/>
-          <p:nvPr/>
-        </p:nvSpPr>
-        <p:spPr>
-          <a:xfrm>
-            <a:off x="548640" y="5897880"/>
-            <a:ext cx="10972800" cy="365760"/>
-          </a:xfrm>
-          <a:prstGeom prst="rect">
-            <a:avLst/>
-          </a:prstGeom>
-          <a:noFill/>
-        </p:spPr>
-        <p:txBody>
-          <a:bodyPr wrap="square" lIns="0" rIns="0" tIns="0" bIns="0">
-            <a:spAutoFit/>
-          </a:bodyPr>
-          <a:lstStyle/>
-          <a:p>
-            <a:pPr algn="l"/>
-            <a:r>
-              <a:rPr sz="1600" b="1" i="0">
-                <a:solidFill>
-                  <a:srgbClr val="ABB7C4"/>
-                </a:solidFill>
-                <a:latin typeface="Arial"/>
-              </a:rPr>
-              <a:t>Thank you - questions?</a:t>
-            </a:r>
-          </a:p>
-        </p:txBody>
-      </p:sp>
-      <p:sp>
-        <p:nvSpPr>
-          <p:cNvPr id="12" name="TextBox 11"/>
           <p:cNvSpPr txBox="1"/>
           <p:nvPr/>
         </p:nvSpPr>
@@ -8344,14 +7834,14 @@
                 </a:solidFill>
                 <a:latin typeface="Arial"/>
               </a:rPr>
-              <a:t>Same score, different story - spatial-frequency features for AI-generated image detection</a:t>
-            </a:r>
-          </a:p>
-        </p:txBody>
-      </p:sp>
-      <p:sp>
-        <p:nvSpPr>
-          <p:cNvPr id="13" name="TextBox 12"/>
+              <a:t>CSE 4883 Digital Image Processing  ·  Same score, different story</a:t>
+            </a:r>
+          </a:p>
+        </p:txBody>
+      </p:sp>
+      <p:sp>
+        <p:nvSpPr>
+          <p:cNvPr id="8" name="TextBox 7"/>
           <p:cNvSpPr txBox="1"/>
           <p:nvPr/>
         </p:nvSpPr>
@@ -8458,20 +7948,6 @@
             <a:noFill/>
           </a:ln>
         </p:spPr>
-        <p:style>
-          <a:lnRef idx="1">
-            <a:schemeClr val="accent1"/>
-          </a:lnRef>
-          <a:fillRef idx="3">
-            <a:schemeClr val="accent1"/>
-          </a:fillRef>
-          <a:effectRef idx="2">
-            <a:schemeClr val="accent1"/>
-          </a:effectRef>
-          <a:fontRef idx="minor">
-            <a:schemeClr val="lt1"/>
-          </a:fontRef>
-        </p:style>
         <p:txBody>
           <a:bodyPr rtlCol="0" anchor="ctr"/>
           <a:lstStyle/>
@@ -8506,7 +7982,7 @@
             <a:r>
               <a:rPr sz="1050" b="0" i="0">
                 <a:solidFill>
-                  <a:srgbClr val="A9B4C0"/>
+                  <a:srgbClr val="5D6D7E"/>
                 </a:solidFill>
                 <a:latin typeface="Arial"/>
               </a:rPr>
@@ -8541,7 +8017,7 @@
             <a:r>
               <a:rPr sz="1050" b="0" i="0">
                 <a:solidFill>
-                  <a:srgbClr val="A9B4C0"/>
+                  <a:srgbClr val="5D6D7E"/>
                 </a:solidFill>
                 <a:latin typeface="Arial"/>
               </a:rPr>
@@ -8576,7 +8052,7 @@
             <a:r>
               <a:rPr sz="1050" b="0" i="0">
                 <a:solidFill>
-                  <a:srgbClr val="A9B4C0"/>
+                  <a:srgbClr val="5D6D7E"/>
                 </a:solidFill>
                 <a:latin typeface="Arial"/>
               </a:rPr>
@@ -8611,7 +8087,7 @@
             <a:r>
               <a:rPr sz="1050" b="0" i="0">
                 <a:solidFill>
-                  <a:srgbClr val="A9B4C0"/>
+                  <a:srgbClr val="5D6D7E"/>
                 </a:solidFill>
                 <a:latin typeface="Arial"/>
               </a:rPr>
@@ -8646,7 +8122,7 @@
             <a:r>
               <a:rPr sz="1050" b="0" i="0">
                 <a:solidFill>
-                  <a:srgbClr val="A9B4C0"/>
+                  <a:srgbClr val="5D6D7E"/>
                 </a:solidFill>
                 <a:latin typeface="Arial"/>
               </a:rPr>
@@ -8681,7 +8157,7 @@
             <a:r>
               <a:rPr sz="1050" b="0" i="0">
                 <a:solidFill>
-                  <a:srgbClr val="A9B4C0"/>
+                  <a:srgbClr val="5D6D7E"/>
                 </a:solidFill>
                 <a:latin typeface="Arial"/>
               </a:rPr>
@@ -8711,20 +8187,6 @@
             <a:noFill/>
           </a:ln>
         </p:spPr>
-        <p:style>
-          <a:lnRef idx="1">
-            <a:schemeClr val="accent1"/>
-          </a:lnRef>
-          <a:fillRef idx="3">
-            <a:schemeClr val="accent1"/>
-          </a:fillRef>
-          <a:effectRef idx="2">
-            <a:schemeClr val="accent1"/>
-          </a:effectRef>
-          <a:fontRef idx="minor">
-            <a:schemeClr val="lt1"/>
-          </a:fontRef>
-        </p:style>
         <p:txBody>
           <a:bodyPr rtlCol="0" anchor="ctr"/>
           <a:lstStyle/>
@@ -8742,7 +8204,7 @@
         <p:spPr>
           <a:xfrm>
             <a:off x="548640" y="713232"/>
-            <a:ext cx="9509760" cy="548640"/>
+            <a:ext cx="9418320" cy="548640"/>
           </a:xfrm>
           <a:prstGeom prst="rect">
             <a:avLst/>
@@ -8776,8 +8238,8 @@
         </p:nvSpPr>
         <p:spPr>
           <a:xfrm>
-            <a:off x="9997135" y="822960"/>
-            <a:ext cx="1645920" cy="274320"/>
+            <a:off x="10271455" y="822960"/>
+            <a:ext cx="1371600" cy="274320"/>
           </a:xfrm>
           <a:prstGeom prst="rect">
             <a:avLst/>
@@ -8819,8 +8281,8 @@
         </p:blipFill>
         <p:spPr>
           <a:xfrm>
-            <a:off x="548640" y="1965670"/>
-            <a:ext cx="7589520" cy="3127827"/>
+            <a:off x="1097280" y="1391827"/>
+            <a:ext cx="9997135" cy="4120065"/>
           </a:xfrm>
           <a:prstGeom prst="rect">
             <a:avLst/>
@@ -8840,8 +8302,8 @@
         </p:nvSpPr>
         <p:spPr>
           <a:xfrm>
-            <a:off x="548640" y="5203225"/>
-            <a:ext cx="7589520" cy="621792"/>
+            <a:off x="548640" y="5669280"/>
+            <a:ext cx="11094415" cy="731520"/>
           </a:xfrm>
           <a:prstGeom prst="rect">
             <a:avLst/>
@@ -8856,17 +8318,44 @@
           <a:p>
             <a:pPr algn="ctr">
               <a:lnSpc>
-                <a:spcPct val="105000"/>
+                <a:spcPct val="120000"/>
               </a:lnSpc>
             </a:pPr>
             <a:r>
-              <a:rPr sz="1200" b="0" i="0">
-                <a:solidFill>
-                  <a:srgbClr val="5D6D7E"/>
-                </a:solidFill>
-                <a:latin typeface="Arial"/>
-              </a:rPr>
-              <a:t>One GenImage test image per class, drawn at its true native size.</a:t>
+              <a:rPr sz="1700" b="0">
+                <a:solidFill>
+                  <a:srgbClr val="1C2833"/>
+                </a:solidFill>
+                <a:latin typeface="Arial"/>
+              </a:rPr>
+              <a:t>File format and size alone separate the classes (AUROC </a:t>
+            </a:r>
+            <a:r>
+              <a:rPr sz="1700" b="1">
+                <a:solidFill>
+                  <a:srgbClr val="B2182B"/>
+                </a:solidFill>
+                <a:latin typeface="Arial"/>
+              </a:rPr>
+              <a:t>1.000</a:t>
+            </a:r>
+            <a:r>
+              <a:rPr sz="1700" b="0">
+                <a:solidFill>
+                  <a:srgbClr val="1C2833"/>
+                </a:solidFill>
+                <a:latin typeface="Arial"/>
+              </a:rPr>
+              <a:t>). A fair pipeline gives every image 256 × 256 px, but </a:t>
+            </a:r>
+            <a:r>
+              <a:rPr sz="1700" b="1">
+                <a:solidFill>
+                  <a:srgbClr val="B2182B"/>
+                </a:solidFill>
+                <a:latin typeface="Arial"/>
+              </a:rPr>
+              <a:t>each class is resized by a different factor.</a:t>
             </a:r>
           </a:p>
         </p:txBody>
@@ -8874,236 +8363,6 @@
       <p:sp>
         <p:nvSpPr>
           <p:cNvPr id="15" name="TextBox 14"/>
-          <p:cNvSpPr txBox="1"/>
-          <p:nvPr/>
-        </p:nvSpPr>
-        <p:spPr>
-          <a:xfrm>
-            <a:off x="8549640" y="1600200"/>
-            <a:ext cx="3108960" cy="630620"/>
-          </a:xfrm>
-          <a:prstGeom prst="rect">
-            <a:avLst/>
-          </a:prstGeom>
-          <a:noFill/>
-        </p:spPr>
-        <p:txBody>
-          <a:bodyPr wrap="square" lIns="0" rIns="0" tIns="0" bIns="0">
-            <a:spAutoFit/>
-          </a:bodyPr>
-          <a:lstStyle/>
-          <a:p>
-            <a:pPr algn="l"/>
-            <a:r>
-              <a:rPr sz="4000" b="1" i="0">
-                <a:solidFill>
-                  <a:srgbClr val="B2182B"/>
-                </a:solidFill>
-                <a:latin typeface="Georgia"/>
-              </a:rPr>
-              <a:t>1.000</a:t>
-            </a:r>
-          </a:p>
-        </p:txBody>
-      </p:sp>
-      <p:sp>
-        <p:nvSpPr>
-          <p:cNvPr id="16" name="TextBox 15"/>
-          <p:cNvSpPr txBox="1"/>
-          <p:nvPr/>
-        </p:nvSpPr>
-        <p:spPr>
-          <a:xfrm>
-            <a:off x="8549640" y="2276540"/>
-            <a:ext cx="3108960" cy="548640"/>
-          </a:xfrm>
-          <a:prstGeom prst="rect">
-            <a:avLst/>
-          </a:prstGeom>
-          <a:noFill/>
-        </p:spPr>
-        <p:txBody>
-          <a:bodyPr wrap="square" lIns="0" rIns="0" tIns="0" bIns="0">
-            <a:spAutoFit/>
-          </a:bodyPr>
-          <a:lstStyle/>
-          <a:p>
-            <a:pPr algn="l">
-              <a:lnSpc>
-                <a:spcPct val="105000"/>
-              </a:lnSpc>
-            </a:pPr>
-            <a:r>
-              <a:rPr sz="1250" b="0" i="0">
-                <a:solidFill>
-                  <a:srgbClr val="5D6D7E"/>
-                </a:solidFill>
-                <a:latin typeface="Arial"/>
-              </a:rPr>
-              <a:t>AUROC from file format + size alone -</a:t>
-            </a:r>
-          </a:p>
-          <a:p>
-            <a:pPr algn="l">
-              <a:lnSpc>
-                <a:spcPct val="105000"/>
-              </a:lnSpc>
-            </a:pPr>
-            <a:r>
-              <a:rPr sz="1250" b="0" i="0">
-                <a:solidFill>
-                  <a:srgbClr val="5D6D7E"/>
-                </a:solidFill>
-                <a:latin typeface="Arial"/>
-              </a:rPr>
-              <a:t>no pixels needed</a:t>
-            </a:r>
-          </a:p>
-        </p:txBody>
-      </p:sp>
-      <p:sp>
-        <p:nvSpPr>
-          <p:cNvPr id="17" name="TextBox 16"/>
-          <p:cNvSpPr txBox="1"/>
-          <p:nvPr/>
-        </p:nvSpPr>
-        <p:spPr>
-          <a:xfrm>
-            <a:off x="8549640" y="3246120"/>
-            <a:ext cx="3108960" cy="320040"/>
-          </a:xfrm>
-          <a:prstGeom prst="rect">
-            <a:avLst/>
-          </a:prstGeom>
-          <a:noFill/>
-        </p:spPr>
-        <p:txBody>
-          <a:bodyPr wrap="square" lIns="0" rIns="0" tIns="0" bIns="0">
-            <a:spAutoFit/>
-          </a:bodyPr>
-          <a:lstStyle/>
-          <a:p>
-            <a:pPr algn="l"/>
-            <a:r>
-              <a:rPr sz="1400" b="1" i="0">
-                <a:solidFill>
-                  <a:srgbClr val="1F3A5F"/>
-                </a:solidFill>
-                <a:latin typeface="Arial"/>
-              </a:rPr>
-              <a:t>So a fair pipeline must</a:t>
-            </a:r>
-          </a:p>
-        </p:txBody>
-      </p:sp>
-      <p:sp>
-        <p:nvSpPr>
-          <p:cNvPr id="18" name="TextBox 17"/>
-          <p:cNvSpPr txBox="1"/>
-          <p:nvPr/>
-        </p:nvSpPr>
-        <p:spPr>
-          <a:xfrm>
-            <a:off x="8549640" y="3639312"/>
-            <a:ext cx="3108960" cy="365760"/>
-          </a:xfrm>
-          <a:prstGeom prst="rect">
-            <a:avLst/>
-          </a:prstGeom>
-          <a:noFill/>
-        </p:spPr>
-        <p:txBody>
-          <a:bodyPr wrap="square" lIns="0" rIns="0" tIns="0" bIns="0">
-            <a:spAutoFit/>
-          </a:bodyPr>
-          <a:lstStyle/>
-          <a:p>
-            <a:pPr algn="l"/>
-            <a:r>
-              <a:rPr sz="1400" b="0" i="0">
-                <a:solidFill>
-                  <a:srgbClr val="1C2833"/>
-                </a:solidFill>
-                <a:latin typeface="Arial"/>
-              </a:rPr>
-              <a:t>give both classes one size (256 px)</a:t>
-            </a:r>
-          </a:p>
-        </p:txBody>
-      </p:sp>
-      <p:sp>
-        <p:nvSpPr>
-          <p:cNvPr id="19" name="TextBox 18"/>
-          <p:cNvSpPr txBox="1"/>
-          <p:nvPr/>
-        </p:nvSpPr>
-        <p:spPr>
-          <a:xfrm>
-            <a:off x="8549640" y="4050791"/>
-            <a:ext cx="3108960" cy="365760"/>
-          </a:xfrm>
-          <a:prstGeom prst="rect">
-            <a:avLst/>
-          </a:prstGeom>
-          <a:noFill/>
-        </p:spPr>
-        <p:txBody>
-          <a:bodyPr wrap="square" lIns="0" rIns="0" tIns="0" bIns="0">
-            <a:spAutoFit/>
-          </a:bodyPr>
-          <a:lstStyle/>
-          <a:p>
-            <a:pPr algn="l"/>
-            <a:r>
-              <a:rPr sz="1400" b="0" i="0">
-                <a:solidFill>
-                  <a:srgbClr val="1C2833"/>
-                </a:solidFill>
-                <a:latin typeface="Arial"/>
-              </a:rPr>
-              <a:t>and one format (PNG)</a:t>
-            </a:r>
-          </a:p>
-        </p:txBody>
-      </p:sp>
-      <p:sp>
-        <p:nvSpPr>
-          <p:cNvPr id="20" name="TextBox 19"/>
-          <p:cNvSpPr txBox="1"/>
-          <p:nvPr/>
-        </p:nvSpPr>
-        <p:spPr>
-          <a:xfrm>
-            <a:off x="8549640" y="4462272"/>
-            <a:ext cx="3108960" cy="365760"/>
-          </a:xfrm>
-          <a:prstGeom prst="rect">
-            <a:avLst/>
-          </a:prstGeom>
-          <a:noFill/>
-        </p:spPr>
-        <p:txBody>
-          <a:bodyPr wrap="square" lIns="0" rIns="0" tIns="0" bIns="0">
-            <a:spAutoFit/>
-          </a:bodyPr>
-          <a:lstStyle/>
-          <a:p>
-            <a:pPr algn="l"/>
-            <a:r>
-              <a:rPr sz="1400" b="1" i="0">
-                <a:solidFill>
-                  <a:srgbClr val="B2182B"/>
-                </a:solidFill>
-                <a:latin typeface="Arial"/>
-              </a:rPr>
-              <a:t>→ but each class is resized by a different factor</a:t>
-            </a:r>
-          </a:p>
-        </p:txBody>
-      </p:sp>
-      <p:sp>
-        <p:nvSpPr>
-          <p:cNvPr id="21" name="TextBox 20"/>
           <p:cNvSpPr txBox="1"/>
           <p:nvPr/>
         </p:nvSpPr>
@@ -9131,14 +8390,14 @@
                 </a:solidFill>
                 <a:latin typeface="Arial"/>
               </a:rPr>
-              <a:t>Same score, different story - spatial-frequency features for AI-generated image detection</a:t>
-            </a:r>
-          </a:p>
-        </p:txBody>
-      </p:sp>
-      <p:sp>
-        <p:nvSpPr>
-          <p:cNvPr id="22" name="TextBox 21"/>
+              <a:t>CSE 4883 Digital Image Processing  ·  Same score, different story</a:t>
+            </a:r>
+          </a:p>
+        </p:txBody>
+      </p:sp>
+      <p:sp>
+        <p:nvSpPr>
+          <p:cNvPr id="16" name="TextBox 15"/>
           <p:cNvSpPr txBox="1"/>
           <p:nvPr/>
         </p:nvSpPr>
@@ -9245,20 +8504,6 @@
             <a:noFill/>
           </a:ln>
         </p:spPr>
-        <p:style>
-          <a:lnRef idx="1">
-            <a:schemeClr val="accent1"/>
-          </a:lnRef>
-          <a:fillRef idx="3">
-            <a:schemeClr val="accent1"/>
-          </a:fillRef>
-          <a:effectRef idx="2">
-            <a:schemeClr val="accent1"/>
-          </a:effectRef>
-          <a:fontRef idx="minor">
-            <a:schemeClr val="lt1"/>
-          </a:fontRef>
-        </p:style>
         <p:txBody>
           <a:bodyPr rtlCol="0" anchor="ctr"/>
           <a:lstStyle/>
@@ -9293,7 +8538,7 @@
             <a:r>
               <a:rPr sz="1050" b="0" i="0">
                 <a:solidFill>
-                  <a:srgbClr val="A9B4C0"/>
+                  <a:srgbClr val="5D6D7E"/>
                 </a:solidFill>
                 <a:latin typeface="Arial"/>
               </a:rPr>
@@ -9328,7 +8573,7 @@
             <a:r>
               <a:rPr sz="1050" b="0" i="0">
                 <a:solidFill>
-                  <a:srgbClr val="A9B4C0"/>
+                  <a:srgbClr val="5D6D7E"/>
                 </a:solidFill>
                 <a:latin typeface="Arial"/>
               </a:rPr>
@@ -9363,7 +8608,7 @@
             <a:r>
               <a:rPr sz="1050" b="0" i="0">
                 <a:solidFill>
-                  <a:srgbClr val="A9B4C0"/>
+                  <a:srgbClr val="5D6D7E"/>
                 </a:solidFill>
                 <a:latin typeface="Arial"/>
               </a:rPr>
@@ -9398,7 +8643,7 @@
             <a:r>
               <a:rPr sz="1050" b="0" i="0">
                 <a:solidFill>
-                  <a:srgbClr val="A9B4C0"/>
+                  <a:srgbClr val="5D6D7E"/>
                 </a:solidFill>
                 <a:latin typeface="Arial"/>
               </a:rPr>
@@ -9433,7 +8678,7 @@
             <a:r>
               <a:rPr sz="1050" b="0" i="0">
                 <a:solidFill>
-                  <a:srgbClr val="A9B4C0"/>
+                  <a:srgbClr val="5D6D7E"/>
                 </a:solidFill>
                 <a:latin typeface="Arial"/>
               </a:rPr>
@@ -9468,7 +8713,7 @@
             <a:r>
               <a:rPr sz="1050" b="0" i="0">
                 <a:solidFill>
-                  <a:srgbClr val="A9B4C0"/>
+                  <a:srgbClr val="5D6D7E"/>
                 </a:solidFill>
                 <a:latin typeface="Arial"/>
               </a:rPr>
@@ -9498,20 +8743,6 @@
             <a:noFill/>
           </a:ln>
         </p:spPr>
-        <p:style>
-          <a:lnRef idx="1">
-            <a:schemeClr val="accent1"/>
-          </a:lnRef>
-          <a:fillRef idx="3">
-            <a:schemeClr val="accent1"/>
-          </a:fillRef>
-          <a:effectRef idx="2">
-            <a:schemeClr val="accent1"/>
-          </a:effectRef>
-          <a:fontRef idx="minor">
-            <a:schemeClr val="lt1"/>
-          </a:fontRef>
-        </p:style>
         <p:txBody>
           <a:bodyPr rtlCol="0" anchor="ctr"/>
           <a:lstStyle/>
@@ -9529,7 +8760,7 @@
         <p:spPr>
           <a:xfrm>
             <a:off x="548640" y="713232"/>
-            <a:ext cx="9509760" cy="548640"/>
+            <a:ext cx="9418320" cy="548640"/>
           </a:xfrm>
           <a:prstGeom prst="rect">
             <a:avLst/>
@@ -9563,8 +8794,8 @@
         </p:nvSpPr>
         <p:spPr>
           <a:xfrm>
-            <a:off x="9997135" y="822960"/>
-            <a:ext cx="1645920" cy="274320"/>
+            <a:off x="10271455" y="822960"/>
+            <a:ext cx="1371600" cy="274320"/>
           </a:xfrm>
           <a:prstGeom prst="rect">
             <a:avLst/>
@@ -9616,20 +8847,6 @@
           </a:ln>
           <a:effectLst/>
         </p:spPr>
-        <p:style>
-          <a:lnRef idx="1">
-            <a:schemeClr val="accent1"/>
-          </a:lnRef>
-          <a:fillRef idx="3">
-            <a:schemeClr val="accent1"/>
-          </a:fillRef>
-          <a:effectRef idx="2">
-            <a:schemeClr val="accent1"/>
-          </a:effectRef>
-          <a:fontRef idx="minor">
-            <a:schemeClr val="lt1"/>
-          </a:fontRef>
-        </p:style>
         <p:txBody>
           <a:bodyPr rtlCol="0" anchor="ctr" wrap="square" lIns="73152" rIns="73152" tIns="27432" bIns="27432"/>
           <a:lstStyle/>
@@ -9654,7 +8871,7 @@
                 </a:solidFill>
                 <a:latin typeface="Arial"/>
               </a:rPr>
-              <a:t>same processing for both classes - strict split by image group</a:t>
+              <a:t>same processing for both classes  ·  strict split by image group</a:t>
             </a:r>
           </a:p>
         </p:txBody>
@@ -9680,20 +8897,6 @@
             <a:tailEnd type="triangle" w="med" len="med"/>
           </a:ln>
         </p:spPr>
-        <p:style>
-          <a:lnRef idx="2">
-            <a:schemeClr val="accent1"/>
-          </a:lnRef>
-          <a:fillRef idx="0">
-            <a:schemeClr val="accent1"/>
-          </a:fillRef>
-          <a:effectRef idx="1">
-            <a:schemeClr val="accent1"/>
-          </a:effectRef>
-          <a:fontRef idx="minor">
-            <a:schemeClr val="tx1"/>
-          </a:fontRef>
-        </p:style>
       </p:cxnSp>
       <p:sp>
         <p:nvSpPr>
@@ -9721,20 +8924,6 @@
           </a:ln>
           <a:effectLst/>
         </p:spPr>
-        <p:style>
-          <a:lnRef idx="1">
-            <a:schemeClr val="accent1"/>
-          </a:lnRef>
-          <a:fillRef idx="3">
-            <a:schemeClr val="accent1"/>
-          </a:fillRef>
-          <a:effectRef idx="2">
-            <a:schemeClr val="accent1"/>
-          </a:effectRef>
-          <a:fontRef idx="minor">
-            <a:schemeClr val="lt1"/>
-          </a:fontRef>
-        </p:style>
         <p:txBody>
           <a:bodyPr rtlCol="0" anchor="ctr" wrap="square" lIns="73152" rIns="73152" tIns="27432" bIns="27432"/>
           <a:lstStyle/>
@@ -9743,7 +8932,7 @@
             <a:r>
               <a:rPr sz="1700" b="1">
                 <a:solidFill>
-                  <a:srgbClr val="2A78D6"/>
+                  <a:srgbClr val="1F63B8"/>
                 </a:solidFill>
                 <a:latin typeface="Arial"/>
               </a:rPr>
@@ -9785,20 +8974,6 @@
             <a:tailEnd type="triangle" w="med" len="med"/>
           </a:ln>
         </p:spPr>
-        <p:style>
-          <a:lnRef idx="2">
-            <a:schemeClr val="accent1"/>
-          </a:lnRef>
-          <a:fillRef idx="0">
-            <a:schemeClr val="accent1"/>
-          </a:fillRef>
-          <a:effectRef idx="1">
-            <a:schemeClr val="accent1"/>
-          </a:effectRef>
-          <a:fontRef idx="minor">
-            <a:schemeClr val="tx1"/>
-          </a:fontRef>
-        </p:style>
       </p:cxnSp>
       <p:cxnSp>
         <p:nvCxnSpPr>
@@ -9821,20 +8996,6 @@
             <a:tailEnd type="triangle" w="med" len="med"/>
           </a:ln>
         </p:spPr>
-        <p:style>
-          <a:lnRef idx="2">
-            <a:schemeClr val="accent1"/>
-          </a:lnRef>
-          <a:fillRef idx="0">
-            <a:schemeClr val="accent1"/>
-          </a:fillRef>
-          <a:effectRef idx="1">
-            <a:schemeClr val="accent1"/>
-          </a:effectRef>
-          <a:fontRef idx="minor">
-            <a:schemeClr val="tx1"/>
-          </a:fontRef>
-        </p:style>
       </p:cxnSp>
       <p:sp>
         <p:nvSpPr>
@@ -9862,20 +9023,6 @@
           </a:ln>
           <a:effectLst/>
         </p:spPr>
-        <p:style>
-          <a:lnRef idx="1">
-            <a:schemeClr val="accent1"/>
-          </a:lnRef>
-          <a:fillRef idx="3">
-            <a:schemeClr val="accent1"/>
-          </a:fillRef>
-          <a:effectRef idx="2">
-            <a:schemeClr val="accent1"/>
-          </a:effectRef>
-          <a:fontRef idx="minor">
-            <a:schemeClr val="lt1"/>
-          </a:fontRef>
-        </p:style>
         <p:txBody>
           <a:bodyPr rtlCol="0" anchor="ctr" wrap="square" lIns="73152" rIns="73152" tIns="27432" bIns="27432"/>
           <a:lstStyle/>
@@ -9884,7 +9031,7 @@
             <a:r>
               <a:rPr sz="1700" b="1">
                 <a:solidFill>
-                  <a:srgbClr val="EB6834"/>
+                  <a:srgbClr val="B54819"/>
                 </a:solidFill>
                 <a:latin typeface="Arial"/>
               </a:rPr>
@@ -9926,20 +9073,6 @@
             <a:tailEnd type="triangle" w="med" len="med"/>
           </a:ln>
         </p:spPr>
-        <p:style>
-          <a:lnRef idx="2">
-            <a:schemeClr val="accent1"/>
-          </a:lnRef>
-          <a:fillRef idx="0">
-            <a:schemeClr val="accent1"/>
-          </a:fillRef>
-          <a:effectRef idx="1">
-            <a:schemeClr val="accent1"/>
-          </a:effectRef>
-          <a:fontRef idx="minor">
-            <a:schemeClr val="tx1"/>
-          </a:fontRef>
-        </p:style>
       </p:cxnSp>
       <p:cxnSp>
         <p:nvCxnSpPr>
@@ -9962,20 +9095,6 @@
             <a:tailEnd type="triangle" w="med" len="med"/>
           </a:ln>
         </p:spPr>
-        <p:style>
-          <a:lnRef idx="2">
-            <a:schemeClr val="accent1"/>
-          </a:lnRef>
-          <a:fillRef idx="0">
-            <a:schemeClr val="accent1"/>
-          </a:fillRef>
-          <a:effectRef idx="1">
-            <a:schemeClr val="accent1"/>
-          </a:effectRef>
-          <a:fontRef idx="minor">
-            <a:schemeClr val="tx1"/>
-          </a:fontRef>
-        </p:style>
       </p:cxnSp>
       <p:sp>
         <p:nvSpPr>
@@ -10003,20 +9122,6 @@
           </a:ln>
           <a:effectLst/>
         </p:spPr>
-        <p:style>
-          <a:lnRef idx="1">
-            <a:schemeClr val="accent1"/>
-          </a:lnRef>
-          <a:fillRef idx="3">
-            <a:schemeClr val="accent1"/>
-          </a:fillRef>
-          <a:effectRef idx="2">
-            <a:schemeClr val="accent1"/>
-          </a:effectRef>
-          <a:fontRef idx="minor">
-            <a:schemeClr val="lt1"/>
-          </a:fontRef>
-        </p:style>
         <p:txBody>
           <a:bodyPr rtlCol="0" anchor="ctr" wrap="square" lIns="73152" rIns="73152" tIns="27432" bIns="27432"/>
           <a:lstStyle/>
@@ -10025,7 +9130,7 @@
             <a:r>
               <a:rPr sz="1700" b="1">
                 <a:solidFill>
-                  <a:srgbClr val="1BAF7A"/>
+                  <a:srgbClr val="0E7A53"/>
                 </a:solidFill>
                 <a:latin typeface="Arial"/>
               </a:rPr>
@@ -10067,20 +9172,6 @@
             <a:tailEnd type="triangle" w="med" len="med"/>
           </a:ln>
         </p:spPr>
-        <p:style>
-          <a:lnRef idx="2">
-            <a:schemeClr val="accent1"/>
-          </a:lnRef>
-          <a:fillRef idx="0">
-            <a:schemeClr val="accent1"/>
-          </a:fillRef>
-          <a:effectRef idx="1">
-            <a:schemeClr val="accent1"/>
-          </a:effectRef>
-          <a:fontRef idx="minor">
-            <a:schemeClr val="tx1"/>
-          </a:fontRef>
-        </p:style>
       </p:cxnSp>
       <p:sp>
         <p:nvSpPr>
@@ -10108,20 +9199,6 @@
           </a:ln>
           <a:effectLst/>
         </p:spPr>
-        <p:style>
-          <a:lnRef idx="1">
-            <a:schemeClr val="accent1"/>
-          </a:lnRef>
-          <a:fillRef idx="3">
-            <a:schemeClr val="accent1"/>
-          </a:fillRef>
-          <a:effectRef idx="2">
-            <a:schemeClr val="accent1"/>
-          </a:effectRef>
-          <a:fontRef idx="minor">
-            <a:schemeClr val="lt1"/>
-          </a:fontRef>
-        </p:style>
         <p:txBody>
           <a:bodyPr rtlCol="0" anchor="ctr" wrap="square" lIns="73152" rIns="73152" tIns="27432" bIns="27432"/>
           <a:lstStyle/>
@@ -10160,20 +9237,6 @@
             <a:tailEnd type="triangle" w="med" len="med"/>
           </a:ln>
         </p:spPr>
-        <p:style>
-          <a:lnRef idx="2">
-            <a:schemeClr val="accent1"/>
-          </a:lnRef>
-          <a:fillRef idx="0">
-            <a:schemeClr val="accent1"/>
-          </a:fillRef>
-          <a:effectRef idx="1">
-            <a:schemeClr val="accent1"/>
-          </a:effectRef>
-          <a:fontRef idx="minor">
-            <a:schemeClr val="tx1"/>
-          </a:fontRef>
-        </p:style>
       </p:cxnSp>
       <p:cxnSp>
         <p:nvCxnSpPr>
@@ -10196,20 +9259,6 @@
             <a:tailEnd type="triangle" w="med" len="med"/>
           </a:ln>
         </p:spPr>
-        <p:style>
-          <a:lnRef idx="2">
-            <a:schemeClr val="accent1"/>
-          </a:lnRef>
-          <a:fillRef idx="0">
-            <a:schemeClr val="accent1"/>
-          </a:fillRef>
-          <a:effectRef idx="1">
-            <a:schemeClr val="accent1"/>
-          </a:effectRef>
-          <a:fontRef idx="minor">
-            <a:schemeClr val="tx1"/>
-          </a:fontRef>
-        </p:style>
       </p:cxnSp>
       <p:sp>
         <p:nvSpPr>
@@ -10232,25 +9281,11 @@
           </a:solidFill>
           <a:ln w="19050">
             <a:solidFill>
-              <a:srgbClr val="B2182B"/>
+              <a:srgbClr val="1F3A5F"/>
             </a:solidFill>
           </a:ln>
           <a:effectLst/>
         </p:spPr>
-        <p:style>
-          <a:lnRef idx="1">
-            <a:schemeClr val="accent1"/>
-          </a:lnRef>
-          <a:fillRef idx="3">
-            <a:schemeClr val="accent1"/>
-          </a:fillRef>
-          <a:effectRef idx="2">
-            <a:schemeClr val="accent1"/>
-          </a:effectRef>
-          <a:fontRef idx="minor">
-            <a:schemeClr val="lt1"/>
-          </a:fontRef>
-        </p:style>
         <p:txBody>
           <a:bodyPr rtlCol="0" anchor="ctr" wrap="square" lIns="73152" rIns="73152" tIns="27432" bIns="27432"/>
           <a:lstStyle/>
@@ -10259,7 +9294,7 @@
             <a:r>
               <a:rPr sz="1600" b="1">
                 <a:solidFill>
-                  <a:srgbClr val="B2182B"/>
+                  <a:srgbClr val="1F3A5F"/>
                 </a:solidFill>
                 <a:latin typeface="Arial"/>
               </a:rPr>
@@ -10301,25 +9336,11 @@
           </a:solidFill>
           <a:ln w="19050">
             <a:solidFill>
-              <a:srgbClr val="B2182B"/>
+              <a:srgbClr val="1F3A5F"/>
             </a:solidFill>
           </a:ln>
           <a:effectLst/>
         </p:spPr>
-        <p:style>
-          <a:lnRef idx="1">
-            <a:schemeClr val="accent1"/>
-          </a:lnRef>
-          <a:fillRef idx="3">
-            <a:schemeClr val="accent1"/>
-          </a:fillRef>
-          <a:effectRef idx="2">
-            <a:schemeClr val="accent1"/>
-          </a:effectRef>
-          <a:fontRef idx="minor">
-            <a:schemeClr val="lt1"/>
-          </a:fontRef>
-        </p:style>
         <p:txBody>
           <a:bodyPr rtlCol="0" anchor="ctr" wrap="square" lIns="73152" rIns="73152" tIns="27432" bIns="27432"/>
           <a:lstStyle/>
@@ -10328,7 +9349,7 @@
             <a:r>
               <a:rPr sz="1600" b="1">
                 <a:solidFill>
-                  <a:srgbClr val="B2182B"/>
+                  <a:srgbClr val="1F3A5F"/>
                 </a:solidFill>
                 <a:latin typeface="Arial"/>
               </a:rPr>
@@ -10379,7 +9400,7 @@
                 </a:solidFill>
                 <a:latin typeface="Arial"/>
               </a:rPr>
-              <a:t>Same score, different story - spatial-frequency features for AI-generated image detection</a:t>
+              <a:t>CSE 4883 Digital Image Processing  ·  Same score, different story</a:t>
             </a:r>
           </a:p>
         </p:txBody>
@@ -10458,20 +9479,6 @@
             <a:noFill/>
           </a:ln>
         </p:spPr>
-        <p:style>
-          <a:lnRef idx="1">
-            <a:schemeClr val="accent1"/>
-          </a:lnRef>
-          <a:fillRef idx="3">
-            <a:schemeClr val="accent1"/>
-          </a:fillRef>
-          <a:effectRef idx="2">
-            <a:schemeClr val="accent1"/>
-          </a:effectRef>
-          <a:fontRef idx="minor">
-            <a:schemeClr val="lt1"/>
-          </a:fontRef>
-        </p:style>
         <p:txBody>
           <a:bodyPr rtlCol="0" anchor="ctr"/>
           <a:lstStyle/>
@@ -10506,7 +9513,7 @@
             <a:r>
               <a:rPr sz="1050" b="0" i="0">
                 <a:solidFill>
-                  <a:srgbClr val="A9B4C0"/>
+                  <a:srgbClr val="5D6D7E"/>
                 </a:solidFill>
                 <a:latin typeface="Arial"/>
               </a:rPr>
@@ -10571,20 +9578,6 @@
             <a:noFill/>
           </a:ln>
         </p:spPr>
-        <p:style>
-          <a:lnRef idx="1">
-            <a:schemeClr val="accent1"/>
-          </a:lnRef>
-          <a:fillRef idx="3">
-            <a:schemeClr val="accent1"/>
-          </a:fillRef>
-          <a:effectRef idx="2">
-            <a:schemeClr val="accent1"/>
-          </a:effectRef>
-          <a:fontRef idx="minor">
-            <a:schemeClr val="lt1"/>
-          </a:fontRef>
-        </p:style>
         <p:txBody>
           <a:bodyPr rtlCol="0" anchor="ctr"/>
           <a:lstStyle/>
@@ -10619,7 +9612,7 @@
             <a:r>
               <a:rPr sz="1050" b="0" i="0">
                 <a:solidFill>
-                  <a:srgbClr val="A9B4C0"/>
+                  <a:srgbClr val="5D6D7E"/>
                 </a:solidFill>
                 <a:latin typeface="Arial"/>
               </a:rPr>
@@ -10654,7 +9647,7 @@
             <a:r>
               <a:rPr sz="1050" b="0" i="0">
                 <a:solidFill>
-                  <a:srgbClr val="A9B4C0"/>
+                  <a:srgbClr val="5D6D7E"/>
                 </a:solidFill>
                 <a:latin typeface="Arial"/>
               </a:rPr>
@@ -10689,7 +9682,7 @@
             <a:r>
               <a:rPr sz="1050" b="0" i="0">
                 <a:solidFill>
-                  <a:srgbClr val="A9B4C0"/>
+                  <a:srgbClr val="5D6D7E"/>
                 </a:solidFill>
                 <a:latin typeface="Arial"/>
               </a:rPr>
@@ -10724,7 +9717,7 @@
             <a:r>
               <a:rPr sz="1050" b="0" i="0">
                 <a:solidFill>
-                  <a:srgbClr val="A9B4C0"/>
+                  <a:srgbClr val="5D6D7E"/>
                 </a:solidFill>
                 <a:latin typeface="Arial"/>
               </a:rPr>
@@ -10759,7 +9752,7 @@
             <a:r>
               <a:rPr sz="1050" b="0" i="0">
                 <a:solidFill>
-                  <a:srgbClr val="A9B4C0"/>
+                  <a:srgbClr val="5D6D7E"/>
                 </a:solidFill>
                 <a:latin typeface="Arial"/>
               </a:rPr>
@@ -10789,20 +9782,6 @@
             <a:noFill/>
           </a:ln>
         </p:spPr>
-        <p:style>
-          <a:lnRef idx="1">
-            <a:schemeClr val="accent1"/>
-          </a:lnRef>
-          <a:fillRef idx="3">
-            <a:schemeClr val="accent1"/>
-          </a:fillRef>
-          <a:effectRef idx="2">
-            <a:schemeClr val="accent1"/>
-          </a:effectRef>
-          <a:fontRef idx="minor">
-            <a:schemeClr val="lt1"/>
-          </a:fontRef>
-        </p:style>
         <p:txBody>
           <a:bodyPr rtlCol="0" anchor="ctr"/>
           <a:lstStyle/>
@@ -10820,7 +9799,7 @@
         <p:spPr>
           <a:xfrm>
             <a:off x="548640" y="713232"/>
-            <a:ext cx="9509760" cy="548640"/>
+            <a:ext cx="9418320" cy="548640"/>
           </a:xfrm>
           <a:prstGeom prst="rect">
             <a:avLst/>
@@ -10854,8 +9833,8 @@
         </p:nvSpPr>
         <p:spPr>
           <a:xfrm>
-            <a:off x="9997135" y="822960"/>
-            <a:ext cx="1645920" cy="274320"/>
+            <a:off x="10271455" y="822960"/>
+            <a:ext cx="1371600" cy="274320"/>
           </a:xfrm>
           <a:prstGeom prst="rect">
             <a:avLst/>
@@ -10883,177 +9862,158 @@
       </p:sp>
       <p:sp>
         <p:nvSpPr>
-          <p:cNvPr id="14" name="Rounded Rectangle 13"/>
+          <p:cNvPr id="14" name="TextBox 13"/>
+          <p:cNvSpPr txBox="1"/>
+          <p:nvPr/>
+        </p:nvSpPr>
+        <p:spPr>
+          <a:xfrm>
+            <a:off x="548640" y="1600200"/>
+            <a:ext cx="4754880" cy="2651760"/>
+          </a:xfrm>
+          <a:prstGeom prst="rect">
+            <a:avLst/>
+          </a:prstGeom>
+          <a:noFill/>
+        </p:spPr>
+        <p:txBody>
+          <a:bodyPr wrap="square" lIns="0" rIns="0" tIns="0" bIns="0">
+            <a:spAutoFit/>
+          </a:bodyPr>
+          <a:lstStyle/>
+          <a:p>
+            <a:pPr algn="l">
+              <a:lnSpc>
+                <a:spcPct val="125000"/>
+              </a:lnSpc>
+            </a:pPr>
+            <a:r>
+              <a:rPr sz="2400" b="0">
+                <a:solidFill>
+                  <a:srgbClr val="1C2833"/>
+                </a:solidFill>
+                <a:latin typeface="Georgia"/>
+              </a:rPr>
+              <a:t>Give every image the same resampling. The pooled AUROC barely moves (</a:t>
+            </a:r>
+            <a:r>
+              <a:rPr sz="2400" b="1">
+                <a:solidFill>
+                  <a:srgbClr val="1F3A5F"/>
+                </a:solidFill>
+                <a:latin typeface="Arial"/>
+              </a:rPr>
+              <a:t>0.796 → 0.802</a:t>
+            </a:r>
+            <a:r>
+              <a:rPr sz="2400" b="0">
+                <a:solidFill>
+                  <a:srgbClr val="1C2833"/>
+                </a:solidFill>
+                <a:latin typeface="Georgia"/>
+              </a:rPr>
+              <a:t>), but per-generator AUROC shifts by </a:t>
+            </a:r>
+            <a:r>
+              <a:rPr sz="2400" b="1">
+                <a:solidFill>
+                  <a:srgbClr val="B2182B"/>
+                </a:solidFill>
+                <a:latin typeface="Arial"/>
+              </a:rPr>
+              <a:t>−0.17 to +0.30</a:t>
+            </a:r>
+            <a:r>
+              <a:rPr sz="2400" b="0">
+                <a:solidFill>
+                  <a:srgbClr val="1C2833"/>
+                </a:solidFill>
+                <a:latin typeface="Georgia"/>
+              </a:rPr>
+              <a:t>.</a:t>
+            </a:r>
+          </a:p>
+        </p:txBody>
+      </p:sp>
+      <p:sp>
+        <p:nvSpPr>
+          <p:cNvPr id="15" name="Rectangle 14"/>
           <p:cNvSpPr/>
           <p:nvPr/>
         </p:nvSpPr>
         <p:spPr>
           <a:xfrm>
-            <a:off x="548640" y="1463040"/>
-            <a:ext cx="4480560" cy="2057400"/>
-          </a:xfrm>
-          <a:prstGeom prst="roundRect">
-            <a:avLst>
-              <a:gd name="adj" fmla="val 12000"/>
-            </a:avLst>
+            <a:off x="548640" y="4343400"/>
+            <a:ext cx="4754880" cy="9525"/>
+          </a:xfrm>
+          <a:prstGeom prst="rect">
+            <a:avLst/>
           </a:prstGeom>
           <a:solidFill>
-            <a:srgbClr val="FFFFFF"/>
+            <a:srgbClr val="D5DBDB"/>
           </a:solidFill>
-          <a:ln w="12700">
-            <a:solidFill>
-              <a:srgbClr val="D5DBDB"/>
-            </a:solidFill>
+          <a:ln>
+            <a:noFill/>
           </a:ln>
-          <a:effectLst/>
-        </p:spPr>
-        <p:style>
-          <a:lnRef idx="1">
-            <a:schemeClr val="accent1"/>
-          </a:lnRef>
-          <a:fillRef idx="3">
-            <a:schemeClr val="accent1"/>
-          </a:fillRef>
-          <a:effectRef idx="2">
-            <a:schemeClr val="accent1"/>
-          </a:effectRef>
-          <a:fontRef idx="minor">
-            <a:schemeClr val="lt1"/>
-          </a:fontRef>
-        </p:style>
-        <p:txBody>
-          <a:bodyPr rtlCol="0" anchor="ctr" wrap="square" lIns="73152" rIns="73152" tIns="27432" bIns="27432"/>
+        </p:spPr>
+        <p:txBody>
+          <a:bodyPr rtlCol="0" anchor="ctr"/>
           <a:lstStyle/>
           <a:p>
             <a:pPr algn="ctr"/>
-            <a:r>
-              <a:rPr sz="4000" b="1">
-                <a:solidFill>
-                  <a:srgbClr val="1F3A5F"/>
-                </a:solidFill>
-                <a:latin typeface="Arial"/>
-              </a:rPr>
-              <a:t>0.796 → 0.802</a:t>
-            </a:r>
-          </a:p>
-          <a:p>
-            <a:pPr algn="ctr"/>
-            <a:r>
-              <a:rPr sz="1300" b="0">
-                <a:solidFill>
-                  <a:srgbClr val="5D6D7E"/>
-                </a:solidFill>
-                <a:latin typeface="Arial"/>
-              </a:rPr>
-              <a:t>pooled AUROC when every image gets</a:t>
-            </a:r>
-          </a:p>
-          <a:p>
-            <a:pPr algn="ctr"/>
-            <a:r>
-              <a:rPr sz="1300" b="0">
-                <a:solidFill>
-                  <a:srgbClr val="5D6D7E"/>
-                </a:solidFill>
-                <a:latin typeface="Arial"/>
-              </a:rPr>
-              <a:t>the same resampling: the score stays</a:t>
-            </a:r>
-          </a:p>
-        </p:txBody>
-      </p:sp>
-      <p:sp>
-        <p:nvSpPr>
-          <p:cNvPr id="15" name="Rounded Rectangle 14"/>
-          <p:cNvSpPr/>
-          <p:nvPr/>
-        </p:nvSpPr>
-        <p:spPr>
-          <a:xfrm>
-            <a:off x="548640" y="3703320"/>
-            <a:ext cx="4480560" cy="2057400"/>
-          </a:xfrm>
-          <a:prstGeom prst="roundRect">
-            <a:avLst>
-              <a:gd name="adj" fmla="val 12000"/>
-            </a:avLst>
-          </a:prstGeom>
-          <a:solidFill>
-            <a:srgbClr val="FFFFFF"/>
-          </a:solidFill>
-          <a:ln w="19050">
-            <a:solidFill>
-              <a:srgbClr val="B2182B"/>
-            </a:solidFill>
-          </a:ln>
-          <a:effectLst/>
-        </p:spPr>
-        <p:style>
-          <a:lnRef idx="1">
-            <a:schemeClr val="accent1"/>
-          </a:lnRef>
-          <a:fillRef idx="3">
-            <a:schemeClr val="accent1"/>
-          </a:fillRef>
-          <a:effectRef idx="2">
-            <a:schemeClr val="accent1"/>
-          </a:effectRef>
-          <a:fontRef idx="minor">
-            <a:schemeClr val="lt1"/>
-          </a:fontRef>
-        </p:style>
-        <p:txBody>
-          <a:bodyPr rtlCol="0" anchor="ctr" wrap="square" lIns="73152" rIns="73152" tIns="27432" bIns="27432"/>
-          <a:lstStyle/>
-          <a:p>
-            <a:pPr algn="ctr"/>
-            <a:r>
-              <a:rPr sz="4000" b="1">
-                <a:solidFill>
-                  <a:srgbClr val="B2182B"/>
-                </a:solidFill>
-                <a:latin typeface="Arial"/>
-              </a:rPr>
-              <a:t>-0.17 to +0.30</a:t>
-            </a:r>
-          </a:p>
-          <a:p>
-            <a:pPr algn="ctr"/>
-            <a:r>
-              <a:rPr sz="1300" b="0">
-                <a:solidFill>
-                  <a:srgbClr val="5D6D7E"/>
-                </a:solidFill>
-                <a:latin typeface="Arial"/>
-              </a:rPr>
-              <a:t>change in per-generator AUROC</a:t>
-            </a:r>
-          </a:p>
-          <a:p>
-            <a:pPr algn="ctr"/>
-            <a:r>
-              <a:rPr sz="1300" b="0">
-                <a:solidFill>
-                  <a:srgbClr val="5D6D7E"/>
-                </a:solidFill>
-                <a:latin typeface="Arial"/>
-              </a:rPr>
-              <a:t>from the same swap: the story changes</a:t>
+          </a:p>
+        </p:txBody>
+      </p:sp>
+      <p:sp>
+        <p:nvSpPr>
+          <p:cNvPr id="16" name="TextBox 15"/>
+          <p:cNvSpPr txBox="1"/>
+          <p:nvPr/>
+        </p:nvSpPr>
+        <p:spPr>
+          <a:xfrm>
+            <a:off x="548640" y="4526280"/>
+            <a:ext cx="4754880" cy="1188720"/>
+          </a:xfrm>
+          <a:prstGeom prst="rect">
+            <a:avLst/>
+          </a:prstGeom>
+          <a:noFill/>
+        </p:spPr>
+        <p:txBody>
+          <a:bodyPr wrap="square" lIns="0" rIns="0" tIns="0" bIns="0">
+            <a:spAutoFit/>
+          </a:bodyPr>
+          <a:lstStyle/>
+          <a:p>
+            <a:pPr algn="l">
+              <a:lnSpc>
+                <a:spcPct val="120000"/>
+              </a:lnSpc>
+            </a:pPr>
+            <a:r>
+              <a:rPr sz="1500" b="0" i="0">
+                <a:solidFill>
+                  <a:srgbClr val="1C2833"/>
+                </a:solidFill>
+                <a:latin typeface="Arial"/>
+              </a:rPr>
+              <a:t>BigGAN images are pixel-identical in both versions, so any change in BigGAN comes from the real photos' processing alone.</a:t>
             </a:r>
           </a:p>
         </p:txBody>
       </p:sp>
       <p:graphicFrame>
         <p:nvGraphicFramePr>
-          <p:cNvPr id="16" name="Table 15"/>
+          <p:cNvPr id="17" name="Table 16"/>
           <p:cNvGraphicFramePr>
             <a:graphicFrameLocks noGrp="1"/>
           </p:cNvGraphicFramePr>
           <p:nvPr/>
         </p:nvGraphicFramePr>
         <p:xfrm>
-          <a:off x="5349240" y="1463040"/>
-          <a:ext cx="6309360" cy="2743200"/>
+          <a:off x="5577840" y="1600200"/>
+          <a:ext cx="6062472" cy="2834640"/>
         </p:xfrm>
         <a:graphic>
           <a:graphicData uri="http://schemas.openxmlformats.org/drawingml/2006/table">
@@ -11062,11 +10022,11 @@
                 <a:tableStyleId>{5C22544A-7EE6-4342-B048-85BDC9FD1C3A}</a:tableStyleId>
               </a:tblPr>
               <a:tblGrid>
-                <a:gridCol w="1645920"/>
-                <a:gridCol w="1783080"/>
-                <a:gridCol w="2880360"/>
+                <a:gridCol w="1463040"/>
+                <a:gridCol w="1737360"/>
+                <a:gridCol w="2862072"/>
               </a:tblGrid>
-              <a:tr h="548640">
+              <a:tr h="566928">
                 <a:tc>
                   <a:txBody>
                     <a:bodyPr wrap="square"/>
@@ -11152,7 +10112,7 @@
                   </a:tcPr>
                 </a:tc>
               </a:tr>
-              <a:tr h="548640">
+              <a:tr h="566928">
                 <a:tc>
                   <a:txBody>
                     <a:bodyPr wrap="square"/>
@@ -11238,7 +10198,7 @@
                   </a:tcPr>
                 </a:tc>
               </a:tr>
-              <a:tr h="548640">
+              <a:tr h="566928">
                 <a:tc>
                   <a:txBody>
                     <a:bodyPr wrap="square"/>
@@ -11324,7 +10284,7 @@
                   </a:tcPr>
                 </a:tc>
               </a:tr>
-              <a:tr h="548640">
+              <a:tr h="566928">
                 <a:tc>
                   <a:txBody>
                     <a:bodyPr wrap="square"/>
@@ -11410,7 +10370,7 @@
                   </a:tcPr>
                 </a:tc>
               </a:tr>
-              <a:tr h="548640">
+              <a:tr h="566928">
                 <a:tc>
                   <a:txBody>
                     <a:bodyPr wrap="square"/>
@@ -11480,17 +10440,7 @@
                           </a:solidFill>
                           <a:latin typeface="Arial"/>
                         </a:rPr>
-                        <a:t>resampling isolated</a:t>
-                      </a:r>
-                      <a:br/>
-                      <a:r>
-                        <a:rPr sz="1250" b="1">
-                          <a:solidFill>
-                            <a:srgbClr val="B2182B"/>
-                          </a:solidFill>
-                          <a:latin typeface="Arial"/>
-                        </a:rPr>
-                        <a:t>+ matched JPEG + unseen generator</a:t>
+                        <a:t>resampling (isolated), matched JPEG, unseen generator</a:t>
                       </a:r>
                     </a:p>
                   </a:txBody>
@@ -11512,14 +10462,14 @@
       </p:graphicFrame>
       <p:sp>
         <p:nvSpPr>
-          <p:cNvPr id="17" name="TextBox 16"/>
-          <p:cNvSpPr txBox="1"/>
-          <p:nvPr/>
-        </p:nvSpPr>
-        <p:spPr>
-          <a:xfrm>
-            <a:off x="5349240" y="4846320"/>
-            <a:ext cx="6309360" cy="914400"/>
+          <p:cNvPr id="18" name="TextBox 17"/>
+          <p:cNvSpPr txBox="1"/>
+          <p:nvPr/>
+        </p:nvSpPr>
+        <p:spPr>
+          <a:xfrm>
+            <a:off x="5577840" y="4846320"/>
+            <a:ext cx="6062472" cy="548640"/>
           </a:xfrm>
           <a:prstGeom prst="rect">
             <a:avLst/>
@@ -11540,34 +10490,18 @@
             <a:r>
               <a:rPr sz="1300" b="0" i="0">
                 <a:solidFill>
-                  <a:srgbClr val="1C2833"/>
-                </a:solidFill>
-                <a:latin typeface="Arial"/>
-              </a:rPr>
-              <a:t>The BigGAN images are pixel-identical in both versions, so any change in BigGAN comes from the real photos' processing alone.</a:t>
-            </a:r>
-          </a:p>
-          <a:p>
-            <a:pPr algn="l">
-              <a:lnSpc>
-                <a:spcPct val="115000"/>
-              </a:lnSpc>
-            </a:pPr>
-            <a:r>
-              <a:rPr sz="1300" b="0" i="0">
-                <a:solidFill>
-                  <a:srgbClr val="1C2833"/>
-                </a:solidFill>
-                <a:latin typeface="Arial"/>
-              </a:rPr>
-              <a:t>We found no report of this feature-level protocol (we do not claim 'first').</a:t>
-            </a:r>
-          </a:p>
-        </p:txBody>
-      </p:sp>
-      <p:sp>
-        <p:nvSpPr>
-          <p:cNvPr id="18" name="TextBox 17"/>
+                  <a:srgbClr val="5D6D7E"/>
+                </a:solidFill>
+                <a:latin typeface="Arial"/>
+              </a:rPr>
+              <a:t>We found no report of this feature-level protocol; we say “not found”, not “first”.</a:t>
+            </a:r>
+          </a:p>
+        </p:txBody>
+      </p:sp>
+      <p:sp>
+        <p:nvSpPr>
+          <p:cNvPr id="19" name="TextBox 18"/>
           <p:cNvSpPr txBox="1"/>
           <p:nvPr/>
         </p:nvSpPr>
@@ -11595,14 +10529,14 @@
                 </a:solidFill>
                 <a:latin typeface="Arial"/>
               </a:rPr>
-              <a:t>Same score, different story - spatial-frequency features for AI-generated image detection</a:t>
-            </a:r>
-          </a:p>
-        </p:txBody>
-      </p:sp>
-      <p:sp>
-        <p:nvSpPr>
-          <p:cNvPr id="19" name="TextBox 18"/>
+              <a:t>CSE 4883 Digital Image Processing  ·  Same score, different story</a:t>
+            </a:r>
+          </a:p>
+        </p:txBody>
+      </p:sp>
+      <p:sp>
+        <p:nvSpPr>
+          <p:cNvPr id="20" name="TextBox 19"/>
           <p:cNvSpPr txBox="1"/>
           <p:nvPr/>
         </p:nvSpPr>
@@ -11679,7 +10613,7 @@
             <a:r>
               <a:rPr sz="1050" b="0" i="0">
                 <a:solidFill>
-                  <a:srgbClr val="A9B4C0"/>
+                  <a:srgbClr val="5D6D7E"/>
                 </a:solidFill>
                 <a:latin typeface="Arial"/>
               </a:rPr>
@@ -11714,7 +10648,7 @@
             <a:r>
               <a:rPr sz="1050" b="0" i="0">
                 <a:solidFill>
-                  <a:srgbClr val="A9B4C0"/>
+                  <a:srgbClr val="5D6D7E"/>
                 </a:solidFill>
                 <a:latin typeface="Arial"/>
               </a:rPr>
@@ -11779,20 +10713,6 @@
             <a:noFill/>
           </a:ln>
         </p:spPr>
-        <p:style>
-          <a:lnRef idx="1">
-            <a:schemeClr val="accent1"/>
-          </a:lnRef>
-          <a:fillRef idx="3">
-            <a:schemeClr val="accent1"/>
-          </a:fillRef>
-          <a:effectRef idx="2">
-            <a:schemeClr val="accent1"/>
-          </a:effectRef>
-          <a:fontRef idx="minor">
-            <a:schemeClr val="lt1"/>
-          </a:fontRef>
-        </p:style>
         <p:txBody>
           <a:bodyPr rtlCol="0" anchor="ctr"/>
           <a:lstStyle/>
@@ -11827,7 +10747,7 @@
             <a:r>
               <a:rPr sz="1050" b="0" i="0">
                 <a:solidFill>
-                  <a:srgbClr val="A9B4C0"/>
+                  <a:srgbClr val="5D6D7E"/>
                 </a:solidFill>
                 <a:latin typeface="Arial"/>
               </a:rPr>
@@ -11862,7 +10782,7 @@
             <a:r>
               <a:rPr sz="1050" b="0" i="0">
                 <a:solidFill>
-                  <a:srgbClr val="A9B4C0"/>
+                  <a:srgbClr val="5D6D7E"/>
                 </a:solidFill>
                 <a:latin typeface="Arial"/>
               </a:rPr>
@@ -11897,7 +10817,7 @@
             <a:r>
               <a:rPr sz="1050" b="0" i="0">
                 <a:solidFill>
-                  <a:srgbClr val="A9B4C0"/>
+                  <a:srgbClr val="5D6D7E"/>
                 </a:solidFill>
                 <a:latin typeface="Arial"/>
               </a:rPr>
@@ -11932,7 +10852,7 @@
             <a:r>
               <a:rPr sz="1050" b="0" i="0">
                 <a:solidFill>
-                  <a:srgbClr val="A9B4C0"/>
+                  <a:srgbClr val="5D6D7E"/>
                 </a:solidFill>
                 <a:latin typeface="Arial"/>
               </a:rPr>
@@ -11962,20 +10882,6 @@
             <a:noFill/>
           </a:ln>
         </p:spPr>
-        <p:style>
-          <a:lnRef idx="1">
-            <a:schemeClr val="accent1"/>
-          </a:lnRef>
-          <a:fillRef idx="3">
-            <a:schemeClr val="accent1"/>
-          </a:fillRef>
-          <a:effectRef idx="2">
-            <a:schemeClr val="accent1"/>
-          </a:effectRef>
-          <a:fontRef idx="minor">
-            <a:schemeClr val="lt1"/>
-          </a:fontRef>
-        </p:style>
         <p:txBody>
           <a:bodyPr rtlCol="0" anchor="ctr"/>
           <a:lstStyle/>
@@ -11993,7 +10899,7 @@
         <p:spPr>
           <a:xfrm>
             <a:off x="548640" y="713232"/>
-            <a:ext cx="9509760" cy="548640"/>
+            <a:ext cx="9418320" cy="548640"/>
           </a:xfrm>
           <a:prstGeom prst="rect">
             <a:avLst/>
@@ -12027,8 +10933,8 @@
         </p:nvSpPr>
         <p:spPr>
           <a:xfrm>
-            <a:off x="9997135" y="822960"/>
-            <a:ext cx="1645920" cy="274320"/>
+            <a:off x="10271455" y="822960"/>
+            <a:ext cx="1371600" cy="274320"/>
           </a:xfrm>
           <a:prstGeom prst="rect">
             <a:avLst/>
@@ -12105,20 +11011,6 @@
           </a:ln>
           <a:effectLst/>
         </p:spPr>
-        <p:style>
-          <a:lnRef idx="1">
-            <a:schemeClr val="accent1"/>
-          </a:lnRef>
-          <a:fillRef idx="3">
-            <a:schemeClr val="accent1"/>
-          </a:fillRef>
-          <a:effectRef idx="2">
-            <a:schemeClr val="accent1"/>
-          </a:effectRef>
-          <a:fontRef idx="minor">
-            <a:schemeClr val="lt1"/>
-          </a:fontRef>
-        </p:style>
         <p:txBody>
           <a:bodyPr rtlCol="0" anchor="ctr"/>
           <a:lstStyle/>
@@ -12200,7 +11092,7 @@
                 </a:solidFill>
                 <a:latin typeface="Arial"/>
               </a:rPr>
-              <a:t>1,500 real  -  500 each: BigGAN, SD v1.4, ADM</a:t>
+              <a:t>1,500 real  ·  500 each: BigGAN, SD v1.4, ADM</a:t>
             </a:r>
           </a:p>
         </p:txBody>
@@ -12227,20 +11119,6 @@
           </a:ln>
           <a:effectLst/>
         </p:spPr>
-        <p:style>
-          <a:lnRef idx="1">
-            <a:schemeClr val="accent1"/>
-          </a:lnRef>
-          <a:fillRef idx="3">
-            <a:schemeClr val="accent1"/>
-          </a:fillRef>
-          <a:effectRef idx="2">
-            <a:schemeClr val="accent1"/>
-          </a:effectRef>
-          <a:fontRef idx="minor">
-            <a:schemeClr val="lt1"/>
-          </a:fontRef>
-        </p:style>
         <p:txBody>
           <a:bodyPr rtlCol="0" anchor="ctr"/>
           <a:lstStyle/>
@@ -12349,20 +11227,6 @@
           </a:ln>
           <a:effectLst/>
         </p:spPr>
-        <p:style>
-          <a:lnRef idx="1">
-            <a:schemeClr val="accent1"/>
-          </a:lnRef>
-          <a:fillRef idx="3">
-            <a:schemeClr val="accent1"/>
-          </a:fillRef>
-          <a:effectRef idx="2">
-            <a:schemeClr val="accent1"/>
-          </a:effectRef>
-          <a:fontRef idx="minor">
-            <a:schemeClr val="lt1"/>
-          </a:fontRef>
-        </p:style>
         <p:txBody>
           <a:bodyPr rtlCol="0" anchor="ctr"/>
           <a:lstStyle/>
@@ -12444,7 +11308,7 @@
                 </a:solidFill>
                 <a:latin typeface="Arial"/>
               </a:rPr>
-              <a:t>resize to 256 x 256, lossless PNG</a:t>
+              <a:t>resize to 256 × 256, lossless PNG</a:t>
             </a:r>
           </a:p>
         </p:txBody>
@@ -12471,20 +11335,6 @@
           </a:ln>
           <a:effectLst/>
         </p:spPr>
-        <p:style>
-          <a:lnRef idx="1">
-            <a:schemeClr val="accent1"/>
-          </a:lnRef>
-          <a:fillRef idx="3">
-            <a:schemeClr val="accent1"/>
-          </a:fillRef>
-          <a:effectRef idx="2">
-            <a:schemeClr val="accent1"/>
-          </a:effectRef>
-          <a:fontRef idx="minor">
-            <a:schemeClr val="lt1"/>
-          </a:fontRef>
-        </p:style>
         <p:txBody>
           <a:bodyPr rtlCol="0" anchor="ctr"/>
           <a:lstStyle/>
@@ -12566,7 +11416,7 @@
                 </a:solidFill>
                 <a:latin typeface="Arial"/>
               </a:rPr>
-              <a:t>C0 clean  -  C1 JPEG 90/75/50  -  C2 unfair control</a:t>
+              <a:t>C0 clean  ·  C1 JPEG 90 / 75 / 50  ·  C2 unfair control</a:t>
             </a:r>
           </a:p>
         </p:txBody>
@@ -12593,20 +11443,6 @@
           </a:ln>
           <a:effectLst/>
         </p:spPr>
-        <p:style>
-          <a:lnRef idx="1">
-            <a:schemeClr val="accent1"/>
-          </a:lnRef>
-          <a:fillRef idx="3">
-            <a:schemeClr val="accent1"/>
-          </a:fillRef>
-          <a:effectRef idx="2">
-            <a:schemeClr val="accent1"/>
-          </a:effectRef>
-          <a:fontRef idx="minor">
-            <a:schemeClr val="lt1"/>
-          </a:fontRef>
-        </p:style>
         <p:txBody>
           <a:bodyPr rtlCol="0" anchor="ctr"/>
           <a:lstStyle/>
@@ -12688,7 +11524,7 @@
                 </a:solidFill>
                 <a:latin typeface="Arial"/>
               </a:rPr>
-              <a:t>split by image group  -  one locked 600-image test set  -  95% CIs</a:t>
+              <a:t>split by image group  ·  one locked 600-image test set  ·  95% CIs</a:t>
             </a:r>
           </a:p>
         </p:txBody>
@@ -12723,7 +11559,7 @@
                 </a:solidFill>
                 <a:latin typeface="Arial"/>
               </a:rPr>
-              <a:t>Same score, different story - spatial-frequency features for AI-generated image detection</a:t>
+              <a:t>CSE 4883 Digital Image Processing  ·  Same score, different story</a:t>
             </a:r>
           </a:p>
         </p:txBody>
@@ -12807,7 +11643,7 @@
             <a:r>
               <a:rPr sz="1050" b="0" i="0">
                 <a:solidFill>
-                  <a:srgbClr val="A9B4C0"/>
+                  <a:srgbClr val="5D6D7E"/>
                 </a:solidFill>
                 <a:latin typeface="Arial"/>
               </a:rPr>
@@ -12842,7 +11678,7 @@
             <a:r>
               <a:rPr sz="1050" b="0" i="0">
                 <a:solidFill>
-                  <a:srgbClr val="A9B4C0"/>
+                  <a:srgbClr val="5D6D7E"/>
                 </a:solidFill>
                 <a:latin typeface="Arial"/>
               </a:rPr>
@@ -12907,20 +11743,6 @@
             <a:noFill/>
           </a:ln>
         </p:spPr>
-        <p:style>
-          <a:lnRef idx="1">
-            <a:schemeClr val="accent1"/>
-          </a:lnRef>
-          <a:fillRef idx="3">
-            <a:schemeClr val="accent1"/>
-          </a:fillRef>
-          <a:effectRef idx="2">
-            <a:schemeClr val="accent1"/>
-          </a:effectRef>
-          <a:fontRef idx="minor">
-            <a:schemeClr val="lt1"/>
-          </a:fontRef>
-        </p:style>
         <p:txBody>
           <a:bodyPr rtlCol="0" anchor="ctr"/>
           <a:lstStyle/>
@@ -12955,7 +11777,7 @@
             <a:r>
               <a:rPr sz="1050" b="0" i="0">
                 <a:solidFill>
-                  <a:srgbClr val="A9B4C0"/>
+                  <a:srgbClr val="5D6D7E"/>
                 </a:solidFill>
                 <a:latin typeface="Arial"/>
               </a:rPr>
@@ -12990,7 +11812,7 @@
             <a:r>
               <a:rPr sz="1050" b="0" i="0">
                 <a:solidFill>
-                  <a:srgbClr val="A9B4C0"/>
+                  <a:srgbClr val="5D6D7E"/>
                 </a:solidFill>
                 <a:latin typeface="Arial"/>
               </a:rPr>
@@ -13025,7 +11847,7 @@
             <a:r>
               <a:rPr sz="1050" b="0" i="0">
                 <a:solidFill>
-                  <a:srgbClr val="A9B4C0"/>
+                  <a:srgbClr val="5D6D7E"/>
                 </a:solidFill>
                 <a:latin typeface="Arial"/>
               </a:rPr>
@@ -13060,7 +11882,7 @@
             <a:r>
               <a:rPr sz="1050" b="0" i="0">
                 <a:solidFill>
-                  <a:srgbClr val="A9B4C0"/>
+                  <a:srgbClr val="5D6D7E"/>
                 </a:solidFill>
                 <a:latin typeface="Arial"/>
               </a:rPr>
@@ -13090,20 +11912,6 @@
             <a:noFill/>
           </a:ln>
         </p:spPr>
-        <p:style>
-          <a:lnRef idx="1">
-            <a:schemeClr val="accent1"/>
-          </a:lnRef>
-          <a:fillRef idx="3">
-            <a:schemeClr val="accent1"/>
-          </a:fillRef>
-          <a:effectRef idx="2">
-            <a:schemeClr val="accent1"/>
-          </a:effectRef>
-          <a:fontRef idx="minor">
-            <a:schemeClr val="lt1"/>
-          </a:fontRef>
-        </p:style>
         <p:txBody>
           <a:bodyPr rtlCol="0" anchor="ctr"/>
           <a:lstStyle/>
@@ -13121,7 +11929,7 @@
         <p:spPr>
           <a:xfrm>
             <a:off x="548640" y="713232"/>
-            <a:ext cx="9509760" cy="548640"/>
+            <a:ext cx="9418320" cy="548640"/>
           </a:xfrm>
           <a:prstGeom prst="rect">
             <a:avLst/>
@@ -13155,8 +11963,8 @@
         </p:nvSpPr>
         <p:spPr>
           <a:xfrm>
-            <a:off x="9997135" y="822960"/>
-            <a:ext cx="1645920" cy="274320"/>
+            <a:off x="10271455" y="822960"/>
+            <a:ext cx="1371600" cy="274320"/>
           </a:xfrm>
           <a:prstGeom prst="rect">
             <a:avLst/>
@@ -13237,20 +12045,6 @@
           </a:ln>
           <a:effectLst/>
         </p:spPr>
-        <p:style>
-          <a:lnRef idx="1">
-            <a:schemeClr val="accent1"/>
-          </a:lnRef>
-          <a:fillRef idx="3">
-            <a:schemeClr val="accent1"/>
-          </a:fillRef>
-          <a:effectRef idx="2">
-            <a:schemeClr val="accent1"/>
-          </a:effectRef>
-          <a:fontRef idx="minor">
-            <a:schemeClr val="lt1"/>
-          </a:fontRef>
-        </p:style>
         <p:txBody>
           <a:bodyPr rtlCol="0" anchor="ctr" wrap="square" lIns="73152" rIns="73152" tIns="27432" bIns="27432"/>
           <a:lstStyle/>
@@ -13301,20 +12095,6 @@
             <a:tailEnd type="triangle" w="med" len="med"/>
           </a:ln>
         </p:spPr>
-        <p:style>
-          <a:lnRef idx="2">
-            <a:schemeClr val="accent1"/>
-          </a:lnRef>
-          <a:fillRef idx="0">
-            <a:schemeClr val="accent1"/>
-          </a:fillRef>
-          <a:effectRef idx="1">
-            <a:schemeClr val="accent1"/>
-          </a:effectRef>
-          <a:fontRef idx="minor">
-            <a:schemeClr val="tx1"/>
-          </a:fontRef>
-        </p:style>
       </p:cxnSp>
       <p:sp>
         <p:nvSpPr>
@@ -13342,20 +12122,6 @@
           </a:ln>
           <a:effectLst/>
         </p:spPr>
-        <p:style>
-          <a:lnRef idx="1">
-            <a:schemeClr val="accent1"/>
-          </a:lnRef>
-          <a:fillRef idx="3">
-            <a:schemeClr val="accent1"/>
-          </a:fillRef>
-          <a:effectRef idx="2">
-            <a:schemeClr val="accent1"/>
-          </a:effectRef>
-          <a:fontRef idx="minor">
-            <a:schemeClr val="lt1"/>
-          </a:fontRef>
-        </p:style>
         <p:txBody>
           <a:bodyPr rtlCol="0" anchor="ctr" wrap="square" lIns="73152" rIns="73152" tIns="27432" bIns="27432"/>
           <a:lstStyle/>
@@ -13406,20 +12172,6 @@
             <a:tailEnd type="triangle" w="med" len="med"/>
           </a:ln>
         </p:spPr>
-        <p:style>
-          <a:lnRef idx="2">
-            <a:schemeClr val="accent1"/>
-          </a:lnRef>
-          <a:fillRef idx="0">
-            <a:schemeClr val="accent1"/>
-          </a:fillRef>
-          <a:effectRef idx="1">
-            <a:schemeClr val="accent1"/>
-          </a:effectRef>
-          <a:fontRef idx="minor">
-            <a:schemeClr val="tx1"/>
-          </a:fontRef>
-        </p:style>
       </p:cxnSp>
       <p:sp>
         <p:nvSpPr>
@@ -13447,20 +12199,6 @@
           </a:ln>
           <a:effectLst/>
         </p:spPr>
-        <p:style>
-          <a:lnRef idx="1">
-            <a:schemeClr val="accent1"/>
-          </a:lnRef>
-          <a:fillRef idx="3">
-            <a:schemeClr val="accent1"/>
-          </a:fillRef>
-          <a:effectRef idx="2">
-            <a:schemeClr val="accent1"/>
-          </a:effectRef>
-          <a:fontRef idx="minor">
-            <a:schemeClr val="lt1"/>
-          </a:fontRef>
-        </p:style>
         <p:txBody>
           <a:bodyPr rtlCol="0" anchor="ctr" wrap="square" lIns="73152" rIns="73152" tIns="27432" bIns="27432"/>
           <a:lstStyle/>
@@ -13511,20 +12249,6 @@
             <a:tailEnd type="triangle" w="med" len="med"/>
           </a:ln>
         </p:spPr>
-        <p:style>
-          <a:lnRef idx="2">
-            <a:schemeClr val="accent1"/>
-          </a:lnRef>
-          <a:fillRef idx="0">
-            <a:schemeClr val="accent1"/>
-          </a:fillRef>
-          <a:effectRef idx="1">
-            <a:schemeClr val="accent1"/>
-          </a:effectRef>
-          <a:fontRef idx="minor">
-            <a:schemeClr val="tx1"/>
-          </a:fontRef>
-        </p:style>
       </p:cxnSp>
       <p:sp>
         <p:nvSpPr>
@@ -13552,20 +12276,6 @@
           </a:ln>
           <a:effectLst/>
         </p:spPr>
-        <p:style>
-          <a:lnRef idx="1">
-            <a:schemeClr val="accent1"/>
-          </a:lnRef>
-          <a:fillRef idx="3">
-            <a:schemeClr val="accent1"/>
-          </a:fillRef>
-          <a:effectRef idx="2">
-            <a:schemeClr val="accent1"/>
-          </a:effectRef>
-          <a:fontRef idx="minor">
-            <a:schemeClr val="lt1"/>
-          </a:fontRef>
-        </p:style>
         <p:txBody>
           <a:bodyPr rtlCol="0" anchor="ctr" wrap="square" lIns="73152" rIns="73152" tIns="27432" bIns="27432"/>
           <a:lstStyle/>
@@ -13616,20 +12326,6 @@
             <a:tailEnd type="triangle" w="med" len="med"/>
           </a:ln>
         </p:spPr>
-        <p:style>
-          <a:lnRef idx="2">
-            <a:schemeClr val="accent1"/>
-          </a:lnRef>
-          <a:fillRef idx="0">
-            <a:schemeClr val="accent1"/>
-          </a:fillRef>
-          <a:effectRef idx="1">
-            <a:schemeClr val="accent1"/>
-          </a:effectRef>
-          <a:fontRef idx="minor">
-            <a:schemeClr val="tx1"/>
-          </a:fontRef>
-        </p:style>
       </p:cxnSp>
       <p:sp>
         <p:nvSpPr>
@@ -13657,20 +12353,6 @@
           </a:ln>
           <a:effectLst/>
         </p:spPr>
-        <p:style>
-          <a:lnRef idx="1">
-            <a:schemeClr val="accent1"/>
-          </a:lnRef>
-          <a:fillRef idx="3">
-            <a:schemeClr val="accent1"/>
-          </a:fillRef>
-          <a:effectRef idx="2">
-            <a:schemeClr val="accent1"/>
-          </a:effectRef>
-          <a:fontRef idx="minor">
-            <a:schemeClr val="lt1"/>
-          </a:fontRef>
-        </p:style>
         <p:txBody>
           <a:bodyPr rtlCol="0" anchor="ctr" wrap="square" lIns="73152" rIns="73152" tIns="27432" bIns="27432"/>
           <a:lstStyle/>
@@ -13730,7 +12412,7 @@
                 </a:solidFill>
                 <a:latin typeface="Arial"/>
               </a:rPr>
-              <a:t>Same score, different story - spatial-frequency features for AI-generated image detection</a:t>
+              <a:t>CSE 4883 Digital Image Processing  ·  Same score, different story</a:t>
             </a:r>
           </a:p>
         </p:txBody>
@@ -13814,7 +12496,7 @@
             <a:r>
               <a:rPr sz="1050" b="0" i="0">
                 <a:solidFill>
-                  <a:srgbClr val="A9B4C0"/>
+                  <a:srgbClr val="5D6D7E"/>
                 </a:solidFill>
                 <a:latin typeface="Arial"/>
               </a:rPr>
@@ -13849,7 +12531,7 @@
             <a:r>
               <a:rPr sz="1050" b="0" i="0">
                 <a:solidFill>
-                  <a:srgbClr val="A9B4C0"/>
+                  <a:srgbClr val="5D6D7E"/>
                 </a:solidFill>
                 <a:latin typeface="Arial"/>
               </a:rPr>
@@ -13884,7 +12566,7 @@
             <a:r>
               <a:rPr sz="1050" b="0" i="0">
                 <a:solidFill>
-                  <a:srgbClr val="A9B4C0"/>
+                  <a:srgbClr val="5D6D7E"/>
                 </a:solidFill>
                 <a:latin typeface="Arial"/>
               </a:rPr>
@@ -13949,20 +12631,6 @@
             <a:noFill/>
           </a:ln>
         </p:spPr>
-        <p:style>
-          <a:lnRef idx="1">
-            <a:schemeClr val="accent1"/>
-          </a:lnRef>
-          <a:fillRef idx="3">
-            <a:schemeClr val="accent1"/>
-          </a:fillRef>
-          <a:effectRef idx="2">
-            <a:schemeClr val="accent1"/>
-          </a:effectRef>
-          <a:fontRef idx="minor">
-            <a:schemeClr val="lt1"/>
-          </a:fontRef>
-        </p:style>
         <p:txBody>
           <a:bodyPr rtlCol="0" anchor="ctr"/>
           <a:lstStyle/>
@@ -13997,7 +12665,7 @@
             <a:r>
               <a:rPr sz="1050" b="0" i="0">
                 <a:solidFill>
-                  <a:srgbClr val="A9B4C0"/>
+                  <a:srgbClr val="5D6D7E"/>
                 </a:solidFill>
                 <a:latin typeface="Arial"/>
               </a:rPr>
@@ -14032,7 +12700,7 @@
             <a:r>
               <a:rPr sz="1050" b="0" i="0">
                 <a:solidFill>
-                  <a:srgbClr val="A9B4C0"/>
+                  <a:srgbClr val="5D6D7E"/>
                 </a:solidFill>
                 <a:latin typeface="Arial"/>
               </a:rPr>
@@ -14067,7 +12735,7 @@
             <a:r>
               <a:rPr sz="1050" b="0" i="0">
                 <a:solidFill>
-                  <a:srgbClr val="A9B4C0"/>
+                  <a:srgbClr val="5D6D7E"/>
                 </a:solidFill>
                 <a:latin typeface="Arial"/>
               </a:rPr>
@@ -14097,20 +12765,6 @@
             <a:noFill/>
           </a:ln>
         </p:spPr>
-        <p:style>
-          <a:lnRef idx="1">
-            <a:schemeClr val="accent1"/>
-          </a:lnRef>
-          <a:fillRef idx="3">
-            <a:schemeClr val="accent1"/>
-          </a:fillRef>
-          <a:effectRef idx="2">
-            <a:schemeClr val="accent1"/>
-          </a:effectRef>
-          <a:fontRef idx="minor">
-            <a:schemeClr val="lt1"/>
-          </a:fontRef>
-        </p:style>
         <p:txBody>
           <a:bodyPr rtlCol="0" anchor="ctr"/>
           <a:lstStyle/>
@@ -14128,7 +12782,7 @@
         <p:spPr>
           <a:xfrm>
             <a:off x="548640" y="713232"/>
-            <a:ext cx="9509760" cy="548640"/>
+            <a:ext cx="9418320" cy="548640"/>
           </a:xfrm>
           <a:prstGeom prst="rect">
             <a:avLst/>
@@ -14162,8 +12816,8 @@
         </p:nvSpPr>
         <p:spPr>
           <a:xfrm>
-            <a:off x="9997135" y="822960"/>
-            <a:ext cx="1645920" cy="274320"/>
+            <a:off x="10271455" y="822960"/>
+            <a:ext cx="1371600" cy="274320"/>
           </a:xfrm>
           <a:prstGeom prst="rect">
             <a:avLst/>
@@ -15096,20 +13750,6 @@
           </a:ln>
           <a:effectLst/>
         </p:spPr>
-        <p:style>
-          <a:lnRef idx="1">
-            <a:schemeClr val="accent1"/>
-          </a:lnRef>
-          <a:fillRef idx="3">
-            <a:schemeClr val="accent1"/>
-          </a:fillRef>
-          <a:effectRef idx="2">
-            <a:schemeClr val="accent1"/>
-          </a:effectRef>
-          <a:fontRef idx="minor">
-            <a:schemeClr val="lt1"/>
-          </a:fontRef>
-        </p:style>
         <p:txBody>
           <a:bodyPr rtlCol="0" anchor="ctr" wrap="square" lIns="73152" rIns="73152" tIns="27432" bIns="27432"/>
           <a:lstStyle/>
@@ -15160,20 +13800,6 @@
             <a:tailEnd type="triangle" w="med" len="med"/>
           </a:ln>
         </p:spPr>
-        <p:style>
-          <a:lnRef idx="2">
-            <a:schemeClr val="accent1"/>
-          </a:lnRef>
-          <a:fillRef idx="0">
-            <a:schemeClr val="accent1"/>
-          </a:fillRef>
-          <a:effectRef idx="1">
-            <a:schemeClr val="accent1"/>
-          </a:effectRef>
-          <a:fontRef idx="minor">
-            <a:schemeClr val="tx1"/>
-          </a:fontRef>
-        </p:style>
       </p:cxnSp>
       <p:sp>
         <p:nvSpPr>
@@ -15201,20 +13827,6 @@
           </a:ln>
           <a:effectLst/>
         </p:spPr>
-        <p:style>
-          <a:lnRef idx="1">
-            <a:schemeClr val="accent1"/>
-          </a:lnRef>
-          <a:fillRef idx="3">
-            <a:schemeClr val="accent1"/>
-          </a:fillRef>
-          <a:effectRef idx="2">
-            <a:schemeClr val="accent1"/>
-          </a:effectRef>
-          <a:fontRef idx="minor">
-            <a:schemeClr val="lt1"/>
-          </a:fontRef>
-        </p:style>
         <p:txBody>
           <a:bodyPr rtlCol="0" anchor="ctr" wrap="square" lIns="73152" rIns="73152" tIns="27432" bIns="27432"/>
           <a:lstStyle/>
@@ -15265,20 +13877,6 @@
             <a:tailEnd type="triangle" w="med" len="med"/>
           </a:ln>
         </p:spPr>
-        <p:style>
-          <a:lnRef idx="2">
-            <a:schemeClr val="accent1"/>
-          </a:lnRef>
-          <a:fillRef idx="0">
-            <a:schemeClr val="accent1"/>
-          </a:fillRef>
-          <a:effectRef idx="1">
-            <a:schemeClr val="accent1"/>
-          </a:effectRef>
-          <a:fontRef idx="minor">
-            <a:schemeClr val="tx1"/>
-          </a:fontRef>
-        </p:style>
       </p:cxnSp>
       <p:sp>
         <p:nvSpPr>
@@ -15306,20 +13904,6 @@
           </a:ln>
           <a:effectLst/>
         </p:spPr>
-        <p:style>
-          <a:lnRef idx="1">
-            <a:schemeClr val="accent1"/>
-          </a:lnRef>
-          <a:fillRef idx="3">
-            <a:schemeClr val="accent1"/>
-          </a:fillRef>
-          <a:effectRef idx="2">
-            <a:schemeClr val="accent1"/>
-          </a:effectRef>
-          <a:fontRef idx="minor">
-            <a:schemeClr val="lt1"/>
-          </a:fontRef>
-        </p:style>
         <p:txBody>
           <a:bodyPr rtlCol="0" anchor="ctr" wrap="square" lIns="73152" rIns="73152" tIns="27432" bIns="27432"/>
           <a:lstStyle/>
@@ -15383,7 +13967,7 @@
                 </a:solidFill>
                 <a:latin typeface="Arial"/>
               </a:rPr>
-              <a:t>E1-E5 were fixed in advance.</a:t>
+              <a:t>E1–E5 were fixed in advance.</a:t>
             </a:r>
           </a:p>
           <a:p>
@@ -15450,7 +14034,7 @@
                 </a:solidFill>
                 <a:latin typeface="Arial"/>
               </a:rPr>
-              <a:t>Same score, different story - spatial-frequency features for AI-generated image detection</a:t>
+              <a:t>CSE 4883 Digital Image Processing  ·  Same score, different story</a:t>
             </a:r>
           </a:p>
         </p:txBody>
@@ -15534,7 +14118,7 @@
             <a:r>
               <a:rPr sz="1050" b="0" i="0">
                 <a:solidFill>
-                  <a:srgbClr val="A9B4C0"/>
+                  <a:srgbClr val="5D6D7E"/>
                 </a:solidFill>
                 <a:latin typeface="Arial"/>
               </a:rPr>
@@ -15569,7 +14153,7 @@
             <a:r>
               <a:rPr sz="1050" b="0" i="0">
                 <a:solidFill>
-                  <a:srgbClr val="A9B4C0"/>
+                  <a:srgbClr val="5D6D7E"/>
                 </a:solidFill>
                 <a:latin typeface="Arial"/>
               </a:rPr>
@@ -15604,7 +14188,7 @@
             <a:r>
               <a:rPr sz="1050" b="0" i="0">
                 <a:solidFill>
-                  <a:srgbClr val="A9B4C0"/>
+                  <a:srgbClr val="5D6D7E"/>
                 </a:solidFill>
                 <a:latin typeface="Arial"/>
               </a:rPr>
@@ -15639,7 +14223,7 @@
             <a:r>
               <a:rPr sz="1050" b="0" i="0">
                 <a:solidFill>
-                  <a:srgbClr val="A9B4C0"/>
+                  <a:srgbClr val="5D6D7E"/>
                 </a:solidFill>
                 <a:latin typeface="Arial"/>
               </a:rPr>
@@ -15704,20 +14288,6 @@
             <a:noFill/>
           </a:ln>
         </p:spPr>
-        <p:style>
-          <a:lnRef idx="1">
-            <a:schemeClr val="accent1"/>
-          </a:lnRef>
-          <a:fillRef idx="3">
-            <a:schemeClr val="accent1"/>
-          </a:fillRef>
-          <a:effectRef idx="2">
-            <a:schemeClr val="accent1"/>
-          </a:effectRef>
-          <a:fontRef idx="minor">
-            <a:schemeClr val="lt1"/>
-          </a:fontRef>
-        </p:style>
         <p:txBody>
           <a:bodyPr rtlCol="0" anchor="ctr"/>
           <a:lstStyle/>
@@ -15752,7 +14322,7 @@
             <a:r>
               <a:rPr sz="1050" b="0" i="0">
                 <a:solidFill>
-                  <a:srgbClr val="A9B4C0"/>
+                  <a:srgbClr val="5D6D7E"/>
                 </a:solidFill>
                 <a:latin typeface="Arial"/>
               </a:rPr>
@@ -15787,7 +14357,7 @@
             <a:r>
               <a:rPr sz="1050" b="0" i="0">
                 <a:solidFill>
-                  <a:srgbClr val="A9B4C0"/>
+                  <a:srgbClr val="5D6D7E"/>
                 </a:solidFill>
                 <a:latin typeface="Arial"/>
               </a:rPr>
@@ -15817,20 +14387,6 @@
             <a:noFill/>
           </a:ln>
         </p:spPr>
-        <p:style>
-          <a:lnRef idx="1">
-            <a:schemeClr val="accent1"/>
-          </a:lnRef>
-          <a:fillRef idx="3">
-            <a:schemeClr val="accent1"/>
-          </a:fillRef>
-          <a:effectRef idx="2">
-            <a:schemeClr val="accent1"/>
-          </a:effectRef>
-          <a:fontRef idx="minor">
-            <a:schemeClr val="lt1"/>
-          </a:fontRef>
-        </p:style>
         <p:txBody>
           <a:bodyPr rtlCol="0" anchor="ctr"/>
           <a:lstStyle/>
@@ -15848,7 +14404,7 @@
         <p:spPr>
           <a:xfrm>
             <a:off x="548640" y="713232"/>
-            <a:ext cx="9509760" cy="548640"/>
+            <a:ext cx="9418320" cy="548640"/>
           </a:xfrm>
           <a:prstGeom prst="rect">
             <a:avLst/>
@@ -15869,7 +14425,7 @@
                 </a:solidFill>
                 <a:latin typeface="Georgia"/>
               </a:rPr>
-              <a:t>Results: combined wins pooled - not everywhere</a:t>
+              <a:t>Results: combined wins pooled — not everywhere</a:t>
             </a:r>
           </a:p>
         </p:txBody>
@@ -15882,8 +14438,8 @@
         </p:nvSpPr>
         <p:spPr>
           <a:xfrm>
-            <a:off x="9997135" y="822960"/>
-            <a:ext cx="1645920" cy="274320"/>
+            <a:off x="10271455" y="822960"/>
+            <a:ext cx="1371600" cy="274320"/>
           </a:xfrm>
           <a:prstGeom prst="rect">
             <a:avLst/>
@@ -15984,7 +14540,7 @@
             <a:r>
               <a:rPr sz="1200" b="0" i="0">
                 <a:solidFill>
-                  <a:srgbClr val="8A97A5"/>
+                  <a:srgbClr val="5D6D7E"/>
                 </a:solidFill>
                 <a:latin typeface="Arial"/>
               </a:rPr>
@@ -16037,7 +14593,7 @@
         <p:spPr>
           <a:xfrm>
             <a:off x="7589520" y="1920240"/>
-            <a:ext cx="2743200" cy="320040"/>
+            <a:ext cx="2560320" cy="320040"/>
           </a:xfrm>
           <a:prstGeom prst="rect">
             <a:avLst/>
@@ -16107,7 +14663,7 @@
         <p:spPr>
           <a:xfrm>
             <a:off x="7589520" y="2395728"/>
-            <a:ext cx="2743200" cy="320040"/>
+            <a:ext cx="2560320" cy="320040"/>
           </a:xfrm>
           <a:prstGeom prst="rect">
             <a:avLst/>
@@ -16177,7 +14733,7 @@
         <p:spPr>
           <a:xfrm>
             <a:off x="7589520" y="2871216"/>
-            <a:ext cx="2743200" cy="320040"/>
+            <a:ext cx="2560320" cy="320040"/>
           </a:xfrm>
           <a:prstGeom prst="rect">
             <a:avLst/>
@@ -16198,7 +14754,7 @@
                 </a:solidFill>
                 <a:latin typeface="Arial"/>
               </a:rPr>
-              <a:t>Shuffled labels (x200)</a:t>
+              <a:t>Shuffled labels (×200)</a:t>
             </a:r>
           </a:p>
         </p:txBody>
@@ -16233,7 +14789,7 @@
                 </a:solidFill>
                 <a:latin typeface="Arial"/>
               </a:rPr>
-              <a:t>0.50-0.52</a:t>
+              <a:t>0.50–0.52</a:t>
             </a:r>
           </a:p>
         </p:txBody>
@@ -16247,7 +14803,7 @@
         <p:spPr>
           <a:xfrm>
             <a:off x="7589520" y="3346704"/>
-            <a:ext cx="2743200" cy="320040"/>
+            <a:ext cx="2560320" cy="320040"/>
           </a:xfrm>
           <a:prstGeom prst="rect">
             <a:avLst/>
@@ -16488,7 +15044,7 @@
                           </a:solidFill>
                           <a:latin typeface="Arial"/>
                         </a:rPr>
-                        <a:t>-0.078</a:t>
+                        <a:t>−0.078</a:t>
                       </a:r>
                     </a:p>
                   </a:txBody>
@@ -16538,7 +15094,7 @@
                 </a:solidFill>
                 <a:latin typeface="Arial"/>
               </a:rPr>
-              <a:t>Same score, different story - spatial-frequency features for AI-generated image detection</a:t>
+              <a:t>CSE 4883 Digital Image Processing  ·  Same score, different story</a:t>
             </a:r>
           </a:p>
         </p:txBody>
@@ -16622,7 +15178,7 @@
             <a:r>
               <a:rPr sz="1050" b="0" i="0">
                 <a:solidFill>
-                  <a:srgbClr val="A9B4C0"/>
+                  <a:srgbClr val="5D6D7E"/>
                 </a:solidFill>
                 <a:latin typeface="Arial"/>
               </a:rPr>
@@ -16657,7 +15213,7 @@
             <a:r>
               <a:rPr sz="1050" b="0" i="0">
                 <a:solidFill>
-                  <a:srgbClr val="A9B4C0"/>
+                  <a:srgbClr val="5D6D7E"/>
                 </a:solidFill>
                 <a:latin typeface="Arial"/>
               </a:rPr>
@@ -16692,7 +15248,7 @@
             <a:r>
               <a:rPr sz="1050" b="0" i="0">
                 <a:solidFill>
-                  <a:srgbClr val="A9B4C0"/>
+                  <a:srgbClr val="5D6D7E"/>
                 </a:solidFill>
                 <a:latin typeface="Arial"/>
               </a:rPr>
@@ -16727,7 +15283,7 @@
             <a:r>
               <a:rPr sz="1050" b="0" i="0">
                 <a:solidFill>
-                  <a:srgbClr val="A9B4C0"/>
+                  <a:srgbClr val="5D6D7E"/>
                 </a:solidFill>
                 <a:latin typeface="Arial"/>
               </a:rPr>
@@ -16792,20 +15348,6 @@
             <a:noFill/>
           </a:ln>
         </p:spPr>
-        <p:style>
-          <a:lnRef idx="1">
-            <a:schemeClr val="accent1"/>
-          </a:lnRef>
-          <a:fillRef idx="3">
-            <a:schemeClr val="accent1"/>
-          </a:fillRef>
-          <a:effectRef idx="2">
-            <a:schemeClr val="accent1"/>
-          </a:effectRef>
-          <a:fontRef idx="minor">
-            <a:schemeClr val="lt1"/>
-          </a:fontRef>
-        </p:style>
         <p:txBody>
           <a:bodyPr rtlCol="0" anchor="ctr"/>
           <a:lstStyle/>
@@ -16840,7 +15382,7 @@
             <a:r>
               <a:rPr sz="1050" b="0" i="0">
                 <a:solidFill>
-                  <a:srgbClr val="A9B4C0"/>
+                  <a:srgbClr val="5D6D7E"/>
                 </a:solidFill>
                 <a:latin typeface="Arial"/>
               </a:rPr>
@@ -16875,7 +15417,7 @@
             <a:r>
               <a:rPr sz="1050" b="0" i="0">
                 <a:solidFill>
-                  <a:srgbClr val="A9B4C0"/>
+                  <a:srgbClr val="5D6D7E"/>
                 </a:solidFill>
                 <a:latin typeface="Arial"/>
               </a:rPr>
@@ -16905,20 +15447,6 @@
             <a:noFill/>
           </a:ln>
         </p:spPr>
-        <p:style>
-          <a:lnRef idx="1">
-            <a:schemeClr val="accent1"/>
-          </a:lnRef>
-          <a:fillRef idx="3">
-            <a:schemeClr val="accent1"/>
-          </a:fillRef>
-          <a:effectRef idx="2">
-            <a:schemeClr val="accent1"/>
-          </a:effectRef>
-          <a:fontRef idx="minor">
-            <a:schemeClr val="lt1"/>
-          </a:fontRef>
-        </p:style>
         <p:txBody>
           <a:bodyPr rtlCol="0" anchor="ctr"/>
           <a:lstStyle/>
@@ -16936,7 +15464,7 @@
         <p:spPr>
           <a:xfrm>
             <a:off x="548640" y="713232"/>
-            <a:ext cx="9509760" cy="548640"/>
+            <a:ext cx="9418320" cy="548640"/>
           </a:xfrm>
           <a:prstGeom prst="rect">
             <a:avLst/>
@@ -16970,8 +15498,8 @@
         </p:nvSpPr>
         <p:spPr>
           <a:xfrm>
-            <a:off x="9997135" y="822960"/>
-            <a:ext cx="1645920" cy="274320"/>
+            <a:off x="10271455" y="822960"/>
+            <a:ext cx="1371600" cy="274320"/>
           </a:xfrm>
           <a:prstGeom prst="rect">
             <a:avLst/>
@@ -17072,7 +15600,7 @@
             <a:r>
               <a:rPr sz="1200" b="0" i="0">
                 <a:solidFill>
-                  <a:srgbClr val="8A97A5"/>
+                  <a:srgbClr val="5D6D7E"/>
                 </a:solidFill>
                 <a:latin typeface="Arial"/>
               </a:rPr>
@@ -17111,7 +15639,7 @@
                 </a:solidFill>
                 <a:latin typeface="Arial"/>
               </a:rPr>
-              <a:t>Same score, different story - spatial-frequency features for AI-generated image detection</a:t>
+              <a:t>CSE 4883 Digital Image Processing  ·  Same score, different story</a:t>
             </a:r>
           </a:p>
         </p:txBody>

--- a/presentation/final_presentation.pptx
+++ b/presentation/final_presentation.pptx
@@ -18,6 +18,7 @@
     <p:sldId id="266" r:id="rId18"/>
     <p:sldId id="267" r:id="rId19"/>
     <p:sldId id="268" r:id="rId20"/>
+    <p:sldId id="269" r:id="rId21"/>
   </p:sldIdLst>
   <p:sldSz cx="12191695" cy="6858000" type="screen4x3"/>
   <p:notesSz cx="6858000" cy="9144000"/>
@@ -514,7 +515,7 @@
           <a:lstStyle/>
           <a:p>
             <a:r>
-              <a:t>MEMBER 1 (10 s). Good morning. We studied what simple, explainable image statistics really measure when they separate real photographs from AI-generated images. Our title is our answer: the same score can tell very different stories.</a:t>
+              <a:t>MEMBER 1 (8 s). Good morning. We studied what simple, explainable image statistics really measure when they separate real photos from AI-generated images. Our answer is in the title.</a:t>
             </a:r>
           </a:p>
         </p:txBody>
@@ -584,7 +585,7 @@
           <a:lstStyle/>
           <a:p>
             <a:r>
-              <a:t>MEMBER 3 (35 s). Now the test. Open circles are the accepted pipeline, filled circles are the same-resampling version, on the same 599 test images. The pooled score does not move: 0.796 to 0.802. But BigGAN falls from 1.000 to 0.828 with frequency features, even though its images did not change at all. Stable Diffusion rises, and on the unseen generator the pixel arm goes from chance to 0.771. On the right, the features that found BigGAN almost perfectly lose most of that power. Resampling explains the near-perfect BigGAN result, though not all of it: the spectral slope still separates.</a:t>
+              <a:t>MEMBER 3 (30 s). This is the mechanism. The plot shows how much energy each class has at each spatial frequency. On the left, the accepted pipeline: BigGAN, in red, drops sharply in the high band, because it is the only class our resize enlarged, and bicubic enlargement cannot create fine detail. So high-frequency features find BigGAN almost perfectly, but they are detecting our resize, not the generator. On the right, every image gets the same resampling, and the three generators collapse onto one curve.</a:t>
             </a:r>
           </a:p>
         </p:txBody>
@@ -654,7 +655,7 @@
           <a:lstStyle/>
           <a:p>
             <a:r>
-              <a:t>MEMBER 3 (30 s). This chart compares all changes side by side. JPEG moves scores within about 0.1, removing a generator spreads them over 0.22, and changing only the resampling spreads them over 0.40. It even changes which feature family looks stronger: frequency beats pixel under the accepted resize, but the difference disappears with matched resampling. One practical warning from JPEG: the ranking barely changes, but a clean pixel model flags more than half of the compressed real photos as fake.</a:t>
+              <a:t>MEMBER 3 (35 s). Now the test. Open circles are the accepted pipeline, filled circles are the same-resampling version, on the same 599 test images. The pooled score does not move: 0.796 to 0.802. But BigGAN falls from 1.000 to 0.828 with frequency features, even though its images did not change at all. Stable Diffusion rises, and on the unseen generator the pixel arm goes from chance to 0.771. On the right, the features that found BigGAN almost perfectly lose most of that power. Resampling explains the near-perfect BigGAN result, though not all of it: the spectral slope still separates.</a:t>
             </a:r>
           </a:p>
         </p:txBody>
@@ -724,7 +725,7 @@
           <a:lstStyle/>
           <a:p>
             <a:r>
-              <a:t>MEMBER 3 (25 s). Our claims are bounded, and each limitation points to a planned extension. The resampling test was added after the results and also narrows the field of view, so next we would fix a native-resolution protocol in advance. We held out only one generator, the content of real and fake images is not matched, and we used one JPEG encoder, one dataset and one split. Each arrow is the step that removes that limitation.</a:t>
+              <a:t>MEMBER 3 (30 s). This chart compares all changes side by side. JPEG moves scores within about 0.1, removing a generator spreads them over 0.22, and changing only the resampling spreads them over 0.40. It even changes which feature family looks stronger: frequency beats pixel under the accepted resize, but the difference disappears with matched resampling. One practical warning from JPEG: the ranking barely changes, but a clean pixel model flags more than half of the compressed real photos as fake.</a:t>
             </a:r>
           </a:p>
         </p:txBody>
@@ -794,6 +795,76 @@
           <a:lstStyle/>
           <a:p>
             <a:r>
+              <a:t>MEMBER 3 (25 s). Our claims are bounded, and each limitation points to a planned extension. The resampling test was added after the results and also narrows the field of view, so next we would fix a native-resolution protocol in advance. We held out only one generator, the content of real and fake images is not matched, and we used one JPEG encoder, one dataset and one split. Each arrow is the step that removes that limitation.</a:t>
+            </a:r>
+          </a:p>
+        </p:txBody>
+      </p:sp>
+      <p:sp>
+        <p:nvSpPr>
+          <p:cNvPr id="4" name="Slide Number Placeholder 3"/>
+          <p:cNvSpPr>
+            <a:spLocks noGrp="1"/>
+          </p:cNvSpPr>
+          <p:nvPr>
+            <p:ph type="sldNum" idx="5" sz="quarter"/>
+          </p:nvPr>
+        </p:nvSpPr>
+        <p:spPr/>
+      </p:sp>
+    </p:spTree>
+  </p:cSld>
+  <p:clrMapOvr>
+    <a:masterClrMapping/>
+  </p:clrMapOvr>
+</p:notes>
+</file>
+
+<file path=ppt/notesSlides/notesSlide14.xml><?xml version="1.0" encoding="utf-8"?>
+<p:notes xmlns:a="http://schemas.openxmlformats.org/drawingml/2006/main" xmlns:p="http://schemas.openxmlformats.org/presentationml/2006/main" xmlns:r="http://schemas.openxmlformats.org/officeDocument/2006/relationships">
+  <p:cSld>
+    <p:spTree>
+      <p:nvGrpSpPr>
+        <p:cNvPr id="1" name=""/>
+        <p:cNvGrpSpPr/>
+        <p:nvPr/>
+      </p:nvGrpSpPr>
+      <p:grpSpPr>
+        <a:xfrm>
+          <a:off x="0" y="0"/>
+          <a:ext cx="0" cy="0"/>
+          <a:chOff x="0" y="0"/>
+          <a:chExt cx="0" cy="0"/>
+        </a:xfrm>
+      </p:grpSpPr>
+      <p:sp>
+        <p:nvSpPr>
+          <p:cNvPr id="2" name="Slide Image Placeholder 1"/>
+          <p:cNvSpPr>
+            <a:spLocks noGrp="1"/>
+          </p:cNvSpPr>
+          <p:nvPr>
+            <p:ph type="sldImg" idx="2"/>
+          </p:nvPr>
+        </p:nvSpPr>
+        <p:spPr/>
+      </p:sp>
+      <p:sp>
+        <p:nvSpPr>
+          <p:cNvPr id="3" name="Notes Placeholder 2"/>
+          <p:cNvSpPr>
+            <a:spLocks noGrp="1"/>
+          </p:cNvSpPr>
+          <p:nvPr>
+            <p:ph type="body" idx="3" sz="quarter"/>
+          </p:nvPr>
+        </p:nvSpPr>
+        <p:spPr/>
+        <p:txBody>
+          <a:bodyPr/>
+          <a:lstStyle/>
+          <a:p>
+            <a:r>
               <a:t>MEMBER 3 (10 s). To conclude: combined features scored best, but a pooled score cannot tell you what simple features detect. Report the resampling history and report per generator. Thank you; we are happy to take questions.</a:t>
             </a:r>
           </a:p>
@@ -864,7 +935,7 @@
           <a:lstStyle/>
           <a:p>
             <a:r>
-              <a:t>MEMBER 1 (35 s). Simple features such as edge strength or spectral band energy are popular for spotting AI images because they are cheap and explainable. We used GenImage, a standard benchmark. Look at how its images arrive: real photos are JPEGs of varying size, and each generator gives PNGs of one fixed size: 128 pixels for BigGAN, 256 for ADM, 512 for Stable Diffusion. A classifier that only reads format and size already separates the classes perfectly. So a fair study must give every image the same size and format. But that means BigGAN is enlarged two times, Stable Diffusion is halved, and real photos are shrunk to about two thirds.</a:t>
+              <a:t>MEMBER 1 (28 s). Simple features such as edge strength or spectral energy are cheap and explainable. But look at how the GenImage benchmark delivers images: real photos are JPEGs of varying size, and each generator gives PNGs of one fixed size. Format and size alone separate the classes perfectly. So a fair study gives every image the same size, which means BigGAN is enlarged two times, Stable Diffusion is halved, and real photos shrink to about two thirds.</a:t>
             </a:r>
           </a:p>
         </p:txBody>
@@ -934,7 +1005,7 @@
           <a:lstStyle/>
           <a:p>
             <a:r>
-              <a:t>MEMBER 1 (30 s). Our question: with the same processing for both classes and a strict split, which simple feature set works best? We compare three sets: seven pixel-pattern features, seven frequency features, and all fourteen combined, each with the same simple classifier. Then we stress them in two realistic ways: JPEG compression applied equally to both classes, and a generator the classifier has never seen. Our goal is to measure what the features detect, not to build a new detector.</a:t>
+              <a:t>MEMBER 1 (22 s). Our question: under fair, identical processing, which simple feature set works best? Pixel features, frequency features, or both, each with the same simple classifier, under two stresses: matched JPEG and an unseen generator. We measure what features detect; we do not build a new detector.</a:t>
             </a:r>
           </a:p>
         </p:txBody>
@@ -1004,7 +1075,7 @@
           <a:lstStyle/>
           <a:p>
             <a:r>
-              <a:t>MEMBER 1 (45 s). This is our novelty. Earlier studies showed that whole detectors exploit format and size differences; one recent audit showed resizing changes the conclusions of training-free detectors. We go one level down, to fourteen named statistics, and we isolate the cause. When we give every image the same resampling history, the pooled score does not move, 0.796 before and 0.802 after. But per generator, results move by minus 0.17 to plus 0.30. Same score, different story. We can pin the cause down because the BigGAN images are pixel-identical in both versions; only the real photos changed. Member 2 will explain how we built the study.</a:t>
+              <a:t>MEMBER 1 (30 s). Our novelty has two parts. First, where we work. Earlier studies, on the left, showed that whole detectors exploit format, size or resizing differences. We go one level down, to fourteen named statistics: we measure each feature on each generator, under matched JPEG and an unseen generator in one fixed protocol, and we isolate the mechanism, because BigGAN's images are pixel-identical in both of our versions.</a:t>
             </a:r>
           </a:p>
         </p:txBody>
@@ -1074,7 +1145,7 @@
           <a:lstStyle/>
           <a:p>
             <a:r>
-              <a:t>MEMBER 2 (30 s). This is the pipeline we presented and had accepted, fixed before we processed any image. We sample 3,000 GenImage images, half real and half generated. Before splitting, we remove duplicates, near-copies and images with unusual colour profiles. Both classes then get exactly the same processing: 256 by 256 pixels, lossless PNG. From that we make three conditions: clean, JPEG at three qualities, and one deliberately unfair control. Every image group stays on one side of the split, and all experiments share one locked test set of 600 images.</a:t>
+              <a:t>MEMBER 1 (30 s). Second, what we found. We give every image the same resampling and compare. The grey bar is the pooled score: it does not move, 0.796 to 0.802. But per generator, BigGAN drops by 0.10, and Stable Diffusion rises, most of all when it is the unseen generator, plus 0.13. Same score, different story. Because BigGAN's images did not change at all, its drop comes only from how the real photos were processed. Member 2 will now show how we built the study.</a:t>
             </a:r>
           </a:p>
         </p:txBody>
@@ -1144,7 +1215,7 @@
           <a:lstStyle/>
           <a:p>
             <a:r>
-              <a:t>MEMBER 2 (30 s). Each image becomes fourteen numbers. The pixel arm, in blue, looks at brightness statistics, edge strength from the Sobel gradient, fine detail from the Laplacian, and a high-pass residual. The frequency arm, in orange, looks at the power spectrum: how energy splits between low, mid and high bands, the top band near the Nyquist limit, the slope of the fall-off, directionality, and single peaks. The bottom row is the classifier: one L2 logistic regression for every arm, tuned on validation data only, and scored by AUROC with confidence intervals.</a:t>
+              <a:t>MEMBER 2 (30 s). This is the pipeline we presented and had accepted, fixed before we processed any image. We sample 3,000 GenImage images, half real and half generated. Before splitting, we remove duplicates, near-copies and images with unusual colour profiles. Both classes then get exactly the same processing: 256 by 256 pixels, lossless PNG. From that we make three conditions: clean, JPEG at three qualities, and one deliberately unfair control. Every image group stays on one side of the split, and all experiments share one locked test set of 600 images.</a:t>
             </a:r>
           </a:p>
         </p:txBody>
@@ -1214,7 +1285,7 @@
           <a:lstStyle/>
           <a:p>
             <a:r>
-              <a:t>MEMBER 2 (30 s). Each experiment answers one question. E1: is there any signal on clean images? E2 is the unfair control where only the reals are compressed. E3 compresses both classes equally; top right you see the same patch at each JPEG quality. E4 removes Stable Diffusion from training to test an unseen generator, and E5 adds JPEG on top; that was our planned headline. R, in red, is a diagnostic we added after the results: every image is cropped at native size and enlarged by the same factor, so all images share one resampling history.</a:t>
+              <a:t>MEMBER 2 (30 s). Each image becomes fourteen numbers. The pixel arm, in blue, looks at brightness statistics, edge strength from the Sobel gradient, fine detail from the Laplacian, and a high-pass residual. The frequency arm, in orange, looks at the power spectrum: how energy splits between low, mid and high bands, the top band near the Nyquist limit, the slope of the fall-off, directionality, and single peaks. The bottom row is the classifier: one L2 logistic regression for every arm, tuned on validation data only, and scored by AUROC with confidence intervals.</a:t>
             </a:r>
           </a:p>
         </p:txBody>
@@ -1284,7 +1355,7 @@
           <a:lstStyle/>
           <a:p>
             <a:r>
-              <a:t>MEMBER 2 (45 s). Here are the results of the accepted pipeline. The combined set has the best pooled score, 0.793, and stays best in every experiment. On the unseen generator under JPEG it reaches 0.629. JPEG compression barely changes the scores, and the unseen generator costs about 0.08. The controls on the right pass: guessing, processed-file history and shuffled labels are at chance, while the original file facts separate perfectly, which is why identical processing matters. But look at the BigGAN column: almost perfect, 0.997 with frequency features, while the two diffusion generators stay between 0.58 and 0.71. Why is BigGAN so easy? Member 3 will show you.</a:t>
+              <a:t>MEMBER 2 (30 s). Each experiment answers one question. E1: is there any signal on clean images? E2 is the unfair control where only the reals are compressed. E3 compresses both classes equally; top right you see the same patch at each JPEG quality. E4 removes Stable Diffusion from training to test an unseen generator, and E5 adds JPEG on top; that was our planned headline. R, in red, is a diagnostic we added after the results: every image is cropped at native size and enlarged by the same factor, so all images share one resampling history.</a:t>
             </a:r>
           </a:p>
         </p:txBody>
@@ -1354,7 +1425,7 @@
           <a:lstStyle/>
           <a:p>
             <a:r>
-              <a:t>MEMBER 3 (30 s). This is the mechanism. The plot shows how much energy each class has at each spatial frequency. On the left, the accepted pipeline: BigGAN, in red, drops sharply in the high band, because it is the only class our resize enlarged, and bicubic enlargement cannot create fine detail. So high-frequency features find BigGAN almost perfectly, but they are detecting our resize, not the generator. On the right, every image gets the same resampling, and the three generators collapse onto one curve.</a:t>
+              <a:t>MEMBER 2 (45 s). Here are the results of the accepted pipeline. The combined set has the best pooled score, 0.793, and stays best in every experiment. On the unseen generator under JPEG it reaches 0.629. JPEG compression barely changes the scores, and the unseen generator costs about 0.08. The controls on the right pass: guessing, processed-file history and shuffled labels are at chance, while the original file facts separate perfectly, which is why identical processing matters. But look at the BigGAN column: almost perfect, 0.997 with frequency features, while the two diffusion generators stay between 0.58 and 0.71. Why is BigGAN so easy? Member 3 will show you.</a:t>
             </a:r>
           </a:p>
         </p:txBody>
@@ -4920,7 +4991,7 @@
                 </a:solidFill>
                 <a:latin typeface="Georgia"/>
               </a:rPr>
-              <a:t>Same pooled score, different story</a:t>
+              <a:t>Why BigGAN is easy: our resize empties its high band</a:t>
             </a:r>
           </a:p>
         </p:txBody>
@@ -4962,7 +5033,7 @@
       </p:sp>
       <p:pic>
         <p:nvPicPr>
-          <p:cNvPr id="13" name="Picture 12" descr="fig_resampling_swap.png"/>
+          <p:cNvPr id="13" name="Picture 12" descr="radial_spectra.png"/>
           <p:cNvPicPr>
             <a:picLocks noChangeAspect="1"/>
           </p:cNvPicPr>
@@ -4976,8 +5047,8 @@
         </p:blipFill>
         <p:spPr>
           <a:xfrm>
-            <a:off x="1092373" y="1325880"/>
-            <a:ext cx="10006949" cy="3977639"/>
+            <a:off x="548640" y="1429902"/>
+            <a:ext cx="11094415" cy="4199364"/>
           </a:xfrm>
           <a:prstGeom prst="rect">
             <a:avLst/>
@@ -4997,29 +5068,49 @@
         </p:nvSpPr>
         <p:spPr>
           <a:xfrm>
-            <a:off x="548640" y="5440680"/>
-            <a:ext cx="3698138" cy="274320"/>
-          </a:xfrm>
-          <a:prstGeom prst="rect">
-            <a:avLst/>
-          </a:prstGeom>
-          <a:noFill/>
-        </p:spPr>
-        <p:txBody>
-          <a:bodyPr wrap="square" lIns="0" rIns="0" tIns="0" bIns="0">
-            <a:spAutoFit/>
-          </a:bodyPr>
-          <a:lstStyle/>
-          <a:p>
-            <a:pPr algn="ctr"/>
-            <a:r>
-              <a:rPr sz="1250" b="0" i="0">
+            <a:off x="548640" y="5738994"/>
+            <a:ext cx="11094415" cy="621792"/>
+          </a:xfrm>
+          <a:prstGeom prst="rect">
+            <a:avLst/>
+          </a:prstGeom>
+          <a:noFill/>
+        </p:spPr>
+        <p:txBody>
+          <a:bodyPr wrap="square" lIns="0" rIns="0" tIns="0" bIns="0">
+            <a:spAutoFit/>
+          </a:bodyPr>
+          <a:lstStyle/>
+          <a:p>
+            <a:pPr algn="ctr">
+              <a:lnSpc>
+                <a:spcPct val="105000"/>
+              </a:lnSpc>
+            </a:pPr>
+            <a:r>
+              <a:rPr sz="1200" b="0" i="0">
                 <a:solidFill>
                   <a:srgbClr val="5D6D7E"/>
                 </a:solidFill>
                 <a:latin typeface="Arial"/>
               </a:rPr>
-              <a:t>Pooled  ·  combined arm</a:t>
+              <a:t>Mean power spectrum per class, all images. Left: BigGAN, the only class enlarged 2x, loses energy above 0.25 cycles/pixel. Right: with the same resampling for all, the three fake curves coincide.</a:t>
+            </a:r>
+          </a:p>
+          <a:p>
+            <a:pPr algn="ctr">
+              <a:lnSpc>
+                <a:spcPct val="105000"/>
+              </a:lnSpc>
+            </a:pPr>
+            <a:r>
+              <a:rPr sz="1200" b="0" i="0">
+                <a:solidFill>
+                  <a:srgbClr val="5D6D7E"/>
+                </a:solidFill>
+                <a:latin typeface="Arial"/>
+              </a:rPr>
+              <a:t>Source: results/diagnostics/radial_spectra.csv</a:t>
             </a:r>
           </a:p>
         </p:txBody>
@@ -5027,181 +5118,6 @@
       <p:sp>
         <p:nvSpPr>
           <p:cNvPr id="15" name="TextBox 14"/>
-          <p:cNvSpPr txBox="1"/>
-          <p:nvPr/>
-        </p:nvSpPr>
-        <p:spPr>
-          <a:xfrm>
-            <a:off x="548640" y="5715000"/>
-            <a:ext cx="3698138" cy="457200"/>
-          </a:xfrm>
-          <a:prstGeom prst="rect">
-            <a:avLst/>
-          </a:prstGeom>
-          <a:noFill/>
-        </p:spPr>
-        <p:txBody>
-          <a:bodyPr wrap="square" lIns="0" rIns="0" tIns="0" bIns="0">
-            <a:spAutoFit/>
-          </a:bodyPr>
-          <a:lstStyle/>
-          <a:p>
-            <a:pPr algn="ctr"/>
-            <a:r>
-              <a:rPr sz="2400" b="1" i="0">
-                <a:solidFill>
-                  <a:srgbClr val="0E7A53"/>
-                </a:solidFill>
-                <a:latin typeface="Arial"/>
-              </a:rPr>
-              <a:t>0.796 → 0.802</a:t>
-            </a:r>
-          </a:p>
-        </p:txBody>
-      </p:sp>
-      <p:sp>
-        <p:nvSpPr>
-          <p:cNvPr id="16" name="TextBox 15"/>
-          <p:cNvSpPr txBox="1"/>
-          <p:nvPr/>
-        </p:nvSpPr>
-        <p:spPr>
-          <a:xfrm>
-            <a:off x="4246778" y="5440680"/>
-            <a:ext cx="3698138" cy="274320"/>
-          </a:xfrm>
-          <a:prstGeom prst="rect">
-            <a:avLst/>
-          </a:prstGeom>
-          <a:noFill/>
-        </p:spPr>
-        <p:txBody>
-          <a:bodyPr wrap="square" lIns="0" rIns="0" tIns="0" bIns="0">
-            <a:spAutoFit/>
-          </a:bodyPr>
-          <a:lstStyle/>
-          <a:p>
-            <a:pPr algn="ctr"/>
-            <a:r>
-              <a:rPr sz="1250" b="0" i="0">
-                <a:solidFill>
-                  <a:srgbClr val="5D6D7E"/>
-                </a:solidFill>
-                <a:latin typeface="Arial"/>
-              </a:rPr>
-              <a:t>BigGAN  ·  frequency arm</a:t>
-            </a:r>
-          </a:p>
-        </p:txBody>
-      </p:sp>
-      <p:sp>
-        <p:nvSpPr>
-          <p:cNvPr id="17" name="TextBox 16"/>
-          <p:cNvSpPr txBox="1"/>
-          <p:nvPr/>
-        </p:nvSpPr>
-        <p:spPr>
-          <a:xfrm>
-            <a:off x="4246778" y="5715000"/>
-            <a:ext cx="3698138" cy="457200"/>
-          </a:xfrm>
-          <a:prstGeom prst="rect">
-            <a:avLst/>
-          </a:prstGeom>
-          <a:noFill/>
-        </p:spPr>
-        <p:txBody>
-          <a:bodyPr wrap="square" lIns="0" rIns="0" tIns="0" bIns="0">
-            <a:spAutoFit/>
-          </a:bodyPr>
-          <a:lstStyle/>
-          <a:p>
-            <a:pPr algn="ctr"/>
-            <a:r>
-              <a:rPr sz="2400" b="1" i="0">
-                <a:solidFill>
-                  <a:srgbClr val="B54819"/>
-                </a:solidFill>
-                <a:latin typeface="Arial"/>
-              </a:rPr>
-              <a:t>1.000 → 0.828</a:t>
-            </a:r>
-          </a:p>
-        </p:txBody>
-      </p:sp>
-      <p:sp>
-        <p:nvSpPr>
-          <p:cNvPr id="18" name="TextBox 17"/>
-          <p:cNvSpPr txBox="1"/>
-          <p:nvPr/>
-        </p:nvSpPr>
-        <p:spPr>
-          <a:xfrm>
-            <a:off x="7944916" y="5440680"/>
-            <a:ext cx="3698138" cy="274320"/>
-          </a:xfrm>
-          <a:prstGeom prst="rect">
-            <a:avLst/>
-          </a:prstGeom>
-          <a:noFill/>
-        </p:spPr>
-        <p:txBody>
-          <a:bodyPr wrap="square" lIns="0" rIns="0" tIns="0" bIns="0">
-            <a:spAutoFit/>
-          </a:bodyPr>
-          <a:lstStyle/>
-          <a:p>
-            <a:pPr algn="ctr"/>
-            <a:r>
-              <a:rPr sz="1250" b="0" i="0">
-                <a:solidFill>
-                  <a:srgbClr val="5D6D7E"/>
-                </a:solidFill>
-                <a:latin typeface="Arial"/>
-              </a:rPr>
-              <a:t>Unseen SD v1.4  ·  pixel arm</a:t>
-            </a:r>
-          </a:p>
-        </p:txBody>
-      </p:sp>
-      <p:sp>
-        <p:nvSpPr>
-          <p:cNvPr id="19" name="TextBox 18"/>
-          <p:cNvSpPr txBox="1"/>
-          <p:nvPr/>
-        </p:nvSpPr>
-        <p:spPr>
-          <a:xfrm>
-            <a:off x="7944916" y="5715000"/>
-            <a:ext cx="3698138" cy="457200"/>
-          </a:xfrm>
-          <a:prstGeom prst="rect">
-            <a:avLst/>
-          </a:prstGeom>
-          <a:noFill/>
-        </p:spPr>
-        <p:txBody>
-          <a:bodyPr wrap="square" lIns="0" rIns="0" tIns="0" bIns="0">
-            <a:spAutoFit/>
-          </a:bodyPr>
-          <a:lstStyle/>
-          <a:p>
-            <a:pPr algn="ctr"/>
-            <a:r>
-              <a:rPr sz="2400" b="1" i="0">
-                <a:solidFill>
-                  <a:srgbClr val="1F63B8"/>
-                </a:solidFill>
-                <a:latin typeface="Arial"/>
-              </a:rPr>
-              <a:t>0.477 → 0.771</a:t>
-            </a:r>
-          </a:p>
-        </p:txBody>
-      </p:sp>
-      <p:sp>
-        <p:nvSpPr>
-          <p:cNvPr id="20" name="TextBox 19"/>
           <p:cNvSpPr txBox="1"/>
           <p:nvPr/>
         </p:nvSpPr>
@@ -5236,7 +5152,7 @@
       </p:sp>
       <p:sp>
         <p:nvSpPr>
-          <p:cNvPr id="21" name="TextBox 20"/>
+          <p:cNvPr id="16" name="TextBox 15"/>
           <p:cNvSpPr txBox="1"/>
           <p:nvPr/>
         </p:nvSpPr>
@@ -5264,7 +5180,7 @@
                 </a:solidFill>
                 <a:latin typeface="Arial"/>
               </a:rPr>
-              <a:t>10 / 13</a:t>
+              <a:t>10 / 14</a:t>
             </a:r>
           </a:p>
         </p:txBody>
@@ -5278,6 +5194,706 @@
 </file>
 
 <file path=ppt/slides/slide11.xml><?xml version="1.0" encoding="utf-8"?>
+<p:sld xmlns:a="http://schemas.openxmlformats.org/drawingml/2006/main" xmlns:p="http://schemas.openxmlformats.org/presentationml/2006/main" xmlns:r="http://schemas.openxmlformats.org/officeDocument/2006/relationships">
+  <p:cSld>
+    <p:spTree>
+      <p:nvGrpSpPr>
+        <p:cNvPr id="1" name=""/>
+        <p:cNvGrpSpPr/>
+        <p:nvPr/>
+      </p:nvGrpSpPr>
+      <p:grpSpPr/>
+      <p:sp>
+        <p:nvSpPr>
+          <p:cNvPr id="2" name="TextBox 1"/>
+          <p:cNvSpPr txBox="1"/>
+          <p:nvPr/>
+        </p:nvSpPr>
+        <p:spPr>
+          <a:xfrm>
+            <a:off x="548640" y="256032"/>
+            <a:ext cx="1584916" cy="274320"/>
+          </a:xfrm>
+          <a:prstGeom prst="rect">
+            <a:avLst/>
+          </a:prstGeom>
+          <a:noFill/>
+        </p:spPr>
+        <p:txBody>
+          <a:bodyPr wrap="square" lIns="0" rIns="0" tIns="0" bIns="0">
+            <a:spAutoFit/>
+          </a:bodyPr>
+          <a:lstStyle/>
+          <a:p>
+            <a:pPr algn="ctr"/>
+            <a:r>
+              <a:rPr sz="1050" b="0" i="0">
+                <a:solidFill>
+                  <a:srgbClr val="5D6D7E"/>
+                </a:solidFill>
+                <a:latin typeface="Arial"/>
+              </a:rPr>
+              <a:t>INTRODUCTION</a:t>
+            </a:r>
+          </a:p>
+        </p:txBody>
+      </p:sp>
+      <p:sp>
+        <p:nvSpPr>
+          <p:cNvPr id="3" name="TextBox 2"/>
+          <p:cNvSpPr txBox="1"/>
+          <p:nvPr/>
+        </p:nvSpPr>
+        <p:spPr>
+          <a:xfrm>
+            <a:off x="2133556" y="256032"/>
+            <a:ext cx="1584916" cy="274320"/>
+          </a:xfrm>
+          <a:prstGeom prst="rect">
+            <a:avLst/>
+          </a:prstGeom>
+          <a:noFill/>
+        </p:spPr>
+        <p:txBody>
+          <a:bodyPr wrap="square" lIns="0" rIns="0" tIns="0" bIns="0">
+            <a:spAutoFit/>
+          </a:bodyPr>
+          <a:lstStyle/>
+          <a:p>
+            <a:pPr algn="ctr"/>
+            <a:r>
+              <a:rPr sz="1050" b="0" i="0">
+                <a:solidFill>
+                  <a:srgbClr val="5D6D7E"/>
+                </a:solidFill>
+                <a:latin typeface="Arial"/>
+              </a:rPr>
+              <a:t>NOVELTY</a:t>
+            </a:r>
+          </a:p>
+        </p:txBody>
+      </p:sp>
+      <p:sp>
+        <p:nvSpPr>
+          <p:cNvPr id="4" name="TextBox 3"/>
+          <p:cNvSpPr txBox="1"/>
+          <p:nvPr/>
+        </p:nvSpPr>
+        <p:spPr>
+          <a:xfrm>
+            <a:off x="3718472" y="256032"/>
+            <a:ext cx="1584916" cy="274320"/>
+          </a:xfrm>
+          <a:prstGeom prst="rect">
+            <a:avLst/>
+          </a:prstGeom>
+          <a:noFill/>
+        </p:spPr>
+        <p:txBody>
+          <a:bodyPr wrap="square" lIns="0" rIns="0" tIns="0" bIns="0">
+            <a:spAutoFit/>
+          </a:bodyPr>
+          <a:lstStyle/>
+          <a:p>
+            <a:pPr algn="ctr"/>
+            <a:r>
+              <a:rPr sz="1050" b="0" i="0">
+                <a:solidFill>
+                  <a:srgbClr val="5D6D7E"/>
+                </a:solidFill>
+                <a:latin typeface="Arial"/>
+              </a:rPr>
+              <a:t>METHODOLOGY</a:t>
+            </a:r>
+          </a:p>
+        </p:txBody>
+      </p:sp>
+      <p:sp>
+        <p:nvSpPr>
+          <p:cNvPr id="5" name="TextBox 4"/>
+          <p:cNvSpPr txBox="1"/>
+          <p:nvPr/>
+        </p:nvSpPr>
+        <p:spPr>
+          <a:xfrm>
+            <a:off x="5303389" y="256032"/>
+            <a:ext cx="1584916" cy="274320"/>
+          </a:xfrm>
+          <a:prstGeom prst="rect">
+            <a:avLst/>
+          </a:prstGeom>
+          <a:noFill/>
+        </p:spPr>
+        <p:txBody>
+          <a:bodyPr wrap="square" lIns="0" rIns="0" tIns="0" bIns="0">
+            <a:spAutoFit/>
+          </a:bodyPr>
+          <a:lstStyle/>
+          <a:p>
+            <a:pPr algn="ctr"/>
+            <a:r>
+              <a:rPr sz="1050" b="0" i="0">
+                <a:solidFill>
+                  <a:srgbClr val="5D6D7E"/>
+                </a:solidFill>
+                <a:latin typeface="Arial"/>
+              </a:rPr>
+              <a:t>EXPERIMENTS</a:t>
+            </a:r>
+          </a:p>
+        </p:txBody>
+      </p:sp>
+      <p:sp>
+        <p:nvSpPr>
+          <p:cNvPr id="6" name="TextBox 5"/>
+          <p:cNvSpPr txBox="1"/>
+          <p:nvPr/>
+        </p:nvSpPr>
+        <p:spPr>
+          <a:xfrm>
+            <a:off x="6888305" y="256032"/>
+            <a:ext cx="1584916" cy="274320"/>
+          </a:xfrm>
+          <a:prstGeom prst="rect">
+            <a:avLst/>
+          </a:prstGeom>
+          <a:noFill/>
+        </p:spPr>
+        <p:txBody>
+          <a:bodyPr wrap="square" lIns="0" rIns="0" tIns="0" bIns="0">
+            <a:spAutoFit/>
+          </a:bodyPr>
+          <a:lstStyle/>
+          <a:p>
+            <a:pPr algn="ctr"/>
+            <a:r>
+              <a:rPr sz="1050" b="1" i="0">
+                <a:solidFill>
+                  <a:srgbClr val="B2182B"/>
+                </a:solidFill>
+                <a:latin typeface="Arial"/>
+              </a:rPr>
+              <a:t>RESULTS</a:t>
+            </a:r>
+          </a:p>
+        </p:txBody>
+      </p:sp>
+      <p:sp>
+        <p:nvSpPr>
+          <p:cNvPr id="7" name="Rectangle 6"/>
+          <p:cNvSpPr/>
+          <p:nvPr/>
+        </p:nvSpPr>
+        <p:spPr>
+          <a:xfrm>
+            <a:off x="7116905" y="548640"/>
+            <a:ext cx="1127716" cy="28575"/>
+          </a:xfrm>
+          <a:prstGeom prst="rect">
+            <a:avLst/>
+          </a:prstGeom>
+          <a:solidFill>
+            <a:srgbClr val="B2182B"/>
+          </a:solidFill>
+          <a:ln>
+            <a:noFill/>
+          </a:ln>
+        </p:spPr>
+        <p:txBody>
+          <a:bodyPr rtlCol="0" anchor="ctr"/>
+          <a:lstStyle/>
+          <a:p>
+            <a:pPr algn="ctr"/>
+          </a:p>
+        </p:txBody>
+      </p:sp>
+      <p:sp>
+        <p:nvSpPr>
+          <p:cNvPr id="8" name="TextBox 7"/>
+          <p:cNvSpPr txBox="1"/>
+          <p:nvPr/>
+        </p:nvSpPr>
+        <p:spPr>
+          <a:xfrm>
+            <a:off x="8473222" y="256032"/>
+            <a:ext cx="1584916" cy="274320"/>
+          </a:xfrm>
+          <a:prstGeom prst="rect">
+            <a:avLst/>
+          </a:prstGeom>
+          <a:noFill/>
+        </p:spPr>
+        <p:txBody>
+          <a:bodyPr wrap="square" lIns="0" rIns="0" tIns="0" bIns="0">
+            <a:spAutoFit/>
+          </a:bodyPr>
+          <a:lstStyle/>
+          <a:p>
+            <a:pPr algn="ctr"/>
+            <a:r>
+              <a:rPr sz="1050" b="0" i="0">
+                <a:solidFill>
+                  <a:srgbClr val="5D6D7E"/>
+                </a:solidFill>
+                <a:latin typeface="Arial"/>
+              </a:rPr>
+              <a:t>LIMITATIONS</a:t>
+            </a:r>
+          </a:p>
+        </p:txBody>
+      </p:sp>
+      <p:sp>
+        <p:nvSpPr>
+          <p:cNvPr id="9" name="TextBox 8"/>
+          <p:cNvSpPr txBox="1"/>
+          <p:nvPr/>
+        </p:nvSpPr>
+        <p:spPr>
+          <a:xfrm>
+            <a:off x="10058138" y="256032"/>
+            <a:ext cx="1584916" cy="274320"/>
+          </a:xfrm>
+          <a:prstGeom prst="rect">
+            <a:avLst/>
+          </a:prstGeom>
+          <a:noFill/>
+        </p:spPr>
+        <p:txBody>
+          <a:bodyPr wrap="square" lIns="0" rIns="0" tIns="0" bIns="0">
+            <a:spAutoFit/>
+          </a:bodyPr>
+          <a:lstStyle/>
+          <a:p>
+            <a:pPr algn="ctr"/>
+            <a:r>
+              <a:rPr sz="1050" b="0" i="0">
+                <a:solidFill>
+                  <a:srgbClr val="5D6D7E"/>
+                </a:solidFill>
+                <a:latin typeface="Arial"/>
+              </a:rPr>
+              <a:t>FUTURE</a:t>
+            </a:r>
+          </a:p>
+        </p:txBody>
+      </p:sp>
+      <p:sp>
+        <p:nvSpPr>
+          <p:cNvPr id="10" name="Rectangle 9"/>
+          <p:cNvSpPr/>
+          <p:nvPr/>
+        </p:nvSpPr>
+        <p:spPr>
+          <a:xfrm>
+            <a:off x="548640" y="566928"/>
+            <a:ext cx="11094415" cy="9525"/>
+          </a:xfrm>
+          <a:prstGeom prst="rect">
+            <a:avLst/>
+          </a:prstGeom>
+          <a:solidFill>
+            <a:srgbClr val="D5DBDB"/>
+          </a:solidFill>
+          <a:ln>
+            <a:noFill/>
+          </a:ln>
+        </p:spPr>
+        <p:txBody>
+          <a:bodyPr rtlCol="0" anchor="ctr"/>
+          <a:lstStyle/>
+          <a:p>
+            <a:pPr algn="ctr"/>
+          </a:p>
+        </p:txBody>
+      </p:sp>
+      <p:sp>
+        <p:nvSpPr>
+          <p:cNvPr id="11" name="TextBox 10"/>
+          <p:cNvSpPr txBox="1"/>
+          <p:nvPr/>
+        </p:nvSpPr>
+        <p:spPr>
+          <a:xfrm>
+            <a:off x="548640" y="713232"/>
+            <a:ext cx="9418320" cy="548640"/>
+          </a:xfrm>
+          <a:prstGeom prst="rect">
+            <a:avLst/>
+          </a:prstGeom>
+          <a:noFill/>
+        </p:spPr>
+        <p:txBody>
+          <a:bodyPr wrap="square" lIns="0" rIns="0" tIns="0" bIns="0">
+            <a:spAutoFit/>
+          </a:bodyPr>
+          <a:lstStyle/>
+          <a:p>
+            <a:pPr algn="l"/>
+            <a:r>
+              <a:rPr sz="2700" b="1" i="0">
+                <a:solidFill>
+                  <a:srgbClr val="1F3A5F"/>
+                </a:solidFill>
+                <a:latin typeface="Georgia"/>
+              </a:rPr>
+              <a:t>Same pooled score, different story</a:t>
+            </a:r>
+          </a:p>
+        </p:txBody>
+      </p:sp>
+      <p:sp>
+        <p:nvSpPr>
+          <p:cNvPr id="12" name="TextBox 11"/>
+          <p:cNvSpPr txBox="1"/>
+          <p:nvPr/>
+        </p:nvSpPr>
+        <p:spPr>
+          <a:xfrm>
+            <a:off x="10271455" y="822960"/>
+            <a:ext cx="1371600" cy="274320"/>
+          </a:xfrm>
+          <a:prstGeom prst="rect">
+            <a:avLst/>
+          </a:prstGeom>
+          <a:noFill/>
+        </p:spPr>
+        <p:txBody>
+          <a:bodyPr wrap="square" lIns="0" rIns="0" tIns="0" bIns="0">
+            <a:spAutoFit/>
+          </a:bodyPr>
+          <a:lstStyle/>
+          <a:p>
+            <a:pPr algn="r"/>
+            <a:r>
+              <a:rPr sz="1100" b="1" i="0">
+                <a:solidFill>
+                  <a:srgbClr val="5D6D7E"/>
+                </a:solidFill>
+                <a:latin typeface="Arial"/>
+              </a:rPr>
+              <a:t>MEMBER 3</a:t>
+            </a:r>
+          </a:p>
+        </p:txBody>
+      </p:sp>
+      <p:pic>
+        <p:nvPicPr>
+          <p:cNvPr id="13" name="Picture 12" descr="fig_resampling_swap.png"/>
+          <p:cNvPicPr>
+            <a:picLocks noChangeAspect="1"/>
+          </p:cNvPicPr>
+          <p:nvPr/>
+        </p:nvPicPr>
+        <p:blipFill>
+          <a:blip r:embed="rId2"/>
+          <a:stretch>
+            <a:fillRect/>
+          </a:stretch>
+        </p:blipFill>
+        <p:spPr>
+          <a:xfrm>
+            <a:off x="1092373" y="1325880"/>
+            <a:ext cx="10006949" cy="3977639"/>
+          </a:xfrm>
+          <a:prstGeom prst="rect">
+            <a:avLst/>
+          </a:prstGeom>
+          <a:ln w="9525">
+            <a:solidFill>
+              <a:srgbClr val="D5DBDB"/>
+            </a:solidFill>
+          </a:ln>
+        </p:spPr>
+      </p:pic>
+      <p:sp>
+        <p:nvSpPr>
+          <p:cNvPr id="14" name="TextBox 13"/>
+          <p:cNvSpPr txBox="1"/>
+          <p:nvPr/>
+        </p:nvSpPr>
+        <p:spPr>
+          <a:xfrm>
+            <a:off x="548640" y="5440680"/>
+            <a:ext cx="3698138" cy="274320"/>
+          </a:xfrm>
+          <a:prstGeom prst="rect">
+            <a:avLst/>
+          </a:prstGeom>
+          <a:noFill/>
+        </p:spPr>
+        <p:txBody>
+          <a:bodyPr wrap="square" lIns="0" rIns="0" tIns="0" bIns="0">
+            <a:spAutoFit/>
+          </a:bodyPr>
+          <a:lstStyle/>
+          <a:p>
+            <a:pPr algn="ctr"/>
+            <a:r>
+              <a:rPr sz="1250" b="0" i="0">
+                <a:solidFill>
+                  <a:srgbClr val="5D6D7E"/>
+                </a:solidFill>
+                <a:latin typeface="Arial"/>
+              </a:rPr>
+              <a:t>Pooled  ·  combined arm</a:t>
+            </a:r>
+          </a:p>
+        </p:txBody>
+      </p:sp>
+      <p:sp>
+        <p:nvSpPr>
+          <p:cNvPr id="15" name="TextBox 14"/>
+          <p:cNvSpPr txBox="1"/>
+          <p:nvPr/>
+        </p:nvSpPr>
+        <p:spPr>
+          <a:xfrm>
+            <a:off x="548640" y="5715000"/>
+            <a:ext cx="3698138" cy="457200"/>
+          </a:xfrm>
+          <a:prstGeom prst="rect">
+            <a:avLst/>
+          </a:prstGeom>
+          <a:noFill/>
+        </p:spPr>
+        <p:txBody>
+          <a:bodyPr wrap="square" lIns="0" rIns="0" tIns="0" bIns="0">
+            <a:spAutoFit/>
+          </a:bodyPr>
+          <a:lstStyle/>
+          <a:p>
+            <a:pPr algn="ctr"/>
+            <a:r>
+              <a:rPr sz="2400" b="1" i="0">
+                <a:solidFill>
+                  <a:srgbClr val="0E7A53"/>
+                </a:solidFill>
+                <a:latin typeface="Arial"/>
+              </a:rPr>
+              <a:t>0.796 → 0.802</a:t>
+            </a:r>
+          </a:p>
+        </p:txBody>
+      </p:sp>
+      <p:sp>
+        <p:nvSpPr>
+          <p:cNvPr id="16" name="TextBox 15"/>
+          <p:cNvSpPr txBox="1"/>
+          <p:nvPr/>
+        </p:nvSpPr>
+        <p:spPr>
+          <a:xfrm>
+            <a:off x="4246778" y="5440680"/>
+            <a:ext cx="3698138" cy="274320"/>
+          </a:xfrm>
+          <a:prstGeom prst="rect">
+            <a:avLst/>
+          </a:prstGeom>
+          <a:noFill/>
+        </p:spPr>
+        <p:txBody>
+          <a:bodyPr wrap="square" lIns="0" rIns="0" tIns="0" bIns="0">
+            <a:spAutoFit/>
+          </a:bodyPr>
+          <a:lstStyle/>
+          <a:p>
+            <a:pPr algn="ctr"/>
+            <a:r>
+              <a:rPr sz="1250" b="0" i="0">
+                <a:solidFill>
+                  <a:srgbClr val="5D6D7E"/>
+                </a:solidFill>
+                <a:latin typeface="Arial"/>
+              </a:rPr>
+              <a:t>BigGAN  ·  frequency arm</a:t>
+            </a:r>
+          </a:p>
+        </p:txBody>
+      </p:sp>
+      <p:sp>
+        <p:nvSpPr>
+          <p:cNvPr id="17" name="TextBox 16"/>
+          <p:cNvSpPr txBox="1"/>
+          <p:nvPr/>
+        </p:nvSpPr>
+        <p:spPr>
+          <a:xfrm>
+            <a:off x="4246778" y="5715000"/>
+            <a:ext cx="3698138" cy="457200"/>
+          </a:xfrm>
+          <a:prstGeom prst="rect">
+            <a:avLst/>
+          </a:prstGeom>
+          <a:noFill/>
+        </p:spPr>
+        <p:txBody>
+          <a:bodyPr wrap="square" lIns="0" rIns="0" tIns="0" bIns="0">
+            <a:spAutoFit/>
+          </a:bodyPr>
+          <a:lstStyle/>
+          <a:p>
+            <a:pPr algn="ctr"/>
+            <a:r>
+              <a:rPr sz="2400" b="1" i="0">
+                <a:solidFill>
+                  <a:srgbClr val="B54819"/>
+                </a:solidFill>
+                <a:latin typeface="Arial"/>
+              </a:rPr>
+              <a:t>1.000 → 0.828</a:t>
+            </a:r>
+          </a:p>
+        </p:txBody>
+      </p:sp>
+      <p:sp>
+        <p:nvSpPr>
+          <p:cNvPr id="18" name="TextBox 17"/>
+          <p:cNvSpPr txBox="1"/>
+          <p:nvPr/>
+        </p:nvSpPr>
+        <p:spPr>
+          <a:xfrm>
+            <a:off x="7944916" y="5440680"/>
+            <a:ext cx="3698138" cy="274320"/>
+          </a:xfrm>
+          <a:prstGeom prst="rect">
+            <a:avLst/>
+          </a:prstGeom>
+          <a:noFill/>
+        </p:spPr>
+        <p:txBody>
+          <a:bodyPr wrap="square" lIns="0" rIns="0" tIns="0" bIns="0">
+            <a:spAutoFit/>
+          </a:bodyPr>
+          <a:lstStyle/>
+          <a:p>
+            <a:pPr algn="ctr"/>
+            <a:r>
+              <a:rPr sz="1250" b="0" i="0">
+                <a:solidFill>
+                  <a:srgbClr val="5D6D7E"/>
+                </a:solidFill>
+                <a:latin typeface="Arial"/>
+              </a:rPr>
+              <a:t>Unseen SD v1.4  ·  pixel arm</a:t>
+            </a:r>
+          </a:p>
+        </p:txBody>
+      </p:sp>
+      <p:sp>
+        <p:nvSpPr>
+          <p:cNvPr id="19" name="TextBox 18"/>
+          <p:cNvSpPr txBox="1"/>
+          <p:nvPr/>
+        </p:nvSpPr>
+        <p:spPr>
+          <a:xfrm>
+            <a:off x="7944916" y="5715000"/>
+            <a:ext cx="3698138" cy="457200"/>
+          </a:xfrm>
+          <a:prstGeom prst="rect">
+            <a:avLst/>
+          </a:prstGeom>
+          <a:noFill/>
+        </p:spPr>
+        <p:txBody>
+          <a:bodyPr wrap="square" lIns="0" rIns="0" tIns="0" bIns="0">
+            <a:spAutoFit/>
+          </a:bodyPr>
+          <a:lstStyle/>
+          <a:p>
+            <a:pPr algn="ctr"/>
+            <a:r>
+              <a:rPr sz="2400" b="1" i="0">
+                <a:solidFill>
+                  <a:srgbClr val="1F63B8"/>
+                </a:solidFill>
+                <a:latin typeface="Arial"/>
+              </a:rPr>
+              <a:t>0.477 → 0.771</a:t>
+            </a:r>
+          </a:p>
+        </p:txBody>
+      </p:sp>
+      <p:sp>
+        <p:nvSpPr>
+          <p:cNvPr id="20" name="TextBox 19"/>
+          <p:cNvSpPr txBox="1"/>
+          <p:nvPr/>
+        </p:nvSpPr>
+        <p:spPr>
+          <a:xfrm>
+            <a:off x="548640" y="6510528"/>
+            <a:ext cx="8229600" cy="237744"/>
+          </a:xfrm>
+          <a:prstGeom prst="rect">
+            <a:avLst/>
+          </a:prstGeom>
+          <a:noFill/>
+        </p:spPr>
+        <p:txBody>
+          <a:bodyPr wrap="square" lIns="0" rIns="0" tIns="0" bIns="0">
+            <a:spAutoFit/>
+          </a:bodyPr>
+          <a:lstStyle/>
+          <a:p>
+            <a:pPr algn="l"/>
+            <a:r>
+              <a:rPr sz="1000" b="0" i="0">
+                <a:solidFill>
+                  <a:srgbClr val="5D6D7E"/>
+                </a:solidFill>
+                <a:latin typeface="Arial"/>
+              </a:rPr>
+              <a:t>CSE 4883 Digital Image Processing  ·  Same score, different story</a:t>
+            </a:r>
+          </a:p>
+        </p:txBody>
+      </p:sp>
+      <p:sp>
+        <p:nvSpPr>
+          <p:cNvPr id="21" name="TextBox 20"/>
+          <p:cNvSpPr txBox="1"/>
+          <p:nvPr/>
+        </p:nvSpPr>
+        <p:spPr>
+          <a:xfrm>
+            <a:off x="10362895" y="6510528"/>
+            <a:ext cx="1280160" cy="237744"/>
+          </a:xfrm>
+          <a:prstGeom prst="rect">
+            <a:avLst/>
+          </a:prstGeom>
+          <a:noFill/>
+        </p:spPr>
+        <p:txBody>
+          <a:bodyPr wrap="square" lIns="0" rIns="0" tIns="0" bIns="0">
+            <a:spAutoFit/>
+          </a:bodyPr>
+          <a:lstStyle/>
+          <a:p>
+            <a:pPr algn="r"/>
+            <a:r>
+              <a:rPr sz="1000" b="0" i="0">
+                <a:solidFill>
+                  <a:srgbClr val="5D6D7E"/>
+                </a:solidFill>
+                <a:latin typeface="Arial"/>
+              </a:rPr>
+              <a:t>11 / 14</a:t>
+            </a:r>
+          </a:p>
+        </p:txBody>
+      </p:sp>
+    </p:spTree>
+  </p:cSld>
+  <p:clrMapOvr>
+    <a:masterClrMapping/>
+  </p:clrMapOvr>
+</p:sld>
+</file>
+
+<file path=ppt/slides/slide12.xml><?xml version="1.0" encoding="utf-8"?>
 <p:sld xmlns:a="http://schemas.openxmlformats.org/drawingml/2006/main" xmlns:p="http://schemas.openxmlformats.org/presentationml/2006/main" xmlns:r="http://schemas.openxmlformats.org/officeDocument/2006/relationships">
   <p:cSld>
     <p:spTree>
@@ -6434,1107 +7050,7 @@
                 </a:solidFill>
                 <a:latin typeface="Arial"/>
               </a:rPr>
-              <a:t>11 / 13</a:t>
-            </a:r>
-          </a:p>
-        </p:txBody>
-      </p:sp>
-    </p:spTree>
-  </p:cSld>
-  <p:clrMapOvr>
-    <a:masterClrMapping/>
-  </p:clrMapOvr>
-</p:sld>
-</file>
-
-<file path=ppt/slides/slide12.xml><?xml version="1.0" encoding="utf-8"?>
-<p:sld xmlns:a="http://schemas.openxmlformats.org/drawingml/2006/main" xmlns:p="http://schemas.openxmlformats.org/presentationml/2006/main" xmlns:r="http://schemas.openxmlformats.org/officeDocument/2006/relationships">
-  <p:cSld>
-    <p:spTree>
-      <p:nvGrpSpPr>
-        <p:cNvPr id="1" name=""/>
-        <p:cNvGrpSpPr/>
-        <p:nvPr/>
-      </p:nvGrpSpPr>
-      <p:grpSpPr/>
-      <p:sp>
-        <p:nvSpPr>
-          <p:cNvPr id="2" name="TextBox 1"/>
-          <p:cNvSpPr txBox="1"/>
-          <p:nvPr/>
-        </p:nvSpPr>
-        <p:spPr>
-          <a:xfrm>
-            <a:off x="548640" y="256032"/>
-            <a:ext cx="1584916" cy="274320"/>
-          </a:xfrm>
-          <a:prstGeom prst="rect">
-            <a:avLst/>
-          </a:prstGeom>
-          <a:noFill/>
-        </p:spPr>
-        <p:txBody>
-          <a:bodyPr wrap="square" lIns="0" rIns="0" tIns="0" bIns="0">
-            <a:spAutoFit/>
-          </a:bodyPr>
-          <a:lstStyle/>
-          <a:p>
-            <a:pPr algn="ctr"/>
-            <a:r>
-              <a:rPr sz="1050" b="0" i="0">
-                <a:solidFill>
-                  <a:srgbClr val="5D6D7E"/>
-                </a:solidFill>
-                <a:latin typeface="Arial"/>
-              </a:rPr>
-              <a:t>INTRODUCTION</a:t>
-            </a:r>
-          </a:p>
-        </p:txBody>
-      </p:sp>
-      <p:sp>
-        <p:nvSpPr>
-          <p:cNvPr id="3" name="TextBox 2"/>
-          <p:cNvSpPr txBox="1"/>
-          <p:nvPr/>
-        </p:nvSpPr>
-        <p:spPr>
-          <a:xfrm>
-            <a:off x="2133556" y="256032"/>
-            <a:ext cx="1584916" cy="274320"/>
-          </a:xfrm>
-          <a:prstGeom prst="rect">
-            <a:avLst/>
-          </a:prstGeom>
-          <a:noFill/>
-        </p:spPr>
-        <p:txBody>
-          <a:bodyPr wrap="square" lIns="0" rIns="0" tIns="0" bIns="0">
-            <a:spAutoFit/>
-          </a:bodyPr>
-          <a:lstStyle/>
-          <a:p>
-            <a:pPr algn="ctr"/>
-            <a:r>
-              <a:rPr sz="1050" b="0" i="0">
-                <a:solidFill>
-                  <a:srgbClr val="5D6D7E"/>
-                </a:solidFill>
-                <a:latin typeface="Arial"/>
-              </a:rPr>
-              <a:t>NOVELTY</a:t>
-            </a:r>
-          </a:p>
-        </p:txBody>
-      </p:sp>
-      <p:sp>
-        <p:nvSpPr>
-          <p:cNvPr id="4" name="TextBox 3"/>
-          <p:cNvSpPr txBox="1"/>
-          <p:nvPr/>
-        </p:nvSpPr>
-        <p:spPr>
-          <a:xfrm>
-            <a:off x="3718472" y="256032"/>
-            <a:ext cx="1584916" cy="274320"/>
-          </a:xfrm>
-          <a:prstGeom prst="rect">
-            <a:avLst/>
-          </a:prstGeom>
-          <a:noFill/>
-        </p:spPr>
-        <p:txBody>
-          <a:bodyPr wrap="square" lIns="0" rIns="0" tIns="0" bIns="0">
-            <a:spAutoFit/>
-          </a:bodyPr>
-          <a:lstStyle/>
-          <a:p>
-            <a:pPr algn="ctr"/>
-            <a:r>
-              <a:rPr sz="1050" b="0" i="0">
-                <a:solidFill>
-                  <a:srgbClr val="5D6D7E"/>
-                </a:solidFill>
-                <a:latin typeface="Arial"/>
-              </a:rPr>
-              <a:t>METHODOLOGY</a:t>
-            </a:r>
-          </a:p>
-        </p:txBody>
-      </p:sp>
-      <p:sp>
-        <p:nvSpPr>
-          <p:cNvPr id="5" name="TextBox 4"/>
-          <p:cNvSpPr txBox="1"/>
-          <p:nvPr/>
-        </p:nvSpPr>
-        <p:spPr>
-          <a:xfrm>
-            <a:off x="5303389" y="256032"/>
-            <a:ext cx="1584916" cy="274320"/>
-          </a:xfrm>
-          <a:prstGeom prst="rect">
-            <a:avLst/>
-          </a:prstGeom>
-          <a:noFill/>
-        </p:spPr>
-        <p:txBody>
-          <a:bodyPr wrap="square" lIns="0" rIns="0" tIns="0" bIns="0">
-            <a:spAutoFit/>
-          </a:bodyPr>
-          <a:lstStyle/>
-          <a:p>
-            <a:pPr algn="ctr"/>
-            <a:r>
-              <a:rPr sz="1050" b="0" i="0">
-                <a:solidFill>
-                  <a:srgbClr val="5D6D7E"/>
-                </a:solidFill>
-                <a:latin typeface="Arial"/>
-              </a:rPr>
-              <a:t>EXPERIMENTS</a:t>
-            </a:r>
-          </a:p>
-        </p:txBody>
-      </p:sp>
-      <p:sp>
-        <p:nvSpPr>
-          <p:cNvPr id="6" name="TextBox 5"/>
-          <p:cNvSpPr txBox="1"/>
-          <p:nvPr/>
-        </p:nvSpPr>
-        <p:spPr>
-          <a:xfrm>
-            <a:off x="6888305" y="256032"/>
-            <a:ext cx="1584916" cy="274320"/>
-          </a:xfrm>
-          <a:prstGeom prst="rect">
-            <a:avLst/>
-          </a:prstGeom>
-          <a:noFill/>
-        </p:spPr>
-        <p:txBody>
-          <a:bodyPr wrap="square" lIns="0" rIns="0" tIns="0" bIns="0">
-            <a:spAutoFit/>
-          </a:bodyPr>
-          <a:lstStyle/>
-          <a:p>
-            <a:pPr algn="ctr"/>
-            <a:r>
-              <a:rPr sz="1050" b="0" i="0">
-                <a:solidFill>
-                  <a:srgbClr val="5D6D7E"/>
-                </a:solidFill>
-                <a:latin typeface="Arial"/>
-              </a:rPr>
-              <a:t>RESULTS</a:t>
-            </a:r>
-          </a:p>
-        </p:txBody>
-      </p:sp>
-      <p:sp>
-        <p:nvSpPr>
-          <p:cNvPr id="7" name="TextBox 6"/>
-          <p:cNvSpPr txBox="1"/>
-          <p:nvPr/>
-        </p:nvSpPr>
-        <p:spPr>
-          <a:xfrm>
-            <a:off x="8473222" y="256032"/>
-            <a:ext cx="1584916" cy="274320"/>
-          </a:xfrm>
-          <a:prstGeom prst="rect">
-            <a:avLst/>
-          </a:prstGeom>
-          <a:noFill/>
-        </p:spPr>
-        <p:txBody>
-          <a:bodyPr wrap="square" lIns="0" rIns="0" tIns="0" bIns="0">
-            <a:spAutoFit/>
-          </a:bodyPr>
-          <a:lstStyle/>
-          <a:p>
-            <a:pPr algn="ctr"/>
-            <a:r>
-              <a:rPr sz="1050" b="1" i="0">
-                <a:solidFill>
-                  <a:srgbClr val="B2182B"/>
-                </a:solidFill>
-                <a:latin typeface="Arial"/>
-              </a:rPr>
-              <a:t>LIMITATIONS</a:t>
-            </a:r>
-          </a:p>
-        </p:txBody>
-      </p:sp>
-      <p:sp>
-        <p:nvSpPr>
-          <p:cNvPr id="8" name="Rectangle 7"/>
-          <p:cNvSpPr/>
-          <p:nvPr/>
-        </p:nvSpPr>
-        <p:spPr>
-          <a:xfrm>
-            <a:off x="8701822" y="548640"/>
-            <a:ext cx="1127716" cy="28575"/>
-          </a:xfrm>
-          <a:prstGeom prst="rect">
-            <a:avLst/>
-          </a:prstGeom>
-          <a:solidFill>
-            <a:srgbClr val="B2182B"/>
-          </a:solidFill>
-          <a:ln>
-            <a:noFill/>
-          </a:ln>
-        </p:spPr>
-        <p:txBody>
-          <a:bodyPr rtlCol="0" anchor="ctr"/>
-          <a:lstStyle/>
-          <a:p>
-            <a:pPr algn="ctr"/>
-          </a:p>
-        </p:txBody>
-      </p:sp>
-      <p:sp>
-        <p:nvSpPr>
-          <p:cNvPr id="9" name="TextBox 8"/>
-          <p:cNvSpPr txBox="1"/>
-          <p:nvPr/>
-        </p:nvSpPr>
-        <p:spPr>
-          <a:xfrm>
-            <a:off x="10058138" y="256032"/>
-            <a:ext cx="1584916" cy="274320"/>
-          </a:xfrm>
-          <a:prstGeom prst="rect">
-            <a:avLst/>
-          </a:prstGeom>
-          <a:noFill/>
-        </p:spPr>
-        <p:txBody>
-          <a:bodyPr wrap="square" lIns="0" rIns="0" tIns="0" bIns="0">
-            <a:spAutoFit/>
-          </a:bodyPr>
-          <a:lstStyle/>
-          <a:p>
-            <a:pPr algn="ctr"/>
-            <a:r>
-              <a:rPr sz="1050" b="1" i="0">
-                <a:solidFill>
-                  <a:srgbClr val="B2182B"/>
-                </a:solidFill>
-                <a:latin typeface="Arial"/>
-              </a:rPr>
-              <a:t>FUTURE</a:t>
-            </a:r>
-          </a:p>
-        </p:txBody>
-      </p:sp>
-      <p:sp>
-        <p:nvSpPr>
-          <p:cNvPr id="10" name="Rectangle 9"/>
-          <p:cNvSpPr/>
-          <p:nvPr/>
-        </p:nvSpPr>
-        <p:spPr>
-          <a:xfrm>
-            <a:off x="10286738" y="548640"/>
-            <a:ext cx="1127716" cy="28575"/>
-          </a:xfrm>
-          <a:prstGeom prst="rect">
-            <a:avLst/>
-          </a:prstGeom>
-          <a:solidFill>
-            <a:srgbClr val="B2182B"/>
-          </a:solidFill>
-          <a:ln>
-            <a:noFill/>
-          </a:ln>
-        </p:spPr>
-        <p:txBody>
-          <a:bodyPr rtlCol="0" anchor="ctr"/>
-          <a:lstStyle/>
-          <a:p>
-            <a:pPr algn="ctr"/>
-          </a:p>
-        </p:txBody>
-      </p:sp>
-      <p:sp>
-        <p:nvSpPr>
-          <p:cNvPr id="11" name="Rectangle 10"/>
-          <p:cNvSpPr/>
-          <p:nvPr/>
-        </p:nvSpPr>
-        <p:spPr>
-          <a:xfrm>
-            <a:off x="548640" y="566928"/>
-            <a:ext cx="11094415" cy="9525"/>
-          </a:xfrm>
-          <a:prstGeom prst="rect">
-            <a:avLst/>
-          </a:prstGeom>
-          <a:solidFill>
-            <a:srgbClr val="D5DBDB"/>
-          </a:solidFill>
-          <a:ln>
-            <a:noFill/>
-          </a:ln>
-        </p:spPr>
-        <p:txBody>
-          <a:bodyPr rtlCol="0" anchor="ctr"/>
-          <a:lstStyle/>
-          <a:p>
-            <a:pPr algn="ctr"/>
-          </a:p>
-        </p:txBody>
-      </p:sp>
-      <p:sp>
-        <p:nvSpPr>
-          <p:cNvPr id="12" name="TextBox 11"/>
-          <p:cNvSpPr txBox="1"/>
-          <p:nvPr/>
-        </p:nvSpPr>
-        <p:spPr>
-          <a:xfrm>
-            <a:off x="548640" y="713232"/>
-            <a:ext cx="9418320" cy="548640"/>
-          </a:xfrm>
-          <a:prstGeom prst="rect">
-            <a:avLst/>
-          </a:prstGeom>
-          <a:noFill/>
-        </p:spPr>
-        <p:txBody>
-          <a:bodyPr wrap="square" lIns="0" rIns="0" tIns="0" bIns="0">
-            <a:spAutoFit/>
-          </a:bodyPr>
-          <a:lstStyle/>
-          <a:p>
-            <a:pPr algn="l"/>
-            <a:r>
-              <a:rPr sz="2700" b="1" i="0">
-                <a:solidFill>
-                  <a:srgbClr val="1F3A5F"/>
-                </a:solidFill>
-                <a:latin typeface="Georgia"/>
-              </a:rPr>
-              <a:t>Limitations and planned extensions</a:t>
-            </a:r>
-          </a:p>
-        </p:txBody>
-      </p:sp>
-      <p:sp>
-        <p:nvSpPr>
-          <p:cNvPr id="13" name="TextBox 12"/>
-          <p:cNvSpPr txBox="1"/>
-          <p:nvPr/>
-        </p:nvSpPr>
-        <p:spPr>
-          <a:xfrm>
-            <a:off x="10271455" y="822960"/>
-            <a:ext cx="1371600" cy="274320"/>
-          </a:xfrm>
-          <a:prstGeom prst="rect">
-            <a:avLst/>
-          </a:prstGeom>
-          <a:noFill/>
-        </p:spPr>
-        <p:txBody>
-          <a:bodyPr wrap="square" lIns="0" rIns="0" tIns="0" bIns="0">
-            <a:spAutoFit/>
-          </a:bodyPr>
-          <a:lstStyle/>
-          <a:p>
-            <a:pPr algn="r"/>
-            <a:r>
-              <a:rPr sz="1100" b="1" i="0">
-                <a:solidFill>
-                  <a:srgbClr val="5D6D7E"/>
-                </a:solidFill>
-                <a:latin typeface="Arial"/>
-              </a:rPr>
-              <a:t>MEMBER 3</a:t>
-            </a:r>
-          </a:p>
-        </p:txBody>
-      </p:sp>
-      <p:sp>
-        <p:nvSpPr>
-          <p:cNvPr id="14" name="TextBox 13"/>
-          <p:cNvSpPr txBox="1"/>
-          <p:nvPr/>
-        </p:nvSpPr>
-        <p:spPr>
-          <a:xfrm>
-            <a:off x="548640" y="1417320"/>
-            <a:ext cx="4846320" cy="320040"/>
-          </a:xfrm>
-          <a:prstGeom prst="rect">
-            <a:avLst/>
-          </a:prstGeom>
-          <a:noFill/>
-        </p:spPr>
-        <p:txBody>
-          <a:bodyPr wrap="square" lIns="0" rIns="0" tIns="0" bIns="0">
-            <a:spAutoFit/>
-          </a:bodyPr>
-          <a:lstStyle/>
-          <a:p>
-            <a:pPr algn="l"/>
-            <a:r>
-              <a:rPr sz="1500" b="1" i="0">
-                <a:solidFill>
-                  <a:srgbClr val="B2182B"/>
-                </a:solidFill>
-                <a:latin typeface="Arial"/>
-              </a:rPr>
-              <a:t>Limitation</a:t>
-            </a:r>
-          </a:p>
-        </p:txBody>
-      </p:sp>
-      <p:sp>
-        <p:nvSpPr>
-          <p:cNvPr id="15" name="TextBox 14"/>
-          <p:cNvSpPr txBox="1"/>
-          <p:nvPr/>
-        </p:nvSpPr>
-        <p:spPr>
-          <a:xfrm>
-            <a:off x="6720840" y="1417320"/>
-            <a:ext cx="4846320" cy="320040"/>
-          </a:xfrm>
-          <a:prstGeom prst="rect">
-            <a:avLst/>
-          </a:prstGeom>
-          <a:noFill/>
-        </p:spPr>
-        <p:txBody>
-          <a:bodyPr wrap="square" lIns="0" rIns="0" tIns="0" bIns="0">
-            <a:spAutoFit/>
-          </a:bodyPr>
-          <a:lstStyle/>
-          <a:p>
-            <a:pPr algn="l"/>
-            <a:r>
-              <a:rPr sz="1500" b="1" i="0">
-                <a:solidFill>
-                  <a:srgbClr val="1F3A5F"/>
-                </a:solidFill>
-                <a:latin typeface="Arial"/>
-              </a:rPr>
-              <a:t>Planned extension</a:t>
-            </a:r>
-          </a:p>
-        </p:txBody>
-      </p:sp>
-      <p:sp>
-        <p:nvSpPr>
-          <p:cNvPr id="16" name="Rounded Rectangle 15"/>
-          <p:cNvSpPr/>
-          <p:nvPr/>
-        </p:nvSpPr>
-        <p:spPr>
-          <a:xfrm>
-            <a:off x="548640" y="1828800"/>
-            <a:ext cx="4937760" cy="640080"/>
-          </a:xfrm>
-          <a:prstGeom prst="roundRect">
-            <a:avLst>
-              <a:gd name="adj" fmla="val 12000"/>
-            </a:avLst>
-          </a:prstGeom>
-          <a:solidFill>
-            <a:srgbClr val="FBEEF0"/>
-          </a:solidFill>
-          <a:ln w="12700">
-            <a:solidFill>
-              <a:srgbClr val="FBEEF0"/>
-            </a:solidFill>
-          </a:ln>
-          <a:effectLst/>
-        </p:spPr>
-        <p:txBody>
-          <a:bodyPr rtlCol="0" anchor="ctr" wrap="square" lIns="73152" rIns="73152" tIns="27432" bIns="27432"/>
-          <a:lstStyle/>
-          <a:p>
-            <a:pPr algn="l"/>
-            <a:r>
-              <a:rPr sz="1400" b="0">
-                <a:solidFill>
-                  <a:srgbClr val="1C2833"/>
-                </a:solidFill>
-                <a:latin typeface="Arial"/>
-              </a:rPr>
-              <a:t>R added after results; also narrows the field of view</a:t>
-            </a:r>
-          </a:p>
-        </p:txBody>
-      </p:sp>
-      <p:cxnSp>
-        <p:nvCxnSpPr>
-          <p:cNvPr id="17" name="Connector 16"/>
-          <p:cNvCxnSpPr/>
-          <p:nvPr/>
-        </p:nvCxnSpPr>
-        <p:spPr>
-          <a:xfrm>
-            <a:off x="5577840" y="2148840"/>
-            <a:ext cx="1051560" cy="0"/>
-          </a:xfrm>
-          <a:prstGeom prst="line">
-            <a:avLst/>
-          </a:prstGeom>
-          <a:ln w="22225">
-            <a:solidFill>
-              <a:srgbClr val="5D6D7E"/>
-            </a:solidFill>
-            <a:tailEnd type="triangle" w="med" len="med"/>
-          </a:ln>
-        </p:spPr>
-      </p:cxnSp>
-      <p:sp>
-        <p:nvSpPr>
-          <p:cNvPr id="18" name="Rounded Rectangle 17"/>
-          <p:cNvSpPr/>
-          <p:nvPr/>
-        </p:nvSpPr>
-        <p:spPr>
-          <a:xfrm>
-            <a:off x="6720840" y="1828800"/>
-            <a:ext cx="4937760" cy="640080"/>
-          </a:xfrm>
-          <a:prstGeom prst="roundRect">
-            <a:avLst>
-              <a:gd name="adj" fmla="val 12000"/>
-            </a:avLst>
-          </a:prstGeom>
-          <a:solidFill>
-            <a:srgbClr val="F2F5F8"/>
-          </a:solidFill>
-          <a:ln w="12700">
-            <a:solidFill>
-              <a:srgbClr val="F2F5F8"/>
-            </a:solidFill>
-          </a:ln>
-          <a:effectLst/>
-        </p:spPr>
-        <p:txBody>
-          <a:bodyPr rtlCol="0" anchor="ctr" wrap="square" lIns="73152" rIns="73152" tIns="27432" bIns="27432"/>
-          <a:lstStyle/>
-          <a:p>
-            <a:pPr algn="l"/>
-            <a:r>
-              <a:rPr sz="1400" b="0">
-                <a:solidFill>
-                  <a:srgbClr val="1C2833"/>
-                </a:solidFill>
-                <a:latin typeface="Arial"/>
-              </a:rPr>
-              <a:t>pre-specified native-resolution protocol (matched view)</a:t>
-            </a:r>
-          </a:p>
-        </p:txBody>
-      </p:sp>
-      <p:sp>
-        <p:nvSpPr>
-          <p:cNvPr id="19" name="Rounded Rectangle 18"/>
-          <p:cNvSpPr/>
-          <p:nvPr/>
-        </p:nvSpPr>
-        <p:spPr>
-          <a:xfrm>
-            <a:off x="548640" y="2670048"/>
-            <a:ext cx="4937760" cy="640080"/>
-          </a:xfrm>
-          <a:prstGeom prst="roundRect">
-            <a:avLst>
-              <a:gd name="adj" fmla="val 12000"/>
-            </a:avLst>
-          </a:prstGeom>
-          <a:solidFill>
-            <a:srgbClr val="FBEEF0"/>
-          </a:solidFill>
-          <a:ln w="12700">
-            <a:solidFill>
-              <a:srgbClr val="FBEEF0"/>
-            </a:solidFill>
-          </a:ln>
-          <a:effectLst/>
-        </p:spPr>
-        <p:txBody>
-          <a:bodyPr rtlCol="0" anchor="ctr" wrap="square" lIns="73152" rIns="73152" tIns="27432" bIns="27432"/>
-          <a:lstStyle/>
-          <a:p>
-            <a:pPr algn="l"/>
-            <a:r>
-              <a:rPr sz="1400" b="0">
-                <a:solidFill>
-                  <a:srgbClr val="1C2833"/>
-                </a:solidFill>
-                <a:latin typeface="Arial"/>
-              </a:rPr>
-              <a:t>only SD v1.4 held out</a:t>
-            </a:r>
-          </a:p>
-        </p:txBody>
-      </p:sp>
-      <p:cxnSp>
-        <p:nvCxnSpPr>
-          <p:cNvPr id="20" name="Connector 19"/>
-          <p:cNvCxnSpPr/>
-          <p:nvPr/>
-        </p:nvCxnSpPr>
-        <p:spPr>
-          <a:xfrm>
-            <a:off x="5577840" y="2990088"/>
-            <a:ext cx="1051560" cy="0"/>
-          </a:xfrm>
-          <a:prstGeom prst="line">
-            <a:avLst/>
-          </a:prstGeom>
-          <a:ln w="22225">
-            <a:solidFill>
-              <a:srgbClr val="5D6D7E"/>
-            </a:solidFill>
-            <a:tailEnd type="triangle" w="med" len="med"/>
-          </a:ln>
-        </p:spPr>
-      </p:cxnSp>
-      <p:sp>
-        <p:nvSpPr>
-          <p:cNvPr id="21" name="Rounded Rectangle 20"/>
-          <p:cNvSpPr/>
-          <p:nvPr/>
-        </p:nvSpPr>
-        <p:spPr>
-          <a:xfrm>
-            <a:off x="6720840" y="2670048"/>
-            <a:ext cx="4937760" cy="640080"/>
-          </a:xfrm>
-          <a:prstGeom prst="roundRect">
-            <a:avLst>
-              <a:gd name="adj" fmla="val 12000"/>
-            </a:avLst>
-          </a:prstGeom>
-          <a:solidFill>
-            <a:srgbClr val="F2F5F8"/>
-          </a:solidFill>
-          <a:ln w="12700">
-            <a:solidFill>
-              <a:srgbClr val="F2F5F8"/>
-            </a:solidFill>
-          </a:ln>
-          <a:effectLst/>
-        </p:spPr>
-        <p:txBody>
-          <a:bodyPr rtlCol="0" anchor="ctr" wrap="square" lIns="73152" rIns="73152" tIns="27432" bIns="27432"/>
-          <a:lstStyle/>
-          <a:p>
-            <a:pPr algn="l"/>
-            <a:r>
-              <a:rPr sz="1400" b="0">
-                <a:solidFill>
-                  <a:srgbClr val="1C2833"/>
-                </a:solidFill>
-                <a:latin typeface="Arial"/>
-              </a:rPr>
-              <a:t>hold out each generator in turn</a:t>
-            </a:r>
-          </a:p>
-        </p:txBody>
-      </p:sp>
-      <p:sp>
-        <p:nvSpPr>
-          <p:cNvPr id="22" name="Rounded Rectangle 21"/>
-          <p:cNvSpPr/>
-          <p:nvPr/>
-        </p:nvSpPr>
-        <p:spPr>
-          <a:xfrm>
-            <a:off x="548640" y="3511296"/>
-            <a:ext cx="4937760" cy="640080"/>
-          </a:xfrm>
-          <a:prstGeom prst="roundRect">
-            <a:avLst>
-              <a:gd name="adj" fmla="val 12000"/>
-            </a:avLst>
-          </a:prstGeom>
-          <a:solidFill>
-            <a:srgbClr val="FBEEF0"/>
-          </a:solidFill>
-          <a:ln w="12700">
-            <a:solidFill>
-              <a:srgbClr val="FBEEF0"/>
-            </a:solidFill>
-          </a:ln>
-          <a:effectLst/>
-        </p:spPr>
-        <p:txBody>
-          <a:bodyPr rtlCol="0" anchor="ctr" wrap="square" lIns="73152" rIns="73152" tIns="27432" bIns="27432"/>
-          <a:lstStyle/>
-          <a:p>
-            <a:pPr algn="l"/>
-            <a:r>
-              <a:rPr sz="1400" b="0">
-                <a:solidFill>
-                  <a:srgbClr val="1C2833"/>
-                </a:solidFill>
-                <a:latin typeface="Arial"/>
-              </a:rPr>
-              <a:t>real and fake content not matched</a:t>
-            </a:r>
-          </a:p>
-        </p:txBody>
-      </p:sp>
-      <p:cxnSp>
-        <p:nvCxnSpPr>
-          <p:cNvPr id="23" name="Connector 22"/>
-          <p:cNvCxnSpPr/>
-          <p:nvPr/>
-        </p:nvCxnSpPr>
-        <p:spPr>
-          <a:xfrm>
-            <a:off x="5577840" y="3831336"/>
-            <a:ext cx="1051560" cy="0"/>
-          </a:xfrm>
-          <a:prstGeom prst="line">
-            <a:avLst/>
-          </a:prstGeom>
-          <a:ln w="22225">
-            <a:solidFill>
-              <a:srgbClr val="5D6D7E"/>
-            </a:solidFill>
-            <a:tailEnd type="triangle" w="med" len="med"/>
-          </a:ln>
-        </p:spPr>
-      </p:cxnSp>
-      <p:sp>
-        <p:nvSpPr>
-          <p:cNvPr id="24" name="Rounded Rectangle 23"/>
-          <p:cNvSpPr/>
-          <p:nvPr/>
-        </p:nvSpPr>
-        <p:spPr>
-          <a:xfrm>
-            <a:off x="6720840" y="3511296"/>
-            <a:ext cx="4937760" cy="640080"/>
-          </a:xfrm>
-          <a:prstGeom prst="roundRect">
-            <a:avLst>
-              <a:gd name="adj" fmla="val 12000"/>
-            </a:avLst>
-          </a:prstGeom>
-          <a:solidFill>
-            <a:srgbClr val="F2F5F8"/>
-          </a:solidFill>
-          <a:ln w="12700">
-            <a:solidFill>
-              <a:srgbClr val="F2F5F8"/>
-            </a:solidFill>
-          </a:ln>
-          <a:effectLst/>
-        </p:spPr>
-        <p:txBody>
-          <a:bodyPr rtlCol="0" anchor="ctr" wrap="square" lIns="73152" rIns="73152" tIns="27432" bIns="27432"/>
-          <a:lstStyle/>
-          <a:p>
-            <a:pPr algn="l"/>
-            <a:r>
-              <a:rPr sz="1400" b="0">
-                <a:solidFill>
-                  <a:srgbClr val="1C2833"/>
-                </a:solidFill>
-                <a:latin typeface="Arial"/>
-              </a:rPr>
-              <a:t>content-matched real / fake pairs</a:t>
-            </a:r>
-          </a:p>
-        </p:txBody>
-      </p:sp>
-      <p:sp>
-        <p:nvSpPr>
-          <p:cNvPr id="25" name="Rounded Rectangle 24"/>
-          <p:cNvSpPr/>
-          <p:nvPr/>
-        </p:nvSpPr>
-        <p:spPr>
-          <a:xfrm>
-            <a:off x="548640" y="4352544"/>
-            <a:ext cx="4937760" cy="640080"/>
-          </a:xfrm>
-          <a:prstGeom prst="roundRect">
-            <a:avLst>
-              <a:gd name="adj" fmla="val 12000"/>
-            </a:avLst>
-          </a:prstGeom>
-          <a:solidFill>
-            <a:srgbClr val="FBEEF0"/>
-          </a:solidFill>
-          <a:ln w="12700">
-            <a:solidFill>
-              <a:srgbClr val="FBEEF0"/>
-            </a:solidFill>
-          </a:ln>
-          <a:effectLst/>
-        </p:spPr>
-        <p:txBody>
-          <a:bodyPr rtlCol="0" anchor="ctr" wrap="square" lIns="73152" rIns="73152" tIns="27432" bIns="27432"/>
-          <a:lstStyle/>
-          <a:p>
-            <a:pPr algn="l"/>
-            <a:r>
-              <a:rPr sz="1400" b="0">
-                <a:solidFill>
-                  <a:srgbClr val="1C2833"/>
-                </a:solidFill>
-                <a:latin typeface="Arial"/>
-              </a:rPr>
-              <a:t>one JPEG encoder (Pillow 4:2:0)</a:t>
-            </a:r>
-          </a:p>
-        </p:txBody>
-      </p:sp>
-      <p:cxnSp>
-        <p:nvCxnSpPr>
-          <p:cNvPr id="26" name="Connector 25"/>
-          <p:cNvCxnSpPr/>
-          <p:nvPr/>
-        </p:nvCxnSpPr>
-        <p:spPr>
-          <a:xfrm>
-            <a:off x="5577840" y="4672584"/>
-            <a:ext cx="1051560" cy="0"/>
-          </a:xfrm>
-          <a:prstGeom prst="line">
-            <a:avLst/>
-          </a:prstGeom>
-          <a:ln w="22225">
-            <a:solidFill>
-              <a:srgbClr val="5D6D7E"/>
-            </a:solidFill>
-            <a:tailEnd type="triangle" w="med" len="med"/>
-          </a:ln>
-        </p:spPr>
-      </p:cxnSp>
-      <p:sp>
-        <p:nvSpPr>
-          <p:cNvPr id="27" name="Rounded Rectangle 26"/>
-          <p:cNvSpPr/>
-          <p:nvPr/>
-        </p:nvSpPr>
-        <p:spPr>
-          <a:xfrm>
-            <a:off x="6720840" y="4352544"/>
-            <a:ext cx="4937760" cy="640080"/>
-          </a:xfrm>
-          <a:prstGeom prst="roundRect">
-            <a:avLst>
-              <a:gd name="adj" fmla="val 12000"/>
-            </a:avLst>
-          </a:prstGeom>
-          <a:solidFill>
-            <a:srgbClr val="F2F5F8"/>
-          </a:solidFill>
-          <a:ln w="12700">
-            <a:solidFill>
-              <a:srgbClr val="F2F5F8"/>
-            </a:solidFill>
-          </a:ln>
-          <a:effectLst/>
-        </p:spPr>
-        <p:txBody>
-          <a:bodyPr rtlCol="0" anchor="ctr" wrap="square" lIns="73152" rIns="73152" tIns="27432" bIns="27432"/>
-          <a:lstStyle/>
-          <a:p>
-            <a:pPr algn="l"/>
-            <a:r>
-              <a:rPr sz="1400" b="0">
-                <a:solidFill>
-                  <a:srgbClr val="1C2833"/>
-                </a:solidFill>
-                <a:latin typeface="Arial"/>
-              </a:rPr>
-              <a:t>a second encoder and subsampling</a:t>
-            </a:r>
-          </a:p>
-        </p:txBody>
-      </p:sp>
-      <p:sp>
-        <p:nvSpPr>
-          <p:cNvPr id="28" name="Rounded Rectangle 27"/>
-          <p:cNvSpPr/>
-          <p:nvPr/>
-        </p:nvSpPr>
-        <p:spPr>
-          <a:xfrm>
-            <a:off x="548640" y="5193792"/>
-            <a:ext cx="4937760" cy="640080"/>
-          </a:xfrm>
-          <a:prstGeom prst="roundRect">
-            <a:avLst>
-              <a:gd name="adj" fmla="val 12000"/>
-            </a:avLst>
-          </a:prstGeom>
-          <a:solidFill>
-            <a:srgbClr val="FBEEF0"/>
-          </a:solidFill>
-          <a:ln w="12700">
-            <a:solidFill>
-              <a:srgbClr val="FBEEF0"/>
-            </a:solidFill>
-          </a:ln>
-          <a:effectLst/>
-        </p:spPr>
-        <p:txBody>
-          <a:bodyPr rtlCol="0" anchor="ctr" wrap="square" lIns="73152" rIns="73152" tIns="27432" bIns="27432"/>
-          <a:lstStyle/>
-          <a:p>
-            <a:pPr algn="l"/>
-            <a:r>
-              <a:rPr sz="1400" b="0">
-                <a:solidFill>
-                  <a:srgbClr val="1C2833"/>
-                </a:solidFill>
-                <a:latin typeface="Arial"/>
-              </a:rPr>
-              <a:t>one dataset, one random split</a:t>
-            </a:r>
-          </a:p>
-        </p:txBody>
-      </p:sp>
-      <p:cxnSp>
-        <p:nvCxnSpPr>
-          <p:cNvPr id="29" name="Connector 28"/>
-          <p:cNvCxnSpPr/>
-          <p:nvPr/>
-        </p:nvCxnSpPr>
-        <p:spPr>
-          <a:xfrm>
-            <a:off x="5577840" y="5513832"/>
-            <a:ext cx="1051560" cy="0"/>
-          </a:xfrm>
-          <a:prstGeom prst="line">
-            <a:avLst/>
-          </a:prstGeom>
-          <a:ln w="22225">
-            <a:solidFill>
-              <a:srgbClr val="5D6D7E"/>
-            </a:solidFill>
-            <a:tailEnd type="triangle" w="med" len="med"/>
-          </a:ln>
-        </p:spPr>
-      </p:cxnSp>
-      <p:sp>
-        <p:nvSpPr>
-          <p:cNvPr id="30" name="Rounded Rectangle 29"/>
-          <p:cNvSpPr/>
-          <p:nvPr/>
-        </p:nvSpPr>
-        <p:spPr>
-          <a:xfrm>
-            <a:off x="6720840" y="5193792"/>
-            <a:ext cx="4937760" cy="640080"/>
-          </a:xfrm>
-          <a:prstGeom prst="roundRect">
-            <a:avLst>
-              <a:gd name="adj" fmla="val 12000"/>
-            </a:avLst>
-          </a:prstGeom>
-          <a:solidFill>
-            <a:srgbClr val="F2F5F8"/>
-          </a:solidFill>
-          <a:ln w="12700">
-            <a:solidFill>
-              <a:srgbClr val="F2F5F8"/>
-            </a:solidFill>
-          </a:ln>
-          <a:effectLst/>
-        </p:spPr>
-        <p:txBody>
-          <a:bodyPr rtlCol="0" anchor="ctr" wrap="square" lIns="73152" rIns="73152" tIns="27432" bIns="27432"/>
-          <a:lstStyle/>
-          <a:p>
-            <a:pPr algn="l"/>
-            <a:r>
-              <a:rPr sz="1400" b="0">
-                <a:solidFill>
-                  <a:srgbClr val="1C2833"/>
-                </a:solidFill>
-                <a:latin typeface="Arial"/>
-              </a:rPr>
-              <a:t>repeated splits and a second dataset</a:t>
-            </a:r>
-          </a:p>
-        </p:txBody>
-      </p:sp>
-      <p:sp>
-        <p:nvSpPr>
-          <p:cNvPr id="31" name="TextBox 30"/>
-          <p:cNvSpPr txBox="1"/>
-          <p:nvPr/>
-        </p:nvSpPr>
-        <p:spPr>
-          <a:xfrm>
-            <a:off x="548640" y="6510528"/>
-            <a:ext cx="8229600" cy="237744"/>
-          </a:xfrm>
-          <a:prstGeom prst="rect">
-            <a:avLst/>
-          </a:prstGeom>
-          <a:noFill/>
-        </p:spPr>
-        <p:txBody>
-          <a:bodyPr wrap="square" lIns="0" rIns="0" tIns="0" bIns="0">
-            <a:spAutoFit/>
-          </a:bodyPr>
-          <a:lstStyle/>
-          <a:p>
-            <a:pPr algn="l"/>
-            <a:r>
-              <a:rPr sz="1000" b="0" i="0">
-                <a:solidFill>
-                  <a:srgbClr val="5D6D7E"/>
-                </a:solidFill>
-                <a:latin typeface="Arial"/>
-              </a:rPr>
-              <a:t>CSE 4883 Digital Image Processing  ·  Same score, different story</a:t>
-            </a:r>
-          </a:p>
-        </p:txBody>
-      </p:sp>
-      <p:sp>
-        <p:nvSpPr>
-          <p:cNvPr id="32" name="TextBox 31"/>
-          <p:cNvSpPr txBox="1"/>
-          <p:nvPr/>
-        </p:nvSpPr>
-        <p:spPr>
-          <a:xfrm>
-            <a:off x="10362895" y="6510528"/>
-            <a:ext cx="1280160" cy="237744"/>
-          </a:xfrm>
-          <a:prstGeom prst="rect">
-            <a:avLst/>
-          </a:prstGeom>
-          <a:noFill/>
-        </p:spPr>
-        <p:txBody>
-          <a:bodyPr wrap="square" lIns="0" rIns="0" tIns="0" bIns="0">
-            <a:spAutoFit/>
-          </a:bodyPr>
-          <a:lstStyle/>
-          <a:p>
-            <a:pPr algn="r"/>
-            <a:r>
-              <a:rPr sz="1000" b="0" i="0">
-                <a:solidFill>
-                  <a:srgbClr val="5D6D7E"/>
-                </a:solidFill>
-                <a:latin typeface="Arial"/>
-              </a:rPr>
-              <a:t>12 / 13</a:t>
+              <a:t>12 / 14</a:t>
             </a:r>
           </a:p>
         </p:txBody>
@@ -7559,6 +7075,1106 @@
       <p:grpSpPr/>
       <p:sp>
         <p:nvSpPr>
+          <p:cNvPr id="2" name="TextBox 1"/>
+          <p:cNvSpPr txBox="1"/>
+          <p:nvPr/>
+        </p:nvSpPr>
+        <p:spPr>
+          <a:xfrm>
+            <a:off x="548640" y="256032"/>
+            <a:ext cx="1584916" cy="274320"/>
+          </a:xfrm>
+          <a:prstGeom prst="rect">
+            <a:avLst/>
+          </a:prstGeom>
+          <a:noFill/>
+        </p:spPr>
+        <p:txBody>
+          <a:bodyPr wrap="square" lIns="0" rIns="0" tIns="0" bIns="0">
+            <a:spAutoFit/>
+          </a:bodyPr>
+          <a:lstStyle/>
+          <a:p>
+            <a:pPr algn="ctr"/>
+            <a:r>
+              <a:rPr sz="1050" b="0" i="0">
+                <a:solidFill>
+                  <a:srgbClr val="5D6D7E"/>
+                </a:solidFill>
+                <a:latin typeface="Arial"/>
+              </a:rPr>
+              <a:t>INTRODUCTION</a:t>
+            </a:r>
+          </a:p>
+        </p:txBody>
+      </p:sp>
+      <p:sp>
+        <p:nvSpPr>
+          <p:cNvPr id="3" name="TextBox 2"/>
+          <p:cNvSpPr txBox="1"/>
+          <p:nvPr/>
+        </p:nvSpPr>
+        <p:spPr>
+          <a:xfrm>
+            <a:off x="2133556" y="256032"/>
+            <a:ext cx="1584916" cy="274320"/>
+          </a:xfrm>
+          <a:prstGeom prst="rect">
+            <a:avLst/>
+          </a:prstGeom>
+          <a:noFill/>
+        </p:spPr>
+        <p:txBody>
+          <a:bodyPr wrap="square" lIns="0" rIns="0" tIns="0" bIns="0">
+            <a:spAutoFit/>
+          </a:bodyPr>
+          <a:lstStyle/>
+          <a:p>
+            <a:pPr algn="ctr"/>
+            <a:r>
+              <a:rPr sz="1050" b="0" i="0">
+                <a:solidFill>
+                  <a:srgbClr val="5D6D7E"/>
+                </a:solidFill>
+                <a:latin typeface="Arial"/>
+              </a:rPr>
+              <a:t>NOVELTY</a:t>
+            </a:r>
+          </a:p>
+        </p:txBody>
+      </p:sp>
+      <p:sp>
+        <p:nvSpPr>
+          <p:cNvPr id="4" name="TextBox 3"/>
+          <p:cNvSpPr txBox="1"/>
+          <p:nvPr/>
+        </p:nvSpPr>
+        <p:spPr>
+          <a:xfrm>
+            <a:off x="3718472" y="256032"/>
+            <a:ext cx="1584916" cy="274320"/>
+          </a:xfrm>
+          <a:prstGeom prst="rect">
+            <a:avLst/>
+          </a:prstGeom>
+          <a:noFill/>
+        </p:spPr>
+        <p:txBody>
+          <a:bodyPr wrap="square" lIns="0" rIns="0" tIns="0" bIns="0">
+            <a:spAutoFit/>
+          </a:bodyPr>
+          <a:lstStyle/>
+          <a:p>
+            <a:pPr algn="ctr"/>
+            <a:r>
+              <a:rPr sz="1050" b="0" i="0">
+                <a:solidFill>
+                  <a:srgbClr val="5D6D7E"/>
+                </a:solidFill>
+                <a:latin typeface="Arial"/>
+              </a:rPr>
+              <a:t>METHODOLOGY</a:t>
+            </a:r>
+          </a:p>
+        </p:txBody>
+      </p:sp>
+      <p:sp>
+        <p:nvSpPr>
+          <p:cNvPr id="5" name="TextBox 4"/>
+          <p:cNvSpPr txBox="1"/>
+          <p:nvPr/>
+        </p:nvSpPr>
+        <p:spPr>
+          <a:xfrm>
+            <a:off x="5303389" y="256032"/>
+            <a:ext cx="1584916" cy="274320"/>
+          </a:xfrm>
+          <a:prstGeom prst="rect">
+            <a:avLst/>
+          </a:prstGeom>
+          <a:noFill/>
+        </p:spPr>
+        <p:txBody>
+          <a:bodyPr wrap="square" lIns="0" rIns="0" tIns="0" bIns="0">
+            <a:spAutoFit/>
+          </a:bodyPr>
+          <a:lstStyle/>
+          <a:p>
+            <a:pPr algn="ctr"/>
+            <a:r>
+              <a:rPr sz="1050" b="0" i="0">
+                <a:solidFill>
+                  <a:srgbClr val="5D6D7E"/>
+                </a:solidFill>
+                <a:latin typeface="Arial"/>
+              </a:rPr>
+              <a:t>EXPERIMENTS</a:t>
+            </a:r>
+          </a:p>
+        </p:txBody>
+      </p:sp>
+      <p:sp>
+        <p:nvSpPr>
+          <p:cNvPr id="6" name="TextBox 5"/>
+          <p:cNvSpPr txBox="1"/>
+          <p:nvPr/>
+        </p:nvSpPr>
+        <p:spPr>
+          <a:xfrm>
+            <a:off x="6888305" y="256032"/>
+            <a:ext cx="1584916" cy="274320"/>
+          </a:xfrm>
+          <a:prstGeom prst="rect">
+            <a:avLst/>
+          </a:prstGeom>
+          <a:noFill/>
+        </p:spPr>
+        <p:txBody>
+          <a:bodyPr wrap="square" lIns="0" rIns="0" tIns="0" bIns="0">
+            <a:spAutoFit/>
+          </a:bodyPr>
+          <a:lstStyle/>
+          <a:p>
+            <a:pPr algn="ctr"/>
+            <a:r>
+              <a:rPr sz="1050" b="0" i="0">
+                <a:solidFill>
+                  <a:srgbClr val="5D6D7E"/>
+                </a:solidFill>
+                <a:latin typeface="Arial"/>
+              </a:rPr>
+              <a:t>RESULTS</a:t>
+            </a:r>
+          </a:p>
+        </p:txBody>
+      </p:sp>
+      <p:sp>
+        <p:nvSpPr>
+          <p:cNvPr id="7" name="TextBox 6"/>
+          <p:cNvSpPr txBox="1"/>
+          <p:nvPr/>
+        </p:nvSpPr>
+        <p:spPr>
+          <a:xfrm>
+            <a:off x="8473222" y="256032"/>
+            <a:ext cx="1584916" cy="274320"/>
+          </a:xfrm>
+          <a:prstGeom prst="rect">
+            <a:avLst/>
+          </a:prstGeom>
+          <a:noFill/>
+        </p:spPr>
+        <p:txBody>
+          <a:bodyPr wrap="square" lIns="0" rIns="0" tIns="0" bIns="0">
+            <a:spAutoFit/>
+          </a:bodyPr>
+          <a:lstStyle/>
+          <a:p>
+            <a:pPr algn="ctr"/>
+            <a:r>
+              <a:rPr sz="1050" b="1" i="0">
+                <a:solidFill>
+                  <a:srgbClr val="B2182B"/>
+                </a:solidFill>
+                <a:latin typeface="Arial"/>
+              </a:rPr>
+              <a:t>LIMITATIONS</a:t>
+            </a:r>
+          </a:p>
+        </p:txBody>
+      </p:sp>
+      <p:sp>
+        <p:nvSpPr>
+          <p:cNvPr id="8" name="Rectangle 7"/>
+          <p:cNvSpPr/>
+          <p:nvPr/>
+        </p:nvSpPr>
+        <p:spPr>
+          <a:xfrm>
+            <a:off x="8701822" y="548640"/>
+            <a:ext cx="1127716" cy="28575"/>
+          </a:xfrm>
+          <a:prstGeom prst="rect">
+            <a:avLst/>
+          </a:prstGeom>
+          <a:solidFill>
+            <a:srgbClr val="B2182B"/>
+          </a:solidFill>
+          <a:ln>
+            <a:noFill/>
+          </a:ln>
+        </p:spPr>
+        <p:txBody>
+          <a:bodyPr rtlCol="0" anchor="ctr"/>
+          <a:lstStyle/>
+          <a:p>
+            <a:pPr algn="ctr"/>
+          </a:p>
+        </p:txBody>
+      </p:sp>
+      <p:sp>
+        <p:nvSpPr>
+          <p:cNvPr id="9" name="TextBox 8"/>
+          <p:cNvSpPr txBox="1"/>
+          <p:nvPr/>
+        </p:nvSpPr>
+        <p:spPr>
+          <a:xfrm>
+            <a:off x="10058138" y="256032"/>
+            <a:ext cx="1584916" cy="274320"/>
+          </a:xfrm>
+          <a:prstGeom prst="rect">
+            <a:avLst/>
+          </a:prstGeom>
+          <a:noFill/>
+        </p:spPr>
+        <p:txBody>
+          <a:bodyPr wrap="square" lIns="0" rIns="0" tIns="0" bIns="0">
+            <a:spAutoFit/>
+          </a:bodyPr>
+          <a:lstStyle/>
+          <a:p>
+            <a:pPr algn="ctr"/>
+            <a:r>
+              <a:rPr sz="1050" b="1" i="0">
+                <a:solidFill>
+                  <a:srgbClr val="B2182B"/>
+                </a:solidFill>
+                <a:latin typeface="Arial"/>
+              </a:rPr>
+              <a:t>FUTURE</a:t>
+            </a:r>
+          </a:p>
+        </p:txBody>
+      </p:sp>
+      <p:sp>
+        <p:nvSpPr>
+          <p:cNvPr id="10" name="Rectangle 9"/>
+          <p:cNvSpPr/>
+          <p:nvPr/>
+        </p:nvSpPr>
+        <p:spPr>
+          <a:xfrm>
+            <a:off x="10286738" y="548640"/>
+            <a:ext cx="1127716" cy="28575"/>
+          </a:xfrm>
+          <a:prstGeom prst="rect">
+            <a:avLst/>
+          </a:prstGeom>
+          <a:solidFill>
+            <a:srgbClr val="B2182B"/>
+          </a:solidFill>
+          <a:ln>
+            <a:noFill/>
+          </a:ln>
+        </p:spPr>
+        <p:txBody>
+          <a:bodyPr rtlCol="0" anchor="ctr"/>
+          <a:lstStyle/>
+          <a:p>
+            <a:pPr algn="ctr"/>
+          </a:p>
+        </p:txBody>
+      </p:sp>
+      <p:sp>
+        <p:nvSpPr>
+          <p:cNvPr id="11" name="Rectangle 10"/>
+          <p:cNvSpPr/>
+          <p:nvPr/>
+        </p:nvSpPr>
+        <p:spPr>
+          <a:xfrm>
+            <a:off x="548640" y="566928"/>
+            <a:ext cx="11094415" cy="9525"/>
+          </a:xfrm>
+          <a:prstGeom prst="rect">
+            <a:avLst/>
+          </a:prstGeom>
+          <a:solidFill>
+            <a:srgbClr val="D5DBDB"/>
+          </a:solidFill>
+          <a:ln>
+            <a:noFill/>
+          </a:ln>
+        </p:spPr>
+        <p:txBody>
+          <a:bodyPr rtlCol="0" anchor="ctr"/>
+          <a:lstStyle/>
+          <a:p>
+            <a:pPr algn="ctr"/>
+          </a:p>
+        </p:txBody>
+      </p:sp>
+      <p:sp>
+        <p:nvSpPr>
+          <p:cNvPr id="12" name="TextBox 11"/>
+          <p:cNvSpPr txBox="1"/>
+          <p:nvPr/>
+        </p:nvSpPr>
+        <p:spPr>
+          <a:xfrm>
+            <a:off x="548640" y="713232"/>
+            <a:ext cx="9418320" cy="548640"/>
+          </a:xfrm>
+          <a:prstGeom prst="rect">
+            <a:avLst/>
+          </a:prstGeom>
+          <a:noFill/>
+        </p:spPr>
+        <p:txBody>
+          <a:bodyPr wrap="square" lIns="0" rIns="0" tIns="0" bIns="0">
+            <a:spAutoFit/>
+          </a:bodyPr>
+          <a:lstStyle/>
+          <a:p>
+            <a:pPr algn="l"/>
+            <a:r>
+              <a:rPr sz="2700" b="1" i="0">
+                <a:solidFill>
+                  <a:srgbClr val="1F3A5F"/>
+                </a:solidFill>
+                <a:latin typeface="Georgia"/>
+              </a:rPr>
+              <a:t>Limitations and planned extensions</a:t>
+            </a:r>
+          </a:p>
+        </p:txBody>
+      </p:sp>
+      <p:sp>
+        <p:nvSpPr>
+          <p:cNvPr id="13" name="TextBox 12"/>
+          <p:cNvSpPr txBox="1"/>
+          <p:nvPr/>
+        </p:nvSpPr>
+        <p:spPr>
+          <a:xfrm>
+            <a:off x="10271455" y="822960"/>
+            <a:ext cx="1371600" cy="274320"/>
+          </a:xfrm>
+          <a:prstGeom prst="rect">
+            <a:avLst/>
+          </a:prstGeom>
+          <a:noFill/>
+        </p:spPr>
+        <p:txBody>
+          <a:bodyPr wrap="square" lIns="0" rIns="0" tIns="0" bIns="0">
+            <a:spAutoFit/>
+          </a:bodyPr>
+          <a:lstStyle/>
+          <a:p>
+            <a:pPr algn="r"/>
+            <a:r>
+              <a:rPr sz="1100" b="1" i="0">
+                <a:solidFill>
+                  <a:srgbClr val="5D6D7E"/>
+                </a:solidFill>
+                <a:latin typeface="Arial"/>
+              </a:rPr>
+              <a:t>MEMBER 3</a:t>
+            </a:r>
+          </a:p>
+        </p:txBody>
+      </p:sp>
+      <p:sp>
+        <p:nvSpPr>
+          <p:cNvPr id="14" name="TextBox 13"/>
+          <p:cNvSpPr txBox="1"/>
+          <p:nvPr/>
+        </p:nvSpPr>
+        <p:spPr>
+          <a:xfrm>
+            <a:off x="548640" y="1417320"/>
+            <a:ext cx="4846320" cy="320040"/>
+          </a:xfrm>
+          <a:prstGeom prst="rect">
+            <a:avLst/>
+          </a:prstGeom>
+          <a:noFill/>
+        </p:spPr>
+        <p:txBody>
+          <a:bodyPr wrap="square" lIns="0" rIns="0" tIns="0" bIns="0">
+            <a:spAutoFit/>
+          </a:bodyPr>
+          <a:lstStyle/>
+          <a:p>
+            <a:pPr algn="l"/>
+            <a:r>
+              <a:rPr sz="1500" b="1" i="0">
+                <a:solidFill>
+                  <a:srgbClr val="B2182B"/>
+                </a:solidFill>
+                <a:latin typeface="Arial"/>
+              </a:rPr>
+              <a:t>Limitation</a:t>
+            </a:r>
+          </a:p>
+        </p:txBody>
+      </p:sp>
+      <p:sp>
+        <p:nvSpPr>
+          <p:cNvPr id="15" name="TextBox 14"/>
+          <p:cNvSpPr txBox="1"/>
+          <p:nvPr/>
+        </p:nvSpPr>
+        <p:spPr>
+          <a:xfrm>
+            <a:off x="6720840" y="1417320"/>
+            <a:ext cx="4846320" cy="320040"/>
+          </a:xfrm>
+          <a:prstGeom prst="rect">
+            <a:avLst/>
+          </a:prstGeom>
+          <a:noFill/>
+        </p:spPr>
+        <p:txBody>
+          <a:bodyPr wrap="square" lIns="0" rIns="0" tIns="0" bIns="0">
+            <a:spAutoFit/>
+          </a:bodyPr>
+          <a:lstStyle/>
+          <a:p>
+            <a:pPr algn="l"/>
+            <a:r>
+              <a:rPr sz="1500" b="1" i="0">
+                <a:solidFill>
+                  <a:srgbClr val="1F3A5F"/>
+                </a:solidFill>
+                <a:latin typeface="Arial"/>
+              </a:rPr>
+              <a:t>Planned extension</a:t>
+            </a:r>
+          </a:p>
+        </p:txBody>
+      </p:sp>
+      <p:sp>
+        <p:nvSpPr>
+          <p:cNvPr id="16" name="Rounded Rectangle 15"/>
+          <p:cNvSpPr/>
+          <p:nvPr/>
+        </p:nvSpPr>
+        <p:spPr>
+          <a:xfrm>
+            <a:off x="548640" y="1828800"/>
+            <a:ext cx="4937760" cy="640080"/>
+          </a:xfrm>
+          <a:prstGeom prst="roundRect">
+            <a:avLst>
+              <a:gd name="adj" fmla="val 12000"/>
+            </a:avLst>
+          </a:prstGeom>
+          <a:solidFill>
+            <a:srgbClr val="FBEEF0"/>
+          </a:solidFill>
+          <a:ln w="12700">
+            <a:solidFill>
+              <a:srgbClr val="FBEEF0"/>
+            </a:solidFill>
+          </a:ln>
+          <a:effectLst/>
+        </p:spPr>
+        <p:txBody>
+          <a:bodyPr rtlCol="0" anchor="ctr" wrap="square" lIns="73152" rIns="73152" tIns="27432" bIns="27432"/>
+          <a:lstStyle/>
+          <a:p>
+            <a:pPr algn="l"/>
+            <a:r>
+              <a:rPr sz="1400" b="0">
+                <a:solidFill>
+                  <a:srgbClr val="1C2833"/>
+                </a:solidFill>
+                <a:latin typeface="Arial"/>
+              </a:rPr>
+              <a:t>R added after results; also narrows the field of view</a:t>
+            </a:r>
+          </a:p>
+        </p:txBody>
+      </p:sp>
+      <p:cxnSp>
+        <p:nvCxnSpPr>
+          <p:cNvPr id="17" name="Connector 16"/>
+          <p:cNvCxnSpPr/>
+          <p:nvPr/>
+        </p:nvCxnSpPr>
+        <p:spPr>
+          <a:xfrm>
+            <a:off x="5577840" y="2148840"/>
+            <a:ext cx="1051560" cy="0"/>
+          </a:xfrm>
+          <a:prstGeom prst="line">
+            <a:avLst/>
+          </a:prstGeom>
+          <a:ln w="22225">
+            <a:solidFill>
+              <a:srgbClr val="5D6D7E"/>
+            </a:solidFill>
+            <a:tailEnd type="triangle" w="med" len="med"/>
+          </a:ln>
+        </p:spPr>
+      </p:cxnSp>
+      <p:sp>
+        <p:nvSpPr>
+          <p:cNvPr id="18" name="Rounded Rectangle 17"/>
+          <p:cNvSpPr/>
+          <p:nvPr/>
+        </p:nvSpPr>
+        <p:spPr>
+          <a:xfrm>
+            <a:off x="6720840" y="1828800"/>
+            <a:ext cx="4937760" cy="640080"/>
+          </a:xfrm>
+          <a:prstGeom prst="roundRect">
+            <a:avLst>
+              <a:gd name="adj" fmla="val 12000"/>
+            </a:avLst>
+          </a:prstGeom>
+          <a:solidFill>
+            <a:srgbClr val="F2F5F8"/>
+          </a:solidFill>
+          <a:ln w="12700">
+            <a:solidFill>
+              <a:srgbClr val="F2F5F8"/>
+            </a:solidFill>
+          </a:ln>
+          <a:effectLst/>
+        </p:spPr>
+        <p:txBody>
+          <a:bodyPr rtlCol="0" anchor="ctr" wrap="square" lIns="73152" rIns="73152" tIns="27432" bIns="27432"/>
+          <a:lstStyle/>
+          <a:p>
+            <a:pPr algn="l"/>
+            <a:r>
+              <a:rPr sz="1400" b="0">
+                <a:solidFill>
+                  <a:srgbClr val="1C2833"/>
+                </a:solidFill>
+                <a:latin typeface="Arial"/>
+              </a:rPr>
+              <a:t>pre-specified native-resolution protocol (matched view)</a:t>
+            </a:r>
+          </a:p>
+        </p:txBody>
+      </p:sp>
+      <p:sp>
+        <p:nvSpPr>
+          <p:cNvPr id="19" name="Rounded Rectangle 18"/>
+          <p:cNvSpPr/>
+          <p:nvPr/>
+        </p:nvSpPr>
+        <p:spPr>
+          <a:xfrm>
+            <a:off x="548640" y="2670048"/>
+            <a:ext cx="4937760" cy="640080"/>
+          </a:xfrm>
+          <a:prstGeom prst="roundRect">
+            <a:avLst>
+              <a:gd name="adj" fmla="val 12000"/>
+            </a:avLst>
+          </a:prstGeom>
+          <a:solidFill>
+            <a:srgbClr val="FBEEF0"/>
+          </a:solidFill>
+          <a:ln w="12700">
+            <a:solidFill>
+              <a:srgbClr val="FBEEF0"/>
+            </a:solidFill>
+          </a:ln>
+          <a:effectLst/>
+        </p:spPr>
+        <p:txBody>
+          <a:bodyPr rtlCol="0" anchor="ctr" wrap="square" lIns="73152" rIns="73152" tIns="27432" bIns="27432"/>
+          <a:lstStyle/>
+          <a:p>
+            <a:pPr algn="l"/>
+            <a:r>
+              <a:rPr sz="1400" b="0">
+                <a:solidFill>
+                  <a:srgbClr val="1C2833"/>
+                </a:solidFill>
+                <a:latin typeface="Arial"/>
+              </a:rPr>
+              <a:t>only SD v1.4 held out</a:t>
+            </a:r>
+          </a:p>
+        </p:txBody>
+      </p:sp>
+      <p:cxnSp>
+        <p:nvCxnSpPr>
+          <p:cNvPr id="20" name="Connector 19"/>
+          <p:cNvCxnSpPr/>
+          <p:nvPr/>
+        </p:nvCxnSpPr>
+        <p:spPr>
+          <a:xfrm>
+            <a:off x="5577840" y="2990088"/>
+            <a:ext cx="1051560" cy="0"/>
+          </a:xfrm>
+          <a:prstGeom prst="line">
+            <a:avLst/>
+          </a:prstGeom>
+          <a:ln w="22225">
+            <a:solidFill>
+              <a:srgbClr val="5D6D7E"/>
+            </a:solidFill>
+            <a:tailEnd type="triangle" w="med" len="med"/>
+          </a:ln>
+        </p:spPr>
+      </p:cxnSp>
+      <p:sp>
+        <p:nvSpPr>
+          <p:cNvPr id="21" name="Rounded Rectangle 20"/>
+          <p:cNvSpPr/>
+          <p:nvPr/>
+        </p:nvSpPr>
+        <p:spPr>
+          <a:xfrm>
+            <a:off x="6720840" y="2670048"/>
+            <a:ext cx="4937760" cy="640080"/>
+          </a:xfrm>
+          <a:prstGeom prst="roundRect">
+            <a:avLst>
+              <a:gd name="adj" fmla="val 12000"/>
+            </a:avLst>
+          </a:prstGeom>
+          <a:solidFill>
+            <a:srgbClr val="F2F5F8"/>
+          </a:solidFill>
+          <a:ln w="12700">
+            <a:solidFill>
+              <a:srgbClr val="F2F5F8"/>
+            </a:solidFill>
+          </a:ln>
+          <a:effectLst/>
+        </p:spPr>
+        <p:txBody>
+          <a:bodyPr rtlCol="0" anchor="ctr" wrap="square" lIns="73152" rIns="73152" tIns="27432" bIns="27432"/>
+          <a:lstStyle/>
+          <a:p>
+            <a:pPr algn="l"/>
+            <a:r>
+              <a:rPr sz="1400" b="0">
+                <a:solidFill>
+                  <a:srgbClr val="1C2833"/>
+                </a:solidFill>
+                <a:latin typeface="Arial"/>
+              </a:rPr>
+              <a:t>hold out each generator in turn</a:t>
+            </a:r>
+          </a:p>
+        </p:txBody>
+      </p:sp>
+      <p:sp>
+        <p:nvSpPr>
+          <p:cNvPr id="22" name="Rounded Rectangle 21"/>
+          <p:cNvSpPr/>
+          <p:nvPr/>
+        </p:nvSpPr>
+        <p:spPr>
+          <a:xfrm>
+            <a:off x="548640" y="3511296"/>
+            <a:ext cx="4937760" cy="640080"/>
+          </a:xfrm>
+          <a:prstGeom prst="roundRect">
+            <a:avLst>
+              <a:gd name="adj" fmla="val 12000"/>
+            </a:avLst>
+          </a:prstGeom>
+          <a:solidFill>
+            <a:srgbClr val="FBEEF0"/>
+          </a:solidFill>
+          <a:ln w="12700">
+            <a:solidFill>
+              <a:srgbClr val="FBEEF0"/>
+            </a:solidFill>
+          </a:ln>
+          <a:effectLst/>
+        </p:spPr>
+        <p:txBody>
+          <a:bodyPr rtlCol="0" anchor="ctr" wrap="square" lIns="73152" rIns="73152" tIns="27432" bIns="27432"/>
+          <a:lstStyle/>
+          <a:p>
+            <a:pPr algn="l"/>
+            <a:r>
+              <a:rPr sz="1400" b="0">
+                <a:solidFill>
+                  <a:srgbClr val="1C2833"/>
+                </a:solidFill>
+                <a:latin typeface="Arial"/>
+              </a:rPr>
+              <a:t>real and fake content not matched</a:t>
+            </a:r>
+          </a:p>
+        </p:txBody>
+      </p:sp>
+      <p:cxnSp>
+        <p:nvCxnSpPr>
+          <p:cNvPr id="23" name="Connector 22"/>
+          <p:cNvCxnSpPr/>
+          <p:nvPr/>
+        </p:nvCxnSpPr>
+        <p:spPr>
+          <a:xfrm>
+            <a:off x="5577840" y="3831336"/>
+            <a:ext cx="1051560" cy="0"/>
+          </a:xfrm>
+          <a:prstGeom prst="line">
+            <a:avLst/>
+          </a:prstGeom>
+          <a:ln w="22225">
+            <a:solidFill>
+              <a:srgbClr val="5D6D7E"/>
+            </a:solidFill>
+            <a:tailEnd type="triangle" w="med" len="med"/>
+          </a:ln>
+        </p:spPr>
+      </p:cxnSp>
+      <p:sp>
+        <p:nvSpPr>
+          <p:cNvPr id="24" name="Rounded Rectangle 23"/>
+          <p:cNvSpPr/>
+          <p:nvPr/>
+        </p:nvSpPr>
+        <p:spPr>
+          <a:xfrm>
+            <a:off x="6720840" y="3511296"/>
+            <a:ext cx="4937760" cy="640080"/>
+          </a:xfrm>
+          <a:prstGeom prst="roundRect">
+            <a:avLst>
+              <a:gd name="adj" fmla="val 12000"/>
+            </a:avLst>
+          </a:prstGeom>
+          <a:solidFill>
+            <a:srgbClr val="F2F5F8"/>
+          </a:solidFill>
+          <a:ln w="12700">
+            <a:solidFill>
+              <a:srgbClr val="F2F5F8"/>
+            </a:solidFill>
+          </a:ln>
+          <a:effectLst/>
+        </p:spPr>
+        <p:txBody>
+          <a:bodyPr rtlCol="0" anchor="ctr" wrap="square" lIns="73152" rIns="73152" tIns="27432" bIns="27432"/>
+          <a:lstStyle/>
+          <a:p>
+            <a:pPr algn="l"/>
+            <a:r>
+              <a:rPr sz="1400" b="0">
+                <a:solidFill>
+                  <a:srgbClr val="1C2833"/>
+                </a:solidFill>
+                <a:latin typeface="Arial"/>
+              </a:rPr>
+              <a:t>content-matched real / fake pairs</a:t>
+            </a:r>
+          </a:p>
+        </p:txBody>
+      </p:sp>
+      <p:sp>
+        <p:nvSpPr>
+          <p:cNvPr id="25" name="Rounded Rectangle 24"/>
+          <p:cNvSpPr/>
+          <p:nvPr/>
+        </p:nvSpPr>
+        <p:spPr>
+          <a:xfrm>
+            <a:off x="548640" y="4352544"/>
+            <a:ext cx="4937760" cy="640080"/>
+          </a:xfrm>
+          <a:prstGeom prst="roundRect">
+            <a:avLst>
+              <a:gd name="adj" fmla="val 12000"/>
+            </a:avLst>
+          </a:prstGeom>
+          <a:solidFill>
+            <a:srgbClr val="FBEEF0"/>
+          </a:solidFill>
+          <a:ln w="12700">
+            <a:solidFill>
+              <a:srgbClr val="FBEEF0"/>
+            </a:solidFill>
+          </a:ln>
+          <a:effectLst/>
+        </p:spPr>
+        <p:txBody>
+          <a:bodyPr rtlCol="0" anchor="ctr" wrap="square" lIns="73152" rIns="73152" tIns="27432" bIns="27432"/>
+          <a:lstStyle/>
+          <a:p>
+            <a:pPr algn="l"/>
+            <a:r>
+              <a:rPr sz="1400" b="0">
+                <a:solidFill>
+                  <a:srgbClr val="1C2833"/>
+                </a:solidFill>
+                <a:latin typeface="Arial"/>
+              </a:rPr>
+              <a:t>one JPEG encoder (Pillow 4:2:0)</a:t>
+            </a:r>
+          </a:p>
+        </p:txBody>
+      </p:sp>
+      <p:cxnSp>
+        <p:nvCxnSpPr>
+          <p:cNvPr id="26" name="Connector 25"/>
+          <p:cNvCxnSpPr/>
+          <p:nvPr/>
+        </p:nvCxnSpPr>
+        <p:spPr>
+          <a:xfrm>
+            <a:off x="5577840" y="4672584"/>
+            <a:ext cx="1051560" cy="0"/>
+          </a:xfrm>
+          <a:prstGeom prst="line">
+            <a:avLst/>
+          </a:prstGeom>
+          <a:ln w="22225">
+            <a:solidFill>
+              <a:srgbClr val="5D6D7E"/>
+            </a:solidFill>
+            <a:tailEnd type="triangle" w="med" len="med"/>
+          </a:ln>
+        </p:spPr>
+      </p:cxnSp>
+      <p:sp>
+        <p:nvSpPr>
+          <p:cNvPr id="27" name="Rounded Rectangle 26"/>
+          <p:cNvSpPr/>
+          <p:nvPr/>
+        </p:nvSpPr>
+        <p:spPr>
+          <a:xfrm>
+            <a:off x="6720840" y="4352544"/>
+            <a:ext cx="4937760" cy="640080"/>
+          </a:xfrm>
+          <a:prstGeom prst="roundRect">
+            <a:avLst>
+              <a:gd name="adj" fmla="val 12000"/>
+            </a:avLst>
+          </a:prstGeom>
+          <a:solidFill>
+            <a:srgbClr val="F2F5F8"/>
+          </a:solidFill>
+          <a:ln w="12700">
+            <a:solidFill>
+              <a:srgbClr val="F2F5F8"/>
+            </a:solidFill>
+          </a:ln>
+          <a:effectLst/>
+        </p:spPr>
+        <p:txBody>
+          <a:bodyPr rtlCol="0" anchor="ctr" wrap="square" lIns="73152" rIns="73152" tIns="27432" bIns="27432"/>
+          <a:lstStyle/>
+          <a:p>
+            <a:pPr algn="l"/>
+            <a:r>
+              <a:rPr sz="1400" b="0">
+                <a:solidFill>
+                  <a:srgbClr val="1C2833"/>
+                </a:solidFill>
+                <a:latin typeface="Arial"/>
+              </a:rPr>
+              <a:t>a second encoder and subsampling</a:t>
+            </a:r>
+          </a:p>
+        </p:txBody>
+      </p:sp>
+      <p:sp>
+        <p:nvSpPr>
+          <p:cNvPr id="28" name="Rounded Rectangle 27"/>
+          <p:cNvSpPr/>
+          <p:nvPr/>
+        </p:nvSpPr>
+        <p:spPr>
+          <a:xfrm>
+            <a:off x="548640" y="5193792"/>
+            <a:ext cx="4937760" cy="640080"/>
+          </a:xfrm>
+          <a:prstGeom prst="roundRect">
+            <a:avLst>
+              <a:gd name="adj" fmla="val 12000"/>
+            </a:avLst>
+          </a:prstGeom>
+          <a:solidFill>
+            <a:srgbClr val="FBEEF0"/>
+          </a:solidFill>
+          <a:ln w="12700">
+            <a:solidFill>
+              <a:srgbClr val="FBEEF0"/>
+            </a:solidFill>
+          </a:ln>
+          <a:effectLst/>
+        </p:spPr>
+        <p:txBody>
+          <a:bodyPr rtlCol="0" anchor="ctr" wrap="square" lIns="73152" rIns="73152" tIns="27432" bIns="27432"/>
+          <a:lstStyle/>
+          <a:p>
+            <a:pPr algn="l"/>
+            <a:r>
+              <a:rPr sz="1400" b="0">
+                <a:solidFill>
+                  <a:srgbClr val="1C2833"/>
+                </a:solidFill>
+                <a:latin typeface="Arial"/>
+              </a:rPr>
+              <a:t>one dataset, one random split</a:t>
+            </a:r>
+          </a:p>
+        </p:txBody>
+      </p:sp>
+      <p:cxnSp>
+        <p:nvCxnSpPr>
+          <p:cNvPr id="29" name="Connector 28"/>
+          <p:cNvCxnSpPr/>
+          <p:nvPr/>
+        </p:nvCxnSpPr>
+        <p:spPr>
+          <a:xfrm>
+            <a:off x="5577840" y="5513832"/>
+            <a:ext cx="1051560" cy="0"/>
+          </a:xfrm>
+          <a:prstGeom prst="line">
+            <a:avLst/>
+          </a:prstGeom>
+          <a:ln w="22225">
+            <a:solidFill>
+              <a:srgbClr val="5D6D7E"/>
+            </a:solidFill>
+            <a:tailEnd type="triangle" w="med" len="med"/>
+          </a:ln>
+        </p:spPr>
+      </p:cxnSp>
+      <p:sp>
+        <p:nvSpPr>
+          <p:cNvPr id="30" name="Rounded Rectangle 29"/>
+          <p:cNvSpPr/>
+          <p:nvPr/>
+        </p:nvSpPr>
+        <p:spPr>
+          <a:xfrm>
+            <a:off x="6720840" y="5193792"/>
+            <a:ext cx="4937760" cy="640080"/>
+          </a:xfrm>
+          <a:prstGeom prst="roundRect">
+            <a:avLst>
+              <a:gd name="adj" fmla="val 12000"/>
+            </a:avLst>
+          </a:prstGeom>
+          <a:solidFill>
+            <a:srgbClr val="F2F5F8"/>
+          </a:solidFill>
+          <a:ln w="12700">
+            <a:solidFill>
+              <a:srgbClr val="F2F5F8"/>
+            </a:solidFill>
+          </a:ln>
+          <a:effectLst/>
+        </p:spPr>
+        <p:txBody>
+          <a:bodyPr rtlCol="0" anchor="ctr" wrap="square" lIns="73152" rIns="73152" tIns="27432" bIns="27432"/>
+          <a:lstStyle/>
+          <a:p>
+            <a:pPr algn="l"/>
+            <a:r>
+              <a:rPr sz="1400" b="0">
+                <a:solidFill>
+                  <a:srgbClr val="1C2833"/>
+                </a:solidFill>
+                <a:latin typeface="Arial"/>
+              </a:rPr>
+              <a:t>repeated splits and a second dataset</a:t>
+            </a:r>
+          </a:p>
+        </p:txBody>
+      </p:sp>
+      <p:sp>
+        <p:nvSpPr>
+          <p:cNvPr id="31" name="TextBox 30"/>
+          <p:cNvSpPr txBox="1"/>
+          <p:nvPr/>
+        </p:nvSpPr>
+        <p:spPr>
+          <a:xfrm>
+            <a:off x="548640" y="6510528"/>
+            <a:ext cx="8229600" cy="237744"/>
+          </a:xfrm>
+          <a:prstGeom prst="rect">
+            <a:avLst/>
+          </a:prstGeom>
+          <a:noFill/>
+        </p:spPr>
+        <p:txBody>
+          <a:bodyPr wrap="square" lIns="0" rIns="0" tIns="0" bIns="0">
+            <a:spAutoFit/>
+          </a:bodyPr>
+          <a:lstStyle/>
+          <a:p>
+            <a:pPr algn="l"/>
+            <a:r>
+              <a:rPr sz="1000" b="0" i="0">
+                <a:solidFill>
+                  <a:srgbClr val="5D6D7E"/>
+                </a:solidFill>
+                <a:latin typeface="Arial"/>
+              </a:rPr>
+              <a:t>CSE 4883 Digital Image Processing  ·  Same score, different story</a:t>
+            </a:r>
+          </a:p>
+        </p:txBody>
+      </p:sp>
+      <p:sp>
+        <p:nvSpPr>
+          <p:cNvPr id="32" name="TextBox 31"/>
+          <p:cNvSpPr txBox="1"/>
+          <p:nvPr/>
+        </p:nvSpPr>
+        <p:spPr>
+          <a:xfrm>
+            <a:off x="10362895" y="6510528"/>
+            <a:ext cx="1280160" cy="237744"/>
+          </a:xfrm>
+          <a:prstGeom prst="rect">
+            <a:avLst/>
+          </a:prstGeom>
+          <a:noFill/>
+        </p:spPr>
+        <p:txBody>
+          <a:bodyPr wrap="square" lIns="0" rIns="0" tIns="0" bIns="0">
+            <a:spAutoFit/>
+          </a:bodyPr>
+          <a:lstStyle/>
+          <a:p>
+            <a:pPr algn="r"/>
+            <a:r>
+              <a:rPr sz="1000" b="0" i="0">
+                <a:solidFill>
+                  <a:srgbClr val="5D6D7E"/>
+                </a:solidFill>
+                <a:latin typeface="Arial"/>
+              </a:rPr>
+              <a:t>13 / 14</a:t>
+            </a:r>
+          </a:p>
+        </p:txBody>
+      </p:sp>
+    </p:spTree>
+  </p:cSld>
+  <p:clrMapOvr>
+    <a:masterClrMapping/>
+  </p:clrMapOvr>
+</p:sld>
+</file>
+
+<file path=ppt/slides/slide14.xml><?xml version="1.0" encoding="utf-8"?>
+<p:sld xmlns:a="http://schemas.openxmlformats.org/drawingml/2006/main" xmlns:p="http://schemas.openxmlformats.org/presentationml/2006/main" xmlns:r="http://schemas.openxmlformats.org/officeDocument/2006/relationships">
+  <p:cSld>
+    <p:spTree>
+      <p:nvGrpSpPr>
+        <p:cNvPr id="1" name=""/>
+        <p:cNvGrpSpPr/>
+        <p:nvPr/>
+      </p:nvGrpSpPr>
+      <p:grpSpPr/>
+      <p:sp>
+        <p:nvSpPr>
           <p:cNvPr id="2" name="Rectangle 1"/>
           <p:cNvSpPr/>
           <p:nvPr/>
@@ -7869,7 +8485,7 @@
                 </a:solidFill>
                 <a:latin typeface="Arial"/>
               </a:rPr>
-              <a:t>13 / 13</a:t>
+              <a:t>14 / 14</a:t>
             </a:r>
           </a:p>
         </p:txBody>
@@ -8425,7 +9041,7 @@
                 </a:solidFill>
                 <a:latin typeface="Arial"/>
               </a:rPr>
-              <a:t>2 / 13</a:t>
+              <a:t>2 / 14</a:t>
             </a:r>
           </a:p>
         </p:txBody>
@@ -9435,7 +10051,7 @@
                 </a:solidFill>
                 <a:latin typeface="Arial"/>
               </a:rPr>
-              <a:t>3 / 13</a:t>
+              <a:t>3 / 14</a:t>
             </a:r>
           </a:p>
         </p:txBody>
@@ -9460,36 +10076,7 @@
       <p:grpSpPr/>
       <p:sp>
         <p:nvSpPr>
-          <p:cNvPr id="2" name="Rectangle 1"/>
-          <p:cNvSpPr/>
-          <p:nvPr/>
-        </p:nvSpPr>
-        <p:spPr>
-          <a:xfrm>
-            <a:off x="0" y="0"/>
-            <a:ext cx="12191695" cy="6858000"/>
-          </a:xfrm>
-          <a:prstGeom prst="rect">
-            <a:avLst/>
-          </a:prstGeom>
-          <a:solidFill>
-            <a:srgbClr val="FBEEF0"/>
-          </a:solidFill>
-          <a:ln>
-            <a:noFill/>
-          </a:ln>
-        </p:spPr>
-        <p:txBody>
-          <a:bodyPr rtlCol="0" anchor="ctr"/>
-          <a:lstStyle/>
-          <a:p>
-            <a:pPr algn="ctr"/>
-          </a:p>
-        </p:txBody>
-      </p:sp>
-      <p:sp>
-        <p:nvSpPr>
-          <p:cNvPr id="3" name="TextBox 2"/>
+          <p:cNvPr id="2" name="TextBox 1"/>
           <p:cNvSpPr txBox="1"/>
           <p:nvPr/>
         </p:nvSpPr>
@@ -9524,7 +10111,7 @@
       </p:sp>
       <p:sp>
         <p:nvSpPr>
-          <p:cNvPr id="4" name="TextBox 3"/>
+          <p:cNvPr id="3" name="TextBox 2"/>
           <p:cNvSpPr txBox="1"/>
           <p:nvPr/>
         </p:nvSpPr>
@@ -9559,7 +10146,7 @@
       </p:sp>
       <p:sp>
         <p:nvSpPr>
-          <p:cNvPr id="5" name="Rectangle 4"/>
+          <p:cNvPr id="4" name="Rectangle 3"/>
           <p:cNvSpPr/>
           <p:nvPr/>
         </p:nvSpPr>
@@ -9588,7 +10175,7 @@
       </p:sp>
       <p:sp>
         <p:nvSpPr>
-          <p:cNvPr id="6" name="TextBox 5"/>
+          <p:cNvPr id="5" name="TextBox 4"/>
           <p:cNvSpPr txBox="1"/>
           <p:nvPr/>
         </p:nvSpPr>
@@ -9623,7 +10210,7 @@
       </p:sp>
       <p:sp>
         <p:nvSpPr>
-          <p:cNvPr id="7" name="TextBox 6"/>
+          <p:cNvPr id="6" name="TextBox 5"/>
           <p:cNvSpPr txBox="1"/>
           <p:nvPr/>
         </p:nvSpPr>
@@ -9658,7 +10245,7 @@
       </p:sp>
       <p:sp>
         <p:nvSpPr>
-          <p:cNvPr id="8" name="TextBox 7"/>
+          <p:cNvPr id="7" name="TextBox 6"/>
           <p:cNvSpPr txBox="1"/>
           <p:nvPr/>
         </p:nvSpPr>
@@ -9693,7 +10280,7 @@
       </p:sp>
       <p:sp>
         <p:nvSpPr>
-          <p:cNvPr id="9" name="TextBox 8"/>
+          <p:cNvPr id="8" name="TextBox 7"/>
           <p:cNvSpPr txBox="1"/>
           <p:nvPr/>
         </p:nvSpPr>
@@ -9728,7 +10315,7 @@
       </p:sp>
       <p:sp>
         <p:nvSpPr>
-          <p:cNvPr id="10" name="TextBox 9"/>
+          <p:cNvPr id="9" name="TextBox 8"/>
           <p:cNvSpPr txBox="1"/>
           <p:nvPr/>
         </p:nvSpPr>
@@ -9763,7 +10350,7 @@
       </p:sp>
       <p:sp>
         <p:nvSpPr>
-          <p:cNvPr id="11" name="Rectangle 10"/>
+          <p:cNvPr id="10" name="Rectangle 9"/>
           <p:cNvSpPr/>
           <p:nvPr/>
         </p:nvSpPr>
@@ -9792,7 +10379,7 @@
       </p:sp>
       <p:sp>
         <p:nvSpPr>
-          <p:cNvPr id="12" name="TextBox 11"/>
+          <p:cNvPr id="11" name="TextBox 10"/>
           <p:cNvSpPr txBox="1"/>
           <p:nvPr/>
         </p:nvSpPr>
@@ -9820,14 +10407,14 @@
                 </a:solidFill>
                 <a:latin typeface="Georgia"/>
               </a:rPr>
-              <a:t>Novelty: same score, different story</a:t>
-            </a:r>
-          </a:p>
-        </p:txBody>
-      </p:sp>
-      <p:sp>
-        <p:nvSpPr>
-          <p:cNvPr id="13" name="TextBox 12"/>
+              <a:t>Novelty: we audit features, not detectors</a:t>
+            </a:r>
+          </a:p>
+        </p:txBody>
+      </p:sp>
+      <p:sp>
+        <p:nvSpPr>
+          <p:cNvPr id="12" name="TextBox 11"/>
           <p:cNvSpPr txBox="1"/>
           <p:nvPr/>
         </p:nvSpPr>
@@ -9862,631 +10449,539 @@
       </p:sp>
       <p:sp>
         <p:nvSpPr>
-          <p:cNvPr id="14" name="TextBox 13"/>
-          <p:cNvSpPr txBox="1"/>
-          <p:nvPr/>
-        </p:nvSpPr>
-        <p:spPr>
-          <a:xfrm>
-            <a:off x="548640" y="1600200"/>
-            <a:ext cx="4754880" cy="2651760"/>
-          </a:xfrm>
-          <a:prstGeom prst="rect">
-            <a:avLst/>
-          </a:prstGeom>
-          <a:noFill/>
-        </p:spPr>
-        <p:txBody>
-          <a:bodyPr wrap="square" lIns="0" rIns="0" tIns="0" bIns="0">
-            <a:spAutoFit/>
-          </a:bodyPr>
-          <a:lstStyle/>
-          <a:p>
-            <a:pPr algn="l">
-              <a:lnSpc>
-                <a:spcPct val="125000"/>
-              </a:lnSpc>
-            </a:pPr>
-            <a:r>
-              <a:rPr sz="2400" b="0">
+          <p:cNvPr id="13" name="TextBox 12"/>
+          <p:cNvSpPr txBox="1"/>
+          <p:nvPr/>
+        </p:nvSpPr>
+        <p:spPr>
+          <a:xfrm>
+            <a:off x="548640" y="1463040"/>
+            <a:ext cx="4846320" cy="320040"/>
+          </a:xfrm>
+          <a:prstGeom prst="rect">
+            <a:avLst/>
+          </a:prstGeom>
+          <a:noFill/>
+        </p:spPr>
+        <p:txBody>
+          <a:bodyPr wrap="square" lIns="0" rIns="0" tIns="0" bIns="0">
+            <a:spAutoFit/>
+          </a:bodyPr>
+          <a:lstStyle/>
+          <a:p>
+            <a:pPr algn="l"/>
+            <a:r>
+              <a:rPr sz="1500" b="1" i="0">
+                <a:solidFill>
+                  <a:srgbClr val="5D6D7E"/>
+                </a:solidFill>
+                <a:latin typeface="Arial"/>
+              </a:rPr>
+              <a:t>Prior work  ·  whole detectors</a:t>
+            </a:r>
+          </a:p>
+        </p:txBody>
+      </p:sp>
+      <p:sp>
+        <p:nvSpPr>
+          <p:cNvPr id="14" name="Rounded Rectangle 13"/>
+          <p:cNvSpPr/>
+          <p:nvPr/>
+        </p:nvSpPr>
+        <p:spPr>
+          <a:xfrm>
+            <a:off x="548640" y="1920240"/>
+            <a:ext cx="4846320" cy="777240"/>
+          </a:xfrm>
+          <a:prstGeom prst="roundRect">
+            <a:avLst>
+              <a:gd name="adj" fmla="val 12000"/>
+            </a:avLst>
+          </a:prstGeom>
+          <a:solidFill>
+            <a:srgbClr val="F2F5F8"/>
+          </a:solidFill>
+          <a:ln w="12700">
+            <a:solidFill>
+              <a:srgbClr val="F2F5F8"/>
+            </a:solidFill>
+          </a:ln>
+          <a:effectLst/>
+        </p:spPr>
+        <p:txBody>
+          <a:bodyPr rtlCol="0" anchor="ctr" wrap="square" lIns="73152" rIns="73152" tIns="27432" bIns="27432"/>
+          <a:lstStyle/>
+          <a:p>
+            <a:pPr algn="l"/>
+            <a:r>
+              <a:rPr sz="1600" b="1">
                 <a:solidFill>
                   <a:srgbClr val="1C2833"/>
                 </a:solidFill>
-                <a:latin typeface="Georgia"/>
-              </a:rPr>
-              <a:t>Give every image the same resampling. The pooled AUROC barely moves (</a:t>
-            </a:r>
-            <a:r>
-              <a:rPr sz="2400" b="1">
+                <a:latin typeface="Arial"/>
+              </a:rPr>
+              <a:t>Grommelt et al. 2024</a:t>
+            </a:r>
+          </a:p>
+          <a:p>
+            <a:pPr algn="l"/>
+            <a:r>
+              <a:rPr sz="1300" b="0">
+                <a:solidFill>
+                  <a:srgbClr val="5D6D7E"/>
+                </a:solidFill>
+                <a:latin typeface="Arial"/>
+              </a:rPr>
+              <a:t>JPEG and size bias</a:t>
+            </a:r>
+          </a:p>
+        </p:txBody>
+      </p:sp>
+      <p:sp>
+        <p:nvSpPr>
+          <p:cNvPr id="15" name="Rounded Rectangle 14"/>
+          <p:cNvSpPr/>
+          <p:nvPr/>
+        </p:nvSpPr>
+        <p:spPr>
+          <a:xfrm>
+            <a:off x="548640" y="2880360"/>
+            <a:ext cx="4846320" cy="777240"/>
+          </a:xfrm>
+          <a:prstGeom prst="roundRect">
+            <a:avLst>
+              <a:gd name="adj" fmla="val 12000"/>
+            </a:avLst>
+          </a:prstGeom>
+          <a:solidFill>
+            <a:srgbClr val="F2F5F8"/>
+          </a:solidFill>
+          <a:ln w="12700">
+            <a:solidFill>
+              <a:srgbClr val="F2F5F8"/>
+            </a:solidFill>
+          </a:ln>
+          <a:effectLst/>
+        </p:spPr>
+        <p:txBody>
+          <a:bodyPr rtlCol="0" anchor="ctr" wrap="square" lIns="73152" rIns="73152" tIns="27432" bIns="27432"/>
+          <a:lstStyle/>
+          <a:p>
+            <a:pPr algn="l"/>
+            <a:r>
+              <a:rPr sz="1600" b="1">
+                <a:solidFill>
+                  <a:srgbClr val="1C2833"/>
+                </a:solidFill>
+                <a:latin typeface="Arial"/>
+              </a:rPr>
+              <a:t>B-Free 2025</a:t>
+            </a:r>
+          </a:p>
+          <a:p>
+            <a:pPr algn="l"/>
+            <a:r>
+              <a:rPr sz="1300" b="0">
+                <a:solidFill>
+                  <a:srgbClr val="5D6D7E"/>
+                </a:solidFill>
+                <a:latin typeface="Arial"/>
+              </a:rPr>
+              <a:t>content, format, size</a:t>
+            </a:r>
+          </a:p>
+        </p:txBody>
+      </p:sp>
+      <p:sp>
+        <p:nvSpPr>
+          <p:cNvPr id="16" name="Rounded Rectangle 15"/>
+          <p:cNvSpPr/>
+          <p:nvPr/>
+        </p:nvSpPr>
+        <p:spPr>
+          <a:xfrm>
+            <a:off x="548640" y="3840480"/>
+            <a:ext cx="4846320" cy="777240"/>
+          </a:xfrm>
+          <a:prstGeom prst="roundRect">
+            <a:avLst>
+              <a:gd name="adj" fmla="val 12000"/>
+            </a:avLst>
+          </a:prstGeom>
+          <a:solidFill>
+            <a:srgbClr val="F2F5F8"/>
+          </a:solidFill>
+          <a:ln w="12700">
+            <a:solidFill>
+              <a:srgbClr val="F2F5F8"/>
+            </a:solidFill>
+          </a:ln>
+          <a:effectLst/>
+        </p:spPr>
+        <p:txBody>
+          <a:bodyPr rtlCol="0" anchor="ctr" wrap="square" lIns="73152" rIns="73152" tIns="27432" bIns="27432"/>
+          <a:lstStyle/>
+          <a:p>
+            <a:pPr algn="l"/>
+            <a:r>
+              <a:rPr sz="1600" b="1">
+                <a:solidFill>
+                  <a:srgbClr val="1C2833"/>
+                </a:solidFill>
+                <a:latin typeface="Arial"/>
+              </a:rPr>
+              <a:t>Zhou &amp; Wang 2026</a:t>
+            </a:r>
+          </a:p>
+          <a:p>
+            <a:pPr algn="l"/>
+            <a:r>
+              <a:rPr sz="1300" b="0">
+                <a:solidFill>
+                  <a:srgbClr val="5D6D7E"/>
+                </a:solidFill>
+                <a:latin typeface="Arial"/>
+              </a:rPr>
+              <a:t>resize vs native, JPEG</a:t>
+            </a:r>
+          </a:p>
+        </p:txBody>
+      </p:sp>
+      <p:cxnSp>
+        <p:nvCxnSpPr>
+          <p:cNvPr id="17" name="Connector 16"/>
+          <p:cNvCxnSpPr/>
+          <p:nvPr/>
+        </p:nvCxnSpPr>
+        <p:spPr>
+          <a:xfrm>
+            <a:off x="5532120" y="3246120"/>
+            <a:ext cx="777240" cy="0"/>
+          </a:xfrm>
+          <a:prstGeom prst="line">
+            <a:avLst/>
+          </a:prstGeom>
+          <a:ln w="31750">
+            <a:solidFill>
+              <a:srgbClr val="B2182B"/>
+            </a:solidFill>
+            <a:tailEnd type="triangle" w="med" len="med"/>
+          </a:ln>
+        </p:spPr>
+      </p:cxnSp>
+      <p:sp>
+        <p:nvSpPr>
+          <p:cNvPr id="18" name="TextBox 17"/>
+          <p:cNvSpPr txBox="1"/>
+          <p:nvPr/>
+        </p:nvSpPr>
+        <p:spPr>
+          <a:xfrm>
+            <a:off x="5468112" y="2697480"/>
+            <a:ext cx="914400" cy="457200"/>
+          </a:xfrm>
+          <a:prstGeom prst="rect">
+            <a:avLst/>
+          </a:prstGeom>
+          <a:noFill/>
+        </p:spPr>
+        <p:txBody>
+          <a:bodyPr wrap="square" lIns="0" rIns="0" tIns="0" bIns="0">
+            <a:spAutoFit/>
+          </a:bodyPr>
+          <a:lstStyle/>
+          <a:p>
+            <a:pPr algn="ctr"/>
+            <a:r>
+              <a:rPr sz="1150" b="0" i="0">
+                <a:solidFill>
+                  <a:srgbClr val="5D6D7E"/>
+                </a:solidFill>
+                <a:latin typeface="Arial"/>
+              </a:rPr>
+              <a:t>one level</a:t>
+            </a:r>
+          </a:p>
+          <a:p>
+            <a:pPr algn="ctr"/>
+            <a:r>
+              <a:rPr sz="1150" b="0" i="0">
+                <a:solidFill>
+                  <a:srgbClr val="5D6D7E"/>
+                </a:solidFill>
+                <a:latin typeface="Arial"/>
+              </a:rPr>
+              <a:t>down</a:t>
+            </a:r>
+          </a:p>
+        </p:txBody>
+      </p:sp>
+      <p:sp>
+        <p:nvSpPr>
+          <p:cNvPr id="19" name="Rounded Rectangle 18"/>
+          <p:cNvSpPr/>
+          <p:nvPr/>
+        </p:nvSpPr>
+        <p:spPr>
+          <a:xfrm>
+            <a:off x="6446520" y="1463040"/>
+            <a:ext cx="5193792" cy="3840480"/>
+          </a:xfrm>
+          <a:prstGeom prst="roundRect">
+            <a:avLst>
+              <a:gd name="adj" fmla="val 12000"/>
+            </a:avLst>
+          </a:prstGeom>
+          <a:solidFill>
+            <a:srgbClr val="FFFFFF"/>
+          </a:solidFill>
+          <a:ln w="25400">
+            <a:solidFill>
+              <a:srgbClr val="B2182B"/>
+            </a:solidFill>
+          </a:ln>
+          <a:effectLst/>
+        </p:spPr>
+        <p:txBody>
+          <a:bodyPr rtlCol="0" anchor="ctr" wrap="square" lIns="73152" rIns="73152" tIns="27432" bIns="27432"/>
+          <a:lstStyle/>
+          <a:p>
+            <a:pPr algn="ctr"/>
+            <a:r>
+              <a:rPr sz="400" b="0">
+                <a:solidFill>
+                  <a:srgbClr val="1C2833"/>
+                </a:solidFill>
+                <a:latin typeface="Arial"/>
+              </a:rPr>
+              <a:t/>
+            </a:r>
+          </a:p>
+        </p:txBody>
+      </p:sp>
+      <p:sp>
+        <p:nvSpPr>
+          <p:cNvPr id="20" name="TextBox 19"/>
+          <p:cNvSpPr txBox="1"/>
+          <p:nvPr/>
+        </p:nvSpPr>
+        <p:spPr>
+          <a:xfrm>
+            <a:off x="6720840" y="1645920"/>
+            <a:ext cx="4663440" cy="411480"/>
+          </a:xfrm>
+          <a:prstGeom prst="rect">
+            <a:avLst/>
+          </a:prstGeom>
+          <a:noFill/>
+        </p:spPr>
+        <p:txBody>
+          <a:bodyPr wrap="square" lIns="0" rIns="0" tIns="0" bIns="0">
+            <a:spAutoFit/>
+          </a:bodyPr>
+          <a:lstStyle/>
+          <a:p>
+            <a:pPr algn="l"/>
+            <a:r>
+              <a:rPr sz="1900" b="1" i="0">
+                <a:solidFill>
+                  <a:srgbClr val="B2182B"/>
+                </a:solidFill>
+                <a:latin typeface="Arial"/>
+              </a:rPr>
+              <a:t>This work  ·  14 named features</a:t>
+            </a:r>
+          </a:p>
+        </p:txBody>
+      </p:sp>
+      <p:sp>
+        <p:nvSpPr>
+          <p:cNvPr id="21" name="Rounded Rectangle 20"/>
+          <p:cNvSpPr/>
+          <p:nvPr/>
+        </p:nvSpPr>
+        <p:spPr>
+          <a:xfrm>
+            <a:off x="6720840" y="2240280"/>
+            <a:ext cx="4663440" cy="804672"/>
+          </a:xfrm>
+          <a:prstGeom prst="roundRect">
+            <a:avLst>
+              <a:gd name="adj" fmla="val 12000"/>
+            </a:avLst>
+          </a:prstGeom>
+          <a:solidFill>
+            <a:srgbClr val="F2F5F8"/>
+          </a:solidFill>
+          <a:ln w="12700">
+            <a:solidFill>
+              <a:srgbClr val="F2F5F8"/>
+            </a:solidFill>
+          </a:ln>
+          <a:effectLst/>
+        </p:spPr>
+        <p:txBody>
+          <a:bodyPr rtlCol="0" anchor="ctr" wrap="square" lIns="73152" rIns="73152" tIns="27432" bIns="27432"/>
+          <a:lstStyle/>
+          <a:p>
+            <a:pPr algn="l"/>
+            <a:r>
+              <a:rPr sz="1600" b="1">
                 <a:solidFill>
                   <a:srgbClr val="1F3A5F"/>
                 </a:solidFill>
                 <a:latin typeface="Arial"/>
               </a:rPr>
-              <a:t>0.796 → 0.802</a:t>
-            </a:r>
-            <a:r>
-              <a:rPr sz="2400" b="0">
-                <a:solidFill>
-                  <a:srgbClr val="1C2833"/>
-                </a:solidFill>
-                <a:latin typeface="Georgia"/>
-              </a:rPr>
-              <a:t>), but per-generator AUROC shifts by </a:t>
-            </a:r>
-            <a:r>
-              <a:rPr sz="2400" b="1">
-                <a:solidFill>
-                  <a:srgbClr val="B2182B"/>
-                </a:solidFill>
-                <a:latin typeface="Arial"/>
-              </a:rPr>
-              <a:t>−0.17 to +0.30</a:t>
-            </a:r>
-            <a:r>
-              <a:rPr sz="2400" b="0">
-                <a:solidFill>
-                  <a:srgbClr val="1C2833"/>
-                </a:solidFill>
-                <a:latin typeface="Georgia"/>
-              </a:rPr>
-              <a:t>.</a:t>
-            </a:r>
-          </a:p>
-        </p:txBody>
-      </p:sp>
-      <p:sp>
-        <p:nvSpPr>
-          <p:cNvPr id="15" name="Rectangle 14"/>
+              <a:t>Per feature, per generator</a:t>
+            </a:r>
+          </a:p>
+          <a:p>
+            <a:pPr algn="l"/>
+            <a:r>
+              <a:rPr sz="1250" b="0">
+                <a:solidFill>
+                  <a:srgbClr val="5D6D7E"/>
+                </a:solidFill>
+                <a:latin typeface="Arial"/>
+              </a:rPr>
+              <a:t>which statistic moves, and for which generator</a:t>
+            </a:r>
+          </a:p>
+        </p:txBody>
+      </p:sp>
+      <p:sp>
+        <p:nvSpPr>
+          <p:cNvPr id="22" name="Rounded Rectangle 21"/>
           <p:cNvSpPr/>
           <p:nvPr/>
         </p:nvSpPr>
         <p:spPr>
           <a:xfrm>
-            <a:off x="548640" y="4343400"/>
-            <a:ext cx="4754880" cy="9525"/>
-          </a:xfrm>
-          <a:prstGeom prst="rect">
-            <a:avLst/>
+            <a:off x="6720840" y="3227832"/>
+            <a:ext cx="4663440" cy="804672"/>
+          </a:xfrm>
+          <a:prstGeom prst="roundRect">
+            <a:avLst>
+              <a:gd name="adj" fmla="val 12000"/>
+            </a:avLst>
           </a:prstGeom>
           <a:solidFill>
-            <a:srgbClr val="D5DBDB"/>
+            <a:srgbClr val="F2F5F8"/>
           </a:solidFill>
-          <a:ln>
-            <a:noFill/>
+          <a:ln w="12700">
+            <a:solidFill>
+              <a:srgbClr val="F2F5F8"/>
+            </a:solidFill>
           </a:ln>
-        </p:spPr>
-        <p:txBody>
-          <a:bodyPr rtlCol="0" anchor="ctr"/>
+          <a:effectLst/>
+        </p:spPr>
+        <p:txBody>
+          <a:bodyPr rtlCol="0" anchor="ctr" wrap="square" lIns="73152" rIns="73152" tIns="27432" bIns="27432"/>
+          <a:lstStyle/>
+          <a:p>
+            <a:pPr algn="l"/>
+            <a:r>
+              <a:rPr sz="1600" b="1">
+                <a:solidFill>
+                  <a:srgbClr val="1F3A5F"/>
+                </a:solidFill>
+                <a:latin typeface="Arial"/>
+              </a:rPr>
+              <a:t>Two stresses, one fixed protocol</a:t>
+            </a:r>
+          </a:p>
+          <a:p>
+            <a:pPr algn="l"/>
+            <a:r>
+              <a:rPr sz="1250" b="0">
+                <a:solidFill>
+                  <a:srgbClr val="5D6D7E"/>
+                </a:solidFill>
+                <a:latin typeface="Arial"/>
+              </a:rPr>
+              <a:t>matched JPEG  +  unseen generator</a:t>
+            </a:r>
+          </a:p>
+        </p:txBody>
+      </p:sp>
+      <p:sp>
+        <p:nvSpPr>
+          <p:cNvPr id="23" name="Rounded Rectangle 22"/>
+          <p:cNvSpPr/>
+          <p:nvPr/>
+        </p:nvSpPr>
+        <p:spPr>
+          <a:xfrm>
+            <a:off x="6720840" y="4215384"/>
+            <a:ext cx="4663440" cy="804672"/>
+          </a:xfrm>
+          <a:prstGeom prst="roundRect">
+            <a:avLst>
+              <a:gd name="adj" fmla="val 12000"/>
+            </a:avLst>
+          </a:prstGeom>
+          <a:solidFill>
+            <a:srgbClr val="F2F5F8"/>
+          </a:solidFill>
+          <a:ln w="12700">
+            <a:solidFill>
+              <a:srgbClr val="F2F5F8"/>
+            </a:solidFill>
+          </a:ln>
+          <a:effectLst/>
+        </p:spPr>
+        <p:txBody>
+          <a:bodyPr rtlCol="0" anchor="ctr" wrap="square" lIns="73152" rIns="73152" tIns="27432" bIns="27432"/>
+          <a:lstStyle/>
+          <a:p>
+            <a:pPr algn="l"/>
+            <a:r>
+              <a:rPr sz="1600" b="1">
+                <a:solidFill>
+                  <a:srgbClr val="1F3A5F"/>
+                </a:solidFill>
+                <a:latin typeface="Arial"/>
+              </a:rPr>
+              <a:t>Mechanism isolated</a:t>
+            </a:r>
+          </a:p>
+          <a:p>
+            <a:pPr algn="l"/>
+            <a:r>
+              <a:rPr sz="1250" b="0">
+                <a:solidFill>
+                  <a:srgbClr val="5D6D7E"/>
+                </a:solidFill>
+                <a:latin typeface="Arial"/>
+              </a:rPr>
+              <a:t>BigGAN pixels identical; only the reals' resampling changes</a:t>
+            </a:r>
+          </a:p>
+        </p:txBody>
+      </p:sp>
+      <p:sp>
+        <p:nvSpPr>
+          <p:cNvPr id="24" name="TextBox 23"/>
+          <p:cNvSpPr txBox="1"/>
+          <p:nvPr/>
+        </p:nvSpPr>
+        <p:spPr>
+          <a:xfrm>
+            <a:off x="548640" y="5669280"/>
+            <a:ext cx="11094415" cy="365760"/>
+          </a:xfrm>
+          <a:prstGeom prst="rect">
+            <a:avLst/>
+          </a:prstGeom>
+          <a:noFill/>
+        </p:spPr>
+        <p:txBody>
+          <a:bodyPr wrap="square" lIns="0" rIns="0" tIns="0" bIns="0">
+            <a:spAutoFit/>
+          </a:bodyPr>
           <a:lstStyle/>
           <a:p>
             <a:pPr algn="ctr"/>
-          </a:p>
-        </p:txBody>
-      </p:sp>
-      <p:sp>
-        <p:nvSpPr>
-          <p:cNvPr id="16" name="TextBox 15"/>
-          <p:cNvSpPr txBox="1"/>
-          <p:nvPr/>
-        </p:nvSpPr>
-        <p:spPr>
-          <a:xfrm>
-            <a:off x="548640" y="4526280"/>
-            <a:ext cx="4754880" cy="1188720"/>
-          </a:xfrm>
-          <a:prstGeom prst="rect">
-            <a:avLst/>
-          </a:prstGeom>
-          <a:noFill/>
-        </p:spPr>
-        <p:txBody>
-          <a:bodyPr wrap="square" lIns="0" rIns="0" tIns="0" bIns="0">
-            <a:spAutoFit/>
-          </a:bodyPr>
-          <a:lstStyle/>
-          <a:p>
-            <a:pPr algn="l">
-              <a:lnSpc>
-                <a:spcPct val="120000"/>
-              </a:lnSpc>
-            </a:pPr>
-            <a:r>
-              <a:rPr sz="1500" b="0" i="0">
-                <a:solidFill>
-                  <a:srgbClr val="1C2833"/>
-                </a:solidFill>
-                <a:latin typeface="Arial"/>
-              </a:rPr>
-              <a:t>BigGAN images are pixel-identical in both versions, so any change in BigGAN comes from the real photos' processing alone.</a:t>
-            </a:r>
-          </a:p>
-        </p:txBody>
-      </p:sp>
-      <p:graphicFrame>
-        <p:nvGraphicFramePr>
-          <p:cNvPr id="17" name="Table 16"/>
-          <p:cNvGraphicFramePr>
-            <a:graphicFrameLocks noGrp="1"/>
-          </p:cNvGraphicFramePr>
-          <p:nvPr/>
-        </p:nvGraphicFramePr>
-        <p:xfrm>
-          <a:off x="5577840" y="1600200"/>
-          <a:ext cx="6062472" cy="2834640"/>
-        </p:xfrm>
-        <a:graphic>
-          <a:graphicData uri="http://schemas.openxmlformats.org/drawingml/2006/table">
-            <a:tbl>
-              <a:tblPr firstRow="1" bandRow="1">
-                <a:tableStyleId>{5C22544A-7EE6-4342-B048-85BDC9FD1C3A}</a:tableStyleId>
-              </a:tblPr>
-              <a:tblGrid>
-                <a:gridCol w="1463040"/>
-                <a:gridCol w="1737360"/>
-                <a:gridCol w="2862072"/>
-              </a:tblGrid>
-              <a:tr h="566928">
-                <a:tc>
-                  <a:txBody>
-                    <a:bodyPr wrap="square"/>
-                    <a:lstStyle/>
-                    <a:p>
-                      <a:pPr algn="l"/>
-                      <a:r>
-                        <a:rPr sz="1150" b="1">
-                          <a:solidFill>
-                            <a:srgbClr val="5D6D7E"/>
-                          </a:solidFill>
-                          <a:latin typeface="Arial"/>
-                        </a:rPr>
-                        <a:t>Work</a:t>
-                      </a:r>
-                    </a:p>
-                  </a:txBody>
-                  <a:tcPr marL="109728" marR="109728" marT="54864" marB="54864" anchor="ctr">
-                    <a:lnB w="9525" cap="flat">
-                      <a:solidFill>
-                        <a:srgbClr val="D5DBDB"/>
-                      </a:solidFill>
-                    </a:lnB>
-                    <a:solidFill>
-                      <a:srgbClr val="F2F5F8"/>
-                    </a:solidFill>
-                  </a:tcPr>
-                </a:tc>
-                <a:tc>
-                  <a:txBody>
-                    <a:bodyPr wrap="square"/>
-                    <a:lstStyle/>
-                    <a:p>
-                      <a:pPr algn="l"/>
-                      <a:r>
-                        <a:rPr sz="1150" b="1">
-                          <a:solidFill>
-                            <a:srgbClr val="5D6D7E"/>
-                          </a:solidFill>
-                          <a:latin typeface="Arial"/>
-                        </a:rPr>
-                        <a:t>Level</a:t>
-                      </a:r>
-                    </a:p>
-                  </a:txBody>
-                  <a:tcPr marL="109728" marR="109728" marT="54864" marB="54864" anchor="ctr">
-                    <a:lnB w="9525" cap="flat">
-                      <a:solidFill>
-                        <a:srgbClr val="D5DBDB"/>
-                      </a:solidFill>
-                    </a:lnB>
-                    <a:solidFill>
-                      <a:srgbClr val="F2F5F8"/>
-                    </a:solidFill>
-                  </a:tcPr>
-                </a:tc>
-                <a:tc>
-                  <a:txBody>
-                    <a:bodyPr wrap="square"/>
-                    <a:lstStyle/>
-                    <a:p>
-                      <a:pPr algn="l"/>
-                      <a:r>
-                        <a:rPr sz="1150" b="1">
-                          <a:solidFill>
-                            <a:srgbClr val="5D6D7E"/>
-                          </a:solidFill>
-                          <a:latin typeface="Arial"/>
-                        </a:rPr>
-                        <a:t>What it varies</a:t>
-                      </a:r>
-                    </a:p>
-                  </a:txBody>
-                  <a:tcPr marL="109728" marR="109728" marT="54864" marB="54864" anchor="ctr">
-                    <a:lnB w="9525" cap="flat">
-                      <a:solidFill>
-                        <a:srgbClr val="D5DBDB"/>
-                      </a:solidFill>
-                    </a:lnB>
-                    <a:solidFill>
-                      <a:srgbClr val="F2F5F8"/>
-                    </a:solidFill>
-                  </a:tcPr>
-                </a:tc>
-              </a:tr>
-              <a:tr h="566928">
-                <a:tc>
-                  <a:txBody>
-                    <a:bodyPr wrap="square"/>
-                    <a:lstStyle/>
-                    <a:p>
-                      <a:pPr algn="l"/>
-                      <a:r>
-                        <a:rPr sz="1250" b="0">
-                          <a:solidFill>
-                            <a:srgbClr val="1C2833"/>
-                          </a:solidFill>
-                          <a:latin typeface="Arial"/>
-                        </a:rPr>
-                        <a:t>Grommelt et al. 2024</a:t>
-                      </a:r>
-                    </a:p>
-                  </a:txBody>
-                  <a:tcPr marL="109728" marR="109728" marT="54864" marB="54864" anchor="ctr">
-                    <a:lnB w="9525" cap="flat">
-                      <a:solidFill>
-                        <a:srgbClr val="D5DBDB"/>
-                      </a:solidFill>
-                    </a:lnB>
-                    <a:solidFill>
-                      <a:srgbClr val="FFFFFF"/>
-                    </a:solidFill>
-                  </a:tcPr>
-                </a:tc>
-                <a:tc>
-                  <a:txBody>
-                    <a:bodyPr wrap="square"/>
-                    <a:lstStyle/>
-                    <a:p>
-                      <a:pPr algn="l"/>
-                      <a:r>
-                        <a:rPr sz="1250" b="0">
-                          <a:solidFill>
-                            <a:srgbClr val="1C2833"/>
-                          </a:solidFill>
-                          <a:latin typeface="Arial"/>
-                        </a:rPr>
-                        <a:t>whole detector</a:t>
-                      </a:r>
-                    </a:p>
-                  </a:txBody>
-                  <a:tcPr marL="109728" marR="109728" marT="54864" marB="54864" anchor="ctr">
-                    <a:lnB w="9525" cap="flat">
-                      <a:solidFill>
-                        <a:srgbClr val="D5DBDB"/>
-                      </a:solidFill>
-                    </a:lnB>
-                    <a:solidFill>
-                      <a:srgbClr val="FFFFFF"/>
-                    </a:solidFill>
-                  </a:tcPr>
-                </a:tc>
-                <a:tc>
-                  <a:txBody>
-                    <a:bodyPr wrap="square"/>
-                    <a:lstStyle/>
-                    <a:p>
-                      <a:pPr algn="l"/>
-                      <a:r>
-                        <a:rPr sz="1250" b="0">
-                          <a:solidFill>
-                            <a:srgbClr val="1C2833"/>
-                          </a:solidFill>
-                          <a:latin typeface="Arial"/>
-                        </a:rPr>
-                        <a:t>JPEG and size bias</a:t>
-                      </a:r>
-                    </a:p>
-                  </a:txBody>
-                  <a:tcPr marL="109728" marR="109728" marT="54864" marB="54864" anchor="ctr">
-                    <a:lnB w="9525" cap="flat">
-                      <a:solidFill>
-                        <a:srgbClr val="D5DBDB"/>
-                      </a:solidFill>
-                    </a:lnB>
-                    <a:solidFill>
-                      <a:srgbClr val="FFFFFF"/>
-                    </a:solidFill>
-                  </a:tcPr>
-                </a:tc>
-              </a:tr>
-              <a:tr h="566928">
-                <a:tc>
-                  <a:txBody>
-                    <a:bodyPr wrap="square"/>
-                    <a:lstStyle/>
-                    <a:p>
-                      <a:pPr algn="l"/>
-                      <a:r>
-                        <a:rPr sz="1250" b="0">
-                          <a:solidFill>
-                            <a:srgbClr val="1C2833"/>
-                          </a:solidFill>
-                          <a:latin typeface="Arial"/>
-                        </a:rPr>
-                        <a:t>B-Free 2025</a:t>
-                      </a:r>
-                    </a:p>
-                  </a:txBody>
-                  <a:tcPr marL="109728" marR="109728" marT="54864" marB="54864" anchor="ctr">
-                    <a:lnB w="9525" cap="flat">
-                      <a:solidFill>
-                        <a:srgbClr val="D5DBDB"/>
-                      </a:solidFill>
-                    </a:lnB>
-                    <a:solidFill>
-                      <a:srgbClr val="FFFFFF"/>
-                    </a:solidFill>
-                  </a:tcPr>
-                </a:tc>
-                <a:tc>
-                  <a:txBody>
-                    <a:bodyPr wrap="square"/>
-                    <a:lstStyle/>
-                    <a:p>
-                      <a:pPr algn="l"/>
-                      <a:r>
-                        <a:rPr sz="1250" b="0">
-                          <a:solidFill>
-                            <a:srgbClr val="1C2833"/>
-                          </a:solidFill>
-                          <a:latin typeface="Arial"/>
-                        </a:rPr>
-                        <a:t>whole detector</a:t>
-                      </a:r>
-                    </a:p>
-                  </a:txBody>
-                  <a:tcPr marL="109728" marR="109728" marT="54864" marB="54864" anchor="ctr">
-                    <a:lnB w="9525" cap="flat">
-                      <a:solidFill>
-                        <a:srgbClr val="D5DBDB"/>
-                      </a:solidFill>
-                    </a:lnB>
-                    <a:solidFill>
-                      <a:srgbClr val="FFFFFF"/>
-                    </a:solidFill>
-                  </a:tcPr>
-                </a:tc>
-                <a:tc>
-                  <a:txBody>
-                    <a:bodyPr wrap="square"/>
-                    <a:lstStyle/>
-                    <a:p>
-                      <a:pPr algn="l"/>
-                      <a:r>
-                        <a:rPr sz="1250" b="0">
-                          <a:solidFill>
-                            <a:srgbClr val="1C2833"/>
-                          </a:solidFill>
-                          <a:latin typeface="Arial"/>
-                        </a:rPr>
-                        <a:t>content, format, size</a:t>
-                      </a:r>
-                    </a:p>
-                  </a:txBody>
-                  <a:tcPr marL="109728" marR="109728" marT="54864" marB="54864" anchor="ctr">
-                    <a:lnB w="9525" cap="flat">
-                      <a:solidFill>
-                        <a:srgbClr val="D5DBDB"/>
-                      </a:solidFill>
-                    </a:lnB>
-                    <a:solidFill>
-                      <a:srgbClr val="FFFFFF"/>
-                    </a:solidFill>
-                  </a:tcPr>
-                </a:tc>
-              </a:tr>
-              <a:tr h="566928">
-                <a:tc>
-                  <a:txBody>
-                    <a:bodyPr wrap="square"/>
-                    <a:lstStyle/>
-                    <a:p>
-                      <a:pPr algn="l"/>
-                      <a:r>
-                        <a:rPr sz="1250" b="0">
-                          <a:solidFill>
-                            <a:srgbClr val="1C2833"/>
-                          </a:solidFill>
-                          <a:latin typeface="Arial"/>
-                        </a:rPr>
-                        <a:t>Zhou &amp; Wang 2026</a:t>
-                      </a:r>
-                    </a:p>
-                  </a:txBody>
-                  <a:tcPr marL="109728" marR="109728" marT="54864" marB="54864" anchor="ctr">
-                    <a:lnB w="9525" cap="flat">
-                      <a:solidFill>
-                        <a:srgbClr val="D5DBDB"/>
-                      </a:solidFill>
-                    </a:lnB>
-                    <a:solidFill>
-                      <a:srgbClr val="FFFFFF"/>
-                    </a:solidFill>
-                  </a:tcPr>
-                </a:tc>
-                <a:tc>
-                  <a:txBody>
-                    <a:bodyPr wrap="square"/>
-                    <a:lstStyle/>
-                    <a:p>
-                      <a:pPr algn="l"/>
-                      <a:r>
-                        <a:rPr sz="1250" b="0">
-                          <a:solidFill>
-                            <a:srgbClr val="1C2833"/>
-                          </a:solidFill>
-                          <a:latin typeface="Arial"/>
-                        </a:rPr>
-                        <a:t>training-free detectors</a:t>
-                      </a:r>
-                    </a:p>
-                  </a:txBody>
-                  <a:tcPr marL="109728" marR="109728" marT="54864" marB="54864" anchor="ctr">
-                    <a:lnB w="9525" cap="flat">
-                      <a:solidFill>
-                        <a:srgbClr val="D5DBDB"/>
-                      </a:solidFill>
-                    </a:lnB>
-                    <a:solidFill>
-                      <a:srgbClr val="FFFFFF"/>
-                    </a:solidFill>
-                  </a:tcPr>
-                </a:tc>
-                <a:tc>
-                  <a:txBody>
-                    <a:bodyPr wrap="square"/>
-                    <a:lstStyle/>
-                    <a:p>
-                      <a:pPr algn="l"/>
-                      <a:r>
-                        <a:rPr sz="1250" b="0">
-                          <a:solidFill>
-                            <a:srgbClr val="1C2833"/>
-                          </a:solidFill>
-                          <a:latin typeface="Arial"/>
-                        </a:rPr>
-                        <a:t>resize vs native, JPEG</a:t>
-                      </a:r>
-                    </a:p>
-                  </a:txBody>
-                  <a:tcPr marL="109728" marR="109728" marT="54864" marB="54864" anchor="ctr">
-                    <a:lnB w="9525" cap="flat">
-                      <a:solidFill>
-                        <a:srgbClr val="D5DBDB"/>
-                      </a:solidFill>
-                    </a:lnB>
-                    <a:solidFill>
-                      <a:srgbClr val="FFFFFF"/>
-                    </a:solidFill>
-                  </a:tcPr>
-                </a:tc>
-              </a:tr>
-              <a:tr h="566928">
-                <a:tc>
-                  <a:txBody>
-                    <a:bodyPr wrap="square"/>
-                    <a:lstStyle/>
-                    <a:p>
-                      <a:pPr algn="l"/>
-                      <a:r>
-                        <a:rPr sz="1250" b="1">
-                          <a:solidFill>
-                            <a:srgbClr val="B2182B"/>
-                          </a:solidFill>
-                          <a:latin typeface="Arial"/>
-                        </a:rPr>
-                        <a:t>This work</a:t>
-                      </a:r>
-                    </a:p>
-                  </a:txBody>
-                  <a:tcPr marL="109728" marR="109728" marT="54864" marB="54864" anchor="ctr">
-                    <a:lnB w="9525" cap="flat">
-                      <a:solidFill>
-                        <a:srgbClr val="D5DBDB"/>
-                      </a:solidFill>
-                    </a:lnB>
-                    <a:solidFill>
-                      <a:srgbClr val="FFFFFF"/>
-                    </a:solidFill>
-                  </a:tcPr>
-                </a:tc>
-                <a:tc>
-                  <a:txBody>
-                    <a:bodyPr wrap="square"/>
-                    <a:lstStyle/>
-                    <a:p>
-                      <a:pPr algn="l"/>
-                      <a:r>
-                        <a:rPr sz="1250" b="1">
-                          <a:solidFill>
-                            <a:srgbClr val="B2182B"/>
-                          </a:solidFill>
-                          <a:latin typeface="Arial"/>
-                        </a:rPr>
-                        <a:t>14 named features</a:t>
-                      </a:r>
-                    </a:p>
-                  </a:txBody>
-                  <a:tcPr marL="109728" marR="109728" marT="54864" marB="54864" anchor="ctr">
-                    <a:lnB w="9525" cap="flat">
-                      <a:solidFill>
-                        <a:srgbClr val="D5DBDB"/>
-                      </a:solidFill>
-                    </a:lnB>
-                    <a:solidFill>
-                      <a:srgbClr val="FFFFFF"/>
-                    </a:solidFill>
-                  </a:tcPr>
-                </a:tc>
-                <a:tc>
-                  <a:txBody>
-                    <a:bodyPr wrap="square"/>
-                    <a:lstStyle/>
-                    <a:p>
-                      <a:pPr algn="l"/>
-                      <a:r>
-                        <a:rPr sz="1250" b="1">
-                          <a:solidFill>
-                            <a:srgbClr val="B2182B"/>
-                          </a:solidFill>
-                          <a:latin typeface="Arial"/>
-                        </a:rPr>
-                        <a:t>resampling (isolated), matched JPEG, unseen generator</a:t>
-                      </a:r>
-                    </a:p>
-                  </a:txBody>
-                  <a:tcPr marL="109728" marR="109728" marT="54864" marB="54864" anchor="ctr">
-                    <a:lnB w="9525" cap="flat">
-                      <a:solidFill>
-                        <a:srgbClr val="D5DBDB"/>
-                      </a:solidFill>
-                    </a:lnB>
-                    <a:solidFill>
-                      <a:srgbClr val="FFFFFF"/>
-                    </a:solidFill>
-                  </a:tcPr>
-                </a:tc>
-              </a:tr>
-            </a:tbl>
-          </a:graphicData>
-        </a:graphic>
-      </p:graphicFrame>
-      <p:sp>
-        <p:nvSpPr>
-          <p:cNvPr id="18" name="TextBox 17"/>
-          <p:cNvSpPr txBox="1"/>
-          <p:nvPr/>
-        </p:nvSpPr>
-        <p:spPr>
-          <a:xfrm>
-            <a:off x="5577840" y="4846320"/>
-            <a:ext cx="6062472" cy="548640"/>
-          </a:xfrm>
-          <a:prstGeom prst="rect">
-            <a:avLst/>
-          </a:prstGeom>
-          <a:noFill/>
-        </p:spPr>
-        <p:txBody>
-          <a:bodyPr wrap="square" lIns="0" rIns="0" tIns="0" bIns="0">
-            <a:spAutoFit/>
-          </a:bodyPr>
-          <a:lstStyle/>
-          <a:p>
-            <a:pPr algn="l">
-              <a:lnSpc>
-                <a:spcPct val="115000"/>
-              </a:lnSpc>
-            </a:pPr>
             <a:r>
               <a:rPr sz="1300" b="0" i="0">
                 <a:solidFill>
@@ -10494,14 +10989,14 @@
                 </a:solidFill>
                 <a:latin typeface="Arial"/>
               </a:rPr>
-              <a:t>We found no report of this feature-level protocol; we say “not found”, not “first”.</a:t>
-            </a:r>
-          </a:p>
-        </p:txBody>
-      </p:sp>
-      <p:sp>
-        <p:nvSpPr>
-          <p:cNvPr id="19" name="TextBox 18"/>
+              <a:t>No prior report of this feature-level protocol found  ·  we say “not found”, not “first”</a:t>
+            </a:r>
+          </a:p>
+        </p:txBody>
+      </p:sp>
+      <p:sp>
+        <p:nvSpPr>
+          <p:cNvPr id="25" name="TextBox 24"/>
           <p:cNvSpPr txBox="1"/>
           <p:nvPr/>
         </p:nvSpPr>
@@ -10536,7 +11031,7 @@
       </p:sp>
       <p:sp>
         <p:nvSpPr>
-          <p:cNvPr id="20" name="TextBox 19"/>
+          <p:cNvPr id="26" name="TextBox 25"/>
           <p:cNvSpPr txBox="1"/>
           <p:nvPr/>
         </p:nvSpPr>
@@ -10564,7 +11059,7 @@
                 </a:solidFill>
                 <a:latin typeface="Arial"/>
               </a:rPr>
-              <a:t>4 / 13</a:t>
+              <a:t>4 / 14</a:t>
             </a:r>
           </a:p>
         </p:txBody>
@@ -10646,9 +11141,9 @@
           <a:p>
             <a:pPr algn="ctr"/>
             <a:r>
-              <a:rPr sz="1050" b="0" i="0">
-                <a:solidFill>
-                  <a:srgbClr val="5D6D7E"/>
+              <a:rPr sz="1050" b="1" i="0">
+                <a:solidFill>
+                  <a:srgbClr val="B2182B"/>
                 </a:solidFill>
                 <a:latin typeface="Arial"/>
               </a:rPr>
@@ -10659,48 +11154,13 @@
       </p:sp>
       <p:sp>
         <p:nvSpPr>
-          <p:cNvPr id="4" name="TextBox 3"/>
-          <p:cNvSpPr txBox="1"/>
-          <p:nvPr/>
-        </p:nvSpPr>
-        <p:spPr>
-          <a:xfrm>
-            <a:off x="3718472" y="256032"/>
-            <a:ext cx="1584916" cy="274320"/>
-          </a:xfrm>
-          <a:prstGeom prst="rect">
-            <a:avLst/>
-          </a:prstGeom>
-          <a:noFill/>
-        </p:spPr>
-        <p:txBody>
-          <a:bodyPr wrap="square" lIns="0" rIns="0" tIns="0" bIns="0">
-            <a:spAutoFit/>
-          </a:bodyPr>
-          <a:lstStyle/>
-          <a:p>
-            <a:pPr algn="ctr"/>
-            <a:r>
-              <a:rPr sz="1050" b="1" i="0">
-                <a:solidFill>
-                  <a:srgbClr val="B2182B"/>
-                </a:solidFill>
-                <a:latin typeface="Arial"/>
-              </a:rPr>
-              <a:t>METHODOLOGY</a:t>
-            </a:r>
-          </a:p>
-        </p:txBody>
-      </p:sp>
-      <p:sp>
-        <p:nvSpPr>
-          <p:cNvPr id="5" name="Rectangle 4"/>
+          <p:cNvPr id="4" name="Rectangle 3"/>
           <p:cNvSpPr/>
           <p:nvPr/>
         </p:nvSpPr>
         <p:spPr>
           <a:xfrm>
-            <a:off x="3947072" y="548640"/>
+            <a:off x="2362156" y="548640"/>
             <a:ext cx="1127716" cy="28575"/>
           </a:xfrm>
           <a:prstGeom prst="rect">
@@ -10723,6 +11183,41 @@
       </p:sp>
       <p:sp>
         <p:nvSpPr>
+          <p:cNvPr id="5" name="TextBox 4"/>
+          <p:cNvSpPr txBox="1"/>
+          <p:nvPr/>
+        </p:nvSpPr>
+        <p:spPr>
+          <a:xfrm>
+            <a:off x="3718472" y="256032"/>
+            <a:ext cx="1584916" cy="274320"/>
+          </a:xfrm>
+          <a:prstGeom prst="rect">
+            <a:avLst/>
+          </a:prstGeom>
+          <a:noFill/>
+        </p:spPr>
+        <p:txBody>
+          <a:bodyPr wrap="square" lIns="0" rIns="0" tIns="0" bIns="0">
+            <a:spAutoFit/>
+          </a:bodyPr>
+          <a:lstStyle/>
+          <a:p>
+            <a:pPr algn="ctr"/>
+            <a:r>
+              <a:rPr sz="1050" b="0" i="0">
+                <a:solidFill>
+                  <a:srgbClr val="5D6D7E"/>
+                </a:solidFill>
+                <a:latin typeface="Arial"/>
+              </a:rPr>
+              <a:t>METHODOLOGY</a:t>
+            </a:r>
+          </a:p>
+        </p:txBody>
+      </p:sp>
+      <p:sp>
+        <p:nvSpPr>
           <p:cNvPr id="6" name="TextBox 5"/>
           <p:cNvSpPr txBox="1"/>
           <p:nvPr/>
@@ -10920,7 +11415,7 @@
                 </a:solidFill>
                 <a:latin typeface="Georgia"/>
               </a:rPr>
-              <a:t>Pipeline, fixed before any image was processed</a:t>
+              <a:t>Novelty: same score, different story</a:t>
             </a:r>
           </a:p>
         </p:txBody>
@@ -10955,14 +11450,14 @@
                 </a:solidFill>
                 <a:latin typeface="Arial"/>
               </a:rPr>
-              <a:t>MEMBER 2</a:t>
+              <a:t>MEMBER 1</a:t>
             </a:r>
           </a:p>
         </p:txBody>
       </p:sp>
       <p:pic>
         <p:nvPicPr>
-          <p:cNvPr id="13" name="Picture 12" descr="pipeline-diagram.png"/>
+          <p:cNvPr id="13" name="Picture 12" descr="novelty_same_score.png"/>
           <p:cNvPicPr>
             <a:picLocks noChangeAspect="1"/>
           </p:cNvPicPr>
@@ -10976,8 +11471,8 @@
         </p:blipFill>
         <p:spPr>
           <a:xfrm>
-            <a:off x="713822" y="1371600"/>
-            <a:ext cx="3601556" cy="5074920"/>
+            <a:off x="822960" y="1730549"/>
+            <a:ext cx="10545775" cy="3488342"/>
           </a:xfrm>
           <a:prstGeom prst="rect">
             <a:avLst/>
@@ -10991,38 +11486,57 @@
       </p:pic>
       <p:sp>
         <p:nvSpPr>
-          <p:cNvPr id="14" name="Oval 13"/>
-          <p:cNvSpPr/>
-          <p:nvPr/>
-        </p:nvSpPr>
-        <p:spPr>
-          <a:xfrm>
-            <a:off x="4937760" y="1554480"/>
-            <a:ext cx="457200" cy="457200"/>
-          </a:xfrm>
-          <a:prstGeom prst="ellipse">
-            <a:avLst/>
-          </a:prstGeom>
-          <a:solidFill>
-            <a:srgbClr val="1F3A5F"/>
-          </a:solidFill>
-          <a:ln>
-            <a:noFill/>
-          </a:ln>
-          <a:effectLst/>
-        </p:spPr>
-        <p:txBody>
-          <a:bodyPr rtlCol="0" anchor="ctr"/>
-          <a:lstStyle/>
-          <a:p>
-            <a:pPr algn="ctr"/>
-            <a:r>
-              <a:rPr sz="1500" b="1">
-                <a:solidFill>
-                  <a:srgbClr val="FFFFFF"/>
-                </a:solidFill>
-              </a:rPr>
-              <a:t>1</a:t>
+          <p:cNvPr id="14" name="TextBox 13"/>
+          <p:cNvSpPr txBox="1"/>
+          <p:nvPr/>
+        </p:nvSpPr>
+        <p:spPr>
+          <a:xfrm>
+            <a:off x="548640" y="5715000"/>
+            <a:ext cx="11094415" cy="457200"/>
+          </a:xfrm>
+          <a:prstGeom prst="rect">
+            <a:avLst/>
+          </a:prstGeom>
+          <a:noFill/>
+        </p:spPr>
+        <p:txBody>
+          <a:bodyPr wrap="square" lIns="0" rIns="0" tIns="0" bIns="0">
+            <a:spAutoFit/>
+          </a:bodyPr>
+          <a:lstStyle/>
+          <a:p>
+            <a:pPr algn="ctr">
+              <a:lnSpc>
+                <a:spcPct val="120000"/>
+              </a:lnSpc>
+            </a:pPr>
+            <a:r>
+              <a:rPr sz="1900" b="1">
+                <a:solidFill>
+                  <a:srgbClr val="1F3A5F"/>
+                </a:solidFill>
+                <a:latin typeface="Arial"/>
+              </a:rPr>
+              <a:t>Pooled score: unchanged.</a:t>
+            </a:r>
+            <a:r>
+              <a:rPr sz="1900" b="0">
+                <a:solidFill>
+                  <a:srgbClr val="1C2833"/>
+                </a:solidFill>
+                <a:latin typeface="Arial"/>
+              </a:rPr>
+              <a:t>      </a:t>
+            </a:r>
+            <a:r>
+              <a:rPr sz="1900" b="1">
+                <a:solidFill>
+                  <a:srgbClr val="B2182B"/>
+                </a:solidFill>
+                <a:latin typeface="Arial"/>
+              </a:rPr>
+              <a:t>Per-generator scores: move both ways.</a:t>
             </a:r>
           </a:p>
         </p:txBody>
@@ -11030,508 +11544,6 @@
       <p:sp>
         <p:nvSpPr>
           <p:cNvPr id="15" name="TextBox 14"/>
-          <p:cNvSpPr txBox="1"/>
-          <p:nvPr/>
-        </p:nvSpPr>
-        <p:spPr>
-          <a:xfrm>
-            <a:off x="5577840" y="1536192"/>
-            <a:ext cx="6035040" cy="292608"/>
-          </a:xfrm>
-          <a:prstGeom prst="rect">
-            <a:avLst/>
-          </a:prstGeom>
-          <a:noFill/>
-        </p:spPr>
-        <p:txBody>
-          <a:bodyPr wrap="square" lIns="0" rIns="0" tIns="0" bIns="0">
-            <a:spAutoFit/>
-          </a:bodyPr>
-          <a:lstStyle/>
-          <a:p>
-            <a:pPr algn="l"/>
-            <a:r>
-              <a:rPr sz="1600" b="1" i="0">
-                <a:solidFill>
-                  <a:srgbClr val="1C2833"/>
-                </a:solidFill>
-                <a:latin typeface="Arial"/>
-              </a:rPr>
-              <a:t>3,000 GenImage images</a:t>
-            </a:r>
-          </a:p>
-        </p:txBody>
-      </p:sp>
-      <p:sp>
-        <p:nvSpPr>
-          <p:cNvPr id="16" name="TextBox 15"/>
-          <p:cNvSpPr txBox="1"/>
-          <p:nvPr/>
-        </p:nvSpPr>
-        <p:spPr>
-          <a:xfrm>
-            <a:off x="5577840" y="1847088"/>
-            <a:ext cx="6035040" cy="274320"/>
-          </a:xfrm>
-          <a:prstGeom prst="rect">
-            <a:avLst/>
-          </a:prstGeom>
-          <a:noFill/>
-        </p:spPr>
-        <p:txBody>
-          <a:bodyPr wrap="square" lIns="0" rIns="0" tIns="0" bIns="0">
-            <a:spAutoFit/>
-          </a:bodyPr>
-          <a:lstStyle/>
-          <a:p>
-            <a:pPr algn="l"/>
-            <a:r>
-              <a:rPr sz="1300" b="0" i="0">
-                <a:solidFill>
-                  <a:srgbClr val="5D6D7E"/>
-                </a:solidFill>
-                <a:latin typeface="Arial"/>
-              </a:rPr>
-              <a:t>1,500 real  ·  500 each: BigGAN, SD v1.4, ADM</a:t>
-            </a:r>
-          </a:p>
-        </p:txBody>
-      </p:sp>
-      <p:sp>
-        <p:nvSpPr>
-          <p:cNvPr id="17" name="Oval 16"/>
-          <p:cNvSpPr/>
-          <p:nvPr/>
-        </p:nvSpPr>
-        <p:spPr>
-          <a:xfrm>
-            <a:off x="4937760" y="2468880"/>
-            <a:ext cx="457200" cy="457200"/>
-          </a:xfrm>
-          <a:prstGeom prst="ellipse">
-            <a:avLst/>
-          </a:prstGeom>
-          <a:solidFill>
-            <a:srgbClr val="1F3A5F"/>
-          </a:solidFill>
-          <a:ln>
-            <a:noFill/>
-          </a:ln>
-          <a:effectLst/>
-        </p:spPr>
-        <p:txBody>
-          <a:bodyPr rtlCol="0" anchor="ctr"/>
-          <a:lstStyle/>
-          <a:p>
-            <a:pPr algn="ctr"/>
-            <a:r>
-              <a:rPr sz="1500" b="1">
-                <a:solidFill>
-                  <a:srgbClr val="FFFFFF"/>
-                </a:solidFill>
-              </a:rPr>
-              <a:t>2</a:t>
-            </a:r>
-          </a:p>
-        </p:txBody>
-      </p:sp>
-      <p:sp>
-        <p:nvSpPr>
-          <p:cNvPr id="18" name="TextBox 17"/>
-          <p:cNvSpPr txBox="1"/>
-          <p:nvPr/>
-        </p:nvSpPr>
-        <p:spPr>
-          <a:xfrm>
-            <a:off x="5577840" y="2450592"/>
-            <a:ext cx="6035040" cy="292608"/>
-          </a:xfrm>
-          <a:prstGeom prst="rect">
-            <a:avLst/>
-          </a:prstGeom>
-          <a:noFill/>
-        </p:spPr>
-        <p:txBody>
-          <a:bodyPr wrap="square" lIns="0" rIns="0" tIns="0" bIns="0">
-            <a:spAutoFit/>
-          </a:bodyPr>
-          <a:lstStyle/>
-          <a:p>
-            <a:pPr algn="l"/>
-            <a:r>
-              <a:rPr sz="1600" b="1" i="0">
-                <a:solidFill>
-                  <a:srgbClr val="1C2833"/>
-                </a:solidFill>
-                <a:latin typeface="Arial"/>
-              </a:rPr>
-              <a:t>Clean before splitting</a:t>
-            </a:r>
-          </a:p>
-        </p:txBody>
-      </p:sp>
-      <p:sp>
-        <p:nvSpPr>
-          <p:cNvPr id="19" name="TextBox 18"/>
-          <p:cNvSpPr txBox="1"/>
-          <p:nvPr/>
-        </p:nvSpPr>
-        <p:spPr>
-          <a:xfrm>
-            <a:off x="5577840" y="2761488"/>
-            <a:ext cx="6035040" cy="274320"/>
-          </a:xfrm>
-          <a:prstGeom prst="rect">
-            <a:avLst/>
-          </a:prstGeom>
-          <a:noFill/>
-        </p:spPr>
-        <p:txBody>
-          <a:bodyPr wrap="square" lIns="0" rIns="0" tIns="0" bIns="0">
-            <a:spAutoFit/>
-          </a:bodyPr>
-          <a:lstStyle/>
-          <a:p>
-            <a:pPr algn="l"/>
-            <a:r>
-              <a:rPr sz="1300" b="0" i="0">
-                <a:solidFill>
-                  <a:srgbClr val="5D6D7E"/>
-                </a:solidFill>
-                <a:latin typeface="Arial"/>
-              </a:rPr>
-              <a:t>duplicates, near-copies, odd colour profiles removed</a:t>
-            </a:r>
-          </a:p>
-        </p:txBody>
-      </p:sp>
-      <p:sp>
-        <p:nvSpPr>
-          <p:cNvPr id="20" name="Oval 19"/>
-          <p:cNvSpPr/>
-          <p:nvPr/>
-        </p:nvSpPr>
-        <p:spPr>
-          <a:xfrm>
-            <a:off x="4937760" y="3383280"/>
-            <a:ext cx="457200" cy="457200"/>
-          </a:xfrm>
-          <a:prstGeom prst="ellipse">
-            <a:avLst/>
-          </a:prstGeom>
-          <a:solidFill>
-            <a:srgbClr val="1F3A5F"/>
-          </a:solidFill>
-          <a:ln>
-            <a:noFill/>
-          </a:ln>
-          <a:effectLst/>
-        </p:spPr>
-        <p:txBody>
-          <a:bodyPr rtlCol="0" anchor="ctr"/>
-          <a:lstStyle/>
-          <a:p>
-            <a:pPr algn="ctr"/>
-            <a:r>
-              <a:rPr sz="1500" b="1">
-                <a:solidFill>
-                  <a:srgbClr val="FFFFFF"/>
-                </a:solidFill>
-              </a:rPr>
-              <a:t>3</a:t>
-            </a:r>
-          </a:p>
-        </p:txBody>
-      </p:sp>
-      <p:sp>
-        <p:nvSpPr>
-          <p:cNvPr id="21" name="TextBox 20"/>
-          <p:cNvSpPr txBox="1"/>
-          <p:nvPr/>
-        </p:nvSpPr>
-        <p:spPr>
-          <a:xfrm>
-            <a:off x="5577840" y="3364992"/>
-            <a:ext cx="6035040" cy="292608"/>
-          </a:xfrm>
-          <a:prstGeom prst="rect">
-            <a:avLst/>
-          </a:prstGeom>
-          <a:noFill/>
-        </p:spPr>
-        <p:txBody>
-          <a:bodyPr wrap="square" lIns="0" rIns="0" tIns="0" bIns="0">
-            <a:spAutoFit/>
-          </a:bodyPr>
-          <a:lstStyle/>
-          <a:p>
-            <a:pPr algn="l"/>
-            <a:r>
-              <a:rPr sz="1600" b="1" i="0">
-                <a:solidFill>
-                  <a:srgbClr val="1C2833"/>
-                </a:solidFill>
-                <a:latin typeface="Arial"/>
-              </a:rPr>
-              <a:t>Same processing for both classes</a:t>
-            </a:r>
-          </a:p>
-        </p:txBody>
-      </p:sp>
-      <p:sp>
-        <p:nvSpPr>
-          <p:cNvPr id="22" name="TextBox 21"/>
-          <p:cNvSpPr txBox="1"/>
-          <p:nvPr/>
-        </p:nvSpPr>
-        <p:spPr>
-          <a:xfrm>
-            <a:off x="5577840" y="3675888"/>
-            <a:ext cx="6035040" cy="274320"/>
-          </a:xfrm>
-          <a:prstGeom prst="rect">
-            <a:avLst/>
-          </a:prstGeom>
-          <a:noFill/>
-        </p:spPr>
-        <p:txBody>
-          <a:bodyPr wrap="square" lIns="0" rIns="0" tIns="0" bIns="0">
-            <a:spAutoFit/>
-          </a:bodyPr>
-          <a:lstStyle/>
-          <a:p>
-            <a:pPr algn="l"/>
-            <a:r>
-              <a:rPr sz="1300" b="0" i="0">
-                <a:solidFill>
-                  <a:srgbClr val="5D6D7E"/>
-                </a:solidFill>
-                <a:latin typeface="Arial"/>
-              </a:rPr>
-              <a:t>resize to 256 × 256, lossless PNG</a:t>
-            </a:r>
-          </a:p>
-        </p:txBody>
-      </p:sp>
-      <p:sp>
-        <p:nvSpPr>
-          <p:cNvPr id="23" name="Oval 22"/>
-          <p:cNvSpPr/>
-          <p:nvPr/>
-        </p:nvSpPr>
-        <p:spPr>
-          <a:xfrm>
-            <a:off x="4937760" y="4297680"/>
-            <a:ext cx="457200" cy="457200"/>
-          </a:xfrm>
-          <a:prstGeom prst="ellipse">
-            <a:avLst/>
-          </a:prstGeom>
-          <a:solidFill>
-            <a:srgbClr val="1F3A5F"/>
-          </a:solidFill>
-          <a:ln>
-            <a:noFill/>
-          </a:ln>
-          <a:effectLst/>
-        </p:spPr>
-        <p:txBody>
-          <a:bodyPr rtlCol="0" anchor="ctr"/>
-          <a:lstStyle/>
-          <a:p>
-            <a:pPr algn="ctr"/>
-            <a:r>
-              <a:rPr sz="1500" b="1">
-                <a:solidFill>
-                  <a:srgbClr val="FFFFFF"/>
-                </a:solidFill>
-              </a:rPr>
-              <a:t>4</a:t>
-            </a:r>
-          </a:p>
-        </p:txBody>
-      </p:sp>
-      <p:sp>
-        <p:nvSpPr>
-          <p:cNvPr id="24" name="TextBox 23"/>
-          <p:cNvSpPr txBox="1"/>
-          <p:nvPr/>
-        </p:nvSpPr>
-        <p:spPr>
-          <a:xfrm>
-            <a:off x="5577840" y="4279392"/>
-            <a:ext cx="6035040" cy="292608"/>
-          </a:xfrm>
-          <a:prstGeom prst="rect">
-            <a:avLst/>
-          </a:prstGeom>
-          <a:noFill/>
-        </p:spPr>
-        <p:txBody>
-          <a:bodyPr wrap="square" lIns="0" rIns="0" tIns="0" bIns="0">
-            <a:spAutoFit/>
-          </a:bodyPr>
-          <a:lstStyle/>
-          <a:p>
-            <a:pPr algn="l"/>
-            <a:r>
-              <a:rPr sz="1600" b="1" i="0">
-                <a:solidFill>
-                  <a:srgbClr val="1C2833"/>
-                </a:solidFill>
-                <a:latin typeface="Arial"/>
-              </a:rPr>
-              <a:t>Three conditions</a:t>
-            </a:r>
-          </a:p>
-        </p:txBody>
-      </p:sp>
-      <p:sp>
-        <p:nvSpPr>
-          <p:cNvPr id="25" name="TextBox 24"/>
-          <p:cNvSpPr txBox="1"/>
-          <p:nvPr/>
-        </p:nvSpPr>
-        <p:spPr>
-          <a:xfrm>
-            <a:off x="5577840" y="4590288"/>
-            <a:ext cx="6035040" cy="274320"/>
-          </a:xfrm>
-          <a:prstGeom prst="rect">
-            <a:avLst/>
-          </a:prstGeom>
-          <a:noFill/>
-        </p:spPr>
-        <p:txBody>
-          <a:bodyPr wrap="square" lIns="0" rIns="0" tIns="0" bIns="0">
-            <a:spAutoFit/>
-          </a:bodyPr>
-          <a:lstStyle/>
-          <a:p>
-            <a:pPr algn="l"/>
-            <a:r>
-              <a:rPr sz="1300" b="0" i="0">
-                <a:solidFill>
-                  <a:srgbClr val="5D6D7E"/>
-                </a:solidFill>
-                <a:latin typeface="Arial"/>
-              </a:rPr>
-              <a:t>C0 clean  ·  C1 JPEG 90 / 75 / 50  ·  C2 unfair control</a:t>
-            </a:r>
-          </a:p>
-        </p:txBody>
-      </p:sp>
-      <p:sp>
-        <p:nvSpPr>
-          <p:cNvPr id="26" name="Oval 25"/>
-          <p:cNvSpPr/>
-          <p:nvPr/>
-        </p:nvSpPr>
-        <p:spPr>
-          <a:xfrm>
-            <a:off x="4937760" y="5212080"/>
-            <a:ext cx="457200" cy="457200"/>
-          </a:xfrm>
-          <a:prstGeom prst="ellipse">
-            <a:avLst/>
-          </a:prstGeom>
-          <a:solidFill>
-            <a:srgbClr val="1F3A5F"/>
-          </a:solidFill>
-          <a:ln>
-            <a:noFill/>
-          </a:ln>
-          <a:effectLst/>
-        </p:spPr>
-        <p:txBody>
-          <a:bodyPr rtlCol="0" anchor="ctr"/>
-          <a:lstStyle/>
-          <a:p>
-            <a:pPr algn="ctr"/>
-            <a:r>
-              <a:rPr sz="1500" b="1">
-                <a:solidFill>
-                  <a:srgbClr val="FFFFFF"/>
-                </a:solidFill>
-              </a:rPr>
-              <a:t>5</a:t>
-            </a:r>
-          </a:p>
-        </p:txBody>
-      </p:sp>
-      <p:sp>
-        <p:nvSpPr>
-          <p:cNvPr id="27" name="TextBox 26"/>
-          <p:cNvSpPr txBox="1"/>
-          <p:nvPr/>
-        </p:nvSpPr>
-        <p:spPr>
-          <a:xfrm>
-            <a:off x="5577840" y="5193792"/>
-            <a:ext cx="6035040" cy="292608"/>
-          </a:xfrm>
-          <a:prstGeom prst="rect">
-            <a:avLst/>
-          </a:prstGeom>
-          <a:noFill/>
-        </p:spPr>
-        <p:txBody>
-          <a:bodyPr wrap="square" lIns="0" rIns="0" tIns="0" bIns="0">
-            <a:spAutoFit/>
-          </a:bodyPr>
-          <a:lstStyle/>
-          <a:p>
-            <a:pPr algn="l"/>
-            <a:r>
-              <a:rPr sz="1600" b="1" i="0">
-                <a:solidFill>
-                  <a:srgbClr val="1C2833"/>
-                </a:solidFill>
-                <a:latin typeface="Arial"/>
-              </a:rPr>
-              <a:t>Strict statistics</a:t>
-            </a:r>
-          </a:p>
-        </p:txBody>
-      </p:sp>
-      <p:sp>
-        <p:nvSpPr>
-          <p:cNvPr id="28" name="TextBox 27"/>
-          <p:cNvSpPr txBox="1"/>
-          <p:nvPr/>
-        </p:nvSpPr>
-        <p:spPr>
-          <a:xfrm>
-            <a:off x="5577840" y="5504688"/>
-            <a:ext cx="6035040" cy="274320"/>
-          </a:xfrm>
-          <a:prstGeom prst="rect">
-            <a:avLst/>
-          </a:prstGeom>
-          <a:noFill/>
-        </p:spPr>
-        <p:txBody>
-          <a:bodyPr wrap="square" lIns="0" rIns="0" tIns="0" bIns="0">
-            <a:spAutoFit/>
-          </a:bodyPr>
-          <a:lstStyle/>
-          <a:p>
-            <a:pPr algn="l"/>
-            <a:r>
-              <a:rPr sz="1300" b="0" i="0">
-                <a:solidFill>
-                  <a:srgbClr val="5D6D7E"/>
-                </a:solidFill>
-                <a:latin typeface="Arial"/>
-              </a:rPr>
-              <a:t>split by image group  ·  one locked 600-image test set  ·  95% CIs</a:t>
-            </a:r>
-          </a:p>
-        </p:txBody>
-      </p:sp>
-      <p:sp>
-        <p:nvSpPr>
-          <p:cNvPr id="29" name="TextBox 28"/>
           <p:cNvSpPr txBox="1"/>
           <p:nvPr/>
         </p:nvSpPr>
@@ -11566,7 +11578,7 @@
       </p:sp>
       <p:sp>
         <p:nvSpPr>
-          <p:cNvPr id="30" name="TextBox 29"/>
+          <p:cNvPr id="16" name="TextBox 15"/>
           <p:cNvSpPr txBox="1"/>
           <p:nvPr/>
         </p:nvSpPr>
@@ -11594,7 +11606,7 @@
                 </a:solidFill>
                 <a:latin typeface="Arial"/>
               </a:rPr>
-              <a:t>5 / 13</a:t>
+              <a:t>5 / 14</a:t>
             </a:r>
           </a:p>
         </p:txBody>
@@ -11950,6 +11962,1036 @@
                 </a:solidFill>
                 <a:latin typeface="Georgia"/>
               </a:rPr>
+              <a:t>Pipeline, fixed before any image was processed</a:t>
+            </a:r>
+          </a:p>
+        </p:txBody>
+      </p:sp>
+      <p:sp>
+        <p:nvSpPr>
+          <p:cNvPr id="12" name="TextBox 11"/>
+          <p:cNvSpPr txBox="1"/>
+          <p:nvPr/>
+        </p:nvSpPr>
+        <p:spPr>
+          <a:xfrm>
+            <a:off x="10271455" y="822960"/>
+            <a:ext cx="1371600" cy="274320"/>
+          </a:xfrm>
+          <a:prstGeom prst="rect">
+            <a:avLst/>
+          </a:prstGeom>
+          <a:noFill/>
+        </p:spPr>
+        <p:txBody>
+          <a:bodyPr wrap="square" lIns="0" rIns="0" tIns="0" bIns="0">
+            <a:spAutoFit/>
+          </a:bodyPr>
+          <a:lstStyle/>
+          <a:p>
+            <a:pPr algn="r"/>
+            <a:r>
+              <a:rPr sz="1100" b="1" i="0">
+                <a:solidFill>
+                  <a:srgbClr val="5D6D7E"/>
+                </a:solidFill>
+                <a:latin typeface="Arial"/>
+              </a:rPr>
+              <a:t>MEMBER 2</a:t>
+            </a:r>
+          </a:p>
+        </p:txBody>
+      </p:sp>
+      <p:pic>
+        <p:nvPicPr>
+          <p:cNvPr id="13" name="Picture 12" descr="pipeline-diagram.png"/>
+          <p:cNvPicPr>
+            <a:picLocks noChangeAspect="1"/>
+          </p:cNvPicPr>
+          <p:nvPr/>
+        </p:nvPicPr>
+        <p:blipFill>
+          <a:blip r:embed="rId2"/>
+          <a:stretch>
+            <a:fillRect/>
+          </a:stretch>
+        </p:blipFill>
+        <p:spPr>
+          <a:xfrm>
+            <a:off x="713822" y="1371600"/>
+            <a:ext cx="3601556" cy="5074920"/>
+          </a:xfrm>
+          <a:prstGeom prst="rect">
+            <a:avLst/>
+          </a:prstGeom>
+          <a:ln w="9525">
+            <a:solidFill>
+              <a:srgbClr val="D5DBDB"/>
+            </a:solidFill>
+          </a:ln>
+        </p:spPr>
+      </p:pic>
+      <p:sp>
+        <p:nvSpPr>
+          <p:cNvPr id="14" name="Oval 13"/>
+          <p:cNvSpPr/>
+          <p:nvPr/>
+        </p:nvSpPr>
+        <p:spPr>
+          <a:xfrm>
+            <a:off x="4937760" y="1554480"/>
+            <a:ext cx="457200" cy="457200"/>
+          </a:xfrm>
+          <a:prstGeom prst="ellipse">
+            <a:avLst/>
+          </a:prstGeom>
+          <a:solidFill>
+            <a:srgbClr val="1F3A5F"/>
+          </a:solidFill>
+          <a:ln>
+            <a:noFill/>
+          </a:ln>
+          <a:effectLst/>
+        </p:spPr>
+        <p:txBody>
+          <a:bodyPr rtlCol="0" anchor="ctr"/>
+          <a:lstStyle/>
+          <a:p>
+            <a:pPr algn="ctr"/>
+            <a:r>
+              <a:rPr sz="1500" b="1">
+                <a:solidFill>
+                  <a:srgbClr val="FFFFFF"/>
+                </a:solidFill>
+              </a:rPr>
+              <a:t>1</a:t>
+            </a:r>
+          </a:p>
+        </p:txBody>
+      </p:sp>
+      <p:sp>
+        <p:nvSpPr>
+          <p:cNvPr id="15" name="TextBox 14"/>
+          <p:cNvSpPr txBox="1"/>
+          <p:nvPr/>
+        </p:nvSpPr>
+        <p:spPr>
+          <a:xfrm>
+            <a:off x="5577840" y="1536192"/>
+            <a:ext cx="6035040" cy="292608"/>
+          </a:xfrm>
+          <a:prstGeom prst="rect">
+            <a:avLst/>
+          </a:prstGeom>
+          <a:noFill/>
+        </p:spPr>
+        <p:txBody>
+          <a:bodyPr wrap="square" lIns="0" rIns="0" tIns="0" bIns="0">
+            <a:spAutoFit/>
+          </a:bodyPr>
+          <a:lstStyle/>
+          <a:p>
+            <a:pPr algn="l"/>
+            <a:r>
+              <a:rPr sz="1600" b="1" i="0">
+                <a:solidFill>
+                  <a:srgbClr val="1C2833"/>
+                </a:solidFill>
+                <a:latin typeface="Arial"/>
+              </a:rPr>
+              <a:t>3,000 GenImage images</a:t>
+            </a:r>
+          </a:p>
+        </p:txBody>
+      </p:sp>
+      <p:sp>
+        <p:nvSpPr>
+          <p:cNvPr id="16" name="TextBox 15"/>
+          <p:cNvSpPr txBox="1"/>
+          <p:nvPr/>
+        </p:nvSpPr>
+        <p:spPr>
+          <a:xfrm>
+            <a:off x="5577840" y="1847088"/>
+            <a:ext cx="6035040" cy="274320"/>
+          </a:xfrm>
+          <a:prstGeom prst="rect">
+            <a:avLst/>
+          </a:prstGeom>
+          <a:noFill/>
+        </p:spPr>
+        <p:txBody>
+          <a:bodyPr wrap="square" lIns="0" rIns="0" tIns="0" bIns="0">
+            <a:spAutoFit/>
+          </a:bodyPr>
+          <a:lstStyle/>
+          <a:p>
+            <a:pPr algn="l"/>
+            <a:r>
+              <a:rPr sz="1300" b="0" i="0">
+                <a:solidFill>
+                  <a:srgbClr val="5D6D7E"/>
+                </a:solidFill>
+                <a:latin typeface="Arial"/>
+              </a:rPr>
+              <a:t>1,500 real  ·  500 each: BigGAN, SD v1.4, ADM</a:t>
+            </a:r>
+          </a:p>
+        </p:txBody>
+      </p:sp>
+      <p:sp>
+        <p:nvSpPr>
+          <p:cNvPr id="17" name="Oval 16"/>
+          <p:cNvSpPr/>
+          <p:nvPr/>
+        </p:nvSpPr>
+        <p:spPr>
+          <a:xfrm>
+            <a:off x="4937760" y="2468880"/>
+            <a:ext cx="457200" cy="457200"/>
+          </a:xfrm>
+          <a:prstGeom prst="ellipse">
+            <a:avLst/>
+          </a:prstGeom>
+          <a:solidFill>
+            <a:srgbClr val="1F3A5F"/>
+          </a:solidFill>
+          <a:ln>
+            <a:noFill/>
+          </a:ln>
+          <a:effectLst/>
+        </p:spPr>
+        <p:txBody>
+          <a:bodyPr rtlCol="0" anchor="ctr"/>
+          <a:lstStyle/>
+          <a:p>
+            <a:pPr algn="ctr"/>
+            <a:r>
+              <a:rPr sz="1500" b="1">
+                <a:solidFill>
+                  <a:srgbClr val="FFFFFF"/>
+                </a:solidFill>
+              </a:rPr>
+              <a:t>2</a:t>
+            </a:r>
+          </a:p>
+        </p:txBody>
+      </p:sp>
+      <p:sp>
+        <p:nvSpPr>
+          <p:cNvPr id="18" name="TextBox 17"/>
+          <p:cNvSpPr txBox="1"/>
+          <p:nvPr/>
+        </p:nvSpPr>
+        <p:spPr>
+          <a:xfrm>
+            <a:off x="5577840" y="2450592"/>
+            <a:ext cx="6035040" cy="292608"/>
+          </a:xfrm>
+          <a:prstGeom prst="rect">
+            <a:avLst/>
+          </a:prstGeom>
+          <a:noFill/>
+        </p:spPr>
+        <p:txBody>
+          <a:bodyPr wrap="square" lIns="0" rIns="0" tIns="0" bIns="0">
+            <a:spAutoFit/>
+          </a:bodyPr>
+          <a:lstStyle/>
+          <a:p>
+            <a:pPr algn="l"/>
+            <a:r>
+              <a:rPr sz="1600" b="1" i="0">
+                <a:solidFill>
+                  <a:srgbClr val="1C2833"/>
+                </a:solidFill>
+                <a:latin typeface="Arial"/>
+              </a:rPr>
+              <a:t>Clean before splitting</a:t>
+            </a:r>
+          </a:p>
+        </p:txBody>
+      </p:sp>
+      <p:sp>
+        <p:nvSpPr>
+          <p:cNvPr id="19" name="TextBox 18"/>
+          <p:cNvSpPr txBox="1"/>
+          <p:nvPr/>
+        </p:nvSpPr>
+        <p:spPr>
+          <a:xfrm>
+            <a:off x="5577840" y="2761488"/>
+            <a:ext cx="6035040" cy="274320"/>
+          </a:xfrm>
+          <a:prstGeom prst="rect">
+            <a:avLst/>
+          </a:prstGeom>
+          <a:noFill/>
+        </p:spPr>
+        <p:txBody>
+          <a:bodyPr wrap="square" lIns="0" rIns="0" tIns="0" bIns="0">
+            <a:spAutoFit/>
+          </a:bodyPr>
+          <a:lstStyle/>
+          <a:p>
+            <a:pPr algn="l"/>
+            <a:r>
+              <a:rPr sz="1300" b="0" i="0">
+                <a:solidFill>
+                  <a:srgbClr val="5D6D7E"/>
+                </a:solidFill>
+                <a:latin typeface="Arial"/>
+              </a:rPr>
+              <a:t>duplicates, near-copies, odd colour profiles removed</a:t>
+            </a:r>
+          </a:p>
+        </p:txBody>
+      </p:sp>
+      <p:sp>
+        <p:nvSpPr>
+          <p:cNvPr id="20" name="Oval 19"/>
+          <p:cNvSpPr/>
+          <p:nvPr/>
+        </p:nvSpPr>
+        <p:spPr>
+          <a:xfrm>
+            <a:off x="4937760" y="3383280"/>
+            <a:ext cx="457200" cy="457200"/>
+          </a:xfrm>
+          <a:prstGeom prst="ellipse">
+            <a:avLst/>
+          </a:prstGeom>
+          <a:solidFill>
+            <a:srgbClr val="1F3A5F"/>
+          </a:solidFill>
+          <a:ln>
+            <a:noFill/>
+          </a:ln>
+          <a:effectLst/>
+        </p:spPr>
+        <p:txBody>
+          <a:bodyPr rtlCol="0" anchor="ctr"/>
+          <a:lstStyle/>
+          <a:p>
+            <a:pPr algn="ctr"/>
+            <a:r>
+              <a:rPr sz="1500" b="1">
+                <a:solidFill>
+                  <a:srgbClr val="FFFFFF"/>
+                </a:solidFill>
+              </a:rPr>
+              <a:t>3</a:t>
+            </a:r>
+          </a:p>
+        </p:txBody>
+      </p:sp>
+      <p:sp>
+        <p:nvSpPr>
+          <p:cNvPr id="21" name="TextBox 20"/>
+          <p:cNvSpPr txBox="1"/>
+          <p:nvPr/>
+        </p:nvSpPr>
+        <p:spPr>
+          <a:xfrm>
+            <a:off x="5577840" y="3364992"/>
+            <a:ext cx="6035040" cy="292608"/>
+          </a:xfrm>
+          <a:prstGeom prst="rect">
+            <a:avLst/>
+          </a:prstGeom>
+          <a:noFill/>
+        </p:spPr>
+        <p:txBody>
+          <a:bodyPr wrap="square" lIns="0" rIns="0" tIns="0" bIns="0">
+            <a:spAutoFit/>
+          </a:bodyPr>
+          <a:lstStyle/>
+          <a:p>
+            <a:pPr algn="l"/>
+            <a:r>
+              <a:rPr sz="1600" b="1" i="0">
+                <a:solidFill>
+                  <a:srgbClr val="1C2833"/>
+                </a:solidFill>
+                <a:latin typeface="Arial"/>
+              </a:rPr>
+              <a:t>Same processing for both classes</a:t>
+            </a:r>
+          </a:p>
+        </p:txBody>
+      </p:sp>
+      <p:sp>
+        <p:nvSpPr>
+          <p:cNvPr id="22" name="TextBox 21"/>
+          <p:cNvSpPr txBox="1"/>
+          <p:nvPr/>
+        </p:nvSpPr>
+        <p:spPr>
+          <a:xfrm>
+            <a:off x="5577840" y="3675888"/>
+            <a:ext cx="6035040" cy="274320"/>
+          </a:xfrm>
+          <a:prstGeom prst="rect">
+            <a:avLst/>
+          </a:prstGeom>
+          <a:noFill/>
+        </p:spPr>
+        <p:txBody>
+          <a:bodyPr wrap="square" lIns="0" rIns="0" tIns="0" bIns="0">
+            <a:spAutoFit/>
+          </a:bodyPr>
+          <a:lstStyle/>
+          <a:p>
+            <a:pPr algn="l"/>
+            <a:r>
+              <a:rPr sz="1300" b="0" i="0">
+                <a:solidFill>
+                  <a:srgbClr val="5D6D7E"/>
+                </a:solidFill>
+                <a:latin typeface="Arial"/>
+              </a:rPr>
+              <a:t>resize to 256 × 256, lossless PNG</a:t>
+            </a:r>
+          </a:p>
+        </p:txBody>
+      </p:sp>
+      <p:sp>
+        <p:nvSpPr>
+          <p:cNvPr id="23" name="Oval 22"/>
+          <p:cNvSpPr/>
+          <p:nvPr/>
+        </p:nvSpPr>
+        <p:spPr>
+          <a:xfrm>
+            <a:off x="4937760" y="4297680"/>
+            <a:ext cx="457200" cy="457200"/>
+          </a:xfrm>
+          <a:prstGeom prst="ellipse">
+            <a:avLst/>
+          </a:prstGeom>
+          <a:solidFill>
+            <a:srgbClr val="1F3A5F"/>
+          </a:solidFill>
+          <a:ln>
+            <a:noFill/>
+          </a:ln>
+          <a:effectLst/>
+        </p:spPr>
+        <p:txBody>
+          <a:bodyPr rtlCol="0" anchor="ctr"/>
+          <a:lstStyle/>
+          <a:p>
+            <a:pPr algn="ctr"/>
+            <a:r>
+              <a:rPr sz="1500" b="1">
+                <a:solidFill>
+                  <a:srgbClr val="FFFFFF"/>
+                </a:solidFill>
+              </a:rPr>
+              <a:t>4</a:t>
+            </a:r>
+          </a:p>
+        </p:txBody>
+      </p:sp>
+      <p:sp>
+        <p:nvSpPr>
+          <p:cNvPr id="24" name="TextBox 23"/>
+          <p:cNvSpPr txBox="1"/>
+          <p:nvPr/>
+        </p:nvSpPr>
+        <p:spPr>
+          <a:xfrm>
+            <a:off x="5577840" y="4279392"/>
+            <a:ext cx="6035040" cy="292608"/>
+          </a:xfrm>
+          <a:prstGeom prst="rect">
+            <a:avLst/>
+          </a:prstGeom>
+          <a:noFill/>
+        </p:spPr>
+        <p:txBody>
+          <a:bodyPr wrap="square" lIns="0" rIns="0" tIns="0" bIns="0">
+            <a:spAutoFit/>
+          </a:bodyPr>
+          <a:lstStyle/>
+          <a:p>
+            <a:pPr algn="l"/>
+            <a:r>
+              <a:rPr sz="1600" b="1" i="0">
+                <a:solidFill>
+                  <a:srgbClr val="1C2833"/>
+                </a:solidFill>
+                <a:latin typeface="Arial"/>
+              </a:rPr>
+              <a:t>Three conditions</a:t>
+            </a:r>
+          </a:p>
+        </p:txBody>
+      </p:sp>
+      <p:sp>
+        <p:nvSpPr>
+          <p:cNvPr id="25" name="TextBox 24"/>
+          <p:cNvSpPr txBox="1"/>
+          <p:nvPr/>
+        </p:nvSpPr>
+        <p:spPr>
+          <a:xfrm>
+            <a:off x="5577840" y="4590288"/>
+            <a:ext cx="6035040" cy="274320"/>
+          </a:xfrm>
+          <a:prstGeom prst="rect">
+            <a:avLst/>
+          </a:prstGeom>
+          <a:noFill/>
+        </p:spPr>
+        <p:txBody>
+          <a:bodyPr wrap="square" lIns="0" rIns="0" tIns="0" bIns="0">
+            <a:spAutoFit/>
+          </a:bodyPr>
+          <a:lstStyle/>
+          <a:p>
+            <a:pPr algn="l"/>
+            <a:r>
+              <a:rPr sz="1300" b="0" i="0">
+                <a:solidFill>
+                  <a:srgbClr val="5D6D7E"/>
+                </a:solidFill>
+                <a:latin typeface="Arial"/>
+              </a:rPr>
+              <a:t>C0 clean  ·  C1 JPEG 90 / 75 / 50  ·  C2 unfair control</a:t>
+            </a:r>
+          </a:p>
+        </p:txBody>
+      </p:sp>
+      <p:sp>
+        <p:nvSpPr>
+          <p:cNvPr id="26" name="Oval 25"/>
+          <p:cNvSpPr/>
+          <p:nvPr/>
+        </p:nvSpPr>
+        <p:spPr>
+          <a:xfrm>
+            <a:off x="4937760" y="5212080"/>
+            <a:ext cx="457200" cy="457200"/>
+          </a:xfrm>
+          <a:prstGeom prst="ellipse">
+            <a:avLst/>
+          </a:prstGeom>
+          <a:solidFill>
+            <a:srgbClr val="1F3A5F"/>
+          </a:solidFill>
+          <a:ln>
+            <a:noFill/>
+          </a:ln>
+          <a:effectLst/>
+        </p:spPr>
+        <p:txBody>
+          <a:bodyPr rtlCol="0" anchor="ctr"/>
+          <a:lstStyle/>
+          <a:p>
+            <a:pPr algn="ctr"/>
+            <a:r>
+              <a:rPr sz="1500" b="1">
+                <a:solidFill>
+                  <a:srgbClr val="FFFFFF"/>
+                </a:solidFill>
+              </a:rPr>
+              <a:t>5</a:t>
+            </a:r>
+          </a:p>
+        </p:txBody>
+      </p:sp>
+      <p:sp>
+        <p:nvSpPr>
+          <p:cNvPr id="27" name="TextBox 26"/>
+          <p:cNvSpPr txBox="1"/>
+          <p:nvPr/>
+        </p:nvSpPr>
+        <p:spPr>
+          <a:xfrm>
+            <a:off x="5577840" y="5193792"/>
+            <a:ext cx="6035040" cy="292608"/>
+          </a:xfrm>
+          <a:prstGeom prst="rect">
+            <a:avLst/>
+          </a:prstGeom>
+          <a:noFill/>
+        </p:spPr>
+        <p:txBody>
+          <a:bodyPr wrap="square" lIns="0" rIns="0" tIns="0" bIns="0">
+            <a:spAutoFit/>
+          </a:bodyPr>
+          <a:lstStyle/>
+          <a:p>
+            <a:pPr algn="l"/>
+            <a:r>
+              <a:rPr sz="1600" b="1" i="0">
+                <a:solidFill>
+                  <a:srgbClr val="1C2833"/>
+                </a:solidFill>
+                <a:latin typeface="Arial"/>
+              </a:rPr>
+              <a:t>Strict statistics</a:t>
+            </a:r>
+          </a:p>
+        </p:txBody>
+      </p:sp>
+      <p:sp>
+        <p:nvSpPr>
+          <p:cNvPr id="28" name="TextBox 27"/>
+          <p:cNvSpPr txBox="1"/>
+          <p:nvPr/>
+        </p:nvSpPr>
+        <p:spPr>
+          <a:xfrm>
+            <a:off x="5577840" y="5504688"/>
+            <a:ext cx="6035040" cy="274320"/>
+          </a:xfrm>
+          <a:prstGeom prst="rect">
+            <a:avLst/>
+          </a:prstGeom>
+          <a:noFill/>
+        </p:spPr>
+        <p:txBody>
+          <a:bodyPr wrap="square" lIns="0" rIns="0" tIns="0" bIns="0">
+            <a:spAutoFit/>
+          </a:bodyPr>
+          <a:lstStyle/>
+          <a:p>
+            <a:pPr algn="l"/>
+            <a:r>
+              <a:rPr sz="1300" b="0" i="0">
+                <a:solidFill>
+                  <a:srgbClr val="5D6D7E"/>
+                </a:solidFill>
+                <a:latin typeface="Arial"/>
+              </a:rPr>
+              <a:t>split by image group  ·  one locked 600-image test set  ·  95% CIs</a:t>
+            </a:r>
+          </a:p>
+        </p:txBody>
+      </p:sp>
+      <p:sp>
+        <p:nvSpPr>
+          <p:cNvPr id="29" name="TextBox 28"/>
+          <p:cNvSpPr txBox="1"/>
+          <p:nvPr/>
+        </p:nvSpPr>
+        <p:spPr>
+          <a:xfrm>
+            <a:off x="548640" y="6510528"/>
+            <a:ext cx="8229600" cy="237744"/>
+          </a:xfrm>
+          <a:prstGeom prst="rect">
+            <a:avLst/>
+          </a:prstGeom>
+          <a:noFill/>
+        </p:spPr>
+        <p:txBody>
+          <a:bodyPr wrap="square" lIns="0" rIns="0" tIns="0" bIns="0">
+            <a:spAutoFit/>
+          </a:bodyPr>
+          <a:lstStyle/>
+          <a:p>
+            <a:pPr algn="l"/>
+            <a:r>
+              <a:rPr sz="1000" b="0" i="0">
+                <a:solidFill>
+                  <a:srgbClr val="5D6D7E"/>
+                </a:solidFill>
+                <a:latin typeface="Arial"/>
+              </a:rPr>
+              <a:t>CSE 4883 Digital Image Processing  ·  Same score, different story</a:t>
+            </a:r>
+          </a:p>
+        </p:txBody>
+      </p:sp>
+      <p:sp>
+        <p:nvSpPr>
+          <p:cNvPr id="30" name="TextBox 29"/>
+          <p:cNvSpPr txBox="1"/>
+          <p:nvPr/>
+        </p:nvSpPr>
+        <p:spPr>
+          <a:xfrm>
+            <a:off x="10362895" y="6510528"/>
+            <a:ext cx="1280160" cy="237744"/>
+          </a:xfrm>
+          <a:prstGeom prst="rect">
+            <a:avLst/>
+          </a:prstGeom>
+          <a:noFill/>
+        </p:spPr>
+        <p:txBody>
+          <a:bodyPr wrap="square" lIns="0" rIns="0" tIns="0" bIns="0">
+            <a:spAutoFit/>
+          </a:bodyPr>
+          <a:lstStyle/>
+          <a:p>
+            <a:pPr algn="r"/>
+            <a:r>
+              <a:rPr sz="1000" b="0" i="0">
+                <a:solidFill>
+                  <a:srgbClr val="5D6D7E"/>
+                </a:solidFill>
+                <a:latin typeface="Arial"/>
+              </a:rPr>
+              <a:t>6 / 14</a:t>
+            </a:r>
+          </a:p>
+        </p:txBody>
+      </p:sp>
+    </p:spTree>
+  </p:cSld>
+  <p:clrMapOvr>
+    <a:masterClrMapping/>
+  </p:clrMapOvr>
+</p:sld>
+</file>
+
+<file path=ppt/slides/slide7.xml><?xml version="1.0" encoding="utf-8"?>
+<p:sld xmlns:a="http://schemas.openxmlformats.org/drawingml/2006/main" xmlns:p="http://schemas.openxmlformats.org/presentationml/2006/main" xmlns:r="http://schemas.openxmlformats.org/officeDocument/2006/relationships">
+  <p:cSld>
+    <p:spTree>
+      <p:nvGrpSpPr>
+        <p:cNvPr id="1" name=""/>
+        <p:cNvGrpSpPr/>
+        <p:nvPr/>
+      </p:nvGrpSpPr>
+      <p:grpSpPr/>
+      <p:sp>
+        <p:nvSpPr>
+          <p:cNvPr id="2" name="TextBox 1"/>
+          <p:cNvSpPr txBox="1"/>
+          <p:nvPr/>
+        </p:nvSpPr>
+        <p:spPr>
+          <a:xfrm>
+            <a:off x="548640" y="256032"/>
+            <a:ext cx="1584916" cy="274320"/>
+          </a:xfrm>
+          <a:prstGeom prst="rect">
+            <a:avLst/>
+          </a:prstGeom>
+          <a:noFill/>
+        </p:spPr>
+        <p:txBody>
+          <a:bodyPr wrap="square" lIns="0" rIns="0" tIns="0" bIns="0">
+            <a:spAutoFit/>
+          </a:bodyPr>
+          <a:lstStyle/>
+          <a:p>
+            <a:pPr algn="ctr"/>
+            <a:r>
+              <a:rPr sz="1050" b="0" i="0">
+                <a:solidFill>
+                  <a:srgbClr val="5D6D7E"/>
+                </a:solidFill>
+                <a:latin typeface="Arial"/>
+              </a:rPr>
+              <a:t>INTRODUCTION</a:t>
+            </a:r>
+          </a:p>
+        </p:txBody>
+      </p:sp>
+      <p:sp>
+        <p:nvSpPr>
+          <p:cNvPr id="3" name="TextBox 2"/>
+          <p:cNvSpPr txBox="1"/>
+          <p:nvPr/>
+        </p:nvSpPr>
+        <p:spPr>
+          <a:xfrm>
+            <a:off x="2133556" y="256032"/>
+            <a:ext cx="1584916" cy="274320"/>
+          </a:xfrm>
+          <a:prstGeom prst="rect">
+            <a:avLst/>
+          </a:prstGeom>
+          <a:noFill/>
+        </p:spPr>
+        <p:txBody>
+          <a:bodyPr wrap="square" lIns="0" rIns="0" tIns="0" bIns="0">
+            <a:spAutoFit/>
+          </a:bodyPr>
+          <a:lstStyle/>
+          <a:p>
+            <a:pPr algn="ctr"/>
+            <a:r>
+              <a:rPr sz="1050" b="0" i="0">
+                <a:solidFill>
+                  <a:srgbClr val="5D6D7E"/>
+                </a:solidFill>
+                <a:latin typeface="Arial"/>
+              </a:rPr>
+              <a:t>NOVELTY</a:t>
+            </a:r>
+          </a:p>
+        </p:txBody>
+      </p:sp>
+      <p:sp>
+        <p:nvSpPr>
+          <p:cNvPr id="4" name="TextBox 3"/>
+          <p:cNvSpPr txBox="1"/>
+          <p:nvPr/>
+        </p:nvSpPr>
+        <p:spPr>
+          <a:xfrm>
+            <a:off x="3718472" y="256032"/>
+            <a:ext cx="1584916" cy="274320"/>
+          </a:xfrm>
+          <a:prstGeom prst="rect">
+            <a:avLst/>
+          </a:prstGeom>
+          <a:noFill/>
+        </p:spPr>
+        <p:txBody>
+          <a:bodyPr wrap="square" lIns="0" rIns="0" tIns="0" bIns="0">
+            <a:spAutoFit/>
+          </a:bodyPr>
+          <a:lstStyle/>
+          <a:p>
+            <a:pPr algn="ctr"/>
+            <a:r>
+              <a:rPr sz="1050" b="1" i="0">
+                <a:solidFill>
+                  <a:srgbClr val="B2182B"/>
+                </a:solidFill>
+                <a:latin typeface="Arial"/>
+              </a:rPr>
+              <a:t>METHODOLOGY</a:t>
+            </a:r>
+          </a:p>
+        </p:txBody>
+      </p:sp>
+      <p:sp>
+        <p:nvSpPr>
+          <p:cNvPr id="5" name="Rectangle 4"/>
+          <p:cNvSpPr/>
+          <p:nvPr/>
+        </p:nvSpPr>
+        <p:spPr>
+          <a:xfrm>
+            <a:off x="3947072" y="548640"/>
+            <a:ext cx="1127716" cy="28575"/>
+          </a:xfrm>
+          <a:prstGeom prst="rect">
+            <a:avLst/>
+          </a:prstGeom>
+          <a:solidFill>
+            <a:srgbClr val="B2182B"/>
+          </a:solidFill>
+          <a:ln>
+            <a:noFill/>
+          </a:ln>
+        </p:spPr>
+        <p:txBody>
+          <a:bodyPr rtlCol="0" anchor="ctr"/>
+          <a:lstStyle/>
+          <a:p>
+            <a:pPr algn="ctr"/>
+          </a:p>
+        </p:txBody>
+      </p:sp>
+      <p:sp>
+        <p:nvSpPr>
+          <p:cNvPr id="6" name="TextBox 5"/>
+          <p:cNvSpPr txBox="1"/>
+          <p:nvPr/>
+        </p:nvSpPr>
+        <p:spPr>
+          <a:xfrm>
+            <a:off x="5303389" y="256032"/>
+            <a:ext cx="1584916" cy="274320"/>
+          </a:xfrm>
+          <a:prstGeom prst="rect">
+            <a:avLst/>
+          </a:prstGeom>
+          <a:noFill/>
+        </p:spPr>
+        <p:txBody>
+          <a:bodyPr wrap="square" lIns="0" rIns="0" tIns="0" bIns="0">
+            <a:spAutoFit/>
+          </a:bodyPr>
+          <a:lstStyle/>
+          <a:p>
+            <a:pPr algn="ctr"/>
+            <a:r>
+              <a:rPr sz="1050" b="0" i="0">
+                <a:solidFill>
+                  <a:srgbClr val="5D6D7E"/>
+                </a:solidFill>
+                <a:latin typeface="Arial"/>
+              </a:rPr>
+              <a:t>EXPERIMENTS</a:t>
+            </a:r>
+          </a:p>
+        </p:txBody>
+      </p:sp>
+      <p:sp>
+        <p:nvSpPr>
+          <p:cNvPr id="7" name="TextBox 6"/>
+          <p:cNvSpPr txBox="1"/>
+          <p:nvPr/>
+        </p:nvSpPr>
+        <p:spPr>
+          <a:xfrm>
+            <a:off x="6888305" y="256032"/>
+            <a:ext cx="1584916" cy="274320"/>
+          </a:xfrm>
+          <a:prstGeom prst="rect">
+            <a:avLst/>
+          </a:prstGeom>
+          <a:noFill/>
+        </p:spPr>
+        <p:txBody>
+          <a:bodyPr wrap="square" lIns="0" rIns="0" tIns="0" bIns="0">
+            <a:spAutoFit/>
+          </a:bodyPr>
+          <a:lstStyle/>
+          <a:p>
+            <a:pPr algn="ctr"/>
+            <a:r>
+              <a:rPr sz="1050" b="0" i="0">
+                <a:solidFill>
+                  <a:srgbClr val="5D6D7E"/>
+                </a:solidFill>
+                <a:latin typeface="Arial"/>
+              </a:rPr>
+              <a:t>RESULTS</a:t>
+            </a:r>
+          </a:p>
+        </p:txBody>
+      </p:sp>
+      <p:sp>
+        <p:nvSpPr>
+          <p:cNvPr id="8" name="TextBox 7"/>
+          <p:cNvSpPr txBox="1"/>
+          <p:nvPr/>
+        </p:nvSpPr>
+        <p:spPr>
+          <a:xfrm>
+            <a:off x="8473222" y="256032"/>
+            <a:ext cx="1584916" cy="274320"/>
+          </a:xfrm>
+          <a:prstGeom prst="rect">
+            <a:avLst/>
+          </a:prstGeom>
+          <a:noFill/>
+        </p:spPr>
+        <p:txBody>
+          <a:bodyPr wrap="square" lIns="0" rIns="0" tIns="0" bIns="0">
+            <a:spAutoFit/>
+          </a:bodyPr>
+          <a:lstStyle/>
+          <a:p>
+            <a:pPr algn="ctr"/>
+            <a:r>
+              <a:rPr sz="1050" b="0" i="0">
+                <a:solidFill>
+                  <a:srgbClr val="5D6D7E"/>
+                </a:solidFill>
+                <a:latin typeface="Arial"/>
+              </a:rPr>
+              <a:t>LIMITATIONS</a:t>
+            </a:r>
+          </a:p>
+        </p:txBody>
+      </p:sp>
+      <p:sp>
+        <p:nvSpPr>
+          <p:cNvPr id="9" name="TextBox 8"/>
+          <p:cNvSpPr txBox="1"/>
+          <p:nvPr/>
+        </p:nvSpPr>
+        <p:spPr>
+          <a:xfrm>
+            <a:off x="10058138" y="256032"/>
+            <a:ext cx="1584916" cy="274320"/>
+          </a:xfrm>
+          <a:prstGeom prst="rect">
+            <a:avLst/>
+          </a:prstGeom>
+          <a:noFill/>
+        </p:spPr>
+        <p:txBody>
+          <a:bodyPr wrap="square" lIns="0" rIns="0" tIns="0" bIns="0">
+            <a:spAutoFit/>
+          </a:bodyPr>
+          <a:lstStyle/>
+          <a:p>
+            <a:pPr algn="ctr"/>
+            <a:r>
+              <a:rPr sz="1050" b="0" i="0">
+                <a:solidFill>
+                  <a:srgbClr val="5D6D7E"/>
+                </a:solidFill>
+                <a:latin typeface="Arial"/>
+              </a:rPr>
+              <a:t>FUTURE</a:t>
+            </a:r>
+          </a:p>
+        </p:txBody>
+      </p:sp>
+      <p:sp>
+        <p:nvSpPr>
+          <p:cNvPr id="10" name="Rectangle 9"/>
+          <p:cNvSpPr/>
+          <p:nvPr/>
+        </p:nvSpPr>
+        <p:spPr>
+          <a:xfrm>
+            <a:off x="548640" y="566928"/>
+            <a:ext cx="11094415" cy="9525"/>
+          </a:xfrm>
+          <a:prstGeom prst="rect">
+            <a:avLst/>
+          </a:prstGeom>
+          <a:solidFill>
+            <a:srgbClr val="D5DBDB"/>
+          </a:solidFill>
+          <a:ln>
+            <a:noFill/>
+          </a:ln>
+        </p:spPr>
+        <p:txBody>
+          <a:bodyPr rtlCol="0" anchor="ctr"/>
+          <a:lstStyle/>
+          <a:p>
+            <a:pPr algn="ctr"/>
+          </a:p>
+        </p:txBody>
+      </p:sp>
+      <p:sp>
+        <p:nvSpPr>
+          <p:cNvPr id="11" name="TextBox 10"/>
+          <p:cNvSpPr txBox="1"/>
+          <p:nvPr/>
+        </p:nvSpPr>
+        <p:spPr>
+          <a:xfrm>
+            <a:off x="548640" y="713232"/>
+            <a:ext cx="9418320" cy="548640"/>
+          </a:xfrm>
+          <a:prstGeom prst="rect">
+            <a:avLst/>
+          </a:prstGeom>
+          <a:noFill/>
+        </p:spPr>
+        <p:txBody>
+          <a:bodyPr wrap="square" lIns="0" rIns="0" tIns="0" bIns="0">
+            <a:spAutoFit/>
+          </a:bodyPr>
+          <a:lstStyle/>
+          <a:p>
+            <a:pPr algn="l"/>
+            <a:r>
+              <a:rPr sz="2700" b="1" i="0">
+                <a:solidFill>
+                  <a:srgbClr val="1F3A5F"/>
+                </a:solidFill>
+                <a:latin typeface="Georgia"/>
+              </a:rPr>
               <a:t>14 explainable features, one simple classifier</a:t>
             </a:r>
           </a:p>
@@ -12447,7 +13489,7 @@
                 </a:solidFill>
                 <a:latin typeface="Arial"/>
               </a:rPr>
-              <a:t>6 / 13</a:t>
+              <a:t>7 / 14</a:t>
             </a:r>
           </a:p>
         </p:txBody>
@@ -12460,7 +13502,7 @@
 </p:sld>
 </file>
 
-<file path=ppt/slides/slide7.xml><?xml version="1.0" encoding="utf-8"?>
+<file path=ppt/slides/slide8.xml><?xml version="1.0" encoding="utf-8"?>
 <p:sld xmlns:a="http://schemas.openxmlformats.org/drawingml/2006/main" xmlns:p="http://schemas.openxmlformats.org/presentationml/2006/main" xmlns:r="http://schemas.openxmlformats.org/officeDocument/2006/relationships">
   <p:cSld>
     <p:spTree>
@@ -14069,7 +15111,7 @@
                 </a:solidFill>
                 <a:latin typeface="Arial"/>
               </a:rPr>
-              <a:t>7 / 13</a:t>
+              <a:t>8 / 14</a:t>
             </a:r>
           </a:p>
         </p:txBody>
@@ -14082,7 +15124,7 @@
 </p:sld>
 </file>
 
-<file path=ppt/slides/slide8.xml><?xml version="1.0" encoding="utf-8"?>
+<file path=ppt/slides/slide9.xml><?xml version="1.0" encoding="utf-8"?>
 <p:sld xmlns:a="http://schemas.openxmlformats.org/drawingml/2006/main" xmlns:p="http://schemas.openxmlformats.org/presentationml/2006/main" xmlns:r="http://schemas.openxmlformats.org/officeDocument/2006/relationships">
   <p:cSld>
     <p:spTree>
@@ -15129,552 +16171,7 @@
                 </a:solidFill>
                 <a:latin typeface="Arial"/>
               </a:rPr>
-              <a:t>8 / 13</a:t>
-            </a:r>
-          </a:p>
-        </p:txBody>
-      </p:sp>
-    </p:spTree>
-  </p:cSld>
-  <p:clrMapOvr>
-    <a:masterClrMapping/>
-  </p:clrMapOvr>
-</p:sld>
-</file>
-
-<file path=ppt/slides/slide9.xml><?xml version="1.0" encoding="utf-8"?>
-<p:sld xmlns:a="http://schemas.openxmlformats.org/drawingml/2006/main" xmlns:p="http://schemas.openxmlformats.org/presentationml/2006/main" xmlns:r="http://schemas.openxmlformats.org/officeDocument/2006/relationships">
-  <p:cSld>
-    <p:spTree>
-      <p:nvGrpSpPr>
-        <p:cNvPr id="1" name=""/>
-        <p:cNvGrpSpPr/>
-        <p:nvPr/>
-      </p:nvGrpSpPr>
-      <p:grpSpPr/>
-      <p:sp>
-        <p:nvSpPr>
-          <p:cNvPr id="2" name="TextBox 1"/>
-          <p:cNvSpPr txBox="1"/>
-          <p:nvPr/>
-        </p:nvSpPr>
-        <p:spPr>
-          <a:xfrm>
-            <a:off x="548640" y="256032"/>
-            <a:ext cx="1584916" cy="274320"/>
-          </a:xfrm>
-          <a:prstGeom prst="rect">
-            <a:avLst/>
-          </a:prstGeom>
-          <a:noFill/>
-        </p:spPr>
-        <p:txBody>
-          <a:bodyPr wrap="square" lIns="0" rIns="0" tIns="0" bIns="0">
-            <a:spAutoFit/>
-          </a:bodyPr>
-          <a:lstStyle/>
-          <a:p>
-            <a:pPr algn="ctr"/>
-            <a:r>
-              <a:rPr sz="1050" b="0" i="0">
-                <a:solidFill>
-                  <a:srgbClr val="5D6D7E"/>
-                </a:solidFill>
-                <a:latin typeface="Arial"/>
-              </a:rPr>
-              <a:t>INTRODUCTION</a:t>
-            </a:r>
-          </a:p>
-        </p:txBody>
-      </p:sp>
-      <p:sp>
-        <p:nvSpPr>
-          <p:cNvPr id="3" name="TextBox 2"/>
-          <p:cNvSpPr txBox="1"/>
-          <p:nvPr/>
-        </p:nvSpPr>
-        <p:spPr>
-          <a:xfrm>
-            <a:off x="2133556" y="256032"/>
-            <a:ext cx="1584916" cy="274320"/>
-          </a:xfrm>
-          <a:prstGeom prst="rect">
-            <a:avLst/>
-          </a:prstGeom>
-          <a:noFill/>
-        </p:spPr>
-        <p:txBody>
-          <a:bodyPr wrap="square" lIns="0" rIns="0" tIns="0" bIns="0">
-            <a:spAutoFit/>
-          </a:bodyPr>
-          <a:lstStyle/>
-          <a:p>
-            <a:pPr algn="ctr"/>
-            <a:r>
-              <a:rPr sz="1050" b="0" i="0">
-                <a:solidFill>
-                  <a:srgbClr val="5D6D7E"/>
-                </a:solidFill>
-                <a:latin typeface="Arial"/>
-              </a:rPr>
-              <a:t>NOVELTY</a:t>
-            </a:r>
-          </a:p>
-        </p:txBody>
-      </p:sp>
-      <p:sp>
-        <p:nvSpPr>
-          <p:cNvPr id="4" name="TextBox 3"/>
-          <p:cNvSpPr txBox="1"/>
-          <p:nvPr/>
-        </p:nvSpPr>
-        <p:spPr>
-          <a:xfrm>
-            <a:off x="3718472" y="256032"/>
-            <a:ext cx="1584916" cy="274320"/>
-          </a:xfrm>
-          <a:prstGeom prst="rect">
-            <a:avLst/>
-          </a:prstGeom>
-          <a:noFill/>
-        </p:spPr>
-        <p:txBody>
-          <a:bodyPr wrap="square" lIns="0" rIns="0" tIns="0" bIns="0">
-            <a:spAutoFit/>
-          </a:bodyPr>
-          <a:lstStyle/>
-          <a:p>
-            <a:pPr algn="ctr"/>
-            <a:r>
-              <a:rPr sz="1050" b="0" i="0">
-                <a:solidFill>
-                  <a:srgbClr val="5D6D7E"/>
-                </a:solidFill>
-                <a:latin typeface="Arial"/>
-              </a:rPr>
-              <a:t>METHODOLOGY</a:t>
-            </a:r>
-          </a:p>
-        </p:txBody>
-      </p:sp>
-      <p:sp>
-        <p:nvSpPr>
-          <p:cNvPr id="5" name="TextBox 4"/>
-          <p:cNvSpPr txBox="1"/>
-          <p:nvPr/>
-        </p:nvSpPr>
-        <p:spPr>
-          <a:xfrm>
-            <a:off x="5303389" y="256032"/>
-            <a:ext cx="1584916" cy="274320"/>
-          </a:xfrm>
-          <a:prstGeom prst="rect">
-            <a:avLst/>
-          </a:prstGeom>
-          <a:noFill/>
-        </p:spPr>
-        <p:txBody>
-          <a:bodyPr wrap="square" lIns="0" rIns="0" tIns="0" bIns="0">
-            <a:spAutoFit/>
-          </a:bodyPr>
-          <a:lstStyle/>
-          <a:p>
-            <a:pPr algn="ctr"/>
-            <a:r>
-              <a:rPr sz="1050" b="0" i="0">
-                <a:solidFill>
-                  <a:srgbClr val="5D6D7E"/>
-                </a:solidFill>
-                <a:latin typeface="Arial"/>
-              </a:rPr>
-              <a:t>EXPERIMENTS</a:t>
-            </a:r>
-          </a:p>
-        </p:txBody>
-      </p:sp>
-      <p:sp>
-        <p:nvSpPr>
-          <p:cNvPr id="6" name="TextBox 5"/>
-          <p:cNvSpPr txBox="1"/>
-          <p:nvPr/>
-        </p:nvSpPr>
-        <p:spPr>
-          <a:xfrm>
-            <a:off x="6888305" y="256032"/>
-            <a:ext cx="1584916" cy="274320"/>
-          </a:xfrm>
-          <a:prstGeom prst="rect">
-            <a:avLst/>
-          </a:prstGeom>
-          <a:noFill/>
-        </p:spPr>
-        <p:txBody>
-          <a:bodyPr wrap="square" lIns="0" rIns="0" tIns="0" bIns="0">
-            <a:spAutoFit/>
-          </a:bodyPr>
-          <a:lstStyle/>
-          <a:p>
-            <a:pPr algn="ctr"/>
-            <a:r>
-              <a:rPr sz="1050" b="1" i="0">
-                <a:solidFill>
-                  <a:srgbClr val="B2182B"/>
-                </a:solidFill>
-                <a:latin typeface="Arial"/>
-              </a:rPr>
-              <a:t>RESULTS</a:t>
-            </a:r>
-          </a:p>
-        </p:txBody>
-      </p:sp>
-      <p:sp>
-        <p:nvSpPr>
-          <p:cNvPr id="7" name="Rectangle 6"/>
-          <p:cNvSpPr/>
-          <p:nvPr/>
-        </p:nvSpPr>
-        <p:spPr>
-          <a:xfrm>
-            <a:off x="7116905" y="548640"/>
-            <a:ext cx="1127716" cy="28575"/>
-          </a:xfrm>
-          <a:prstGeom prst="rect">
-            <a:avLst/>
-          </a:prstGeom>
-          <a:solidFill>
-            <a:srgbClr val="B2182B"/>
-          </a:solidFill>
-          <a:ln>
-            <a:noFill/>
-          </a:ln>
-        </p:spPr>
-        <p:txBody>
-          <a:bodyPr rtlCol="0" anchor="ctr"/>
-          <a:lstStyle/>
-          <a:p>
-            <a:pPr algn="ctr"/>
-          </a:p>
-        </p:txBody>
-      </p:sp>
-      <p:sp>
-        <p:nvSpPr>
-          <p:cNvPr id="8" name="TextBox 7"/>
-          <p:cNvSpPr txBox="1"/>
-          <p:nvPr/>
-        </p:nvSpPr>
-        <p:spPr>
-          <a:xfrm>
-            <a:off x="8473222" y="256032"/>
-            <a:ext cx="1584916" cy="274320"/>
-          </a:xfrm>
-          <a:prstGeom prst="rect">
-            <a:avLst/>
-          </a:prstGeom>
-          <a:noFill/>
-        </p:spPr>
-        <p:txBody>
-          <a:bodyPr wrap="square" lIns="0" rIns="0" tIns="0" bIns="0">
-            <a:spAutoFit/>
-          </a:bodyPr>
-          <a:lstStyle/>
-          <a:p>
-            <a:pPr algn="ctr"/>
-            <a:r>
-              <a:rPr sz="1050" b="0" i="0">
-                <a:solidFill>
-                  <a:srgbClr val="5D6D7E"/>
-                </a:solidFill>
-                <a:latin typeface="Arial"/>
-              </a:rPr>
-              <a:t>LIMITATIONS</a:t>
-            </a:r>
-          </a:p>
-        </p:txBody>
-      </p:sp>
-      <p:sp>
-        <p:nvSpPr>
-          <p:cNvPr id="9" name="TextBox 8"/>
-          <p:cNvSpPr txBox="1"/>
-          <p:nvPr/>
-        </p:nvSpPr>
-        <p:spPr>
-          <a:xfrm>
-            <a:off x="10058138" y="256032"/>
-            <a:ext cx="1584916" cy="274320"/>
-          </a:xfrm>
-          <a:prstGeom prst="rect">
-            <a:avLst/>
-          </a:prstGeom>
-          <a:noFill/>
-        </p:spPr>
-        <p:txBody>
-          <a:bodyPr wrap="square" lIns="0" rIns="0" tIns="0" bIns="0">
-            <a:spAutoFit/>
-          </a:bodyPr>
-          <a:lstStyle/>
-          <a:p>
-            <a:pPr algn="ctr"/>
-            <a:r>
-              <a:rPr sz="1050" b="0" i="0">
-                <a:solidFill>
-                  <a:srgbClr val="5D6D7E"/>
-                </a:solidFill>
-                <a:latin typeface="Arial"/>
-              </a:rPr>
-              <a:t>FUTURE</a:t>
-            </a:r>
-          </a:p>
-        </p:txBody>
-      </p:sp>
-      <p:sp>
-        <p:nvSpPr>
-          <p:cNvPr id="10" name="Rectangle 9"/>
-          <p:cNvSpPr/>
-          <p:nvPr/>
-        </p:nvSpPr>
-        <p:spPr>
-          <a:xfrm>
-            <a:off x="548640" y="566928"/>
-            <a:ext cx="11094415" cy="9525"/>
-          </a:xfrm>
-          <a:prstGeom prst="rect">
-            <a:avLst/>
-          </a:prstGeom>
-          <a:solidFill>
-            <a:srgbClr val="D5DBDB"/>
-          </a:solidFill>
-          <a:ln>
-            <a:noFill/>
-          </a:ln>
-        </p:spPr>
-        <p:txBody>
-          <a:bodyPr rtlCol="0" anchor="ctr"/>
-          <a:lstStyle/>
-          <a:p>
-            <a:pPr algn="ctr"/>
-          </a:p>
-        </p:txBody>
-      </p:sp>
-      <p:sp>
-        <p:nvSpPr>
-          <p:cNvPr id="11" name="TextBox 10"/>
-          <p:cNvSpPr txBox="1"/>
-          <p:nvPr/>
-        </p:nvSpPr>
-        <p:spPr>
-          <a:xfrm>
-            <a:off x="548640" y="713232"/>
-            <a:ext cx="9418320" cy="548640"/>
-          </a:xfrm>
-          <a:prstGeom prst="rect">
-            <a:avLst/>
-          </a:prstGeom>
-          <a:noFill/>
-        </p:spPr>
-        <p:txBody>
-          <a:bodyPr wrap="square" lIns="0" rIns="0" tIns="0" bIns="0">
-            <a:spAutoFit/>
-          </a:bodyPr>
-          <a:lstStyle/>
-          <a:p>
-            <a:pPr algn="l"/>
-            <a:r>
-              <a:rPr sz="2700" b="1" i="0">
-                <a:solidFill>
-                  <a:srgbClr val="1F3A5F"/>
-                </a:solidFill>
-                <a:latin typeface="Georgia"/>
-              </a:rPr>
-              <a:t>Why BigGAN is easy: our resize empties its high band</a:t>
-            </a:r>
-          </a:p>
-        </p:txBody>
-      </p:sp>
-      <p:sp>
-        <p:nvSpPr>
-          <p:cNvPr id="12" name="TextBox 11"/>
-          <p:cNvSpPr txBox="1"/>
-          <p:nvPr/>
-        </p:nvSpPr>
-        <p:spPr>
-          <a:xfrm>
-            <a:off x="10271455" y="822960"/>
-            <a:ext cx="1371600" cy="274320"/>
-          </a:xfrm>
-          <a:prstGeom prst="rect">
-            <a:avLst/>
-          </a:prstGeom>
-          <a:noFill/>
-        </p:spPr>
-        <p:txBody>
-          <a:bodyPr wrap="square" lIns="0" rIns="0" tIns="0" bIns="0">
-            <a:spAutoFit/>
-          </a:bodyPr>
-          <a:lstStyle/>
-          <a:p>
-            <a:pPr algn="r"/>
-            <a:r>
-              <a:rPr sz="1100" b="1" i="0">
-                <a:solidFill>
-                  <a:srgbClr val="5D6D7E"/>
-                </a:solidFill>
-                <a:latin typeface="Arial"/>
-              </a:rPr>
-              <a:t>MEMBER 3</a:t>
-            </a:r>
-          </a:p>
-        </p:txBody>
-      </p:sp>
-      <p:pic>
-        <p:nvPicPr>
-          <p:cNvPr id="13" name="Picture 12" descr="radial_spectra.png"/>
-          <p:cNvPicPr>
-            <a:picLocks noChangeAspect="1"/>
-          </p:cNvPicPr>
-          <p:nvPr/>
-        </p:nvPicPr>
-        <p:blipFill>
-          <a:blip r:embed="rId2"/>
-          <a:stretch>
-            <a:fillRect/>
-          </a:stretch>
-        </p:blipFill>
-        <p:spPr>
-          <a:xfrm>
-            <a:off x="548640" y="1429902"/>
-            <a:ext cx="11094415" cy="4199364"/>
-          </a:xfrm>
-          <a:prstGeom prst="rect">
-            <a:avLst/>
-          </a:prstGeom>
-          <a:ln w="9525">
-            <a:solidFill>
-              <a:srgbClr val="D5DBDB"/>
-            </a:solidFill>
-          </a:ln>
-        </p:spPr>
-      </p:pic>
-      <p:sp>
-        <p:nvSpPr>
-          <p:cNvPr id="14" name="TextBox 13"/>
-          <p:cNvSpPr txBox="1"/>
-          <p:nvPr/>
-        </p:nvSpPr>
-        <p:spPr>
-          <a:xfrm>
-            <a:off x="548640" y="5738994"/>
-            <a:ext cx="11094415" cy="621792"/>
-          </a:xfrm>
-          <a:prstGeom prst="rect">
-            <a:avLst/>
-          </a:prstGeom>
-          <a:noFill/>
-        </p:spPr>
-        <p:txBody>
-          <a:bodyPr wrap="square" lIns="0" rIns="0" tIns="0" bIns="0">
-            <a:spAutoFit/>
-          </a:bodyPr>
-          <a:lstStyle/>
-          <a:p>
-            <a:pPr algn="ctr">
-              <a:lnSpc>
-                <a:spcPct val="105000"/>
-              </a:lnSpc>
-            </a:pPr>
-            <a:r>
-              <a:rPr sz="1200" b="0" i="0">
-                <a:solidFill>
-                  <a:srgbClr val="5D6D7E"/>
-                </a:solidFill>
-                <a:latin typeface="Arial"/>
-              </a:rPr>
-              <a:t>Mean power spectrum per class, all images. Left: BigGAN, the only class enlarged 2x, loses energy above 0.25 cycles/pixel. Right: with the same resampling for all, the three fake curves coincide.</a:t>
-            </a:r>
-          </a:p>
-          <a:p>
-            <a:pPr algn="ctr">
-              <a:lnSpc>
-                <a:spcPct val="105000"/>
-              </a:lnSpc>
-            </a:pPr>
-            <a:r>
-              <a:rPr sz="1200" b="0" i="0">
-                <a:solidFill>
-                  <a:srgbClr val="5D6D7E"/>
-                </a:solidFill>
-                <a:latin typeface="Arial"/>
-              </a:rPr>
-              <a:t>Source: results/diagnostics/radial_spectra.csv</a:t>
-            </a:r>
-          </a:p>
-        </p:txBody>
-      </p:sp>
-      <p:sp>
-        <p:nvSpPr>
-          <p:cNvPr id="15" name="TextBox 14"/>
-          <p:cNvSpPr txBox="1"/>
-          <p:nvPr/>
-        </p:nvSpPr>
-        <p:spPr>
-          <a:xfrm>
-            <a:off x="548640" y="6510528"/>
-            <a:ext cx="8229600" cy="237744"/>
-          </a:xfrm>
-          <a:prstGeom prst="rect">
-            <a:avLst/>
-          </a:prstGeom>
-          <a:noFill/>
-        </p:spPr>
-        <p:txBody>
-          <a:bodyPr wrap="square" lIns="0" rIns="0" tIns="0" bIns="0">
-            <a:spAutoFit/>
-          </a:bodyPr>
-          <a:lstStyle/>
-          <a:p>
-            <a:pPr algn="l"/>
-            <a:r>
-              <a:rPr sz="1000" b="0" i="0">
-                <a:solidFill>
-                  <a:srgbClr val="5D6D7E"/>
-                </a:solidFill>
-                <a:latin typeface="Arial"/>
-              </a:rPr>
-              <a:t>CSE 4883 Digital Image Processing  ·  Same score, different story</a:t>
-            </a:r>
-          </a:p>
-        </p:txBody>
-      </p:sp>
-      <p:sp>
-        <p:nvSpPr>
-          <p:cNvPr id="16" name="TextBox 15"/>
-          <p:cNvSpPr txBox="1"/>
-          <p:nvPr/>
-        </p:nvSpPr>
-        <p:spPr>
-          <a:xfrm>
-            <a:off x="10362895" y="6510528"/>
-            <a:ext cx="1280160" cy="237744"/>
-          </a:xfrm>
-          <a:prstGeom prst="rect">
-            <a:avLst/>
-          </a:prstGeom>
-          <a:noFill/>
-        </p:spPr>
-        <p:txBody>
-          <a:bodyPr wrap="square" lIns="0" rIns="0" tIns="0" bIns="0">
-            <a:spAutoFit/>
-          </a:bodyPr>
-          <a:lstStyle/>
-          <a:p>
-            <a:pPr algn="r"/>
-            <a:r>
-              <a:rPr sz="1000" b="0" i="0">
-                <a:solidFill>
-                  <a:srgbClr val="5D6D7E"/>
-                </a:solidFill>
-                <a:latin typeface="Arial"/>
-              </a:rPr>
-              <a:t>9 / 13</a:t>
+              <a:t>9 / 14</a:t>
             </a:r>
           </a:p>
         </p:txBody>
